--- a/documents/명함제작/[2026 우리가치(WeValue) QI 활동 프로젝트 명함 14층(뒤).pptx
+++ b/documents/명함제작/[2026 우리가치(WeValue) QI 활동 프로젝트 명함 14층(뒤).pptx
@@ -2,7 +2,7 @@
 <file path=ppt/presentation.xml><?xml version="1.0" encoding="utf-8"?>
 <p:presentation xmlns:a="http://schemas.openxmlformats.org/drawingml/2006/main" xmlns:r="http://schemas.openxmlformats.org/officeDocument/2006/relationships" xmlns:p="http://schemas.openxmlformats.org/presentationml/2006/main" saveSubsetFonts="1">
   <p:sldMasterIdLst>
-    <p:sldMasterId id="2147483883" r:id="rId1"/>
+    <p:sldMasterId id="2147483896" r:id="rId1"/>
   </p:sldMasterIdLst>
   <p:notesMasterIdLst>
     <p:notesMasterId r:id="rId8"/>
@@ -15,8 +15,8 @@
     <p:sldId id="309" r:id="rId6"/>
     <p:sldId id="310" r:id="rId7"/>
   </p:sldIdLst>
-  <p:sldSz cx="9144000" cy="5143500" type="screen16x9"/>
-  <p:notesSz cx="9945688" cy="6858000"/>
+  <p:sldSz cx="9180513" cy="5143500"/>
+  <p:notesSz cx="6858000" cy="9945688"/>
   <p:defaultTextStyle>
     <a:defPPr>
       <a:defRPr lang="en-US"/>
@@ -130,17 +130,17 @@
             <a:srgbClr val="A4A3A4"/>
           </p15:clr>
         </p15:guide>
-        <p15:guide id="8" pos="2881" userDrawn="1">
+        <p15:guide id="8" pos="2893" userDrawn="1">
           <p15:clr>
             <a:srgbClr val="A4A3A4"/>
           </p15:clr>
         </p15:guide>
-        <p15:guide id="9" pos="373" userDrawn="1">
+        <p15:guide id="9" pos="374" userDrawn="1">
           <p15:clr>
             <a:srgbClr val="A4A3A4"/>
           </p15:clr>
         </p15:guide>
-        <p15:guide id="10" pos="5387" userDrawn="1">
+        <p15:guide id="10" pos="5409" userDrawn="1">
           <p15:clr>
             <a:srgbClr val="A4A3A4"/>
           </p15:clr>
@@ -185,8 +185,8 @@
         </p:nvSpPr>
         <p:spPr>
           <a:xfrm>
-            <a:off x="4" y="1"/>
-            <a:ext cx="4309798" cy="343722"/>
+            <a:off x="3" y="2"/>
+            <a:ext cx="2971800" cy="498476"/>
           </a:xfrm>
           <a:prstGeom prst="rect">
             <a:avLst/>
@@ -216,8 +216,8 @@
         </p:nvSpPr>
         <p:spPr>
           <a:xfrm>
-            <a:off x="5633596" y="1"/>
-            <a:ext cx="4309798" cy="343722"/>
+            <a:off x="3884618" y="2"/>
+            <a:ext cx="2971800" cy="498476"/>
           </a:xfrm>
           <a:prstGeom prst="rect">
             <a:avLst/>
@@ -233,7 +233,7 @@
           <a:p>
             <a:fld id="{F929F65E-AEE7-45C5-814B-4468CAF1E537}" type="datetimeFigureOut">
               <a:rPr lang="ko-KR" altLang="en-US" smtClean="0"/>
-              <a:t>2026-03-11</a:t>
+              <a:t>2026-04-09</a:t>
             </a:fld>
             <a:endParaRPr lang="ko-KR" altLang="en-US"/>
           </a:p>
@@ -251,8 +251,8 @@
         </p:nvSpPr>
         <p:spPr>
           <a:xfrm>
-            <a:off x="2914650" y="855663"/>
-            <a:ext cx="4116388" cy="2316162"/>
+            <a:off x="431800" y="1241425"/>
+            <a:ext cx="5994400" cy="3359150"/>
           </a:xfrm>
           <a:prstGeom prst="rect">
             <a:avLst/>
@@ -284,8 +284,8 @@
         </p:nvSpPr>
         <p:spPr>
           <a:xfrm>
-            <a:off x="994569" y="3300378"/>
-            <a:ext cx="7956550" cy="2700509"/>
+            <a:off x="685800" y="4786313"/>
+            <a:ext cx="5486400" cy="3916363"/>
           </a:xfrm>
           <a:prstGeom prst="rect">
             <a:avLst/>
@@ -343,8 +343,8 @@
         </p:nvSpPr>
         <p:spPr>
           <a:xfrm>
-            <a:off x="4" y="6514280"/>
-            <a:ext cx="4309798" cy="343722"/>
+            <a:off x="3" y="9447215"/>
+            <a:ext cx="2971800" cy="498476"/>
           </a:xfrm>
           <a:prstGeom prst="rect">
             <a:avLst/>
@@ -374,8 +374,8 @@
         </p:nvSpPr>
         <p:spPr>
           <a:xfrm>
-            <a:off x="5633596" y="6514280"/>
-            <a:ext cx="4309798" cy="343722"/>
+            <a:off x="3884618" y="9447215"/>
+            <a:ext cx="2971800" cy="498476"/>
           </a:xfrm>
           <a:prstGeom prst="rect">
             <a:avLst/>
@@ -529,8 +529,8 @@
         </p:nvSpPr>
         <p:spPr>
           <a:xfrm>
-            <a:off x="1143000" y="841772"/>
-            <a:ext cx="6858000" cy="1790700"/>
+            <a:off x="1147564" y="841772"/>
+            <a:ext cx="6885385" cy="1790700"/>
           </a:xfrm>
         </p:spPr>
         <p:txBody>
@@ -561,8 +561,8 @@
         </p:nvSpPr>
         <p:spPr>
           <a:xfrm>
-            <a:off x="1143000" y="2701528"/>
-            <a:ext cx="6858000" cy="1241822"/>
+            <a:off x="1147564" y="2701528"/>
+            <a:ext cx="6885385" cy="1241822"/>
           </a:xfrm>
         </p:spPr>
         <p:txBody>
@@ -631,7 +631,7 @@
           <a:p>
             <a:fld id="{149F34B4-7175-41BD-B98B-2E7021201D7D}" type="datetimeFigureOut">
               <a:rPr lang="ko-KR" altLang="en-US" smtClean="0"/>
-              <a:t>2026-03-11</a:t>
+              <a:t>2026-04-09</a:t>
             </a:fld>
             <a:endParaRPr lang="ko-KR" altLang="en-US"/>
           </a:p>
@@ -682,7 +682,7 @@
     </p:spTree>
     <p:extLst>
       <p:ext uri="{BB962C8B-B14F-4D97-AF65-F5344CB8AC3E}">
-        <p14:creationId xmlns:p14="http://schemas.microsoft.com/office/powerpoint/2010/main" val="3961582231"/>
+        <p14:creationId xmlns:p14="http://schemas.microsoft.com/office/powerpoint/2010/main" val="329389349"/>
       </p:ext>
     </p:extLst>
   </p:cSld>
@@ -750,35 +750,35 @@
             <a:pPr lvl="0"/>
             <a:r>
               <a:rPr lang="ko-KR" altLang="en-US"/>
-              <a:t>마스터 텍스트 스타일 편집</a:t>
+              <a:t>마스터 텍스트 스타일을 편집하려면 클릭</a:t>
             </a:r>
           </a:p>
           <a:p>
             <a:pPr lvl="1"/>
             <a:r>
               <a:rPr lang="ko-KR" altLang="en-US"/>
-              <a:t>둘째 수준</a:t>
+              <a:t>두 번째 수준</a:t>
             </a:r>
           </a:p>
           <a:p>
             <a:pPr lvl="2"/>
             <a:r>
               <a:rPr lang="ko-KR" altLang="en-US"/>
-              <a:t>셋째 수준</a:t>
+              <a:t>세 번째 수준</a:t>
             </a:r>
           </a:p>
           <a:p>
             <a:pPr lvl="3"/>
             <a:r>
               <a:rPr lang="ko-KR" altLang="en-US"/>
-              <a:t>넷째 수준</a:t>
+              <a:t>네 번째 수준</a:t>
             </a:r>
           </a:p>
           <a:p>
             <a:pPr lvl="4"/>
             <a:r>
               <a:rPr lang="ko-KR" altLang="en-US"/>
-              <a:t>다섯째 수준</a:t>
+              <a:t>다섯 번째 수준</a:t>
             </a:r>
             <a:endParaRPr lang="en-US" dirty="0"/>
           </a:p>
@@ -801,7 +801,7 @@
           <a:p>
             <a:fld id="{149F34B4-7175-41BD-B98B-2E7021201D7D}" type="datetimeFigureOut">
               <a:rPr lang="ko-KR" altLang="en-US" smtClean="0"/>
-              <a:t>2026-03-11</a:t>
+              <a:t>2026-04-09</a:t>
             </a:fld>
             <a:endParaRPr lang="ko-KR" altLang="en-US"/>
           </a:p>
@@ -852,7 +852,7 @@
     </p:spTree>
     <p:extLst>
       <p:ext uri="{BB962C8B-B14F-4D97-AF65-F5344CB8AC3E}">
-        <p14:creationId xmlns:p14="http://schemas.microsoft.com/office/powerpoint/2010/main" val="1524794645"/>
+        <p14:creationId xmlns:p14="http://schemas.microsoft.com/office/powerpoint/2010/main" val="192692291"/>
       </p:ext>
     </p:extLst>
   </p:cSld>
@@ -891,8 +891,8 @@
         </p:nvSpPr>
         <p:spPr>
           <a:xfrm>
-            <a:off x="6543675" y="273844"/>
-            <a:ext cx="1971675" cy="4358879"/>
+            <a:off x="6569805" y="273844"/>
+            <a:ext cx="1979548" cy="4358879"/>
           </a:xfrm>
         </p:spPr>
         <p:txBody>
@@ -919,8 +919,8 @@
         </p:nvSpPr>
         <p:spPr>
           <a:xfrm>
-            <a:off x="628650" y="273844"/>
-            <a:ext cx="5800725" cy="4358879"/>
+            <a:off x="631160" y="273844"/>
+            <a:ext cx="5823888" cy="4358879"/>
           </a:xfrm>
         </p:spPr>
         <p:txBody>
@@ -930,35 +930,35 @@
             <a:pPr lvl="0"/>
             <a:r>
               <a:rPr lang="ko-KR" altLang="en-US"/>
-              <a:t>마스터 텍스트 스타일 편집</a:t>
+              <a:t>마스터 텍스트 스타일을 편집하려면 클릭</a:t>
             </a:r>
           </a:p>
           <a:p>
             <a:pPr lvl="1"/>
             <a:r>
               <a:rPr lang="ko-KR" altLang="en-US"/>
-              <a:t>둘째 수준</a:t>
+              <a:t>두 번째 수준</a:t>
             </a:r>
           </a:p>
           <a:p>
             <a:pPr lvl="2"/>
             <a:r>
               <a:rPr lang="ko-KR" altLang="en-US"/>
-              <a:t>셋째 수준</a:t>
+              <a:t>세 번째 수준</a:t>
             </a:r>
           </a:p>
           <a:p>
             <a:pPr lvl="3"/>
             <a:r>
               <a:rPr lang="ko-KR" altLang="en-US"/>
-              <a:t>넷째 수준</a:t>
+              <a:t>네 번째 수준</a:t>
             </a:r>
           </a:p>
           <a:p>
             <a:pPr lvl="4"/>
             <a:r>
               <a:rPr lang="ko-KR" altLang="en-US"/>
-              <a:t>다섯째 수준</a:t>
+              <a:t>다섯 번째 수준</a:t>
             </a:r>
             <a:endParaRPr lang="en-US" dirty="0"/>
           </a:p>
@@ -981,7 +981,7 @@
           <a:p>
             <a:fld id="{149F34B4-7175-41BD-B98B-2E7021201D7D}" type="datetimeFigureOut">
               <a:rPr lang="ko-KR" altLang="en-US" smtClean="0"/>
-              <a:t>2026-03-11</a:t>
+              <a:t>2026-04-09</a:t>
             </a:fld>
             <a:endParaRPr lang="ko-KR" altLang="en-US"/>
           </a:p>
@@ -1032,7 +1032,7 @@
     </p:spTree>
     <p:extLst>
       <p:ext uri="{BB962C8B-B14F-4D97-AF65-F5344CB8AC3E}">
-        <p14:creationId xmlns:p14="http://schemas.microsoft.com/office/powerpoint/2010/main" val="764583920"/>
+        <p14:creationId xmlns:p14="http://schemas.microsoft.com/office/powerpoint/2010/main" val="3185065480"/>
       </p:ext>
     </p:extLst>
   </p:cSld>
@@ -1074,7 +1074,7 @@
         <p:spPr>
           <a:xfrm>
             <a:off x="7" y="4"/>
-            <a:ext cx="9163052" cy="5143500"/>
+            <a:ext cx="9199641" cy="5143500"/>
           </a:xfrm>
           <a:prstGeom prst="rect">
             <a:avLst/>
@@ -1109,7 +1109,7 @@
           <a:lstStyle/>
           <a:p>
             <a:pPr algn="ctr"/>
-            <a:endParaRPr lang="ko-KR" altLang="en-US" sz="336" dirty="0"/>
+            <a:endParaRPr lang="ko-KR" altLang="en-US" sz="337" dirty="0"/>
           </a:p>
         </p:txBody>
       </p:sp>
@@ -1127,8 +1127,8 @@
         </p:nvSpPr>
         <p:spPr>
           <a:xfrm>
-            <a:off x="84412" y="87099"/>
-            <a:ext cx="8980815" cy="4938477"/>
+            <a:off x="84750" y="87100"/>
+            <a:ext cx="9016676" cy="4938477"/>
           </a:xfrm>
           <a:prstGeom prst="rect">
             <a:avLst/>
@@ -1161,7 +1161,7 @@
           <a:lstStyle/>
           <a:p>
             <a:pPr algn="ctr"/>
-            <a:endParaRPr lang="ko-KR" altLang="en-US" sz="336"/>
+            <a:endParaRPr lang="ko-KR" altLang="en-US" sz="337"/>
           </a:p>
         </p:txBody>
       </p:sp>
@@ -1187,8 +1187,8 @@
         </p:blipFill>
         <p:spPr>
           <a:xfrm>
-            <a:off x="7876114" y="233109"/>
-            <a:ext cx="1024896" cy="580120"/>
+            <a:off x="7907564" y="233109"/>
+            <a:ext cx="1028989" cy="580120"/>
           </a:xfrm>
           <a:prstGeom prst="rect">
             <a:avLst/>
@@ -1214,8 +1214,8 @@
         </p:nvSpPr>
         <p:spPr>
           <a:xfrm>
-            <a:off x="5921636" y="4485449"/>
-            <a:ext cx="3222368" cy="309444"/>
+            <a:off x="5945282" y="4485449"/>
+            <a:ext cx="3235235" cy="309444"/>
           </a:xfrm>
           <a:prstGeom prst="rect">
             <a:avLst/>
@@ -1230,7 +1230,7 @@
           <a:p>
             <a:pPr algn="r"/>
             <a:r>
-              <a:rPr lang="ko-KR" altLang="en-US" sz="1411" b="1" dirty="0">
+              <a:rPr lang="ko-KR" altLang="en-US" sz="1417" b="1" dirty="0">
                 <a:solidFill>
                   <a:srgbClr val="4472C4"/>
                 </a:solidFill>
@@ -1239,7 +1239,7 @@
               </a:rPr>
               <a:t>진료지원간호팀</a:t>
             </a:r>
-            <a:endParaRPr lang="ko-KR" altLang="en-US" sz="1693" b="1" dirty="0">
+            <a:endParaRPr lang="ko-KR" altLang="en-US" sz="1700" b="1" dirty="0">
               <a:solidFill>
                 <a:srgbClr val="4472C4"/>
               </a:solidFill>
@@ -1252,14 +1252,14 @@
     </p:spTree>
     <p:extLst>
       <p:ext uri="{BB962C8B-B14F-4D97-AF65-F5344CB8AC3E}">
-        <p14:creationId xmlns:p14="http://schemas.microsoft.com/office/powerpoint/2010/main" val="4003098529"/>
+        <p14:creationId xmlns:p14="http://schemas.microsoft.com/office/powerpoint/2010/main" val="874329842"/>
       </p:ext>
     </p:extLst>
   </p:cSld>
   <p:clrMapOvr>
     <a:masterClrMapping/>
   </p:clrMapOvr>
-  <p:extLst mod="1">
+  <p:extLst>
     <p:ext uri="{DCECCB84-F9BA-43D5-87BE-67443E8EF086}">
       <p15:sldGuideLst xmlns:p15="http://schemas.microsoft.com/office/powerpoint/2012/main">
         <p15:guide id="1" orient="horz" pos="1620">
@@ -1267,7 +1267,7 @@
             <a:srgbClr val="FBAE40"/>
           </p15:clr>
         </p15:guide>
-        <p15:guide id="2" pos="2881">
+        <p15:guide id="2" pos="2893">
           <p15:clr>
             <a:srgbClr val="FBAE40"/>
           </p15:clr>
@@ -1310,7 +1310,7 @@
         <p:spPr>
           <a:xfrm>
             <a:off x="7" y="4"/>
-            <a:ext cx="9163052" cy="5143500"/>
+            <a:ext cx="9199641" cy="5143500"/>
           </a:xfrm>
           <a:prstGeom prst="rect">
             <a:avLst/>
@@ -1345,7 +1345,7 @@
           <a:lstStyle/>
           <a:p>
             <a:pPr algn="ctr"/>
-            <a:endParaRPr lang="ko-KR" altLang="en-US" sz="336" dirty="0"/>
+            <a:endParaRPr lang="ko-KR" altLang="en-US" sz="337" dirty="0"/>
           </a:p>
         </p:txBody>
       </p:sp>
@@ -1363,8 +1363,8 @@
         </p:nvSpPr>
         <p:spPr>
           <a:xfrm>
-            <a:off x="128347" y="49983"/>
-            <a:ext cx="8901360" cy="5041463"/>
+            <a:off x="128860" y="49984"/>
+            <a:ext cx="8936904" cy="5041463"/>
           </a:xfrm>
           <a:prstGeom prst="rect">
             <a:avLst/>
@@ -1397,7 +1397,7 @@
           <a:lstStyle/>
           <a:p>
             <a:pPr algn="ctr"/>
-            <a:endParaRPr lang="ko-KR" altLang="en-US" sz="336"/>
+            <a:endParaRPr lang="ko-KR" altLang="en-US" sz="337"/>
           </a:p>
         </p:txBody>
       </p:sp>
@@ -1423,8 +1423,8 @@
         </p:blipFill>
         <p:spPr>
           <a:xfrm>
-            <a:off x="7985258" y="83528"/>
-            <a:ext cx="915752" cy="216029"/>
+            <a:off x="8017144" y="83529"/>
+            <a:ext cx="919409" cy="216029"/>
           </a:xfrm>
           <a:prstGeom prst="rect">
             <a:avLst/>
@@ -1450,8 +1450,8 @@
         </p:nvSpPr>
         <p:spPr>
           <a:xfrm>
-            <a:off x="8458260" y="4819777"/>
-            <a:ext cx="442750" cy="179152"/>
+            <a:off x="8525833" y="4819777"/>
+            <a:ext cx="410720" cy="179408"/>
           </a:xfrm>
           <a:prstGeom prst="rect">
             <a:avLst/>
@@ -1466,7 +1466,7 @@
           <a:p>
             <a:pPr algn="r"/>
             <a:r>
-              <a:rPr lang="ko-KR" altLang="en-US" sz="282" b="1" dirty="0">
+              <a:rPr lang="ko-KR" altLang="en-US" sz="283" b="1" dirty="0">
                 <a:solidFill>
                   <a:srgbClr val="4472C4"/>
                 </a:solidFill>
@@ -1475,7 +1475,7 @@
               </a:rPr>
               <a:t>진료지원간호팀</a:t>
             </a:r>
-            <a:endParaRPr lang="en-US" altLang="ko-KR" sz="282" b="1" dirty="0">
+            <a:endParaRPr lang="en-US" altLang="ko-KR" sz="283" b="1" dirty="0">
               <a:solidFill>
                 <a:srgbClr val="4472C4"/>
               </a:solidFill>
@@ -1486,7 +1486,7 @@
           <a:p>
             <a:pPr algn="r"/>
             <a:r>
-              <a:rPr lang="ko-KR" altLang="en-US" sz="282" b="1" dirty="0">
+              <a:rPr lang="ko-KR" altLang="en-US" sz="283" b="1" dirty="0">
                 <a:solidFill>
                   <a:srgbClr val="4472C4"/>
                 </a:solidFill>
@@ -1508,7 +1508,7 @@
   <p:clrMapOvr>
     <a:masterClrMapping/>
   </p:clrMapOvr>
-  <p:extLst mod="1">
+  <p:extLst>
     <p:ext uri="{DCECCB84-F9BA-43D5-87BE-67443E8EF086}">
       <p15:sldGuideLst xmlns:p15="http://schemas.microsoft.com/office/powerpoint/2012/main">
         <p15:guide id="1" orient="horz" pos="1620" userDrawn="1">
@@ -1516,7 +1516,7 @@
             <a:srgbClr val="FBAE40"/>
           </p15:clr>
         </p15:guide>
-        <p15:guide id="2" pos="2881" userDrawn="1">
+        <p15:guide id="2" pos="2893" userDrawn="1">
           <p15:clr>
             <a:srgbClr val="FBAE40"/>
           </p15:clr>
@@ -1559,7 +1559,7 @@
         <p:spPr>
           <a:xfrm>
             <a:off x="7" y="4"/>
-            <a:ext cx="9163052" cy="5143500"/>
+            <a:ext cx="9199641" cy="5143500"/>
           </a:xfrm>
           <a:prstGeom prst="rect">
             <a:avLst/>
@@ -1594,7 +1594,7 @@
           <a:lstStyle/>
           <a:p>
             <a:pPr algn="ctr"/>
-            <a:endParaRPr lang="ko-KR" altLang="en-US" sz="336" dirty="0"/>
+            <a:endParaRPr lang="ko-KR" altLang="en-US" sz="337" dirty="0"/>
           </a:p>
         </p:txBody>
       </p:sp>
@@ -1612,8 +1612,8 @@
         </p:nvSpPr>
         <p:spPr>
           <a:xfrm>
-            <a:off x="128347" y="49983"/>
-            <a:ext cx="8901360" cy="5041463"/>
+            <a:off x="128860" y="49984"/>
+            <a:ext cx="8936904" cy="5041463"/>
           </a:xfrm>
           <a:prstGeom prst="rect">
             <a:avLst/>
@@ -1646,7 +1646,7 @@
           <a:lstStyle/>
           <a:p>
             <a:pPr algn="ctr"/>
-            <a:endParaRPr lang="ko-KR" altLang="en-US" sz="336" dirty="0"/>
+            <a:endParaRPr lang="ko-KR" altLang="en-US" sz="337" dirty="0"/>
           </a:p>
         </p:txBody>
       </p:sp>
@@ -1672,8 +1672,8 @@
         </p:blipFill>
         <p:spPr>
           <a:xfrm>
-            <a:off x="7980811" y="83528"/>
-            <a:ext cx="915752" cy="216029"/>
+            <a:off x="8012679" y="83529"/>
+            <a:ext cx="919409" cy="216029"/>
           </a:xfrm>
           <a:prstGeom prst="rect">
             <a:avLst/>
@@ -1699,8 +1699,8 @@
         </p:nvSpPr>
         <p:spPr>
           <a:xfrm>
-            <a:off x="8382919" y="4877770"/>
-            <a:ext cx="518091" cy="135743"/>
+            <a:off x="8451801" y="4877771"/>
+            <a:ext cx="484752" cy="135871"/>
           </a:xfrm>
           <a:prstGeom prst="rect">
             <a:avLst/>
@@ -1715,7 +1715,7 @@
           <a:p>
             <a:pPr algn="r"/>
             <a:r>
-              <a:rPr lang="ko-KR" altLang="en-US" sz="282" b="1" dirty="0">
+              <a:rPr lang="ko-KR" altLang="en-US" sz="283" b="1" dirty="0">
                 <a:solidFill>
                   <a:srgbClr val="4472C4"/>
                 </a:solidFill>
@@ -1725,7 +1725,7 @@
               <a:t>이비인후과 </a:t>
             </a:r>
             <a:r>
-              <a:rPr lang="en-US" altLang="ko-KR" sz="282" b="1" dirty="0">
+              <a:rPr lang="en-US" altLang="ko-KR" sz="283" b="1" dirty="0">
                 <a:solidFill>
                   <a:srgbClr val="4472C4"/>
                 </a:solidFill>
@@ -1735,7 +1735,7 @@
               <a:t>131</a:t>
             </a:r>
             <a:r>
-              <a:rPr lang="ko-KR" altLang="en-US" sz="282" b="1" dirty="0">
+              <a:rPr lang="ko-KR" altLang="en-US" sz="283" b="1" dirty="0">
                 <a:solidFill>
                   <a:srgbClr val="4472C4"/>
                 </a:solidFill>
@@ -1757,7 +1757,7 @@
   <p:clrMapOvr>
     <a:masterClrMapping/>
   </p:clrMapOvr>
-  <p:extLst mod="1">
+  <p:extLst>
     <p:ext uri="{DCECCB84-F9BA-43D5-87BE-67443E8EF086}">
       <p15:sldGuideLst xmlns:p15="http://schemas.microsoft.com/office/powerpoint/2012/main">
         <p15:guide id="1" orient="horz" pos="1620" userDrawn="1">
@@ -1765,7 +1765,7 @@
             <a:srgbClr val="FBAE40"/>
           </p15:clr>
         </p15:guide>
-        <p15:guide id="2" pos="2881" userDrawn="1">
+        <p15:guide id="2" pos="2893" userDrawn="1">
           <p15:clr>
             <a:srgbClr val="FBAE40"/>
           </p15:clr>
@@ -1839,35 +1839,35 @@
             <a:pPr lvl="0"/>
             <a:r>
               <a:rPr lang="ko-KR" altLang="en-US"/>
-              <a:t>마스터 텍스트 스타일 편집</a:t>
+              <a:t>마스터 텍스트 스타일을 편집하려면 클릭</a:t>
             </a:r>
           </a:p>
           <a:p>
             <a:pPr lvl="1"/>
             <a:r>
               <a:rPr lang="ko-KR" altLang="en-US"/>
-              <a:t>둘째 수준</a:t>
+              <a:t>두 번째 수준</a:t>
             </a:r>
           </a:p>
           <a:p>
             <a:pPr lvl="2"/>
             <a:r>
               <a:rPr lang="ko-KR" altLang="en-US"/>
-              <a:t>셋째 수준</a:t>
+              <a:t>세 번째 수준</a:t>
             </a:r>
           </a:p>
           <a:p>
             <a:pPr lvl="3"/>
             <a:r>
               <a:rPr lang="ko-KR" altLang="en-US"/>
-              <a:t>넷째 수준</a:t>
+              <a:t>네 번째 수준</a:t>
             </a:r>
           </a:p>
           <a:p>
             <a:pPr lvl="4"/>
             <a:r>
               <a:rPr lang="ko-KR" altLang="en-US"/>
-              <a:t>다섯째 수준</a:t>
+              <a:t>다섯 번째 수준</a:t>
             </a:r>
             <a:endParaRPr lang="en-US" dirty="0"/>
           </a:p>
@@ -1890,7 +1890,7 @@
           <a:p>
             <a:fld id="{149F34B4-7175-41BD-B98B-2E7021201D7D}" type="datetimeFigureOut">
               <a:rPr lang="ko-KR" altLang="en-US" smtClean="0"/>
-              <a:t>2026-03-11</a:t>
+              <a:t>2026-04-09</a:t>
             </a:fld>
             <a:endParaRPr lang="ko-KR" altLang="en-US"/>
           </a:p>
@@ -1941,7 +1941,7 @@
     </p:spTree>
     <p:extLst>
       <p:ext uri="{BB962C8B-B14F-4D97-AF65-F5344CB8AC3E}">
-        <p14:creationId xmlns:p14="http://schemas.microsoft.com/office/powerpoint/2010/main" val="3600745084"/>
+        <p14:creationId xmlns:p14="http://schemas.microsoft.com/office/powerpoint/2010/main" val="3532418628"/>
       </p:ext>
     </p:extLst>
   </p:cSld>
@@ -1980,8 +1980,8 @@
         </p:nvSpPr>
         <p:spPr>
           <a:xfrm>
-            <a:off x="623888" y="1282304"/>
-            <a:ext cx="7886700" cy="2139553"/>
+            <a:off x="626379" y="1282304"/>
+            <a:ext cx="7918192" cy="2139553"/>
           </a:xfrm>
         </p:spPr>
         <p:txBody>
@@ -2012,8 +2012,8 @@
         </p:nvSpPr>
         <p:spPr>
           <a:xfrm>
-            <a:off x="623888" y="3442098"/>
-            <a:ext cx="7886700" cy="1125140"/>
+            <a:off x="626379" y="3442098"/>
+            <a:ext cx="7918192" cy="1125140"/>
           </a:xfrm>
         </p:spPr>
         <p:txBody>
@@ -2114,7 +2114,7 @@
             <a:pPr lvl="0"/>
             <a:r>
               <a:rPr lang="ko-KR" altLang="en-US"/>
-              <a:t>마스터 텍스트 스타일 편집</a:t>
+              <a:t>마스터 텍스트 스타일을 편집하려면 클릭</a:t>
             </a:r>
           </a:p>
         </p:txBody>
@@ -2136,7 +2136,7 @@
           <a:p>
             <a:fld id="{149F34B4-7175-41BD-B98B-2E7021201D7D}" type="datetimeFigureOut">
               <a:rPr lang="ko-KR" altLang="en-US" smtClean="0"/>
-              <a:t>2026-03-11</a:t>
+              <a:t>2026-04-09</a:t>
             </a:fld>
             <a:endParaRPr lang="ko-KR" altLang="en-US"/>
           </a:p>
@@ -2187,7 +2187,7 @@
     </p:spTree>
     <p:extLst>
       <p:ext uri="{BB962C8B-B14F-4D97-AF65-F5344CB8AC3E}">
-        <p14:creationId xmlns:p14="http://schemas.microsoft.com/office/powerpoint/2010/main" val="1631795843"/>
+        <p14:creationId xmlns:p14="http://schemas.microsoft.com/office/powerpoint/2010/main" val="4270631468"/>
       </p:ext>
     </p:extLst>
   </p:cSld>
@@ -2249,8 +2249,8 @@
         </p:nvSpPr>
         <p:spPr>
           <a:xfrm>
-            <a:off x="628650" y="1369219"/>
-            <a:ext cx="3886200" cy="3263504"/>
+            <a:off x="631160" y="1369219"/>
+            <a:ext cx="3901718" cy="3263504"/>
           </a:xfrm>
         </p:spPr>
         <p:txBody>
@@ -2260,35 +2260,35 @@
             <a:pPr lvl="0"/>
             <a:r>
               <a:rPr lang="ko-KR" altLang="en-US"/>
-              <a:t>마스터 텍스트 스타일 편집</a:t>
+              <a:t>마스터 텍스트 스타일을 편집하려면 클릭</a:t>
             </a:r>
           </a:p>
           <a:p>
             <a:pPr lvl="1"/>
             <a:r>
               <a:rPr lang="ko-KR" altLang="en-US"/>
-              <a:t>둘째 수준</a:t>
+              <a:t>두 번째 수준</a:t>
             </a:r>
           </a:p>
           <a:p>
             <a:pPr lvl="2"/>
             <a:r>
               <a:rPr lang="ko-KR" altLang="en-US"/>
-              <a:t>셋째 수준</a:t>
+              <a:t>세 번째 수준</a:t>
             </a:r>
           </a:p>
           <a:p>
             <a:pPr lvl="3"/>
             <a:r>
               <a:rPr lang="ko-KR" altLang="en-US"/>
-              <a:t>넷째 수준</a:t>
+              <a:t>네 번째 수준</a:t>
             </a:r>
           </a:p>
           <a:p>
             <a:pPr lvl="4"/>
             <a:r>
               <a:rPr lang="ko-KR" altLang="en-US"/>
-              <a:t>다섯째 수준</a:t>
+              <a:t>다섯 번째 수준</a:t>
             </a:r>
             <a:endParaRPr lang="en-US" dirty="0"/>
           </a:p>
@@ -2306,8 +2306,8 @@
         </p:nvSpPr>
         <p:spPr>
           <a:xfrm>
-            <a:off x="4629150" y="1369219"/>
-            <a:ext cx="3886200" cy="3263504"/>
+            <a:off x="4647635" y="1369219"/>
+            <a:ext cx="3901718" cy="3263504"/>
           </a:xfrm>
         </p:spPr>
         <p:txBody>
@@ -2317,35 +2317,35 @@
             <a:pPr lvl="0"/>
             <a:r>
               <a:rPr lang="ko-KR" altLang="en-US"/>
-              <a:t>마스터 텍스트 스타일 편집</a:t>
+              <a:t>마스터 텍스트 스타일을 편집하려면 클릭</a:t>
             </a:r>
           </a:p>
           <a:p>
             <a:pPr lvl="1"/>
             <a:r>
               <a:rPr lang="ko-KR" altLang="en-US"/>
-              <a:t>둘째 수준</a:t>
+              <a:t>두 번째 수준</a:t>
             </a:r>
           </a:p>
           <a:p>
             <a:pPr lvl="2"/>
             <a:r>
               <a:rPr lang="ko-KR" altLang="en-US"/>
-              <a:t>셋째 수준</a:t>
+              <a:t>세 번째 수준</a:t>
             </a:r>
           </a:p>
           <a:p>
             <a:pPr lvl="3"/>
             <a:r>
               <a:rPr lang="ko-KR" altLang="en-US"/>
-              <a:t>넷째 수준</a:t>
+              <a:t>네 번째 수준</a:t>
             </a:r>
           </a:p>
           <a:p>
             <a:pPr lvl="4"/>
             <a:r>
               <a:rPr lang="ko-KR" altLang="en-US"/>
-              <a:t>다섯째 수준</a:t>
+              <a:t>다섯 번째 수준</a:t>
             </a:r>
             <a:endParaRPr lang="en-US" dirty="0"/>
           </a:p>
@@ -2368,7 +2368,7 @@
           <a:p>
             <a:fld id="{149F34B4-7175-41BD-B98B-2E7021201D7D}" type="datetimeFigureOut">
               <a:rPr lang="ko-KR" altLang="en-US" smtClean="0"/>
-              <a:t>2026-03-11</a:t>
+              <a:t>2026-04-09</a:t>
             </a:fld>
             <a:endParaRPr lang="ko-KR" altLang="en-US"/>
           </a:p>
@@ -2419,7 +2419,7 @@
     </p:spTree>
     <p:extLst>
       <p:ext uri="{BB962C8B-B14F-4D97-AF65-F5344CB8AC3E}">
-        <p14:creationId xmlns:p14="http://schemas.microsoft.com/office/powerpoint/2010/main" val="1598540710"/>
+        <p14:creationId xmlns:p14="http://schemas.microsoft.com/office/powerpoint/2010/main" val="3234368299"/>
       </p:ext>
     </p:extLst>
   </p:cSld>
@@ -2458,8 +2458,8 @@
         </p:nvSpPr>
         <p:spPr>
           <a:xfrm>
-            <a:off x="629841" y="273844"/>
-            <a:ext cx="7886700" cy="994172"/>
+            <a:off x="632356" y="273844"/>
+            <a:ext cx="7918192" cy="994172"/>
           </a:xfrm>
         </p:spPr>
         <p:txBody>
@@ -2486,8 +2486,8 @@
         </p:nvSpPr>
         <p:spPr>
           <a:xfrm>
-            <a:off x="629842" y="1260872"/>
-            <a:ext cx="3868340" cy="617934"/>
+            <a:off x="632356" y="1260872"/>
+            <a:ext cx="3883787" cy="617934"/>
           </a:xfrm>
         </p:spPr>
         <p:txBody>
@@ -2534,7 +2534,7 @@
             <a:pPr lvl="0"/>
             <a:r>
               <a:rPr lang="ko-KR" altLang="en-US"/>
-              <a:t>마스터 텍스트 스타일 편집</a:t>
+              <a:t>마스터 텍스트 스타일을 편집하려면 클릭</a:t>
             </a:r>
           </a:p>
         </p:txBody>
@@ -2551,8 +2551,8 @@
         </p:nvSpPr>
         <p:spPr>
           <a:xfrm>
-            <a:off x="629842" y="1878806"/>
-            <a:ext cx="3868340" cy="2763441"/>
+            <a:off x="632356" y="1878806"/>
+            <a:ext cx="3883787" cy="2763441"/>
           </a:xfrm>
         </p:spPr>
         <p:txBody>
@@ -2562,35 +2562,35 @@
             <a:pPr lvl="0"/>
             <a:r>
               <a:rPr lang="ko-KR" altLang="en-US"/>
-              <a:t>마스터 텍스트 스타일 편집</a:t>
+              <a:t>마스터 텍스트 스타일을 편집하려면 클릭</a:t>
             </a:r>
           </a:p>
           <a:p>
             <a:pPr lvl="1"/>
             <a:r>
               <a:rPr lang="ko-KR" altLang="en-US"/>
-              <a:t>둘째 수준</a:t>
+              <a:t>두 번째 수준</a:t>
             </a:r>
           </a:p>
           <a:p>
             <a:pPr lvl="2"/>
             <a:r>
               <a:rPr lang="ko-KR" altLang="en-US"/>
-              <a:t>셋째 수준</a:t>
+              <a:t>세 번째 수준</a:t>
             </a:r>
           </a:p>
           <a:p>
             <a:pPr lvl="3"/>
             <a:r>
               <a:rPr lang="ko-KR" altLang="en-US"/>
-              <a:t>넷째 수준</a:t>
+              <a:t>네 번째 수준</a:t>
             </a:r>
           </a:p>
           <a:p>
             <a:pPr lvl="4"/>
             <a:r>
               <a:rPr lang="ko-KR" altLang="en-US"/>
-              <a:t>다섯째 수준</a:t>
+              <a:t>다섯 번째 수준</a:t>
             </a:r>
             <a:endParaRPr lang="en-US" dirty="0"/>
           </a:p>
@@ -2608,8 +2608,8 @@
         </p:nvSpPr>
         <p:spPr>
           <a:xfrm>
-            <a:off x="4629150" y="1260872"/>
-            <a:ext cx="3887391" cy="617934"/>
+            <a:off x="4647635" y="1260872"/>
+            <a:ext cx="3902914" cy="617934"/>
           </a:xfrm>
         </p:spPr>
         <p:txBody>
@@ -2656,7 +2656,7 @@
             <a:pPr lvl="0"/>
             <a:r>
               <a:rPr lang="ko-KR" altLang="en-US"/>
-              <a:t>마스터 텍스트 스타일 편집</a:t>
+              <a:t>마스터 텍스트 스타일을 편집하려면 클릭</a:t>
             </a:r>
           </a:p>
         </p:txBody>
@@ -2673,8 +2673,8 @@
         </p:nvSpPr>
         <p:spPr>
           <a:xfrm>
-            <a:off x="4629150" y="1878806"/>
-            <a:ext cx="3887391" cy="2763441"/>
+            <a:off x="4647635" y="1878806"/>
+            <a:ext cx="3902914" cy="2763441"/>
           </a:xfrm>
         </p:spPr>
         <p:txBody>
@@ -2684,35 +2684,35 @@
             <a:pPr lvl="0"/>
             <a:r>
               <a:rPr lang="ko-KR" altLang="en-US"/>
-              <a:t>마스터 텍스트 스타일 편집</a:t>
+              <a:t>마스터 텍스트 스타일을 편집하려면 클릭</a:t>
             </a:r>
           </a:p>
           <a:p>
             <a:pPr lvl="1"/>
             <a:r>
               <a:rPr lang="ko-KR" altLang="en-US"/>
-              <a:t>둘째 수준</a:t>
+              <a:t>두 번째 수준</a:t>
             </a:r>
           </a:p>
           <a:p>
             <a:pPr lvl="2"/>
             <a:r>
               <a:rPr lang="ko-KR" altLang="en-US"/>
-              <a:t>셋째 수준</a:t>
+              <a:t>세 번째 수준</a:t>
             </a:r>
           </a:p>
           <a:p>
             <a:pPr lvl="3"/>
             <a:r>
               <a:rPr lang="ko-KR" altLang="en-US"/>
-              <a:t>넷째 수준</a:t>
+              <a:t>네 번째 수준</a:t>
             </a:r>
           </a:p>
           <a:p>
             <a:pPr lvl="4"/>
             <a:r>
               <a:rPr lang="ko-KR" altLang="en-US"/>
-              <a:t>다섯째 수준</a:t>
+              <a:t>다섯 번째 수준</a:t>
             </a:r>
             <a:endParaRPr lang="en-US" dirty="0"/>
           </a:p>
@@ -2735,7 +2735,7 @@
           <a:p>
             <a:fld id="{149F34B4-7175-41BD-B98B-2E7021201D7D}" type="datetimeFigureOut">
               <a:rPr lang="ko-KR" altLang="en-US" smtClean="0"/>
-              <a:t>2026-03-11</a:t>
+              <a:t>2026-04-09</a:t>
             </a:fld>
             <a:endParaRPr lang="ko-KR" altLang="en-US"/>
           </a:p>
@@ -2786,7 +2786,7 @@
     </p:spTree>
     <p:extLst>
       <p:ext uri="{BB962C8B-B14F-4D97-AF65-F5344CB8AC3E}">
-        <p14:creationId xmlns:p14="http://schemas.microsoft.com/office/powerpoint/2010/main" val="3691860999"/>
+        <p14:creationId xmlns:p14="http://schemas.microsoft.com/office/powerpoint/2010/main" val="1663811376"/>
       </p:ext>
     </p:extLst>
   </p:cSld>
@@ -2853,7 +2853,7 @@
           <a:p>
             <a:fld id="{149F34B4-7175-41BD-B98B-2E7021201D7D}" type="datetimeFigureOut">
               <a:rPr lang="ko-KR" altLang="en-US" smtClean="0"/>
-              <a:t>2026-03-11</a:t>
+              <a:t>2026-04-09</a:t>
             </a:fld>
             <a:endParaRPr lang="ko-KR" altLang="en-US"/>
           </a:p>
@@ -2904,7 +2904,7 @@
     </p:spTree>
     <p:extLst>
       <p:ext uri="{BB962C8B-B14F-4D97-AF65-F5344CB8AC3E}">
-        <p14:creationId xmlns:p14="http://schemas.microsoft.com/office/powerpoint/2010/main" val="2956326358"/>
+        <p14:creationId xmlns:p14="http://schemas.microsoft.com/office/powerpoint/2010/main" val="358478867"/>
       </p:ext>
     </p:extLst>
   </p:cSld>
@@ -2948,7 +2948,7 @@
           <a:p>
             <a:fld id="{149F34B4-7175-41BD-B98B-2E7021201D7D}" type="datetimeFigureOut">
               <a:rPr lang="ko-KR" altLang="en-US" smtClean="0"/>
-              <a:t>2026-03-11</a:t>
+              <a:t>2026-04-09</a:t>
             </a:fld>
             <a:endParaRPr lang="ko-KR" altLang="en-US"/>
           </a:p>
@@ -2999,7 +2999,7 @@
     </p:spTree>
     <p:extLst>
       <p:ext uri="{BB962C8B-B14F-4D97-AF65-F5344CB8AC3E}">
-        <p14:creationId xmlns:p14="http://schemas.microsoft.com/office/powerpoint/2010/main" val="1890411939"/>
+        <p14:creationId xmlns:p14="http://schemas.microsoft.com/office/powerpoint/2010/main" val="2429272632"/>
       </p:ext>
     </p:extLst>
   </p:cSld>
@@ -3038,8 +3038,8 @@
         </p:nvSpPr>
         <p:spPr>
           <a:xfrm>
-            <a:off x="629841" y="342900"/>
-            <a:ext cx="2949178" cy="1200150"/>
+            <a:off x="632356" y="342900"/>
+            <a:ext cx="2960954" cy="1200150"/>
           </a:xfrm>
         </p:spPr>
         <p:txBody>
@@ -3070,8 +3070,8 @@
         </p:nvSpPr>
         <p:spPr>
           <a:xfrm>
-            <a:off x="3887391" y="740569"/>
-            <a:ext cx="4629150" cy="3655219"/>
+            <a:off x="3902914" y="740569"/>
+            <a:ext cx="4647635" cy="3655219"/>
           </a:xfrm>
         </p:spPr>
         <p:txBody>
@@ -3109,35 +3109,35 @@
             <a:pPr lvl="0"/>
             <a:r>
               <a:rPr lang="ko-KR" altLang="en-US"/>
-              <a:t>마스터 텍스트 스타일 편집</a:t>
+              <a:t>마스터 텍스트 스타일을 편집하려면 클릭</a:t>
             </a:r>
           </a:p>
           <a:p>
             <a:pPr lvl="1"/>
             <a:r>
               <a:rPr lang="ko-KR" altLang="en-US"/>
-              <a:t>둘째 수준</a:t>
+              <a:t>두 번째 수준</a:t>
             </a:r>
           </a:p>
           <a:p>
             <a:pPr lvl="2"/>
             <a:r>
               <a:rPr lang="ko-KR" altLang="en-US"/>
-              <a:t>셋째 수준</a:t>
+              <a:t>세 번째 수준</a:t>
             </a:r>
           </a:p>
           <a:p>
             <a:pPr lvl="3"/>
             <a:r>
               <a:rPr lang="ko-KR" altLang="en-US"/>
-              <a:t>넷째 수준</a:t>
+              <a:t>네 번째 수준</a:t>
             </a:r>
           </a:p>
           <a:p>
             <a:pPr lvl="4"/>
             <a:r>
               <a:rPr lang="ko-KR" altLang="en-US"/>
-              <a:t>다섯째 수준</a:t>
+              <a:t>다섯 번째 수준</a:t>
             </a:r>
             <a:endParaRPr lang="en-US" dirty="0"/>
           </a:p>
@@ -3155,8 +3155,8 @@
         </p:nvSpPr>
         <p:spPr>
           <a:xfrm>
-            <a:off x="629841" y="1543050"/>
-            <a:ext cx="2949178" cy="2858691"/>
+            <a:off x="632356" y="1543050"/>
+            <a:ext cx="2960954" cy="2858691"/>
           </a:xfrm>
         </p:spPr>
         <p:txBody>
@@ -3203,7 +3203,7 @@
             <a:pPr lvl="0"/>
             <a:r>
               <a:rPr lang="ko-KR" altLang="en-US"/>
-              <a:t>마스터 텍스트 스타일 편집</a:t>
+              <a:t>마스터 텍스트 스타일을 편집하려면 클릭</a:t>
             </a:r>
           </a:p>
         </p:txBody>
@@ -3225,7 +3225,7 @@
           <a:p>
             <a:fld id="{149F34B4-7175-41BD-B98B-2E7021201D7D}" type="datetimeFigureOut">
               <a:rPr lang="ko-KR" altLang="en-US" smtClean="0"/>
-              <a:t>2026-03-11</a:t>
+              <a:t>2026-04-09</a:t>
             </a:fld>
             <a:endParaRPr lang="ko-KR" altLang="en-US"/>
           </a:p>
@@ -3276,7 +3276,7 @@
     </p:spTree>
     <p:extLst>
       <p:ext uri="{BB962C8B-B14F-4D97-AF65-F5344CB8AC3E}">
-        <p14:creationId xmlns:p14="http://schemas.microsoft.com/office/powerpoint/2010/main" val="2411852991"/>
+        <p14:creationId xmlns:p14="http://schemas.microsoft.com/office/powerpoint/2010/main" val="868167867"/>
       </p:ext>
     </p:extLst>
   </p:cSld>
@@ -3315,8 +3315,8 @@
         </p:nvSpPr>
         <p:spPr>
           <a:xfrm>
-            <a:off x="629841" y="342900"/>
-            <a:ext cx="2949178" cy="1200150"/>
+            <a:off x="632356" y="342900"/>
+            <a:ext cx="2960954" cy="1200150"/>
           </a:xfrm>
         </p:spPr>
         <p:txBody>
@@ -3347,8 +3347,8 @@
         </p:nvSpPr>
         <p:spPr>
           <a:xfrm>
-            <a:off x="3887391" y="740569"/>
-            <a:ext cx="4629150" cy="3655219"/>
+            <a:off x="3902914" y="740569"/>
+            <a:ext cx="4647635" cy="3655219"/>
           </a:xfrm>
         </p:spPr>
         <p:txBody>
@@ -3412,8 +3412,8 @@
         </p:nvSpPr>
         <p:spPr>
           <a:xfrm>
-            <a:off x="629841" y="1543050"/>
-            <a:ext cx="2949178" cy="2858691"/>
+            <a:off x="632356" y="1543050"/>
+            <a:ext cx="2960954" cy="2858691"/>
           </a:xfrm>
         </p:spPr>
         <p:txBody>
@@ -3460,7 +3460,7 @@
             <a:pPr lvl="0"/>
             <a:r>
               <a:rPr lang="ko-KR" altLang="en-US"/>
-              <a:t>마스터 텍스트 스타일 편집</a:t>
+              <a:t>마스터 텍스트 스타일을 편집하려면 클릭</a:t>
             </a:r>
           </a:p>
         </p:txBody>
@@ -3482,7 +3482,7 @@
           <a:p>
             <a:fld id="{149F34B4-7175-41BD-B98B-2E7021201D7D}" type="datetimeFigureOut">
               <a:rPr lang="ko-KR" altLang="en-US" smtClean="0"/>
-              <a:t>2026-03-11</a:t>
+              <a:t>2026-04-09</a:t>
             </a:fld>
             <a:endParaRPr lang="ko-KR" altLang="en-US"/>
           </a:p>
@@ -3533,7 +3533,7 @@
     </p:spTree>
     <p:extLst>
       <p:ext uri="{BB962C8B-B14F-4D97-AF65-F5344CB8AC3E}">
-        <p14:creationId xmlns:p14="http://schemas.microsoft.com/office/powerpoint/2010/main" val="3756956877"/>
+        <p14:creationId xmlns:p14="http://schemas.microsoft.com/office/powerpoint/2010/main" val="3555584137"/>
       </p:ext>
     </p:extLst>
   </p:cSld>
@@ -3577,8 +3577,8 @@
         </p:nvSpPr>
         <p:spPr>
           <a:xfrm>
-            <a:off x="628650" y="273844"/>
-            <a:ext cx="7886700" cy="994172"/>
+            <a:off x="631161" y="273844"/>
+            <a:ext cx="7918192" cy="994172"/>
           </a:xfrm>
           <a:prstGeom prst="rect">
             <a:avLst/>
@@ -3610,8 +3610,8 @@
         </p:nvSpPr>
         <p:spPr>
           <a:xfrm>
-            <a:off x="628650" y="1369219"/>
-            <a:ext cx="7886700" cy="3263504"/>
+            <a:off x="631161" y="1369219"/>
+            <a:ext cx="7918192" cy="3263504"/>
           </a:xfrm>
           <a:prstGeom prst="rect">
             <a:avLst/>
@@ -3626,35 +3626,35 @@
             <a:pPr lvl="0"/>
             <a:r>
               <a:rPr lang="ko-KR" altLang="en-US"/>
-              <a:t>마스터 텍스트 스타일 편집</a:t>
+              <a:t>마스터 텍스트 스타일을 편집하려면 클릭</a:t>
             </a:r>
           </a:p>
           <a:p>
             <a:pPr lvl="1"/>
             <a:r>
               <a:rPr lang="ko-KR" altLang="en-US"/>
-              <a:t>둘째 수준</a:t>
+              <a:t>두 번째 수준</a:t>
             </a:r>
           </a:p>
           <a:p>
             <a:pPr lvl="2"/>
             <a:r>
               <a:rPr lang="ko-KR" altLang="en-US"/>
-              <a:t>셋째 수준</a:t>
+              <a:t>세 번째 수준</a:t>
             </a:r>
           </a:p>
           <a:p>
             <a:pPr lvl="3"/>
             <a:r>
               <a:rPr lang="ko-KR" altLang="en-US"/>
-              <a:t>넷째 수준</a:t>
+              <a:t>네 번째 수준</a:t>
             </a:r>
           </a:p>
           <a:p>
             <a:pPr lvl="4"/>
             <a:r>
               <a:rPr lang="ko-KR" altLang="en-US"/>
-              <a:t>다섯째 수준</a:t>
+              <a:t>다섯 번째 수준</a:t>
             </a:r>
             <a:endParaRPr lang="en-US" dirty="0"/>
           </a:p>
@@ -3672,8 +3672,8 @@
         </p:nvSpPr>
         <p:spPr>
           <a:xfrm>
-            <a:off x="628650" y="4767263"/>
-            <a:ext cx="2057400" cy="273844"/>
+            <a:off x="631160" y="4767263"/>
+            <a:ext cx="2065615" cy="273844"/>
           </a:xfrm>
           <a:prstGeom prst="rect">
             <a:avLst/>
@@ -3695,7 +3695,7 @@
           <a:p>
             <a:fld id="{149F34B4-7175-41BD-B98B-2E7021201D7D}" type="datetimeFigureOut">
               <a:rPr lang="ko-KR" altLang="en-US" smtClean="0"/>
-              <a:t>2026-03-11</a:t>
+              <a:t>2026-04-09</a:t>
             </a:fld>
             <a:endParaRPr lang="ko-KR" altLang="en-US"/>
           </a:p>
@@ -3713,8 +3713,8 @@
         </p:nvSpPr>
         <p:spPr>
           <a:xfrm>
-            <a:off x="3028950" y="4767263"/>
-            <a:ext cx="3086100" cy="273844"/>
+            <a:off x="3041045" y="4767263"/>
+            <a:ext cx="3098423" cy="273844"/>
           </a:xfrm>
           <a:prstGeom prst="rect">
             <a:avLst/>
@@ -3750,8 +3750,8 @@
         </p:nvSpPr>
         <p:spPr>
           <a:xfrm>
-            <a:off x="6457950" y="4767263"/>
-            <a:ext cx="2057400" cy="273844"/>
+            <a:off x="6483738" y="4767263"/>
+            <a:ext cx="2065615" cy="273844"/>
           </a:xfrm>
           <a:prstGeom prst="rect">
             <a:avLst/>
@@ -3782,24 +3782,24 @@
     </p:spTree>
     <p:extLst>
       <p:ext uri="{BB962C8B-B14F-4D97-AF65-F5344CB8AC3E}">
-        <p14:creationId xmlns:p14="http://schemas.microsoft.com/office/powerpoint/2010/main" val="3417278895"/>
+        <p14:creationId xmlns:p14="http://schemas.microsoft.com/office/powerpoint/2010/main" val="1537783530"/>
       </p:ext>
     </p:extLst>
   </p:cSld>
   <p:clrMap bg1="lt1" tx1="dk1" bg2="lt2" tx2="dk2" accent1="accent1" accent2="accent2" accent3="accent3" accent4="accent4" accent5="accent5" accent6="accent6" hlink="hlink" folHlink="folHlink"/>
   <p:sldLayoutIdLst>
-    <p:sldLayoutId id="2147483884" r:id="rId1"/>
-    <p:sldLayoutId id="2147483885" r:id="rId2"/>
-    <p:sldLayoutId id="2147483886" r:id="rId3"/>
-    <p:sldLayoutId id="2147483887" r:id="rId4"/>
-    <p:sldLayoutId id="2147483888" r:id="rId5"/>
-    <p:sldLayoutId id="2147483889" r:id="rId6"/>
-    <p:sldLayoutId id="2147483890" r:id="rId7"/>
-    <p:sldLayoutId id="2147483891" r:id="rId8"/>
-    <p:sldLayoutId id="2147483892" r:id="rId9"/>
-    <p:sldLayoutId id="2147483893" r:id="rId10"/>
-    <p:sldLayoutId id="2147483894" r:id="rId11"/>
-    <p:sldLayoutId id="2147483895" r:id="rId12"/>
+    <p:sldLayoutId id="2147483897" r:id="rId1"/>
+    <p:sldLayoutId id="2147483898" r:id="rId2"/>
+    <p:sldLayoutId id="2147483899" r:id="rId3"/>
+    <p:sldLayoutId id="2147483900" r:id="rId4"/>
+    <p:sldLayoutId id="2147483901" r:id="rId5"/>
+    <p:sldLayoutId id="2147483902" r:id="rId6"/>
+    <p:sldLayoutId id="2147483903" r:id="rId7"/>
+    <p:sldLayoutId id="2147483904" r:id="rId8"/>
+    <p:sldLayoutId id="2147483905" r:id="rId9"/>
+    <p:sldLayoutId id="2147483906" r:id="rId10"/>
+    <p:sldLayoutId id="2147483907" r:id="rId11"/>
+    <p:sldLayoutId id="2147483908" r:id="rId12"/>
     <p:sldLayoutId id="2147483790" r:id="rId13"/>
     <p:sldLayoutId id="2147483789" r:id="rId14"/>
   </p:sldLayoutIdLst>
@@ -4091,7 +4091,7 @@
             <a:srgbClr val="F26B43"/>
           </p15:clr>
         </p15:guide>
-        <p15:guide id="2" pos="2881" userDrawn="1">
+        <p15:guide id="2" pos="2893" userDrawn="1">
           <p15:clr>
             <a:srgbClr val="F26B43"/>
           </p15:clr>
@@ -4139,8 +4139,8 @@
         </p:nvSpPr>
         <p:spPr>
           <a:xfrm>
-            <a:off x="590790" y="807444"/>
-            <a:ext cx="2561688" cy="548828"/>
+            <a:off x="593149" y="800399"/>
+            <a:ext cx="2571917" cy="551020"/>
           </a:xfrm>
           <a:prstGeom prst="roundRect">
             <a:avLst/>
@@ -4180,7 +4180,10 @@
           <a:lstStyle/>
           <a:p>
             <a:pPr algn="ctr"/>
-            <a:endParaRPr lang="ko-KR" altLang="en-US"/>
+            <a:endParaRPr lang="ko-KR" altLang="en-US" sz="1807">
+              <a:latin typeface="KoPub돋움체 Medium" panose="02020603020101020101" pitchFamily="18" charset="-127"/>
+              <a:ea typeface="KoPub돋움체 Medium" panose="02020603020101020101" pitchFamily="18" charset="-127"/>
+            </a:endParaRPr>
           </a:p>
         </p:txBody>
       </p:sp>
@@ -4198,8 +4201,8 @@
         </p:nvSpPr>
         <p:spPr>
           <a:xfrm>
-            <a:off x="3204625" y="807444"/>
-            <a:ext cx="5347237" cy="548828"/>
+            <a:off x="3217421" y="800399"/>
+            <a:ext cx="5368589" cy="551020"/>
           </a:xfrm>
           <a:prstGeom prst="roundRect">
             <a:avLst/>
@@ -4239,7 +4242,10 @@
           <a:lstStyle/>
           <a:p>
             <a:pPr algn="ctr"/>
-            <a:endParaRPr lang="ko-KR" altLang="en-US"/>
+            <a:endParaRPr lang="ko-KR" altLang="en-US" sz="1807">
+              <a:latin typeface="KoPub돋움체 Medium" panose="02020603020101020101" pitchFamily="18" charset="-127"/>
+              <a:ea typeface="KoPub돋움체 Medium" panose="02020603020101020101" pitchFamily="18" charset="-127"/>
+            </a:endParaRPr>
           </a:p>
         </p:txBody>
       </p:sp>
@@ -4257,8 +4263,8 @@
         </p:nvSpPr>
         <p:spPr>
           <a:xfrm>
-            <a:off x="5281613" y="2565733"/>
-            <a:ext cx="2843725" cy="584775"/>
+            <a:off x="5193921" y="2506427"/>
+            <a:ext cx="2855080" cy="707886"/>
           </a:xfrm>
           <a:prstGeom prst="rect">
             <a:avLst/>
@@ -4272,23 +4278,23 @@
           <a:lstStyle/>
           <a:p>
             <a:r>
-              <a:rPr lang="ko-KR" altLang="en-US" sz="1600" dirty="0">
-                <a:latin typeface="KoPub돋움체 Light" panose="02020603020101020101" pitchFamily="18" charset="-127"/>
-                <a:ea typeface="KoPub돋움체 Light" panose="02020603020101020101" pitchFamily="18" charset="-127"/>
+              <a:rPr lang="ko-KR" altLang="en-US" sz="2000" b="1" dirty="0">
+                <a:latin typeface="KoPub돋움체 Medium" panose="02020603020101020101" pitchFamily="18" charset="-127"/>
+                <a:ea typeface="KoPub돋움체 Medium" panose="02020603020101020101" pitchFamily="18" charset="-127"/>
               </a:rPr>
               <a:t>야간 응급 유선 보고 후 사후 </a:t>
             </a:r>
             <a:r>
-              <a:rPr lang="en-US" altLang="ko-KR" sz="1600" dirty="0">
-                <a:latin typeface="KoPub돋움체 Light" panose="02020603020101020101" pitchFamily="18" charset="-127"/>
-                <a:ea typeface="KoPub돋움체 Light" panose="02020603020101020101" pitchFamily="18" charset="-127"/>
+              <a:rPr lang="en-US" altLang="ko-KR" sz="2000" b="1" dirty="0">
+                <a:latin typeface="KoPub돋움체 Medium" panose="02020603020101020101" pitchFamily="18" charset="-127"/>
+                <a:ea typeface="KoPub돋움체 Medium" panose="02020603020101020101" pitchFamily="18" charset="-127"/>
               </a:rPr>
               <a:t>[A]-[D] 1</a:t>
             </a:r>
             <a:r>
-              <a:rPr lang="ko-KR" altLang="en-US" sz="1600" dirty="0">
-                <a:latin typeface="KoPub돋움체 Light" panose="02020603020101020101" pitchFamily="18" charset="-127"/>
-                <a:ea typeface="KoPub돋움체 Light" panose="02020603020101020101" pitchFamily="18" charset="-127"/>
+              <a:rPr lang="ko-KR" altLang="en-US" sz="2000" b="1" dirty="0">
+                <a:latin typeface="KoPub돋움체 Medium" panose="02020603020101020101" pitchFamily="18" charset="-127"/>
+                <a:ea typeface="KoPub돋움체 Medium" panose="02020603020101020101" pitchFamily="18" charset="-127"/>
               </a:rPr>
               <a:t>줄 기록</a:t>
             </a:r>
@@ -4309,8 +4315,8 @@
         </p:nvSpPr>
         <p:spPr>
           <a:xfrm>
-            <a:off x="5067299" y="2388822"/>
-            <a:ext cx="3484563" cy="959835"/>
+            <a:off x="5087533" y="2388092"/>
+            <a:ext cx="3498477" cy="963668"/>
           </a:xfrm>
           <a:prstGeom prst="roundRect">
             <a:avLst>
@@ -4347,9 +4353,9 @@
           <a:lstStyle/>
           <a:p>
             <a:pPr algn="ctr"/>
-            <a:endParaRPr lang="ko-KR" altLang="en-US" sz="5080">
+            <a:endParaRPr lang="ko-KR" altLang="en-US" sz="5100">
               <a:latin typeface="KoPub돋움체 Medium" panose="02020603020101020101" pitchFamily="18" charset="-127"/>
-              <a:ea typeface="KoPub돋움체 Light" panose="02020603020101020101"/>
+              <a:ea typeface="KoPub돋움체 Medium" panose="02020603020101020101" pitchFamily="18" charset="-127"/>
             </a:endParaRPr>
           </a:p>
         </p:txBody>
@@ -4368,8 +4374,8 @@
         </p:nvSpPr>
         <p:spPr>
           <a:xfrm>
-            <a:off x="3204625" y="2394111"/>
-            <a:ext cx="1811875" cy="954545"/>
+            <a:off x="3217421" y="2393402"/>
+            <a:ext cx="1819110" cy="958357"/>
           </a:xfrm>
           <a:prstGeom prst="roundRect">
             <a:avLst>
@@ -4407,9 +4413,9 @@
           <a:lstStyle/>
           <a:p>
             <a:pPr algn="ctr"/>
-            <a:endParaRPr lang="ko-KR" altLang="en-US" sz="5080">
+            <a:endParaRPr lang="ko-KR" altLang="en-US" sz="5100">
               <a:latin typeface="KoPub돋움체 Medium" panose="02020603020101020101" pitchFamily="18" charset="-127"/>
-              <a:ea typeface="KoPub돋움체 Light" panose="02020603020101020101"/>
+              <a:ea typeface="KoPub돋움체 Medium" panose="02020603020101020101" pitchFamily="18" charset="-127"/>
             </a:endParaRPr>
           </a:p>
         </p:txBody>
@@ -4428,8 +4434,8 @@
         </p:nvSpPr>
         <p:spPr>
           <a:xfrm>
-            <a:off x="3415500" y="2675202"/>
-            <a:ext cx="1390125" cy="338554"/>
+            <a:off x="3354969" y="2653493"/>
+            <a:ext cx="1544012" cy="400110"/>
           </a:xfrm>
           <a:prstGeom prst="rect">
             <a:avLst/>
@@ -4444,23 +4450,23 @@
           <a:p>
             <a:pPr algn="ctr"/>
             <a:r>
-              <a:rPr lang="en-US" altLang="ko-KR" sz="1600" b="1" dirty="0">
-                <a:latin typeface="KoPub돋움체 Light" panose="02020603020101020101" pitchFamily="18" charset="-127"/>
-                <a:ea typeface="KoPub돋움체 Light" panose="02020603020101020101" pitchFamily="18" charset="-127"/>
+              <a:rPr lang="en-US" altLang="ko-KR" sz="2000" b="1" dirty="0">
+                <a:latin typeface="KoPub돋움체 Medium" panose="02020603020101020101" pitchFamily="18" charset="-127"/>
+                <a:ea typeface="KoPub돋움체 Medium" panose="02020603020101020101" pitchFamily="18" charset="-127"/>
               </a:rPr>
               <a:t>[D-</a:t>
             </a:r>
             <a:r>
-              <a:rPr lang="ko-KR" altLang="en-US" sz="1600" b="1" dirty="0" err="1">
-                <a:latin typeface="KoPub돋움체 Light" panose="02020603020101020101" pitchFamily="18" charset="-127"/>
-                <a:ea typeface="KoPub돋움체 Light" panose="02020603020101020101" pitchFamily="18" charset="-127"/>
+              <a:rPr lang="ko-KR" altLang="en-US" sz="2000" b="1" dirty="0" err="1">
+                <a:latin typeface="KoPub돋움체 Medium" panose="02020603020101020101" pitchFamily="18" charset="-127"/>
+                <a:ea typeface="KoPub돋움체 Medium" panose="02020603020101020101" pitchFamily="18" charset="-127"/>
               </a:rPr>
               <a:t>야간유선</a:t>
             </a:r>
             <a:r>
-              <a:rPr lang="en-US" altLang="ko-KR" sz="1600" b="1" dirty="0">
-                <a:latin typeface="KoPub돋움체 Light" panose="02020603020101020101" pitchFamily="18" charset="-127"/>
-                <a:ea typeface="KoPub돋움체 Light" panose="02020603020101020101" pitchFamily="18" charset="-127"/>
+              <a:rPr lang="en-US" altLang="ko-KR" sz="2000" b="1" dirty="0">
+                <a:latin typeface="KoPub돋움체 Medium" panose="02020603020101020101" pitchFamily="18" charset="-127"/>
+                <a:ea typeface="KoPub돋움체 Medium" panose="02020603020101020101" pitchFamily="18" charset="-127"/>
               </a:rPr>
               <a:t>]</a:t>
             </a:r>
@@ -4481,8 +4487,8 @@
         </p:nvSpPr>
         <p:spPr>
           <a:xfrm>
-            <a:off x="101771" y="184601"/>
-            <a:ext cx="3476336" cy="309444"/>
+            <a:off x="302548" y="175069"/>
+            <a:ext cx="3089475" cy="311645"/>
           </a:xfrm>
           <a:prstGeom prst="rect">
             <a:avLst/>
@@ -4497,21 +4503,21 @@
           <a:p>
             <a:pPr algn="ctr"/>
             <a:r>
-              <a:rPr lang="ko-KR" altLang="en-US" sz="1411" spc="-31" dirty="0">
+              <a:rPr lang="ko-KR" altLang="en-US" sz="1417" spc="-31" dirty="0">
                 <a:latin typeface="KoPub돋움체 Light" panose="02020603020101020101" pitchFamily="18" charset="-127"/>
                 <a:ea typeface="KoPub돋움체 Light" panose="02020603020101020101" pitchFamily="18" charset="-127"/>
               </a:rPr>
               <a:t>순천향대학교 천안병원 </a:t>
             </a:r>
             <a:r>
-              <a:rPr lang="en-US" altLang="ko-KR" sz="1411" spc="-31" dirty="0">
+              <a:rPr lang="en-US" altLang="ko-KR" sz="1417" spc="-31" dirty="0">
                 <a:latin typeface="KoPub돋움체 Light" panose="02020603020101020101" pitchFamily="18" charset="-127"/>
                 <a:ea typeface="KoPub돋움체 Light" panose="02020603020101020101" pitchFamily="18" charset="-127"/>
               </a:rPr>
               <a:t>| </a:t>
             </a:r>
             <a:r>
-              <a:rPr lang="ko-KR" altLang="en-US" sz="1411" spc="-31" dirty="0">
+              <a:rPr lang="ko-KR" altLang="en-US" sz="1417" spc="-31" dirty="0">
                 <a:latin typeface="KoPub돋움체 Light" panose="02020603020101020101" pitchFamily="18" charset="-127"/>
                 <a:ea typeface="KoPub돋움체 Light" panose="02020603020101020101" pitchFamily="18" charset="-127"/>
               </a:rPr>
@@ -4534,8 +4540,8 @@
         </p:nvGrpSpPr>
         <p:grpSpPr>
           <a:xfrm>
-            <a:off x="592138" y="1396134"/>
-            <a:ext cx="2585305" cy="2814796"/>
+            <a:off x="594503" y="1391440"/>
+            <a:ext cx="2595628" cy="2826036"/>
             <a:chOff x="592138" y="1592949"/>
             <a:chExt cx="2585305" cy="2814796"/>
           </a:xfrm>
@@ -4594,11 +4600,12 @@
             <a:lstStyle/>
             <a:p>
               <a:pPr algn="ctr"/>
-              <a:endParaRPr lang="ko-KR" altLang="en-US" sz="5080">
+              <a:endParaRPr lang="ko-KR" altLang="en-US" sz="5100">
                 <a:solidFill>
                   <a:schemeClr val="tx1"/>
                 </a:solidFill>
-                <a:ea typeface="KoPub돋움체 Light" panose="02020603020101020101"/>
+                <a:latin typeface="KoPub돋움체 Medium" panose="02020603020101020101" pitchFamily="18" charset="-127"/>
+                <a:ea typeface="KoPub돋움체 Medium" panose="02020603020101020101" pitchFamily="18" charset="-127"/>
               </a:endParaRPr>
             </a:p>
           </p:txBody>
@@ -4632,251 +4639,254 @@
             <a:lstStyle/>
             <a:p>
               <a:r>
-                <a:rPr lang="en-US" altLang="ko-KR" sz="1600" b="1" dirty="0">
-                  <a:latin typeface="KoPub돋움체 Light" panose="02020603020101020101" pitchFamily="18" charset="-127"/>
-                  <a:ea typeface="KoPub돋움체 Light" panose="02020603020101020101" pitchFamily="18" charset="-127"/>
+                <a:rPr lang="en-US" altLang="ko-KR" sz="1606" b="1" dirty="0">
+                  <a:latin typeface="KoPub돋움체 Medium" panose="02020603020101020101" pitchFamily="18" charset="-127"/>
+                  <a:ea typeface="KoPub돋움체 Medium" panose="02020603020101020101" pitchFamily="18" charset="-127"/>
                 </a:rPr>
                 <a:t>[CHEMO] </a:t>
               </a:r>
               <a:r>
-                <a:rPr lang="ko-KR" altLang="en-US" sz="1600" dirty="0"/>
+                <a:rPr lang="ko-KR" altLang="en-US" sz="1606" dirty="0">
+                  <a:latin typeface="KoPub돋움체 Medium" panose="02020603020101020101" pitchFamily="18" charset="-127"/>
+                  <a:ea typeface="KoPub돋움체 Medium" panose="02020603020101020101" pitchFamily="18" charset="-127"/>
+                </a:rPr>
                 <a:t>항암 관리</a:t>
               </a:r>
             </a:p>
             <a:p>
               <a:r>
-                <a:rPr lang="en-US" altLang="ko-KR" sz="1600" b="1" dirty="0">
-                  <a:latin typeface="KoPub돋움체 Light" panose="02020603020101020101" pitchFamily="18" charset="-127"/>
-                  <a:ea typeface="KoPub돋움체 Light" panose="02020603020101020101" pitchFamily="18" charset="-127"/>
+                <a:rPr lang="en-US" altLang="ko-KR" sz="1606" b="1" dirty="0">
+                  <a:latin typeface="KoPub돋움체 Medium" panose="02020603020101020101" pitchFamily="18" charset="-127"/>
+                  <a:ea typeface="KoPub돋움체 Medium" panose="02020603020101020101" pitchFamily="18" charset="-127"/>
                 </a:rPr>
                 <a:t>[BLOOD]</a:t>
               </a:r>
               <a:r>
-                <a:rPr lang="en-US" altLang="ko-KR" sz="1600" dirty="0">
-                  <a:latin typeface="KoPub돋움체 Light" panose="02020603020101020101" pitchFamily="18" charset="-127"/>
-                  <a:ea typeface="KoPub돋움체 Light" panose="02020603020101020101" pitchFamily="18" charset="-127"/>
+                <a:rPr lang="en-US" altLang="ko-KR" sz="1606" dirty="0">
+                  <a:latin typeface="KoPub돋움체 Medium" panose="02020603020101020101" pitchFamily="18" charset="-127"/>
+                  <a:ea typeface="KoPub돋움체 Medium" panose="02020603020101020101" pitchFamily="18" charset="-127"/>
                 </a:rPr>
                 <a:t> </a:t>
               </a:r>
               <a:r>
-                <a:rPr lang="ko-KR" altLang="en-US" sz="1600" dirty="0">
-                  <a:latin typeface="KoPub돋움체 Light" panose="02020603020101020101" pitchFamily="18" charset="-127"/>
-                  <a:ea typeface="KoPub돋움체 Light" panose="02020603020101020101" pitchFamily="18" charset="-127"/>
+                <a:rPr lang="ko-KR" altLang="en-US" sz="1606" dirty="0">
+                  <a:latin typeface="KoPub돋움체 Medium" panose="02020603020101020101" pitchFamily="18" charset="-127"/>
+                  <a:ea typeface="KoPub돋움체 Medium" panose="02020603020101020101" pitchFamily="18" charset="-127"/>
                 </a:rPr>
                 <a:t>수혈 관리</a:t>
               </a:r>
-              <a:endParaRPr lang="en-US" altLang="ko-KR" sz="1600" dirty="0">
-                <a:latin typeface="KoPub돋움체 Light" panose="02020603020101020101" pitchFamily="18" charset="-127"/>
-                <a:ea typeface="KoPub돋움체 Light" panose="02020603020101020101" pitchFamily="18" charset="-127"/>
+              <a:endParaRPr lang="en-US" altLang="ko-KR" sz="1606" dirty="0">
+                <a:latin typeface="KoPub돋움체 Medium" panose="02020603020101020101" pitchFamily="18" charset="-127"/>
+                <a:ea typeface="KoPub돋움체 Medium" panose="02020603020101020101" pitchFamily="18" charset="-127"/>
               </a:endParaRPr>
             </a:p>
             <a:p>
               <a:r>
-                <a:rPr lang="en-US" altLang="ko-KR" sz="1600" b="1" dirty="0">
-                  <a:latin typeface="KoPub돋움체 Light" panose="02020603020101020101" pitchFamily="18" charset="-127"/>
-                  <a:ea typeface="KoPub돋움체 Light" panose="02020603020101020101" pitchFamily="18" charset="-127"/>
+                <a:rPr lang="en-US" altLang="ko-KR" sz="1606" b="1" dirty="0">
+                  <a:latin typeface="KoPub돋움체 Medium" panose="02020603020101020101" pitchFamily="18" charset="-127"/>
+                  <a:ea typeface="KoPub돋움체 Medium" panose="02020603020101020101" pitchFamily="18" charset="-127"/>
                 </a:rPr>
                 <a:t>[CVR]</a:t>
               </a:r>
               <a:r>
-                <a:rPr lang="en-US" altLang="ko-KR" sz="1600" dirty="0">
-                  <a:latin typeface="KoPub돋움체 Light" panose="02020603020101020101" pitchFamily="18" charset="-127"/>
-                  <a:ea typeface="KoPub돋움체 Light" panose="02020603020101020101" pitchFamily="18" charset="-127"/>
+                <a:rPr lang="en-US" altLang="ko-KR" sz="1606" dirty="0">
+                  <a:latin typeface="KoPub돋움체 Medium" panose="02020603020101020101" pitchFamily="18" charset="-127"/>
+                  <a:ea typeface="KoPub돋움체 Medium" panose="02020603020101020101" pitchFamily="18" charset="-127"/>
                 </a:rPr>
                 <a:t> </a:t>
               </a:r>
               <a:r>
-                <a:rPr lang="ko-KR" altLang="en-US" sz="1600" dirty="0">
-                  <a:latin typeface="KoPub돋움체 Light" panose="02020603020101020101" pitchFamily="18" charset="-127"/>
-                  <a:ea typeface="KoPub돋움체 Light" panose="02020603020101020101" pitchFamily="18" charset="-127"/>
+                <a:rPr lang="ko-KR" altLang="en-US" sz="1606" dirty="0">
+                  <a:latin typeface="KoPub돋움체 Medium" panose="02020603020101020101" pitchFamily="18" charset="-127"/>
+                  <a:ea typeface="KoPub돋움체 Medium" panose="02020603020101020101" pitchFamily="18" charset="-127"/>
                 </a:rPr>
                 <a:t>위험 수치</a:t>
               </a:r>
-              <a:endParaRPr lang="en-US" altLang="ko-KR" sz="1600" dirty="0">
-                <a:latin typeface="KoPub돋움체 Light" panose="02020603020101020101" pitchFamily="18" charset="-127"/>
-                <a:ea typeface="KoPub돋움체 Light" panose="02020603020101020101" pitchFamily="18" charset="-127"/>
+              <a:endParaRPr lang="en-US" altLang="ko-KR" sz="1606" dirty="0">
+                <a:latin typeface="KoPub돋움체 Medium" panose="02020603020101020101" pitchFamily="18" charset="-127"/>
+                <a:ea typeface="KoPub돋움체 Medium" panose="02020603020101020101" pitchFamily="18" charset="-127"/>
               </a:endParaRPr>
             </a:p>
             <a:p>
               <a:r>
-                <a:rPr lang="en-US" altLang="ko-KR" sz="1600" b="1" dirty="0">
-                  <a:latin typeface="KoPub돋움체 Light" panose="02020603020101020101" pitchFamily="18" charset="-127"/>
-                  <a:ea typeface="KoPub돋움체 Light" panose="02020603020101020101" pitchFamily="18" charset="-127"/>
+                <a:rPr lang="en-US" altLang="ko-KR" sz="1606" b="1" dirty="0">
+                  <a:latin typeface="KoPub돋움체 Medium" panose="02020603020101020101" pitchFamily="18" charset="-127"/>
+                  <a:ea typeface="KoPub돋움체 Medium" panose="02020603020101020101" pitchFamily="18" charset="-127"/>
                 </a:rPr>
                 <a:t>[LIFE] </a:t>
               </a:r>
               <a:r>
-                <a:rPr lang="ko-KR" altLang="en-US" sz="1600" dirty="0">
-                  <a:latin typeface="KoPub돋움체 Light" panose="02020603020101020101" pitchFamily="18" charset="-127"/>
-                  <a:ea typeface="KoPub돋움체 Light" panose="02020603020101020101" pitchFamily="18" charset="-127"/>
+                <a:rPr lang="ko-KR" altLang="en-US" sz="1606" dirty="0">
+                  <a:latin typeface="KoPub돋움체 Medium" panose="02020603020101020101" pitchFamily="18" charset="-127"/>
+                  <a:ea typeface="KoPub돋움체 Medium" panose="02020603020101020101" pitchFamily="18" charset="-127"/>
                 </a:rPr>
                 <a:t>존엄</a:t>
               </a:r>
               <a:r>
-                <a:rPr lang="en-US" altLang="ko-KR" sz="1600" dirty="0">
-                  <a:latin typeface="KoPub돋움체 Light" panose="02020603020101020101" pitchFamily="18" charset="-127"/>
-                  <a:ea typeface="KoPub돋움체 Light" panose="02020603020101020101" pitchFamily="18" charset="-127"/>
+                <a:rPr lang="en-US" altLang="ko-KR" sz="1606" dirty="0">
+                  <a:latin typeface="KoPub돋움체 Medium" panose="02020603020101020101" pitchFamily="18" charset="-127"/>
+                  <a:ea typeface="KoPub돋움체 Medium" panose="02020603020101020101" pitchFamily="18" charset="-127"/>
                 </a:rPr>
                 <a:t>/</a:t>
               </a:r>
               <a:r>
-                <a:rPr lang="ko-KR" altLang="en-US" sz="1600" dirty="0">
-                  <a:latin typeface="KoPub돋움체 Light" panose="02020603020101020101" pitchFamily="18" charset="-127"/>
-                  <a:ea typeface="KoPub돋움체 Light" panose="02020603020101020101" pitchFamily="18" charset="-127"/>
+                <a:rPr lang="ko-KR" altLang="en-US" sz="1606" dirty="0">
+                  <a:latin typeface="KoPub돋움체 Medium" panose="02020603020101020101" pitchFamily="18" charset="-127"/>
+                  <a:ea typeface="KoPub돋움체 Medium" panose="02020603020101020101" pitchFamily="18" charset="-127"/>
                 </a:rPr>
                 <a:t>임종</a:t>
               </a:r>
-              <a:endParaRPr lang="en-US" altLang="ko-KR" sz="1600" dirty="0">
-                <a:latin typeface="KoPub돋움체 Light" panose="02020603020101020101" pitchFamily="18" charset="-127"/>
-                <a:ea typeface="KoPub돋움체 Light" panose="02020603020101020101" pitchFamily="18" charset="-127"/>
+              <a:endParaRPr lang="en-US" altLang="ko-KR" sz="1606" dirty="0">
+                <a:latin typeface="KoPub돋움체 Medium" panose="02020603020101020101" pitchFamily="18" charset="-127"/>
+                <a:ea typeface="KoPub돋움체 Medium" panose="02020603020101020101" pitchFamily="18" charset="-127"/>
               </a:endParaRPr>
             </a:p>
             <a:p>
               <a:r>
-                <a:rPr lang="en-US" altLang="ko-KR" sz="1600" b="1" dirty="0">
-                  <a:latin typeface="KoPub돋움체 Light" panose="02020603020101020101" pitchFamily="18" charset="-127"/>
-                  <a:ea typeface="KoPub돋움체 Light" panose="02020603020101020101" pitchFamily="18" charset="-127"/>
+                <a:rPr lang="en-US" altLang="ko-KR" sz="1606" b="1" dirty="0">
+                  <a:latin typeface="KoPub돋움체 Medium" panose="02020603020101020101" pitchFamily="18" charset="-127"/>
+                  <a:ea typeface="KoPub돋움체 Medium" panose="02020603020101020101" pitchFamily="18" charset="-127"/>
                 </a:rPr>
                 <a:t>[MEET] </a:t>
               </a:r>
               <a:r>
-                <a:rPr lang="ko-KR" altLang="en-US" sz="1600" dirty="0">
-                  <a:latin typeface="KoPub돋움체 Light" panose="02020603020101020101" pitchFamily="18" charset="-127"/>
-                  <a:ea typeface="KoPub돋움체 Light" panose="02020603020101020101" pitchFamily="18" charset="-127"/>
+                <a:rPr lang="ko-KR" altLang="en-US" sz="1606" dirty="0">
+                  <a:latin typeface="KoPub돋움체 Medium" panose="02020603020101020101" pitchFamily="18" charset="-127"/>
+                  <a:ea typeface="KoPub돋움체 Medium" panose="02020603020101020101" pitchFamily="18" charset="-127"/>
                 </a:rPr>
                 <a:t>보호자 면담</a:t>
               </a:r>
-              <a:endParaRPr lang="en-US" altLang="ko-KR" sz="1600" dirty="0">
-                <a:latin typeface="KoPub돋움체 Light" panose="02020603020101020101" pitchFamily="18" charset="-127"/>
-                <a:ea typeface="KoPub돋움체 Light" panose="02020603020101020101" pitchFamily="18" charset="-127"/>
+              <a:endParaRPr lang="en-US" altLang="ko-KR" sz="1606" dirty="0">
+                <a:latin typeface="KoPub돋움체 Medium" panose="02020603020101020101" pitchFamily="18" charset="-127"/>
+                <a:ea typeface="KoPub돋움체 Medium" panose="02020603020101020101" pitchFamily="18" charset="-127"/>
               </a:endParaRPr>
             </a:p>
             <a:p>
               <a:r>
-                <a:rPr lang="en-US" altLang="ko-KR" sz="1600" b="1" dirty="0">
-                  <a:latin typeface="KoPub돋움체 Light" panose="02020603020101020101" pitchFamily="18" charset="-127"/>
-                  <a:ea typeface="KoPub돋움체 Light" panose="02020603020101020101" pitchFamily="18" charset="-127"/>
+                <a:rPr lang="en-US" altLang="ko-KR" sz="1606" b="1" dirty="0">
+                  <a:latin typeface="KoPub돋움체 Medium" panose="02020603020101020101" pitchFamily="18" charset="-127"/>
+                  <a:ea typeface="KoPub돋움체 Medium" panose="02020603020101020101" pitchFamily="18" charset="-127"/>
                 </a:rPr>
                 <a:t>[MARROW] </a:t>
               </a:r>
               <a:r>
-                <a:rPr lang="ko-KR" altLang="en-US" sz="1600" dirty="0">
-                  <a:latin typeface="KoPub돋움체 Light" panose="02020603020101020101" pitchFamily="18" charset="-127"/>
-                  <a:ea typeface="KoPub돋움체 Light" panose="02020603020101020101" pitchFamily="18" charset="-127"/>
+                <a:rPr lang="ko-KR" altLang="en-US" sz="1606" dirty="0">
+                  <a:latin typeface="KoPub돋움체 Medium" panose="02020603020101020101" pitchFamily="18" charset="-127"/>
+                  <a:ea typeface="KoPub돋움체 Medium" panose="02020603020101020101" pitchFamily="18" charset="-127"/>
                 </a:rPr>
                 <a:t>골수 검사</a:t>
               </a:r>
-              <a:endParaRPr lang="en-US" altLang="ko-KR" sz="1600" dirty="0">
-                <a:latin typeface="KoPub돋움체 Light" panose="02020603020101020101" pitchFamily="18" charset="-127"/>
-                <a:ea typeface="KoPub돋움체 Light" panose="02020603020101020101" pitchFamily="18" charset="-127"/>
+              <a:endParaRPr lang="en-US" altLang="ko-KR" sz="1606" dirty="0">
+                <a:latin typeface="KoPub돋움체 Medium" panose="02020603020101020101" pitchFamily="18" charset="-127"/>
+                <a:ea typeface="KoPub돋움체 Medium" panose="02020603020101020101" pitchFamily="18" charset="-127"/>
               </a:endParaRPr>
             </a:p>
             <a:p>
               <a:r>
-                <a:rPr lang="en-US" altLang="ko-KR" sz="1600" b="1" dirty="0">
-                  <a:latin typeface="KoPub돋움체 Light" panose="02020603020101020101" pitchFamily="18" charset="-127"/>
-                  <a:ea typeface="KoPub돋움체 Light" panose="02020603020101020101" pitchFamily="18" charset="-127"/>
+                <a:rPr lang="en-US" altLang="ko-KR" sz="1606" b="1" dirty="0">
+                  <a:latin typeface="KoPub돋움체 Medium" panose="02020603020101020101" pitchFamily="18" charset="-127"/>
+                  <a:ea typeface="KoPub돋움체 Medium" panose="02020603020101020101" pitchFamily="18" charset="-127"/>
                 </a:rPr>
                 <a:t>[ISO] </a:t>
               </a:r>
               <a:r>
-                <a:rPr lang="ko-KR" altLang="en-US" sz="1600" dirty="0">
-                  <a:latin typeface="KoPub돋움체 Light" panose="02020603020101020101" pitchFamily="18" charset="-127"/>
-                  <a:ea typeface="KoPub돋움체 Light" panose="02020603020101020101" pitchFamily="18" charset="-127"/>
+                <a:rPr lang="ko-KR" altLang="en-US" sz="1606" dirty="0">
+                  <a:latin typeface="KoPub돋움체 Medium" panose="02020603020101020101" pitchFamily="18" charset="-127"/>
+                  <a:ea typeface="KoPub돋움체 Medium" panose="02020603020101020101" pitchFamily="18" charset="-127"/>
                 </a:rPr>
                 <a:t>격리 관리</a:t>
               </a:r>
-              <a:endParaRPr lang="en-US" altLang="ko-KR" sz="1600" dirty="0">
-                <a:latin typeface="KoPub돋움체 Light" panose="02020603020101020101" pitchFamily="18" charset="-127"/>
-                <a:ea typeface="KoPub돋움체 Light" panose="02020603020101020101" pitchFamily="18" charset="-127"/>
+              <a:endParaRPr lang="en-US" altLang="ko-KR" sz="1606" dirty="0">
+                <a:latin typeface="KoPub돋움체 Medium" panose="02020603020101020101" pitchFamily="18" charset="-127"/>
+                <a:ea typeface="KoPub돋움체 Medium" panose="02020603020101020101" pitchFamily="18" charset="-127"/>
               </a:endParaRPr>
             </a:p>
             <a:p>
               <a:r>
-                <a:rPr lang="en-US" altLang="ko-KR" sz="1600" b="1" dirty="0">
-                  <a:latin typeface="KoPub돋움체 Light" panose="02020603020101020101" pitchFamily="18" charset="-127"/>
-                  <a:ea typeface="KoPub돋움체 Light" panose="02020603020101020101" pitchFamily="18" charset="-127"/>
+                <a:rPr lang="en-US" altLang="ko-KR" sz="1606" b="1" dirty="0">
+                  <a:latin typeface="KoPub돋움체 Medium" panose="02020603020101020101" pitchFamily="18" charset="-127"/>
+                  <a:ea typeface="KoPub돋움체 Medium" panose="02020603020101020101" pitchFamily="18" charset="-127"/>
                 </a:rPr>
                 <a:t>[C-Status] </a:t>
               </a:r>
               <a:r>
-                <a:rPr lang="ko-KR" altLang="en-US" sz="1600" dirty="0">
-                  <a:latin typeface="KoPub돋움체 Light" panose="02020603020101020101" pitchFamily="18" charset="-127"/>
-                  <a:ea typeface="KoPub돋움체 Light" panose="02020603020101020101" pitchFamily="18" charset="-127"/>
+                <a:rPr lang="ko-KR" altLang="en-US" sz="1606" dirty="0">
+                  <a:latin typeface="KoPub돋움체 Medium" panose="02020603020101020101" pitchFamily="18" charset="-127"/>
+                  <a:ea typeface="KoPub돋움체 Medium" panose="02020603020101020101" pitchFamily="18" charset="-127"/>
                 </a:rPr>
                 <a:t>상태 악화</a:t>
               </a:r>
-              <a:endParaRPr lang="en-US" altLang="ko-KR" sz="1600" dirty="0">
-                <a:latin typeface="KoPub돋움체 Light" panose="02020603020101020101" pitchFamily="18" charset="-127"/>
-                <a:ea typeface="KoPub돋움체 Light" panose="02020603020101020101" pitchFamily="18" charset="-127"/>
+              <a:endParaRPr lang="en-US" altLang="ko-KR" sz="1606" dirty="0">
+                <a:latin typeface="KoPub돋움체 Medium" panose="02020603020101020101" pitchFamily="18" charset="-127"/>
+                <a:ea typeface="KoPub돋움체 Medium" panose="02020603020101020101" pitchFamily="18" charset="-127"/>
               </a:endParaRPr>
             </a:p>
             <a:p>
               <a:r>
-                <a:rPr lang="en-US" altLang="ko-KR" sz="1600" b="1" dirty="0">
-                  <a:latin typeface="KoPub돋움체 Light" panose="02020603020101020101" pitchFamily="18" charset="-127"/>
-                  <a:ea typeface="KoPub돋움체 Light" panose="02020603020101020101" pitchFamily="18" charset="-127"/>
+                <a:rPr lang="en-US" altLang="ko-KR" sz="1606" b="1" dirty="0">
+                  <a:latin typeface="KoPub돋움체 Medium" panose="02020603020101020101" pitchFamily="18" charset="-127"/>
+                  <a:ea typeface="KoPub돋움체 Medium" panose="02020603020101020101" pitchFamily="18" charset="-127"/>
                 </a:rPr>
                 <a:t>[PAIN] </a:t>
               </a:r>
               <a:r>
-                <a:rPr lang="ko-KR" altLang="en-US" sz="1600" dirty="0">
-                  <a:latin typeface="KoPub돋움체 Light" panose="02020603020101020101" pitchFamily="18" charset="-127"/>
-                  <a:ea typeface="KoPub돋움체 Light" panose="02020603020101020101" pitchFamily="18" charset="-127"/>
+                <a:rPr lang="ko-KR" altLang="en-US" sz="1606" dirty="0">
+                  <a:latin typeface="KoPub돋움체 Medium" panose="02020603020101020101" pitchFamily="18" charset="-127"/>
+                  <a:ea typeface="KoPub돋움체 Medium" panose="02020603020101020101" pitchFamily="18" charset="-127"/>
                 </a:rPr>
                 <a:t>통증 조절</a:t>
               </a:r>
-              <a:endParaRPr lang="en-US" altLang="ko-KR" sz="1600" dirty="0">
-                <a:latin typeface="KoPub돋움체 Light" panose="02020603020101020101" pitchFamily="18" charset="-127"/>
-                <a:ea typeface="KoPub돋움체 Light" panose="02020603020101020101" pitchFamily="18" charset="-127"/>
+              <a:endParaRPr lang="en-US" altLang="ko-KR" sz="1606" dirty="0">
+                <a:latin typeface="KoPub돋움체 Medium" panose="02020603020101020101" pitchFamily="18" charset="-127"/>
+                <a:ea typeface="KoPub돋움체 Medium" panose="02020603020101020101" pitchFamily="18" charset="-127"/>
               </a:endParaRPr>
             </a:p>
             <a:p>
               <a:r>
-                <a:rPr lang="en-US" altLang="ko-KR" sz="1600" b="1" dirty="0">
-                  <a:latin typeface="KoPub돋움체 Light" panose="02020603020101020101" pitchFamily="18" charset="-127"/>
-                  <a:ea typeface="KoPub돋움체 Light" panose="02020603020101020101" pitchFamily="18" charset="-127"/>
+                <a:rPr lang="en-US" altLang="ko-KR" sz="1606" b="1" dirty="0">
+                  <a:latin typeface="KoPub돋움체 Medium" panose="02020603020101020101" pitchFamily="18" charset="-127"/>
+                  <a:ea typeface="KoPub돋움체 Medium" panose="02020603020101020101" pitchFamily="18" charset="-127"/>
                 </a:rPr>
                 <a:t>[OUT] </a:t>
               </a:r>
               <a:r>
-                <a:rPr lang="ko-KR" altLang="en-US" sz="1600" dirty="0">
-                  <a:latin typeface="KoPub돋움체 Light" panose="02020603020101020101" pitchFamily="18" charset="-127"/>
-                  <a:ea typeface="KoPub돋움체 Light" panose="02020603020101020101" pitchFamily="18" charset="-127"/>
+                <a:rPr lang="ko-KR" altLang="en-US" sz="1606" dirty="0">
+                  <a:latin typeface="KoPub돋움체 Medium" panose="02020603020101020101" pitchFamily="18" charset="-127"/>
+                  <a:ea typeface="KoPub돋움체 Medium" panose="02020603020101020101" pitchFamily="18" charset="-127"/>
                 </a:rPr>
                 <a:t>퇴원</a:t>
               </a:r>
               <a:r>
-                <a:rPr lang="en-US" altLang="ko-KR" sz="1600" dirty="0">
-                  <a:latin typeface="KoPub돋움체 Light" panose="02020603020101020101" pitchFamily="18" charset="-127"/>
-                  <a:ea typeface="KoPub돋움체 Light" panose="02020603020101020101" pitchFamily="18" charset="-127"/>
+                <a:rPr lang="en-US" altLang="ko-KR" sz="1606" dirty="0">
+                  <a:latin typeface="KoPub돋움체 Medium" panose="02020603020101020101" pitchFamily="18" charset="-127"/>
+                  <a:ea typeface="KoPub돋움체 Medium" panose="02020603020101020101" pitchFamily="18" charset="-127"/>
                 </a:rPr>
                 <a:t>/</a:t>
               </a:r>
               <a:r>
-                <a:rPr lang="ko-KR" altLang="en-US" sz="1600" dirty="0">
-                  <a:latin typeface="KoPub돋움체 Light" panose="02020603020101020101" pitchFamily="18" charset="-127"/>
-                  <a:ea typeface="KoPub돋움체 Light" panose="02020603020101020101" pitchFamily="18" charset="-127"/>
+                <a:rPr lang="ko-KR" altLang="en-US" sz="1606" dirty="0">
+                  <a:latin typeface="KoPub돋움체 Medium" panose="02020603020101020101" pitchFamily="18" charset="-127"/>
+                  <a:ea typeface="KoPub돋움체 Medium" panose="02020603020101020101" pitchFamily="18" charset="-127"/>
                 </a:rPr>
                 <a:t>전과</a:t>
               </a:r>
               <a:r>
-                <a:rPr lang="en-US" altLang="ko-KR" sz="1600" dirty="0">
-                  <a:latin typeface="KoPub돋움체 Light" panose="02020603020101020101" pitchFamily="18" charset="-127"/>
-                  <a:ea typeface="KoPub돋움체 Light" panose="02020603020101020101" pitchFamily="18" charset="-127"/>
+                <a:rPr lang="en-US" altLang="ko-KR" sz="1606" dirty="0">
+                  <a:latin typeface="KoPub돋움체 Medium" panose="02020603020101020101" pitchFamily="18" charset="-127"/>
+                  <a:ea typeface="KoPub돋움체 Medium" panose="02020603020101020101" pitchFamily="18" charset="-127"/>
                 </a:rPr>
                 <a:t>/</a:t>
               </a:r>
               <a:r>
-                <a:rPr lang="ko-KR" altLang="en-US" sz="1600" dirty="0">
-                  <a:latin typeface="KoPub돋움체 Light" panose="02020603020101020101" pitchFamily="18" charset="-127"/>
-                  <a:ea typeface="KoPub돋움체 Light" panose="02020603020101020101" pitchFamily="18" charset="-127"/>
+                <a:rPr lang="ko-KR" altLang="en-US" sz="1606" dirty="0">
+                  <a:latin typeface="KoPub돋움체 Medium" panose="02020603020101020101" pitchFamily="18" charset="-127"/>
+                  <a:ea typeface="KoPub돋움체 Medium" panose="02020603020101020101" pitchFamily="18" charset="-127"/>
                 </a:rPr>
                 <a:t>사망</a:t>
               </a:r>
-              <a:endParaRPr lang="en-US" altLang="ko-KR" sz="1600" dirty="0">
-                <a:latin typeface="KoPub돋움체 Light" panose="02020603020101020101" pitchFamily="18" charset="-127"/>
-                <a:ea typeface="KoPub돋움체 Light" panose="02020603020101020101" pitchFamily="18" charset="-127"/>
+              <a:endParaRPr lang="en-US" altLang="ko-KR" sz="1606" dirty="0">
+                <a:latin typeface="KoPub돋움체 Medium" panose="02020603020101020101" pitchFamily="18" charset="-127"/>
+                <a:ea typeface="KoPub돋움체 Medium" panose="02020603020101020101" pitchFamily="18" charset="-127"/>
               </a:endParaRPr>
             </a:p>
           </p:txBody>
@@ -4896,8 +4906,8 @@
         </p:nvSpPr>
         <p:spPr>
           <a:xfrm>
-            <a:off x="589442" y="881803"/>
-            <a:ext cx="2564384" cy="400110"/>
+            <a:off x="591795" y="875055"/>
+            <a:ext cx="2574624" cy="461665"/>
           </a:xfrm>
           <a:prstGeom prst="rect">
             <a:avLst/>
@@ -4912,29 +4922,29 @@
           <a:p>
             <a:pPr algn="ctr"/>
             <a:r>
-              <a:rPr lang="ko-KR" altLang="en-US" sz="2000" b="1" dirty="0">
-                <a:latin typeface="KoPub돋움체 Light" panose="02020603020101020101" pitchFamily="18" charset="-127"/>
-                <a:ea typeface="KoPub돋움체 Light" panose="02020603020101020101" pitchFamily="18" charset="-127"/>
+              <a:rPr lang="ko-KR" altLang="en-US" sz="2400" b="1" dirty="0">
+                <a:latin typeface="KoPub돋움체 Medium" panose="02020603020101020101" pitchFamily="18" charset="-127"/>
+                <a:ea typeface="KoPub돋움체 Medium" panose="02020603020101020101" pitchFamily="18" charset="-127"/>
               </a:rPr>
               <a:t>하이패스 태그 </a:t>
             </a:r>
             <a:r>
-              <a:rPr lang="en-US" altLang="ko-KR" sz="2000" b="1" dirty="0">
-                <a:latin typeface="KoPub돋움체 Light" panose="02020603020101020101" pitchFamily="18" charset="-127"/>
-                <a:ea typeface="KoPub돋움체 Light" panose="02020603020101020101" pitchFamily="18" charset="-127"/>
+              <a:rPr lang="en-US" altLang="ko-KR" sz="2400" b="1" dirty="0">
+                <a:latin typeface="KoPub돋움체 Medium" panose="02020603020101020101" pitchFamily="18" charset="-127"/>
+                <a:ea typeface="KoPub돋움체 Medium" panose="02020603020101020101" pitchFamily="18" charset="-127"/>
               </a:rPr>
               <a:t>10</a:t>
             </a:r>
             <a:r>
-              <a:rPr lang="ko-KR" altLang="en-US" sz="2000" b="1" dirty="0">
-                <a:latin typeface="KoPub돋움체 Light" panose="02020603020101020101" pitchFamily="18" charset="-127"/>
-                <a:ea typeface="KoPub돋움체 Light" panose="02020603020101020101" pitchFamily="18" charset="-127"/>
+              <a:rPr lang="ko-KR" altLang="en-US" sz="2400" b="1" dirty="0">
+                <a:latin typeface="KoPub돋움체 Medium" panose="02020603020101020101" pitchFamily="18" charset="-127"/>
+                <a:ea typeface="KoPub돋움체 Medium" panose="02020603020101020101" pitchFamily="18" charset="-127"/>
               </a:rPr>
               <a:t>종</a:t>
             </a:r>
-            <a:endParaRPr lang="en-US" altLang="ko-KR" sz="2000" b="1" dirty="0">
-              <a:latin typeface="KoPub돋움체 Light" panose="02020603020101020101" pitchFamily="18" charset="-127"/>
-              <a:ea typeface="KoPub돋움체 Light" panose="02020603020101020101" pitchFamily="18" charset="-127"/>
+            <a:endParaRPr lang="en-US" altLang="ko-KR" sz="2400" b="1" dirty="0">
+              <a:latin typeface="KoPub돋움체 Medium" panose="02020603020101020101" pitchFamily="18" charset="-127"/>
+              <a:ea typeface="KoPub돋움체 Medium" panose="02020603020101020101" pitchFamily="18" charset="-127"/>
             </a:endParaRPr>
           </a:p>
         </p:txBody>
@@ -4953,8 +4963,8 @@
         </p:nvSpPr>
         <p:spPr>
           <a:xfrm>
-            <a:off x="5281613" y="1573045"/>
-            <a:ext cx="2843725" cy="584775"/>
+            <a:off x="5193921" y="1509776"/>
+            <a:ext cx="2855080" cy="707886"/>
           </a:xfrm>
           <a:prstGeom prst="rect">
             <a:avLst/>
@@ -4968,43 +4978,43 @@
           <a:lstStyle/>
           <a:p>
             <a:r>
-              <a:rPr lang="ko-KR" altLang="en-US" sz="1600" dirty="0">
-                <a:latin typeface="KoPub돋움체 Light" panose="02020603020101020101" pitchFamily="18" charset="-127"/>
-                <a:ea typeface="KoPub돋움체 Light" panose="02020603020101020101" pitchFamily="18" charset="-127"/>
+              <a:rPr lang="ko-KR" altLang="en-US" sz="2000" b="1" dirty="0">
+                <a:latin typeface="KoPub돋움체 Medium" panose="02020603020101020101" pitchFamily="18" charset="-127"/>
+                <a:ea typeface="KoPub돋움체 Medium" panose="02020603020101020101" pitchFamily="18" charset="-127"/>
               </a:rPr>
               <a:t>근무 교대 시 미완료 건에 </a:t>
             </a:r>
             <a:r>
-              <a:rPr lang="en-US" altLang="ko-KR" sz="1600" dirty="0">
-                <a:latin typeface="KoPub돋움체 Light" panose="02020603020101020101" pitchFamily="18" charset="-127"/>
-                <a:ea typeface="KoPub돋움체 Light" panose="02020603020101020101" pitchFamily="18" charset="-127"/>
+              <a:rPr lang="en-US" altLang="ko-KR" sz="2000" b="1" dirty="0">
+                <a:latin typeface="KoPub돋움체 Medium" panose="02020603020101020101" pitchFamily="18" charset="-127"/>
+                <a:ea typeface="KoPub돋움체 Medium" panose="02020603020101020101" pitchFamily="18" charset="-127"/>
               </a:rPr>
               <a:t>'</a:t>
             </a:r>
             <a:r>
-              <a:rPr lang="ko-KR" altLang="en-US" sz="1600" dirty="0">
-                <a:latin typeface="KoPub돋움체 Light" panose="02020603020101020101" pitchFamily="18" charset="-127"/>
-                <a:ea typeface="KoPub돋움체 Light" panose="02020603020101020101" pitchFamily="18" charset="-127"/>
+              <a:rPr lang="ko-KR" altLang="en-US" sz="2000" b="1" dirty="0">
+                <a:latin typeface="KoPub돋움체 Medium" panose="02020603020101020101" pitchFamily="18" charset="-127"/>
+                <a:ea typeface="KoPub돋움체 Medium" panose="02020603020101020101" pitchFamily="18" charset="-127"/>
               </a:rPr>
               <a:t>답장</a:t>
             </a:r>
             <a:r>
-              <a:rPr lang="en-US" altLang="ko-KR" sz="1600" dirty="0">
-                <a:latin typeface="KoPub돋움체 Light" panose="02020603020101020101" pitchFamily="18" charset="-127"/>
-                <a:ea typeface="KoPub돋움체 Light" panose="02020603020101020101" pitchFamily="18" charset="-127"/>
+              <a:rPr lang="en-US" altLang="ko-KR" sz="2000" b="1" dirty="0">
+                <a:latin typeface="KoPub돋움체 Medium" panose="02020603020101020101" pitchFamily="18" charset="-127"/>
+                <a:ea typeface="KoPub돋움체 Medium" panose="02020603020101020101" pitchFamily="18" charset="-127"/>
               </a:rPr>
               <a:t>'</a:t>
             </a:r>
             <a:r>
-              <a:rPr lang="ko-KR" altLang="en-US" sz="1600" dirty="0">
-                <a:latin typeface="KoPub돋움체 Light" panose="02020603020101020101" pitchFamily="18" charset="-127"/>
-                <a:ea typeface="KoPub돋움체 Light" panose="02020603020101020101" pitchFamily="18" charset="-127"/>
+              <a:rPr lang="ko-KR" altLang="en-US" sz="2000" b="1" dirty="0">
+                <a:latin typeface="KoPub돋움체 Medium" panose="02020603020101020101" pitchFamily="18" charset="-127"/>
+                <a:ea typeface="KoPub돋움체 Medium" panose="02020603020101020101" pitchFamily="18" charset="-127"/>
               </a:rPr>
               <a:t>으로 인계 기록</a:t>
             </a:r>
-            <a:endParaRPr lang="en-US" altLang="ko-KR" sz="1600" dirty="0">
-              <a:latin typeface="KoPub돋움체 Light" panose="02020603020101020101" pitchFamily="18" charset="-127"/>
-              <a:ea typeface="KoPub돋움체 Light" panose="02020603020101020101" pitchFamily="18" charset="-127"/>
+            <a:endParaRPr lang="en-US" altLang="ko-KR" sz="2000" b="1" dirty="0">
+              <a:latin typeface="KoPub돋움체 Medium" panose="02020603020101020101" pitchFamily="18" charset="-127"/>
+              <a:ea typeface="KoPub돋움체 Medium" panose="02020603020101020101" pitchFamily="18" charset="-127"/>
             </a:endParaRPr>
           </a:p>
         </p:txBody>
@@ -5023,8 +5033,8 @@
         </p:nvSpPr>
         <p:spPr>
           <a:xfrm>
-            <a:off x="5067299" y="1396134"/>
-            <a:ext cx="3484563" cy="959835"/>
+            <a:off x="5087533" y="1391440"/>
+            <a:ext cx="3498477" cy="963668"/>
           </a:xfrm>
           <a:prstGeom prst="roundRect">
             <a:avLst>
@@ -5061,9 +5071,9 @@
           <a:lstStyle/>
           <a:p>
             <a:pPr algn="ctr"/>
-            <a:endParaRPr lang="ko-KR" altLang="en-US" sz="5080">
+            <a:endParaRPr lang="ko-KR" altLang="en-US" sz="5100">
               <a:latin typeface="KoPub돋움체 Medium" panose="02020603020101020101" pitchFamily="18" charset="-127"/>
-              <a:ea typeface="KoPub돋움체 Light" panose="02020603020101020101"/>
+              <a:ea typeface="KoPub돋움체 Medium" panose="02020603020101020101" pitchFamily="18" charset="-127"/>
             </a:endParaRPr>
           </a:p>
         </p:txBody>
@@ -5082,8 +5092,8 @@
         </p:nvSpPr>
         <p:spPr>
           <a:xfrm>
-            <a:off x="3204625" y="1401423"/>
-            <a:ext cx="1811875" cy="954545"/>
+            <a:off x="3217421" y="1396750"/>
+            <a:ext cx="1819110" cy="958357"/>
           </a:xfrm>
           <a:prstGeom prst="roundRect">
             <a:avLst>
@@ -5121,9 +5131,9 @@
           <a:lstStyle/>
           <a:p>
             <a:pPr algn="ctr"/>
-            <a:endParaRPr lang="ko-KR" altLang="en-US" sz="5080">
+            <a:endParaRPr lang="ko-KR" altLang="en-US" sz="5100">
               <a:latin typeface="KoPub돋움체 Medium" panose="02020603020101020101" pitchFamily="18" charset="-127"/>
-              <a:ea typeface="KoPub돋움체 Light" panose="02020603020101020101"/>
+              <a:ea typeface="KoPub돋움체 Medium" panose="02020603020101020101" pitchFamily="18" charset="-127"/>
             </a:endParaRPr>
           </a:p>
         </p:txBody>
@@ -5142,8 +5152,8 @@
         </p:nvSpPr>
         <p:spPr>
           <a:xfrm>
-            <a:off x="3573396" y="1682514"/>
-            <a:ext cx="1074332" cy="338554"/>
+            <a:off x="3501645" y="1656841"/>
+            <a:ext cx="1250663" cy="400110"/>
           </a:xfrm>
           <a:prstGeom prst="rect">
             <a:avLst/>
@@ -5158,9 +5168,9 @@
           <a:p>
             <a:pPr algn="ctr"/>
             <a:r>
-              <a:rPr lang="en-US" altLang="ko-KR" sz="1600" b="1" dirty="0">
-                <a:latin typeface="KoPub돋움체 Light" panose="02020603020101020101" pitchFamily="18" charset="-127"/>
-                <a:ea typeface="KoPub돋움체 Light" panose="02020603020101020101" pitchFamily="18" charset="-127"/>
+              <a:rPr lang="en-US" altLang="ko-KR" sz="2000" b="1" dirty="0">
+                <a:latin typeface="KoPub돋움체 Medium" panose="02020603020101020101" pitchFamily="18" charset="-127"/>
+                <a:ea typeface="KoPub돋움체 Medium" panose="02020603020101020101" pitchFamily="18" charset="-127"/>
               </a:rPr>
               <a:t>[IN-OUT]</a:t>
             </a:r>
@@ -5181,8 +5191,8 @@
         </p:nvSpPr>
         <p:spPr>
           <a:xfrm>
-            <a:off x="4362454" y="860517"/>
-            <a:ext cx="2762295" cy="400110"/>
+            <a:off x="4379873" y="853684"/>
+            <a:ext cx="2863284" cy="461665"/>
           </a:xfrm>
           <a:prstGeom prst="rect">
             <a:avLst/>
@@ -5195,15 +5205,15 @@
           <a:lstStyle/>
           <a:p>
             <a:r>
-              <a:rPr lang="ko-KR" altLang="en-US" sz="2000" b="1" dirty="0">
-                <a:latin typeface="KoPub돋움체 Light" panose="02020603020101020101" pitchFamily="18" charset="-127"/>
-                <a:ea typeface="KoPub돋움체 Light" panose="02020603020101020101" pitchFamily="18" charset="-127"/>
+              <a:rPr lang="ko-KR" altLang="en-US" sz="2400" b="1" dirty="0">
+                <a:latin typeface="KoPub돋움체 Medium" panose="02020603020101020101" pitchFamily="18" charset="-127"/>
+                <a:ea typeface="KoPub돋움체 Medium" panose="02020603020101020101" pitchFamily="18" charset="-127"/>
               </a:rPr>
               <a:t>나를 지키는 방어 기록</a:t>
             </a:r>
-            <a:endParaRPr lang="en-US" altLang="ko-KR" sz="2000" b="1" dirty="0">
-              <a:latin typeface="KoPub돋움체 Light" panose="02020603020101020101" pitchFamily="18" charset="-127"/>
-              <a:ea typeface="KoPub돋움체 Light" panose="02020603020101020101" pitchFamily="18" charset="-127"/>
+            <a:endParaRPr lang="en-US" altLang="ko-KR" sz="2400" b="1" dirty="0">
+              <a:latin typeface="KoPub돋움체 Medium" panose="02020603020101020101" pitchFamily="18" charset="-127"/>
+              <a:ea typeface="KoPub돋움체 Medium" panose="02020603020101020101" pitchFamily="18" charset="-127"/>
             </a:endParaRPr>
           </a:p>
         </p:txBody>
@@ -5222,8 +5232,8 @@
         </p:nvSpPr>
         <p:spPr>
           <a:xfrm>
-            <a:off x="5281613" y="3503834"/>
-            <a:ext cx="3119437" cy="584775"/>
+            <a:off x="5193921" y="3448274"/>
+            <a:ext cx="3443091" cy="707886"/>
           </a:xfrm>
           <a:prstGeom prst="rect">
             <a:avLst/>
@@ -5237,92 +5247,92 @@
           <a:lstStyle/>
           <a:p>
             <a:r>
-              <a:rPr lang="en-US" altLang="ko-KR" sz="1600" dirty="0">
-                <a:latin typeface="KoPub돋움체 Light" panose="02020603020101020101" pitchFamily="18" charset="-127"/>
-                <a:ea typeface="KoPub돋움체 Light" panose="02020603020101020101" pitchFamily="18" charset="-127"/>
+              <a:rPr lang="en-US" altLang="ko-KR" sz="2000" b="1" dirty="0">
+                <a:latin typeface="KoPub돋움체 Medium" panose="02020603020101020101" pitchFamily="18" charset="-127"/>
+                <a:ea typeface="KoPub돋움체 Medium" panose="02020603020101020101" pitchFamily="18" charset="-127"/>
               </a:rPr>
               <a:t>PA </a:t>
             </a:r>
             <a:r>
-              <a:rPr lang="ko-KR" altLang="en-US" sz="1600" dirty="0">
-                <a:latin typeface="KoPub돋움체 Light" panose="02020603020101020101" pitchFamily="18" charset="-127"/>
-                <a:ea typeface="KoPub돋움체 Light" panose="02020603020101020101" pitchFamily="18" charset="-127"/>
+              <a:rPr lang="ko-KR" altLang="en-US" sz="2000" b="1" dirty="0">
+                <a:latin typeface="KoPub돋움체 Medium" panose="02020603020101020101" pitchFamily="18" charset="-127"/>
+                <a:ea typeface="KoPub돋움체 Medium" panose="02020603020101020101" pitchFamily="18" charset="-127"/>
               </a:rPr>
               <a:t>지연 사유</a:t>
             </a:r>
             <a:r>
-              <a:rPr lang="en-US" altLang="ko-KR" sz="1600" dirty="0">
-                <a:latin typeface="KoPub돋움체 Light" panose="02020603020101020101" pitchFamily="18" charset="-127"/>
-                <a:ea typeface="KoPub돋움체 Light" panose="02020603020101020101" pitchFamily="18" charset="-127"/>
+              <a:rPr lang="en-US" altLang="ko-KR" sz="2000" b="1" dirty="0">
+                <a:latin typeface="KoPub돋움체 Medium" panose="02020603020101020101" pitchFamily="18" charset="-127"/>
+                <a:ea typeface="KoPub돋움체 Medium" panose="02020603020101020101" pitchFamily="18" charset="-127"/>
               </a:rPr>
               <a:t>(</a:t>
             </a:r>
             <a:r>
-              <a:rPr lang="ko-KR" altLang="en-US" sz="1600" dirty="0">
-                <a:latin typeface="KoPub돋움체 Light" panose="02020603020101020101" pitchFamily="18" charset="-127"/>
-                <a:ea typeface="KoPub돋움체 Light" panose="02020603020101020101" pitchFamily="18" charset="-127"/>
+              <a:rPr lang="ko-KR" altLang="en-US" sz="2000" b="1" dirty="0">
+                <a:latin typeface="KoPub돋움체 Medium" panose="02020603020101020101" pitchFamily="18" charset="-127"/>
+                <a:ea typeface="KoPub돋움체 Medium" panose="02020603020101020101" pitchFamily="18" charset="-127"/>
               </a:rPr>
               <a:t>응급</a:t>
             </a:r>
             <a:r>
-              <a:rPr lang="en-US" altLang="ko-KR" sz="1600" dirty="0">
-                <a:latin typeface="KoPub돋움체 Light" panose="02020603020101020101" pitchFamily="18" charset="-127"/>
-                <a:ea typeface="KoPub돋움체 Light" panose="02020603020101020101" pitchFamily="18" charset="-127"/>
+              <a:rPr lang="en-US" altLang="ko-KR" sz="2000" b="1" dirty="0">
+                <a:latin typeface="KoPub돋움체 Medium" panose="02020603020101020101" pitchFamily="18" charset="-127"/>
+                <a:ea typeface="KoPub돋움체 Medium" panose="02020603020101020101" pitchFamily="18" charset="-127"/>
               </a:rPr>
               <a:t>·</a:t>
             </a:r>
             <a:r>
-              <a:rPr lang="ko-KR" altLang="en-US" sz="1600" dirty="0">
-                <a:latin typeface="KoPub돋움체 Light" panose="02020603020101020101" pitchFamily="18" charset="-127"/>
-                <a:ea typeface="KoPub돋움체 Light" panose="02020603020101020101" pitchFamily="18" charset="-127"/>
+              <a:rPr lang="ko-KR" altLang="en-US" sz="2000" b="1" dirty="0">
+                <a:latin typeface="KoPub돋움체 Medium" panose="02020603020101020101" pitchFamily="18" charset="-127"/>
+                <a:ea typeface="KoPub돋움체 Medium" panose="02020603020101020101" pitchFamily="18" charset="-127"/>
               </a:rPr>
               <a:t>수술</a:t>
             </a:r>
             <a:r>
-              <a:rPr lang="en-US" altLang="ko-KR" sz="1600" dirty="0">
-                <a:latin typeface="KoPub돋움체 Light" panose="02020603020101020101" pitchFamily="18" charset="-127"/>
-                <a:ea typeface="KoPub돋움체 Light" panose="02020603020101020101" pitchFamily="18" charset="-127"/>
+              <a:rPr lang="en-US" altLang="ko-KR" sz="2000" b="1" dirty="0">
+                <a:latin typeface="KoPub돋움체 Medium" panose="02020603020101020101" pitchFamily="18" charset="-127"/>
+                <a:ea typeface="KoPub돋움체 Medium" panose="02020603020101020101" pitchFamily="18" charset="-127"/>
               </a:rPr>
               <a:t>·</a:t>
             </a:r>
             <a:r>
-              <a:rPr lang="ko-KR" altLang="en-US" sz="1600" dirty="0">
-                <a:latin typeface="KoPub돋움체 Light" panose="02020603020101020101" pitchFamily="18" charset="-127"/>
-                <a:ea typeface="KoPub돋움체 Light" panose="02020603020101020101" pitchFamily="18" charset="-127"/>
+              <a:rPr lang="ko-KR" altLang="en-US" sz="2000" b="1" dirty="0">
+                <a:latin typeface="KoPub돋움체 Medium" panose="02020603020101020101" pitchFamily="18" charset="-127"/>
+                <a:ea typeface="KoPub돋움체 Medium" panose="02020603020101020101" pitchFamily="18" charset="-127"/>
               </a:rPr>
               <a:t>대기</a:t>
             </a:r>
             <a:r>
-              <a:rPr lang="en-US" altLang="ko-KR" sz="1600" dirty="0">
-                <a:latin typeface="KoPub돋움체 Light" panose="02020603020101020101" pitchFamily="18" charset="-127"/>
-                <a:ea typeface="KoPub돋움체 Light" panose="02020603020101020101" pitchFamily="18" charset="-127"/>
+              <a:rPr lang="en-US" altLang="ko-KR" sz="2000" b="1" dirty="0">
+                <a:latin typeface="KoPub돋움체 Medium" panose="02020603020101020101" pitchFamily="18" charset="-127"/>
+                <a:ea typeface="KoPub돋움체 Medium" panose="02020603020101020101" pitchFamily="18" charset="-127"/>
               </a:rPr>
               <a:t>·</a:t>
             </a:r>
             <a:r>
-              <a:rPr lang="ko-KR" altLang="en-US" sz="1600" dirty="0" err="1">
-                <a:latin typeface="KoPub돋움체 Light" panose="02020603020101020101" pitchFamily="18" charset="-127"/>
-                <a:ea typeface="KoPub돋움체 Light" panose="02020603020101020101" pitchFamily="18" charset="-127"/>
+              <a:rPr lang="ko-KR" altLang="en-US" sz="2000" b="1" dirty="0" err="1">
+                <a:latin typeface="KoPub돋움체 Medium" panose="02020603020101020101" pitchFamily="18" charset="-127"/>
+                <a:ea typeface="KoPub돋움체 Medium" panose="02020603020101020101" pitchFamily="18" charset="-127"/>
               </a:rPr>
               <a:t>컨펌</a:t>
             </a:r>
             <a:r>
-              <a:rPr lang="en-US" altLang="ko-KR" sz="1600" dirty="0">
-                <a:latin typeface="KoPub돋움체 Light" panose="02020603020101020101" pitchFamily="18" charset="-127"/>
-                <a:ea typeface="KoPub돋움체 Light" panose="02020603020101020101" pitchFamily="18" charset="-127"/>
+              <a:rPr lang="en-US" altLang="ko-KR" sz="2000" b="1" dirty="0">
+                <a:latin typeface="KoPub돋움체 Medium" panose="02020603020101020101" pitchFamily="18" charset="-127"/>
+                <a:ea typeface="KoPub돋움체 Medium" panose="02020603020101020101" pitchFamily="18" charset="-127"/>
               </a:rPr>
               <a:t>) </a:t>
             </a:r>
             <a:r>
-              <a:rPr lang="ko-KR" altLang="en-US" sz="1600" dirty="0">
-                <a:latin typeface="KoPub돋움체 Light" panose="02020603020101020101" pitchFamily="18" charset="-127"/>
-                <a:ea typeface="KoPub돋움체 Light" panose="02020603020101020101" pitchFamily="18" charset="-127"/>
+              <a:rPr lang="ko-KR" altLang="en-US" sz="2000" b="1" dirty="0">
+                <a:latin typeface="KoPub돋움체 Medium" panose="02020603020101020101" pitchFamily="18" charset="-127"/>
+                <a:ea typeface="KoPub돋움체 Medium" panose="02020603020101020101" pitchFamily="18" charset="-127"/>
               </a:rPr>
               <a:t>명시</a:t>
             </a:r>
-            <a:endParaRPr lang="en-US" altLang="ko-KR" sz="1600" dirty="0">
-              <a:latin typeface="KoPub돋움체 Light" panose="02020603020101020101" pitchFamily="18" charset="-127"/>
-              <a:ea typeface="KoPub돋움체 Light" panose="02020603020101020101" pitchFamily="18" charset="-127"/>
+            <a:endParaRPr lang="en-US" altLang="ko-KR" sz="2000" b="1" dirty="0">
+              <a:latin typeface="KoPub돋움체 Medium" panose="02020603020101020101" pitchFamily="18" charset="-127"/>
+              <a:ea typeface="KoPub돋움체 Medium" panose="02020603020101020101" pitchFamily="18" charset="-127"/>
             </a:endParaRPr>
           </a:p>
         </p:txBody>
@@ -5341,8 +5351,8 @@
         </p:nvSpPr>
         <p:spPr>
           <a:xfrm>
-            <a:off x="5067299" y="3376222"/>
-            <a:ext cx="3484563" cy="829420"/>
+            <a:off x="5087533" y="3379434"/>
+            <a:ext cx="3498477" cy="832732"/>
           </a:xfrm>
           <a:prstGeom prst="roundRect">
             <a:avLst>
@@ -5379,9 +5389,9 @@
           <a:lstStyle/>
           <a:p>
             <a:pPr algn="ctr"/>
-            <a:endParaRPr lang="ko-KR" altLang="en-US" sz="5080">
+            <a:endParaRPr lang="ko-KR" altLang="en-US" sz="5100">
               <a:latin typeface="KoPub돋움체 Medium" panose="02020603020101020101" pitchFamily="18" charset="-127"/>
-              <a:ea typeface="KoPub돋움체 Light" panose="02020603020101020101"/>
+              <a:ea typeface="KoPub돋움체 Medium" panose="02020603020101020101" pitchFamily="18" charset="-127"/>
             </a:endParaRPr>
           </a:p>
         </p:txBody>
@@ -5400,8 +5410,8 @@
         </p:nvSpPr>
         <p:spPr>
           <a:xfrm>
-            <a:off x="3204625" y="3381511"/>
-            <a:ext cx="1811875" cy="829420"/>
+            <a:off x="3217421" y="3384744"/>
+            <a:ext cx="1819110" cy="832732"/>
           </a:xfrm>
           <a:prstGeom prst="roundRect">
             <a:avLst>
@@ -5439,9 +5449,9 @@
           <a:lstStyle/>
           <a:p>
             <a:pPr algn="ctr"/>
-            <a:endParaRPr lang="ko-KR" altLang="en-US" sz="5080">
+            <a:endParaRPr lang="ko-KR" altLang="en-US" sz="5100">
               <a:latin typeface="KoPub돋움체 Medium" panose="02020603020101020101" pitchFamily="18" charset="-127"/>
-              <a:ea typeface="KoPub돋움체 Light" panose="02020603020101020101"/>
+              <a:ea typeface="KoPub돋움체 Medium" panose="02020603020101020101" pitchFamily="18" charset="-127"/>
             </a:endParaRPr>
           </a:p>
         </p:txBody>
@@ -5460,8 +5470,8 @@
         </p:nvSpPr>
         <p:spPr>
           <a:xfrm>
-            <a:off x="3660760" y="3626944"/>
-            <a:ext cx="899605" cy="338554"/>
+            <a:off x="3588368" y="3609035"/>
+            <a:ext cx="1077219" cy="400110"/>
           </a:xfrm>
           <a:prstGeom prst="rect">
             <a:avLst/>
@@ -5476,9 +5486,9 @@
           <a:p>
             <a:pPr algn="ctr"/>
             <a:r>
-              <a:rPr lang="en-US" altLang="ko-KR" sz="1600" b="1" dirty="0">
-                <a:latin typeface="KoPub돋움체 Light" panose="02020603020101020101" pitchFamily="18" charset="-127"/>
-                <a:ea typeface="KoPub돋움체 Light" panose="02020603020101020101" pitchFamily="18" charset="-127"/>
+              <a:rPr lang="en-US" altLang="ko-KR" sz="2000" b="1" dirty="0">
+                <a:latin typeface="KoPub돋움체 Medium" panose="02020603020101020101" pitchFamily="18" charset="-127"/>
+                <a:ea typeface="KoPub돋움체 Medium" panose="02020603020101020101" pitchFamily="18" charset="-127"/>
               </a:rPr>
               <a:t>C-Code</a:t>
             </a:r>
@@ -5499,8 +5509,8 @@
         </p:nvSpPr>
         <p:spPr>
           <a:xfrm>
-            <a:off x="1847923" y="4282983"/>
-            <a:ext cx="5424883" cy="461665"/>
+            <a:off x="2192472" y="4289816"/>
+            <a:ext cx="4772204" cy="465054"/>
           </a:xfrm>
           <a:prstGeom prst="rect">
             <a:avLst/>
@@ -5515,72 +5525,72 @@
           <a:p>
             <a:pPr algn="ctr"/>
             <a:r>
-              <a:rPr lang="en-US" altLang="ko-KR" sz="2400" b="1" dirty="0">
+              <a:rPr lang="en-US" altLang="ko-KR" sz="2410" b="1" dirty="0">
                 <a:solidFill>
                   <a:srgbClr val="7030A0"/>
                 </a:solidFill>
-                <a:latin typeface="KoPub돋움체 Light" panose="02020603020101020101" pitchFamily="18" charset="-127"/>
-                <a:ea typeface="KoPub돋움체 Light" panose="02020603020101020101" pitchFamily="18" charset="-127"/>
+                <a:latin typeface="KoPub돋움체 Medium" panose="02020603020101020101" pitchFamily="18" charset="-127"/>
+                <a:ea typeface="KoPub돋움체 Medium" panose="02020603020101020101" pitchFamily="18" charset="-127"/>
               </a:rPr>
               <a:t>“</a:t>
             </a:r>
             <a:r>
-              <a:rPr lang="ko-KR" altLang="en-US" sz="2400" b="1" dirty="0">
+              <a:rPr lang="ko-KR" altLang="en-US" sz="2410" b="1" dirty="0">
                 <a:solidFill>
                   <a:srgbClr val="7030A0"/>
                 </a:solidFill>
-                <a:latin typeface="KoPub돋움체 Light" panose="02020603020101020101" pitchFamily="18" charset="-127"/>
-                <a:ea typeface="KoPub돋움체 Light" panose="02020603020101020101" pitchFamily="18" charset="-127"/>
+                <a:latin typeface="KoPub돋움체 Medium" panose="02020603020101020101" pitchFamily="18" charset="-127"/>
+                <a:ea typeface="KoPub돋움체 Medium" panose="02020603020101020101" pitchFamily="18" charset="-127"/>
               </a:rPr>
               <a:t>기록은 메신저에서</a:t>
             </a:r>
             <a:r>
-              <a:rPr lang="en-US" altLang="ko-KR" sz="2400" b="1" dirty="0">
+              <a:rPr lang="en-US" altLang="ko-KR" sz="2410" b="1" dirty="0">
                 <a:solidFill>
                   <a:srgbClr val="7030A0"/>
                 </a:solidFill>
-                <a:latin typeface="KoPub돋움체 Light" panose="02020603020101020101" pitchFamily="18" charset="-127"/>
-                <a:ea typeface="KoPub돋움체 Light" panose="02020603020101020101" pitchFamily="18" charset="-127"/>
+                <a:latin typeface="KoPub돋움체 Medium" panose="02020603020101020101" pitchFamily="18" charset="-127"/>
+                <a:ea typeface="KoPub돋움체 Medium" panose="02020603020101020101" pitchFamily="18" charset="-127"/>
               </a:rPr>
               <a:t>, </a:t>
             </a:r>
             <a:r>
-              <a:rPr lang="ko-KR" altLang="en-US" sz="2400" b="1" dirty="0">
+              <a:rPr lang="ko-KR" altLang="en-US" sz="2410" b="1" dirty="0">
                 <a:solidFill>
                   <a:srgbClr val="7030A0"/>
                 </a:solidFill>
-                <a:latin typeface="KoPub돋움체 Light" panose="02020603020101020101" pitchFamily="18" charset="-127"/>
-                <a:ea typeface="KoPub돋움체 Light" panose="02020603020101020101" pitchFamily="18" charset="-127"/>
+                <a:latin typeface="KoPub돋움체 Medium" panose="02020603020101020101" pitchFamily="18" charset="-127"/>
+                <a:ea typeface="KoPub돋움체 Medium" panose="02020603020101020101" pitchFamily="18" charset="-127"/>
               </a:rPr>
               <a:t>정보는 </a:t>
             </a:r>
             <a:r>
-              <a:rPr lang="en-US" altLang="ko-KR" sz="2400" b="1" dirty="0">
+              <a:rPr lang="en-US" altLang="ko-KR" sz="2410" b="1" dirty="0">
                 <a:solidFill>
                   <a:srgbClr val="7030A0"/>
                 </a:solidFill>
-                <a:latin typeface="KoPub돋움체 Light" panose="02020603020101020101" pitchFamily="18" charset="-127"/>
-                <a:ea typeface="KoPub돋움체 Light" panose="02020603020101020101" pitchFamily="18" charset="-127"/>
+                <a:latin typeface="KoPub돋움체 Medium" panose="02020603020101020101" pitchFamily="18" charset="-127"/>
+                <a:ea typeface="KoPub돋움체 Medium" panose="02020603020101020101" pitchFamily="18" charset="-127"/>
               </a:rPr>
               <a:t>QR</a:t>
             </a:r>
             <a:r>
-              <a:rPr lang="ko-KR" altLang="en-US" sz="2400" b="1" dirty="0">
+              <a:rPr lang="ko-KR" altLang="en-US" sz="2410" b="1" dirty="0">
                 <a:solidFill>
                   <a:srgbClr val="7030A0"/>
                 </a:solidFill>
-                <a:latin typeface="KoPub돋움체 Light" panose="02020603020101020101" pitchFamily="18" charset="-127"/>
-                <a:ea typeface="KoPub돋움체 Light" panose="02020603020101020101" pitchFamily="18" charset="-127"/>
+                <a:latin typeface="KoPub돋움체 Medium" panose="02020603020101020101" pitchFamily="18" charset="-127"/>
+                <a:ea typeface="KoPub돋움체 Medium" panose="02020603020101020101" pitchFamily="18" charset="-127"/>
               </a:rPr>
               <a:t>에서</a:t>
             </a:r>
             <a:r>
-              <a:rPr lang="en-US" altLang="ko-KR" sz="2400" b="1" dirty="0">
+              <a:rPr lang="en-US" altLang="ko-KR" sz="2410" b="1" dirty="0">
                 <a:solidFill>
                   <a:srgbClr val="7030A0"/>
                 </a:solidFill>
-                <a:latin typeface="KoPub돋움체 Light" panose="02020603020101020101" pitchFamily="18" charset="-127"/>
-                <a:ea typeface="KoPub돋움체 Light" panose="02020603020101020101" pitchFamily="18" charset="-127"/>
+                <a:latin typeface="KoPub돋움체 Medium" panose="02020603020101020101" pitchFamily="18" charset="-127"/>
+                <a:ea typeface="KoPub돋움체 Medium" panose="02020603020101020101" pitchFamily="18" charset="-127"/>
               </a:rPr>
               <a:t>!”</a:t>
             </a:r>
@@ -5608,7 +5618,7 @@
         <p:cNvPr id="1" name="">
           <a:extLst>
             <a:ext uri="{FF2B5EF4-FFF2-40B4-BE49-F238E27FC236}">
-              <a16:creationId xmlns:a16="http://schemas.microsoft.com/office/drawing/2014/main" id="{75C95857-5CB6-E176-FDD7-C77B771BAC79}"/>
+              <a16:creationId xmlns:a16="http://schemas.microsoft.com/office/drawing/2014/main" id="{876AB891-B574-18F3-1203-5340F20307CD}"/>
             </a:ext>
           </a:extLst>
         </p:cNvPr>
@@ -5628,7 +5638,7 @@
           <p:cNvPr id="32" name="사각형: 둥근 모서리 31">
             <a:extLst>
               <a:ext uri="{FF2B5EF4-FFF2-40B4-BE49-F238E27FC236}">
-                <a16:creationId xmlns:a16="http://schemas.microsoft.com/office/drawing/2014/main" id="{B0243490-B7C6-42DB-B189-20704EFBD587}"/>
+                <a16:creationId xmlns:a16="http://schemas.microsoft.com/office/drawing/2014/main" id="{E8D9A6E3-3353-C408-CE40-BE039CFC378D}"/>
               </a:ext>
             </a:extLst>
           </p:cNvPr>
@@ -5637,8 +5647,8 @@
         </p:nvSpPr>
         <p:spPr>
           <a:xfrm>
-            <a:off x="590790" y="807444"/>
-            <a:ext cx="2561688" cy="548828"/>
+            <a:off x="593149" y="800399"/>
+            <a:ext cx="2571917" cy="551020"/>
           </a:xfrm>
           <a:prstGeom prst="roundRect">
             <a:avLst/>
@@ -5678,7 +5688,10 @@
           <a:lstStyle/>
           <a:p>
             <a:pPr algn="ctr"/>
-            <a:endParaRPr lang="ko-KR" altLang="en-US"/>
+            <a:endParaRPr lang="ko-KR" altLang="en-US" sz="1807">
+              <a:latin typeface="KoPub돋움체 Medium" panose="02020603020101020101" pitchFamily="18" charset="-127"/>
+              <a:ea typeface="KoPub돋움체 Medium" panose="02020603020101020101" pitchFamily="18" charset="-127"/>
+            </a:endParaRPr>
           </a:p>
         </p:txBody>
       </p:sp>
@@ -5687,7 +5700,7 @@
           <p:cNvPr id="31" name="사각형: 둥근 모서리 30">
             <a:extLst>
               <a:ext uri="{FF2B5EF4-FFF2-40B4-BE49-F238E27FC236}">
-                <a16:creationId xmlns:a16="http://schemas.microsoft.com/office/drawing/2014/main" id="{30F47067-F54E-4A90-9F21-57BD24BB9C63}"/>
+                <a16:creationId xmlns:a16="http://schemas.microsoft.com/office/drawing/2014/main" id="{ED407008-A267-E2E1-2A47-45851F7B49C6}"/>
               </a:ext>
             </a:extLst>
           </p:cNvPr>
@@ -5696,8 +5709,8 @@
         </p:nvSpPr>
         <p:spPr>
           <a:xfrm>
-            <a:off x="3204625" y="807444"/>
-            <a:ext cx="5347237" cy="548828"/>
+            <a:off x="3217421" y="800399"/>
+            <a:ext cx="5368589" cy="551020"/>
           </a:xfrm>
           <a:prstGeom prst="roundRect">
             <a:avLst/>
@@ -5737,7 +5750,10 @@
           <a:lstStyle/>
           <a:p>
             <a:pPr algn="ctr"/>
-            <a:endParaRPr lang="ko-KR" altLang="en-US"/>
+            <a:endParaRPr lang="ko-KR" altLang="en-US" sz="1807">
+              <a:latin typeface="KoPub돋움체 Medium" panose="02020603020101020101" pitchFamily="18" charset="-127"/>
+              <a:ea typeface="KoPub돋움체 Medium" panose="02020603020101020101" pitchFamily="18" charset="-127"/>
+            </a:endParaRPr>
           </a:p>
         </p:txBody>
       </p:sp>
@@ -5746,7 +5762,7 @@
           <p:cNvPr id="23" name="TextBox 22">
             <a:extLst>
               <a:ext uri="{FF2B5EF4-FFF2-40B4-BE49-F238E27FC236}">
-                <a16:creationId xmlns:a16="http://schemas.microsoft.com/office/drawing/2014/main" id="{CD41B2AA-F91D-4DF3-86CD-504CE316D08F}"/>
+                <a16:creationId xmlns:a16="http://schemas.microsoft.com/office/drawing/2014/main" id="{D607A990-88E5-7E9B-E74A-87C64C3E8F7A}"/>
               </a:ext>
             </a:extLst>
           </p:cNvPr>
@@ -5755,8 +5771,8 @@
         </p:nvSpPr>
         <p:spPr>
           <a:xfrm>
-            <a:off x="5281613" y="2565733"/>
-            <a:ext cx="2843725" cy="584775"/>
+            <a:off x="5193921" y="2506427"/>
+            <a:ext cx="2855080" cy="707886"/>
           </a:xfrm>
           <a:prstGeom prst="rect">
             <a:avLst/>
@@ -5770,23 +5786,23 @@
           <a:lstStyle/>
           <a:p>
             <a:r>
-              <a:rPr lang="ko-KR" altLang="en-US" sz="1600" dirty="0">
-                <a:latin typeface="KoPub돋움체 Light" panose="02020603020101020101" pitchFamily="18" charset="-127"/>
-                <a:ea typeface="KoPub돋움체 Light" panose="02020603020101020101" pitchFamily="18" charset="-127"/>
+              <a:rPr lang="ko-KR" altLang="en-US" sz="2000" b="1" dirty="0">
+                <a:latin typeface="KoPub돋움체 Medium" panose="02020603020101020101" pitchFamily="18" charset="-127"/>
+                <a:ea typeface="KoPub돋움체 Medium" panose="02020603020101020101" pitchFamily="18" charset="-127"/>
               </a:rPr>
               <a:t>야간 응급 유선 보고 후 사후 </a:t>
             </a:r>
             <a:r>
-              <a:rPr lang="en-US" altLang="ko-KR" sz="1600" dirty="0">
-                <a:latin typeface="KoPub돋움체 Light" panose="02020603020101020101" pitchFamily="18" charset="-127"/>
-                <a:ea typeface="KoPub돋움체 Light" panose="02020603020101020101" pitchFamily="18" charset="-127"/>
+              <a:rPr lang="en-US" altLang="ko-KR" sz="2000" b="1" dirty="0">
+                <a:latin typeface="KoPub돋움체 Medium" panose="02020603020101020101" pitchFamily="18" charset="-127"/>
+                <a:ea typeface="KoPub돋움체 Medium" panose="02020603020101020101" pitchFamily="18" charset="-127"/>
               </a:rPr>
               <a:t>[A]-[D] 1</a:t>
             </a:r>
             <a:r>
-              <a:rPr lang="ko-KR" altLang="en-US" sz="1600" dirty="0">
-                <a:latin typeface="KoPub돋움체 Light" panose="02020603020101020101" pitchFamily="18" charset="-127"/>
-                <a:ea typeface="KoPub돋움체 Light" panose="02020603020101020101" pitchFamily="18" charset="-127"/>
+              <a:rPr lang="ko-KR" altLang="en-US" sz="2000" b="1" dirty="0">
+                <a:latin typeface="KoPub돋움체 Medium" panose="02020603020101020101" pitchFamily="18" charset="-127"/>
+                <a:ea typeface="KoPub돋움체 Medium" panose="02020603020101020101" pitchFamily="18" charset="-127"/>
               </a:rPr>
               <a:t>줄 기록</a:t>
             </a:r>
@@ -5798,7 +5814,7 @@
           <p:cNvPr id="24" name="사각형: 둥근 모서리 23">
             <a:extLst>
               <a:ext uri="{FF2B5EF4-FFF2-40B4-BE49-F238E27FC236}">
-                <a16:creationId xmlns:a16="http://schemas.microsoft.com/office/drawing/2014/main" id="{A193F6F5-6376-4F98-A3BB-96E53249AC9E}"/>
+                <a16:creationId xmlns:a16="http://schemas.microsoft.com/office/drawing/2014/main" id="{2EC9BEFA-4CAD-2DAC-58D4-F2F28DBC9ED4}"/>
               </a:ext>
             </a:extLst>
           </p:cNvPr>
@@ -5807,8 +5823,8 @@
         </p:nvSpPr>
         <p:spPr>
           <a:xfrm>
-            <a:off x="5067299" y="2388822"/>
-            <a:ext cx="3484563" cy="959835"/>
+            <a:off x="5087533" y="2388092"/>
+            <a:ext cx="3498477" cy="963668"/>
           </a:xfrm>
           <a:prstGeom prst="roundRect">
             <a:avLst>
@@ -5845,9 +5861,9 @@
           <a:lstStyle/>
           <a:p>
             <a:pPr algn="ctr"/>
-            <a:endParaRPr lang="ko-KR" altLang="en-US" sz="5080">
+            <a:endParaRPr lang="ko-KR" altLang="en-US" sz="5100">
               <a:latin typeface="KoPub돋움체 Medium" panose="02020603020101020101" pitchFamily="18" charset="-127"/>
-              <a:ea typeface="KoPub돋움체 Light" panose="02020603020101020101"/>
+              <a:ea typeface="KoPub돋움체 Medium" panose="02020603020101020101" pitchFamily="18" charset="-127"/>
             </a:endParaRPr>
           </a:p>
         </p:txBody>
@@ -5857,7 +5873,7 @@
           <p:cNvPr id="25" name="사각형: 둥근 모서리 24">
             <a:extLst>
               <a:ext uri="{FF2B5EF4-FFF2-40B4-BE49-F238E27FC236}">
-                <a16:creationId xmlns:a16="http://schemas.microsoft.com/office/drawing/2014/main" id="{ABE07B44-9D20-4CE2-BFB6-8DDA339570CA}"/>
+                <a16:creationId xmlns:a16="http://schemas.microsoft.com/office/drawing/2014/main" id="{8C80535F-8D43-0B66-8571-9E0C42AEF140}"/>
               </a:ext>
             </a:extLst>
           </p:cNvPr>
@@ -5866,8 +5882,8 @@
         </p:nvSpPr>
         <p:spPr>
           <a:xfrm>
-            <a:off x="3204625" y="2394111"/>
-            <a:ext cx="1811875" cy="954545"/>
+            <a:off x="3217421" y="2393402"/>
+            <a:ext cx="1819110" cy="958357"/>
           </a:xfrm>
           <a:prstGeom prst="roundRect">
             <a:avLst>
@@ -5905,9 +5921,9 @@
           <a:lstStyle/>
           <a:p>
             <a:pPr algn="ctr"/>
-            <a:endParaRPr lang="ko-KR" altLang="en-US" sz="5080">
+            <a:endParaRPr lang="ko-KR" altLang="en-US" sz="5100">
               <a:latin typeface="KoPub돋움체 Medium" panose="02020603020101020101" pitchFamily="18" charset="-127"/>
-              <a:ea typeface="KoPub돋움체 Light" panose="02020603020101020101"/>
+              <a:ea typeface="KoPub돋움체 Medium" panose="02020603020101020101" pitchFamily="18" charset="-127"/>
             </a:endParaRPr>
           </a:p>
         </p:txBody>
@@ -5917,7 +5933,7 @@
           <p:cNvPr id="26" name="TextBox 25">
             <a:extLst>
               <a:ext uri="{FF2B5EF4-FFF2-40B4-BE49-F238E27FC236}">
-                <a16:creationId xmlns:a16="http://schemas.microsoft.com/office/drawing/2014/main" id="{31132F88-5AA2-43B2-8C2A-F2BB31E51E43}"/>
+                <a16:creationId xmlns:a16="http://schemas.microsoft.com/office/drawing/2014/main" id="{729BE170-0919-00A6-4B2D-C57BBE5A104F}"/>
               </a:ext>
             </a:extLst>
           </p:cNvPr>
@@ -5926,8 +5942,8 @@
         </p:nvSpPr>
         <p:spPr>
           <a:xfrm>
-            <a:off x="3415500" y="2675202"/>
-            <a:ext cx="1390125" cy="338554"/>
+            <a:off x="3354969" y="2653493"/>
+            <a:ext cx="1544012" cy="400110"/>
           </a:xfrm>
           <a:prstGeom prst="rect">
             <a:avLst/>
@@ -5942,23 +5958,23 @@
           <a:p>
             <a:pPr algn="ctr"/>
             <a:r>
-              <a:rPr lang="en-US" altLang="ko-KR" sz="1600" b="1" dirty="0">
-                <a:latin typeface="KoPub돋움체 Light" panose="02020603020101020101" pitchFamily="18" charset="-127"/>
-                <a:ea typeface="KoPub돋움체 Light" panose="02020603020101020101" pitchFamily="18" charset="-127"/>
+              <a:rPr lang="en-US" altLang="ko-KR" sz="2000" b="1" dirty="0">
+                <a:latin typeface="KoPub돋움체 Medium" panose="02020603020101020101" pitchFamily="18" charset="-127"/>
+                <a:ea typeface="KoPub돋움체 Medium" panose="02020603020101020101" pitchFamily="18" charset="-127"/>
               </a:rPr>
               <a:t>[D-</a:t>
             </a:r>
             <a:r>
-              <a:rPr lang="ko-KR" altLang="en-US" sz="1600" b="1" dirty="0" err="1">
-                <a:latin typeface="KoPub돋움체 Light" panose="02020603020101020101" pitchFamily="18" charset="-127"/>
-                <a:ea typeface="KoPub돋움체 Light" panose="02020603020101020101" pitchFamily="18" charset="-127"/>
+              <a:rPr lang="ko-KR" altLang="en-US" sz="2000" b="1" dirty="0" err="1">
+                <a:latin typeface="KoPub돋움체 Medium" panose="02020603020101020101" pitchFamily="18" charset="-127"/>
+                <a:ea typeface="KoPub돋움체 Medium" panose="02020603020101020101" pitchFamily="18" charset="-127"/>
               </a:rPr>
               <a:t>야간유선</a:t>
             </a:r>
             <a:r>
-              <a:rPr lang="en-US" altLang="ko-KR" sz="1600" b="1" dirty="0">
-                <a:latin typeface="KoPub돋움체 Light" panose="02020603020101020101" pitchFamily="18" charset="-127"/>
-                <a:ea typeface="KoPub돋움체 Light" panose="02020603020101020101" pitchFamily="18" charset="-127"/>
+              <a:rPr lang="en-US" altLang="ko-KR" sz="2000" b="1" dirty="0">
+                <a:latin typeface="KoPub돋움체 Medium" panose="02020603020101020101" pitchFamily="18" charset="-127"/>
+                <a:ea typeface="KoPub돋움체 Medium" panose="02020603020101020101" pitchFamily="18" charset="-127"/>
               </a:rPr>
               <a:t>]</a:t>
             </a:r>
@@ -5970,7 +5986,7 @@
           <p:cNvPr id="3" name="TextBox 2">
             <a:extLst>
               <a:ext uri="{FF2B5EF4-FFF2-40B4-BE49-F238E27FC236}">
-                <a16:creationId xmlns:a16="http://schemas.microsoft.com/office/drawing/2014/main" id="{BDB8E964-7EED-74B0-E816-8BE4F8865B12}"/>
+                <a16:creationId xmlns:a16="http://schemas.microsoft.com/office/drawing/2014/main" id="{C88ABC7E-4EB5-23DC-7275-7AF2F68A9C24}"/>
               </a:ext>
             </a:extLst>
           </p:cNvPr>
@@ -5979,8 +5995,8 @@
         </p:nvSpPr>
         <p:spPr>
           <a:xfrm>
-            <a:off x="101771" y="184601"/>
-            <a:ext cx="3476336" cy="309444"/>
+            <a:off x="302548" y="175069"/>
+            <a:ext cx="3089475" cy="311645"/>
           </a:xfrm>
           <a:prstGeom prst="rect">
             <a:avLst/>
@@ -5995,21 +6011,21 @@
           <a:p>
             <a:pPr algn="ctr"/>
             <a:r>
-              <a:rPr lang="ko-KR" altLang="en-US" sz="1411" spc="-31" dirty="0">
+              <a:rPr lang="ko-KR" altLang="en-US" sz="1417" spc="-31" dirty="0">
                 <a:latin typeface="KoPub돋움체 Light" panose="02020603020101020101" pitchFamily="18" charset="-127"/>
                 <a:ea typeface="KoPub돋움체 Light" panose="02020603020101020101" pitchFamily="18" charset="-127"/>
               </a:rPr>
               <a:t>순천향대학교 천안병원 </a:t>
             </a:r>
             <a:r>
-              <a:rPr lang="en-US" altLang="ko-KR" sz="1411" spc="-31" dirty="0">
+              <a:rPr lang="en-US" altLang="ko-KR" sz="1417" spc="-31" dirty="0">
                 <a:latin typeface="KoPub돋움체 Light" panose="02020603020101020101" pitchFamily="18" charset="-127"/>
                 <a:ea typeface="KoPub돋움체 Light" panose="02020603020101020101" pitchFamily="18" charset="-127"/>
               </a:rPr>
               <a:t>| </a:t>
             </a:r>
             <a:r>
-              <a:rPr lang="ko-KR" altLang="en-US" sz="1411" spc="-31" dirty="0">
+              <a:rPr lang="ko-KR" altLang="en-US" sz="1417" spc="-31" dirty="0">
                 <a:latin typeface="KoPub돋움체 Light" panose="02020603020101020101" pitchFamily="18" charset="-127"/>
                 <a:ea typeface="KoPub돋움체 Light" panose="02020603020101020101" pitchFamily="18" charset="-127"/>
               </a:rPr>
@@ -6023,7 +6039,7 @@
           <p:cNvPr id="7" name="그룹 6">
             <a:extLst>
               <a:ext uri="{FF2B5EF4-FFF2-40B4-BE49-F238E27FC236}">
-                <a16:creationId xmlns:a16="http://schemas.microsoft.com/office/drawing/2014/main" id="{399CA2A2-FAD0-4681-B98C-3A7AA0484B78}"/>
+                <a16:creationId xmlns:a16="http://schemas.microsoft.com/office/drawing/2014/main" id="{C152D493-D9E3-A1B1-9C69-6645A7A894CF}"/>
               </a:ext>
             </a:extLst>
           </p:cNvPr>
@@ -6032,8 +6048,8 @@
         </p:nvGrpSpPr>
         <p:grpSpPr>
           <a:xfrm>
-            <a:off x="592138" y="1396134"/>
-            <a:ext cx="2585305" cy="2814796"/>
+            <a:off x="594503" y="1391440"/>
+            <a:ext cx="2595628" cy="2826036"/>
             <a:chOff x="592138" y="1592949"/>
             <a:chExt cx="2585305" cy="2814796"/>
           </a:xfrm>
@@ -6043,7 +6059,7 @@
             <p:cNvPr id="22" name="사각형: 둥근 모서리 21">
               <a:extLst>
                 <a:ext uri="{FF2B5EF4-FFF2-40B4-BE49-F238E27FC236}">
-                  <a16:creationId xmlns:a16="http://schemas.microsoft.com/office/drawing/2014/main" id="{8DA9AE8C-7191-4002-98F1-FF77B72D519F}"/>
+                  <a16:creationId xmlns:a16="http://schemas.microsoft.com/office/drawing/2014/main" id="{2D55C1FB-9D2C-7E0D-A6C9-32A9A71486C0}"/>
                 </a:ext>
               </a:extLst>
             </p:cNvPr>
@@ -6092,11 +6108,12 @@
             <a:lstStyle/>
             <a:p>
               <a:pPr algn="ctr"/>
-              <a:endParaRPr lang="ko-KR" altLang="en-US" sz="5080">
+              <a:endParaRPr lang="ko-KR" altLang="en-US" sz="5100">
                 <a:solidFill>
                   <a:schemeClr val="tx1"/>
                 </a:solidFill>
-                <a:ea typeface="KoPub돋움체 Light" panose="02020603020101020101"/>
+                <a:latin typeface="KoPub돋움체 Medium" panose="02020603020101020101" pitchFamily="18" charset="-127"/>
+                <a:ea typeface="KoPub돋움체 Medium" panose="02020603020101020101" pitchFamily="18" charset="-127"/>
               </a:endParaRPr>
             </a:p>
           </p:txBody>
@@ -6106,7 +6123,7 @@
             <p:cNvPr id="17" name="TextBox 16">
               <a:extLst>
                 <a:ext uri="{FF2B5EF4-FFF2-40B4-BE49-F238E27FC236}">
-                  <a16:creationId xmlns:a16="http://schemas.microsoft.com/office/drawing/2014/main" id="{5E33DDDA-6085-D01E-695B-8DCA20A2A084}"/>
+                  <a16:creationId xmlns:a16="http://schemas.microsoft.com/office/drawing/2014/main" id="{92EADEF6-67C9-36D0-7CC2-202D0B571FC9}"/>
                 </a:ext>
               </a:extLst>
             </p:cNvPr>
@@ -6130,251 +6147,254 @@
             <a:lstStyle/>
             <a:p>
               <a:r>
-                <a:rPr lang="en-US" altLang="ko-KR" sz="1600" b="1" dirty="0">
-                  <a:latin typeface="KoPub돋움체 Light" panose="02020603020101020101" pitchFamily="18" charset="-127"/>
-                  <a:ea typeface="KoPub돋움체 Light" panose="02020603020101020101" pitchFamily="18" charset="-127"/>
+                <a:rPr lang="en-US" altLang="ko-KR" sz="1606" b="1" dirty="0">
+                  <a:latin typeface="KoPub돋움체 Medium" panose="02020603020101020101" pitchFamily="18" charset="-127"/>
+                  <a:ea typeface="KoPub돋움체 Medium" panose="02020603020101020101" pitchFamily="18" charset="-127"/>
                 </a:rPr>
                 <a:t>[CHEMO] </a:t>
               </a:r>
               <a:r>
-                <a:rPr lang="ko-KR" altLang="en-US" sz="1600" dirty="0"/>
+                <a:rPr lang="ko-KR" altLang="en-US" sz="1606" dirty="0">
+                  <a:latin typeface="KoPub돋움체 Medium" panose="02020603020101020101" pitchFamily="18" charset="-127"/>
+                  <a:ea typeface="KoPub돋움체 Medium" panose="02020603020101020101" pitchFamily="18" charset="-127"/>
+                </a:rPr>
                 <a:t>항암 관리</a:t>
               </a:r>
             </a:p>
             <a:p>
               <a:r>
-                <a:rPr lang="en-US" altLang="ko-KR" sz="1600" b="1" dirty="0">
-                  <a:latin typeface="KoPub돋움체 Light" panose="02020603020101020101" pitchFamily="18" charset="-127"/>
-                  <a:ea typeface="KoPub돋움체 Light" panose="02020603020101020101" pitchFamily="18" charset="-127"/>
+                <a:rPr lang="en-US" altLang="ko-KR" sz="1606" b="1" dirty="0">
+                  <a:latin typeface="KoPub돋움체 Medium" panose="02020603020101020101" pitchFamily="18" charset="-127"/>
+                  <a:ea typeface="KoPub돋움체 Medium" panose="02020603020101020101" pitchFamily="18" charset="-127"/>
                 </a:rPr>
                 <a:t>[BLOOD]</a:t>
               </a:r>
               <a:r>
-                <a:rPr lang="en-US" altLang="ko-KR" sz="1600" dirty="0">
-                  <a:latin typeface="KoPub돋움체 Light" panose="02020603020101020101" pitchFamily="18" charset="-127"/>
-                  <a:ea typeface="KoPub돋움체 Light" panose="02020603020101020101" pitchFamily="18" charset="-127"/>
+                <a:rPr lang="en-US" altLang="ko-KR" sz="1606" dirty="0">
+                  <a:latin typeface="KoPub돋움체 Medium" panose="02020603020101020101" pitchFamily="18" charset="-127"/>
+                  <a:ea typeface="KoPub돋움체 Medium" panose="02020603020101020101" pitchFamily="18" charset="-127"/>
                 </a:rPr>
                 <a:t> </a:t>
               </a:r>
               <a:r>
-                <a:rPr lang="ko-KR" altLang="en-US" sz="1600" dirty="0">
-                  <a:latin typeface="KoPub돋움체 Light" panose="02020603020101020101" pitchFamily="18" charset="-127"/>
-                  <a:ea typeface="KoPub돋움체 Light" panose="02020603020101020101" pitchFamily="18" charset="-127"/>
+                <a:rPr lang="ko-KR" altLang="en-US" sz="1606" dirty="0">
+                  <a:latin typeface="KoPub돋움체 Medium" panose="02020603020101020101" pitchFamily="18" charset="-127"/>
+                  <a:ea typeface="KoPub돋움체 Medium" panose="02020603020101020101" pitchFamily="18" charset="-127"/>
                 </a:rPr>
                 <a:t>수혈 관리</a:t>
               </a:r>
-              <a:endParaRPr lang="en-US" altLang="ko-KR" sz="1600" dirty="0">
-                <a:latin typeface="KoPub돋움체 Light" panose="02020603020101020101" pitchFamily="18" charset="-127"/>
-                <a:ea typeface="KoPub돋움체 Light" panose="02020603020101020101" pitchFamily="18" charset="-127"/>
+              <a:endParaRPr lang="en-US" altLang="ko-KR" sz="1606" dirty="0">
+                <a:latin typeface="KoPub돋움체 Medium" panose="02020603020101020101" pitchFamily="18" charset="-127"/>
+                <a:ea typeface="KoPub돋움체 Medium" panose="02020603020101020101" pitchFamily="18" charset="-127"/>
               </a:endParaRPr>
             </a:p>
             <a:p>
               <a:r>
-                <a:rPr lang="en-US" altLang="ko-KR" sz="1600" b="1" dirty="0">
-                  <a:latin typeface="KoPub돋움체 Light" panose="02020603020101020101" pitchFamily="18" charset="-127"/>
-                  <a:ea typeface="KoPub돋움체 Light" panose="02020603020101020101" pitchFamily="18" charset="-127"/>
+                <a:rPr lang="en-US" altLang="ko-KR" sz="1606" b="1" dirty="0">
+                  <a:latin typeface="KoPub돋움체 Medium" panose="02020603020101020101" pitchFamily="18" charset="-127"/>
+                  <a:ea typeface="KoPub돋움체 Medium" panose="02020603020101020101" pitchFamily="18" charset="-127"/>
                 </a:rPr>
                 <a:t>[CVR]</a:t>
               </a:r>
               <a:r>
-                <a:rPr lang="en-US" altLang="ko-KR" sz="1600" dirty="0">
-                  <a:latin typeface="KoPub돋움체 Light" panose="02020603020101020101" pitchFamily="18" charset="-127"/>
-                  <a:ea typeface="KoPub돋움체 Light" panose="02020603020101020101" pitchFamily="18" charset="-127"/>
+                <a:rPr lang="en-US" altLang="ko-KR" sz="1606" dirty="0">
+                  <a:latin typeface="KoPub돋움체 Medium" panose="02020603020101020101" pitchFamily="18" charset="-127"/>
+                  <a:ea typeface="KoPub돋움체 Medium" panose="02020603020101020101" pitchFamily="18" charset="-127"/>
                 </a:rPr>
                 <a:t> </a:t>
               </a:r>
               <a:r>
-                <a:rPr lang="ko-KR" altLang="en-US" sz="1600" dirty="0">
-                  <a:latin typeface="KoPub돋움체 Light" panose="02020603020101020101" pitchFamily="18" charset="-127"/>
-                  <a:ea typeface="KoPub돋움체 Light" panose="02020603020101020101" pitchFamily="18" charset="-127"/>
+                <a:rPr lang="ko-KR" altLang="en-US" sz="1606" dirty="0">
+                  <a:latin typeface="KoPub돋움체 Medium" panose="02020603020101020101" pitchFamily="18" charset="-127"/>
+                  <a:ea typeface="KoPub돋움체 Medium" panose="02020603020101020101" pitchFamily="18" charset="-127"/>
                 </a:rPr>
                 <a:t>위험 수치</a:t>
               </a:r>
-              <a:endParaRPr lang="en-US" altLang="ko-KR" sz="1600" dirty="0">
-                <a:latin typeface="KoPub돋움체 Light" panose="02020603020101020101" pitchFamily="18" charset="-127"/>
-                <a:ea typeface="KoPub돋움체 Light" panose="02020603020101020101" pitchFamily="18" charset="-127"/>
+              <a:endParaRPr lang="en-US" altLang="ko-KR" sz="1606" dirty="0">
+                <a:latin typeface="KoPub돋움체 Medium" panose="02020603020101020101" pitchFamily="18" charset="-127"/>
+                <a:ea typeface="KoPub돋움체 Medium" panose="02020603020101020101" pitchFamily="18" charset="-127"/>
               </a:endParaRPr>
             </a:p>
             <a:p>
               <a:r>
-                <a:rPr lang="en-US" altLang="ko-KR" sz="1600" b="1" dirty="0">
-                  <a:latin typeface="KoPub돋움체 Light" panose="02020603020101020101" pitchFamily="18" charset="-127"/>
-                  <a:ea typeface="KoPub돋움체 Light" panose="02020603020101020101" pitchFamily="18" charset="-127"/>
+                <a:rPr lang="en-US" altLang="ko-KR" sz="1606" b="1" dirty="0">
+                  <a:latin typeface="KoPub돋움체 Medium" panose="02020603020101020101" pitchFamily="18" charset="-127"/>
+                  <a:ea typeface="KoPub돋움체 Medium" panose="02020603020101020101" pitchFamily="18" charset="-127"/>
                 </a:rPr>
                 <a:t>[LIFE] </a:t>
               </a:r>
               <a:r>
-                <a:rPr lang="ko-KR" altLang="en-US" sz="1600" dirty="0">
-                  <a:latin typeface="KoPub돋움체 Light" panose="02020603020101020101" pitchFamily="18" charset="-127"/>
-                  <a:ea typeface="KoPub돋움체 Light" panose="02020603020101020101" pitchFamily="18" charset="-127"/>
+                <a:rPr lang="ko-KR" altLang="en-US" sz="1606" dirty="0">
+                  <a:latin typeface="KoPub돋움체 Medium" panose="02020603020101020101" pitchFamily="18" charset="-127"/>
+                  <a:ea typeface="KoPub돋움체 Medium" panose="02020603020101020101" pitchFamily="18" charset="-127"/>
                 </a:rPr>
                 <a:t>존엄</a:t>
               </a:r>
               <a:r>
-                <a:rPr lang="en-US" altLang="ko-KR" sz="1600" dirty="0">
-                  <a:latin typeface="KoPub돋움체 Light" panose="02020603020101020101" pitchFamily="18" charset="-127"/>
-                  <a:ea typeface="KoPub돋움체 Light" panose="02020603020101020101" pitchFamily="18" charset="-127"/>
+                <a:rPr lang="en-US" altLang="ko-KR" sz="1606" dirty="0">
+                  <a:latin typeface="KoPub돋움체 Medium" panose="02020603020101020101" pitchFamily="18" charset="-127"/>
+                  <a:ea typeface="KoPub돋움체 Medium" panose="02020603020101020101" pitchFamily="18" charset="-127"/>
                 </a:rPr>
                 <a:t>/</a:t>
               </a:r>
               <a:r>
-                <a:rPr lang="ko-KR" altLang="en-US" sz="1600" dirty="0">
-                  <a:latin typeface="KoPub돋움체 Light" panose="02020603020101020101" pitchFamily="18" charset="-127"/>
-                  <a:ea typeface="KoPub돋움체 Light" panose="02020603020101020101" pitchFamily="18" charset="-127"/>
+                <a:rPr lang="ko-KR" altLang="en-US" sz="1606" dirty="0">
+                  <a:latin typeface="KoPub돋움체 Medium" panose="02020603020101020101" pitchFamily="18" charset="-127"/>
+                  <a:ea typeface="KoPub돋움체 Medium" panose="02020603020101020101" pitchFamily="18" charset="-127"/>
                 </a:rPr>
                 <a:t>임종</a:t>
               </a:r>
-              <a:endParaRPr lang="en-US" altLang="ko-KR" sz="1600" dirty="0">
-                <a:latin typeface="KoPub돋움체 Light" panose="02020603020101020101" pitchFamily="18" charset="-127"/>
-                <a:ea typeface="KoPub돋움체 Light" panose="02020603020101020101" pitchFamily="18" charset="-127"/>
+              <a:endParaRPr lang="en-US" altLang="ko-KR" sz="1606" dirty="0">
+                <a:latin typeface="KoPub돋움체 Medium" panose="02020603020101020101" pitchFamily="18" charset="-127"/>
+                <a:ea typeface="KoPub돋움체 Medium" panose="02020603020101020101" pitchFamily="18" charset="-127"/>
               </a:endParaRPr>
             </a:p>
             <a:p>
               <a:r>
-                <a:rPr lang="en-US" altLang="ko-KR" sz="1600" b="1" dirty="0">
-                  <a:latin typeface="KoPub돋움체 Light" panose="02020603020101020101" pitchFamily="18" charset="-127"/>
-                  <a:ea typeface="KoPub돋움체 Light" panose="02020603020101020101" pitchFamily="18" charset="-127"/>
+                <a:rPr lang="en-US" altLang="ko-KR" sz="1606" b="1" dirty="0">
+                  <a:latin typeface="KoPub돋움체 Medium" panose="02020603020101020101" pitchFamily="18" charset="-127"/>
+                  <a:ea typeface="KoPub돋움체 Medium" panose="02020603020101020101" pitchFamily="18" charset="-127"/>
                 </a:rPr>
                 <a:t>[MEET] </a:t>
               </a:r>
               <a:r>
-                <a:rPr lang="ko-KR" altLang="en-US" sz="1600" dirty="0">
-                  <a:latin typeface="KoPub돋움체 Light" panose="02020603020101020101" pitchFamily="18" charset="-127"/>
-                  <a:ea typeface="KoPub돋움체 Light" panose="02020603020101020101" pitchFamily="18" charset="-127"/>
+                <a:rPr lang="ko-KR" altLang="en-US" sz="1606" dirty="0">
+                  <a:latin typeface="KoPub돋움체 Medium" panose="02020603020101020101" pitchFamily="18" charset="-127"/>
+                  <a:ea typeface="KoPub돋움체 Medium" panose="02020603020101020101" pitchFamily="18" charset="-127"/>
                 </a:rPr>
                 <a:t>보호자 면담</a:t>
               </a:r>
-              <a:endParaRPr lang="en-US" altLang="ko-KR" sz="1600" dirty="0">
-                <a:latin typeface="KoPub돋움체 Light" panose="02020603020101020101" pitchFamily="18" charset="-127"/>
-                <a:ea typeface="KoPub돋움체 Light" panose="02020603020101020101" pitchFamily="18" charset="-127"/>
+              <a:endParaRPr lang="en-US" altLang="ko-KR" sz="1606" dirty="0">
+                <a:latin typeface="KoPub돋움체 Medium" panose="02020603020101020101" pitchFamily="18" charset="-127"/>
+                <a:ea typeface="KoPub돋움체 Medium" panose="02020603020101020101" pitchFamily="18" charset="-127"/>
               </a:endParaRPr>
             </a:p>
             <a:p>
               <a:r>
-                <a:rPr lang="en-US" altLang="ko-KR" sz="1600" b="1" dirty="0">
-                  <a:latin typeface="KoPub돋움체 Light" panose="02020603020101020101" pitchFamily="18" charset="-127"/>
-                  <a:ea typeface="KoPub돋움체 Light" panose="02020603020101020101" pitchFamily="18" charset="-127"/>
+                <a:rPr lang="en-US" altLang="ko-KR" sz="1606" b="1" dirty="0">
+                  <a:latin typeface="KoPub돋움체 Medium" panose="02020603020101020101" pitchFamily="18" charset="-127"/>
+                  <a:ea typeface="KoPub돋움체 Medium" panose="02020603020101020101" pitchFamily="18" charset="-127"/>
                 </a:rPr>
                 <a:t>[MARROW] </a:t>
               </a:r>
               <a:r>
-                <a:rPr lang="ko-KR" altLang="en-US" sz="1600" dirty="0">
-                  <a:latin typeface="KoPub돋움체 Light" panose="02020603020101020101" pitchFamily="18" charset="-127"/>
-                  <a:ea typeface="KoPub돋움체 Light" panose="02020603020101020101" pitchFamily="18" charset="-127"/>
+                <a:rPr lang="ko-KR" altLang="en-US" sz="1606" dirty="0">
+                  <a:latin typeface="KoPub돋움체 Medium" panose="02020603020101020101" pitchFamily="18" charset="-127"/>
+                  <a:ea typeface="KoPub돋움체 Medium" panose="02020603020101020101" pitchFamily="18" charset="-127"/>
                 </a:rPr>
                 <a:t>골수 검사</a:t>
               </a:r>
-              <a:endParaRPr lang="en-US" altLang="ko-KR" sz="1600" dirty="0">
-                <a:latin typeface="KoPub돋움체 Light" panose="02020603020101020101" pitchFamily="18" charset="-127"/>
-                <a:ea typeface="KoPub돋움체 Light" panose="02020603020101020101" pitchFamily="18" charset="-127"/>
+              <a:endParaRPr lang="en-US" altLang="ko-KR" sz="1606" dirty="0">
+                <a:latin typeface="KoPub돋움체 Medium" panose="02020603020101020101" pitchFamily="18" charset="-127"/>
+                <a:ea typeface="KoPub돋움체 Medium" panose="02020603020101020101" pitchFamily="18" charset="-127"/>
               </a:endParaRPr>
             </a:p>
             <a:p>
               <a:r>
-                <a:rPr lang="en-US" altLang="ko-KR" sz="1600" b="1" dirty="0">
-                  <a:latin typeface="KoPub돋움체 Light" panose="02020603020101020101" pitchFamily="18" charset="-127"/>
-                  <a:ea typeface="KoPub돋움체 Light" panose="02020603020101020101" pitchFamily="18" charset="-127"/>
+                <a:rPr lang="en-US" altLang="ko-KR" sz="1606" b="1" dirty="0">
+                  <a:latin typeface="KoPub돋움체 Medium" panose="02020603020101020101" pitchFamily="18" charset="-127"/>
+                  <a:ea typeface="KoPub돋움체 Medium" panose="02020603020101020101" pitchFamily="18" charset="-127"/>
                 </a:rPr>
                 <a:t>[ISO] </a:t>
               </a:r>
               <a:r>
-                <a:rPr lang="ko-KR" altLang="en-US" sz="1600" dirty="0">
-                  <a:latin typeface="KoPub돋움체 Light" panose="02020603020101020101" pitchFamily="18" charset="-127"/>
-                  <a:ea typeface="KoPub돋움체 Light" panose="02020603020101020101" pitchFamily="18" charset="-127"/>
+                <a:rPr lang="ko-KR" altLang="en-US" sz="1606" dirty="0">
+                  <a:latin typeface="KoPub돋움체 Medium" panose="02020603020101020101" pitchFamily="18" charset="-127"/>
+                  <a:ea typeface="KoPub돋움체 Medium" panose="02020603020101020101" pitchFamily="18" charset="-127"/>
                 </a:rPr>
                 <a:t>격리 관리</a:t>
               </a:r>
-              <a:endParaRPr lang="en-US" altLang="ko-KR" sz="1600" dirty="0">
-                <a:latin typeface="KoPub돋움체 Light" panose="02020603020101020101" pitchFamily="18" charset="-127"/>
-                <a:ea typeface="KoPub돋움체 Light" panose="02020603020101020101" pitchFamily="18" charset="-127"/>
+              <a:endParaRPr lang="en-US" altLang="ko-KR" sz="1606" dirty="0">
+                <a:latin typeface="KoPub돋움체 Medium" panose="02020603020101020101" pitchFamily="18" charset="-127"/>
+                <a:ea typeface="KoPub돋움체 Medium" panose="02020603020101020101" pitchFamily="18" charset="-127"/>
               </a:endParaRPr>
             </a:p>
             <a:p>
               <a:r>
-                <a:rPr lang="en-US" altLang="ko-KR" sz="1600" b="1" dirty="0">
-                  <a:latin typeface="KoPub돋움체 Light" panose="02020603020101020101" pitchFamily="18" charset="-127"/>
-                  <a:ea typeface="KoPub돋움체 Light" panose="02020603020101020101" pitchFamily="18" charset="-127"/>
+                <a:rPr lang="en-US" altLang="ko-KR" sz="1606" b="1" dirty="0">
+                  <a:latin typeface="KoPub돋움체 Medium" panose="02020603020101020101" pitchFamily="18" charset="-127"/>
+                  <a:ea typeface="KoPub돋움체 Medium" panose="02020603020101020101" pitchFamily="18" charset="-127"/>
                 </a:rPr>
                 <a:t>[C-Status] </a:t>
               </a:r>
               <a:r>
-                <a:rPr lang="ko-KR" altLang="en-US" sz="1600" dirty="0">
-                  <a:latin typeface="KoPub돋움체 Light" panose="02020603020101020101" pitchFamily="18" charset="-127"/>
-                  <a:ea typeface="KoPub돋움체 Light" panose="02020603020101020101" pitchFamily="18" charset="-127"/>
+                <a:rPr lang="ko-KR" altLang="en-US" sz="1606" dirty="0">
+                  <a:latin typeface="KoPub돋움체 Medium" panose="02020603020101020101" pitchFamily="18" charset="-127"/>
+                  <a:ea typeface="KoPub돋움체 Medium" panose="02020603020101020101" pitchFamily="18" charset="-127"/>
                 </a:rPr>
                 <a:t>상태 악화</a:t>
               </a:r>
-              <a:endParaRPr lang="en-US" altLang="ko-KR" sz="1600" dirty="0">
-                <a:latin typeface="KoPub돋움체 Light" panose="02020603020101020101" pitchFamily="18" charset="-127"/>
-                <a:ea typeface="KoPub돋움체 Light" panose="02020603020101020101" pitchFamily="18" charset="-127"/>
+              <a:endParaRPr lang="en-US" altLang="ko-KR" sz="1606" dirty="0">
+                <a:latin typeface="KoPub돋움체 Medium" panose="02020603020101020101" pitchFamily="18" charset="-127"/>
+                <a:ea typeface="KoPub돋움체 Medium" panose="02020603020101020101" pitchFamily="18" charset="-127"/>
               </a:endParaRPr>
             </a:p>
             <a:p>
               <a:r>
-                <a:rPr lang="en-US" altLang="ko-KR" sz="1600" b="1" dirty="0">
-                  <a:latin typeface="KoPub돋움체 Light" panose="02020603020101020101" pitchFamily="18" charset="-127"/>
-                  <a:ea typeface="KoPub돋움체 Light" panose="02020603020101020101" pitchFamily="18" charset="-127"/>
+                <a:rPr lang="en-US" altLang="ko-KR" sz="1606" b="1" dirty="0">
+                  <a:latin typeface="KoPub돋움체 Medium" panose="02020603020101020101" pitchFamily="18" charset="-127"/>
+                  <a:ea typeface="KoPub돋움체 Medium" panose="02020603020101020101" pitchFamily="18" charset="-127"/>
                 </a:rPr>
                 <a:t>[PAIN] </a:t>
               </a:r>
               <a:r>
-                <a:rPr lang="ko-KR" altLang="en-US" sz="1600" dirty="0">
-                  <a:latin typeface="KoPub돋움체 Light" panose="02020603020101020101" pitchFamily="18" charset="-127"/>
-                  <a:ea typeface="KoPub돋움체 Light" panose="02020603020101020101" pitchFamily="18" charset="-127"/>
+                <a:rPr lang="ko-KR" altLang="en-US" sz="1606" dirty="0">
+                  <a:latin typeface="KoPub돋움체 Medium" panose="02020603020101020101" pitchFamily="18" charset="-127"/>
+                  <a:ea typeface="KoPub돋움체 Medium" panose="02020603020101020101" pitchFamily="18" charset="-127"/>
                 </a:rPr>
                 <a:t>통증 조절</a:t>
               </a:r>
-              <a:endParaRPr lang="en-US" altLang="ko-KR" sz="1600" dirty="0">
-                <a:latin typeface="KoPub돋움체 Light" panose="02020603020101020101" pitchFamily="18" charset="-127"/>
-                <a:ea typeface="KoPub돋움체 Light" panose="02020603020101020101" pitchFamily="18" charset="-127"/>
+              <a:endParaRPr lang="en-US" altLang="ko-KR" sz="1606" dirty="0">
+                <a:latin typeface="KoPub돋움체 Medium" panose="02020603020101020101" pitchFamily="18" charset="-127"/>
+                <a:ea typeface="KoPub돋움체 Medium" panose="02020603020101020101" pitchFamily="18" charset="-127"/>
               </a:endParaRPr>
             </a:p>
             <a:p>
               <a:r>
-                <a:rPr lang="en-US" altLang="ko-KR" sz="1600" b="1" dirty="0">
-                  <a:latin typeface="KoPub돋움체 Light" panose="02020603020101020101" pitchFamily="18" charset="-127"/>
-                  <a:ea typeface="KoPub돋움체 Light" panose="02020603020101020101" pitchFamily="18" charset="-127"/>
+                <a:rPr lang="en-US" altLang="ko-KR" sz="1606" b="1" dirty="0">
+                  <a:latin typeface="KoPub돋움체 Medium" panose="02020603020101020101" pitchFamily="18" charset="-127"/>
+                  <a:ea typeface="KoPub돋움체 Medium" panose="02020603020101020101" pitchFamily="18" charset="-127"/>
                 </a:rPr>
                 <a:t>[OUT] </a:t>
               </a:r>
               <a:r>
-                <a:rPr lang="ko-KR" altLang="en-US" sz="1600" dirty="0">
-                  <a:latin typeface="KoPub돋움체 Light" panose="02020603020101020101" pitchFamily="18" charset="-127"/>
-                  <a:ea typeface="KoPub돋움체 Light" panose="02020603020101020101" pitchFamily="18" charset="-127"/>
+                <a:rPr lang="ko-KR" altLang="en-US" sz="1606" dirty="0">
+                  <a:latin typeface="KoPub돋움체 Medium" panose="02020603020101020101" pitchFamily="18" charset="-127"/>
+                  <a:ea typeface="KoPub돋움체 Medium" panose="02020603020101020101" pitchFamily="18" charset="-127"/>
                 </a:rPr>
                 <a:t>퇴원</a:t>
               </a:r>
               <a:r>
-                <a:rPr lang="en-US" altLang="ko-KR" sz="1600" dirty="0">
-                  <a:latin typeface="KoPub돋움체 Light" panose="02020603020101020101" pitchFamily="18" charset="-127"/>
-                  <a:ea typeface="KoPub돋움체 Light" panose="02020603020101020101" pitchFamily="18" charset="-127"/>
+                <a:rPr lang="en-US" altLang="ko-KR" sz="1606" dirty="0">
+                  <a:latin typeface="KoPub돋움체 Medium" panose="02020603020101020101" pitchFamily="18" charset="-127"/>
+                  <a:ea typeface="KoPub돋움체 Medium" panose="02020603020101020101" pitchFamily="18" charset="-127"/>
                 </a:rPr>
                 <a:t>/</a:t>
               </a:r>
               <a:r>
-                <a:rPr lang="ko-KR" altLang="en-US" sz="1600" dirty="0">
-                  <a:latin typeface="KoPub돋움체 Light" panose="02020603020101020101" pitchFamily="18" charset="-127"/>
-                  <a:ea typeface="KoPub돋움체 Light" panose="02020603020101020101" pitchFamily="18" charset="-127"/>
+                <a:rPr lang="ko-KR" altLang="en-US" sz="1606" dirty="0">
+                  <a:latin typeface="KoPub돋움체 Medium" panose="02020603020101020101" pitchFamily="18" charset="-127"/>
+                  <a:ea typeface="KoPub돋움체 Medium" panose="02020603020101020101" pitchFamily="18" charset="-127"/>
                 </a:rPr>
                 <a:t>전과</a:t>
               </a:r>
               <a:r>
-                <a:rPr lang="en-US" altLang="ko-KR" sz="1600" dirty="0">
-                  <a:latin typeface="KoPub돋움체 Light" panose="02020603020101020101" pitchFamily="18" charset="-127"/>
-                  <a:ea typeface="KoPub돋움체 Light" panose="02020603020101020101" pitchFamily="18" charset="-127"/>
+                <a:rPr lang="en-US" altLang="ko-KR" sz="1606" dirty="0">
+                  <a:latin typeface="KoPub돋움체 Medium" panose="02020603020101020101" pitchFamily="18" charset="-127"/>
+                  <a:ea typeface="KoPub돋움체 Medium" panose="02020603020101020101" pitchFamily="18" charset="-127"/>
                 </a:rPr>
                 <a:t>/</a:t>
               </a:r>
               <a:r>
-                <a:rPr lang="ko-KR" altLang="en-US" sz="1600" dirty="0">
-                  <a:latin typeface="KoPub돋움체 Light" panose="02020603020101020101" pitchFamily="18" charset="-127"/>
-                  <a:ea typeface="KoPub돋움체 Light" panose="02020603020101020101" pitchFamily="18" charset="-127"/>
+                <a:rPr lang="ko-KR" altLang="en-US" sz="1606" dirty="0">
+                  <a:latin typeface="KoPub돋움체 Medium" panose="02020603020101020101" pitchFamily="18" charset="-127"/>
+                  <a:ea typeface="KoPub돋움체 Medium" panose="02020603020101020101" pitchFamily="18" charset="-127"/>
                 </a:rPr>
                 <a:t>사망</a:t>
               </a:r>
-              <a:endParaRPr lang="en-US" altLang="ko-KR" sz="1600" dirty="0">
-                <a:latin typeface="KoPub돋움체 Light" panose="02020603020101020101" pitchFamily="18" charset="-127"/>
-                <a:ea typeface="KoPub돋움체 Light" panose="02020603020101020101" pitchFamily="18" charset="-127"/>
+              <a:endParaRPr lang="en-US" altLang="ko-KR" sz="1606" dirty="0">
+                <a:latin typeface="KoPub돋움체 Medium" panose="02020603020101020101" pitchFamily="18" charset="-127"/>
+                <a:ea typeface="KoPub돋움체 Medium" panose="02020603020101020101" pitchFamily="18" charset="-127"/>
               </a:endParaRPr>
             </a:p>
           </p:txBody>
@@ -6385,7 +6405,7 @@
           <p:cNvPr id="2" name="TextBox 1">
             <a:extLst>
               <a:ext uri="{FF2B5EF4-FFF2-40B4-BE49-F238E27FC236}">
-                <a16:creationId xmlns:a16="http://schemas.microsoft.com/office/drawing/2014/main" id="{5C7E232E-6B0D-4C30-967C-1D82B967BC1B}"/>
+                <a16:creationId xmlns:a16="http://schemas.microsoft.com/office/drawing/2014/main" id="{A765A0F5-842D-6208-5557-F27F42C1A1B5}"/>
               </a:ext>
             </a:extLst>
           </p:cNvPr>
@@ -6394,8 +6414,8 @@
         </p:nvSpPr>
         <p:spPr>
           <a:xfrm>
-            <a:off x="589442" y="881803"/>
-            <a:ext cx="2564384" cy="400110"/>
+            <a:off x="591795" y="875055"/>
+            <a:ext cx="2574624" cy="461665"/>
           </a:xfrm>
           <a:prstGeom prst="rect">
             <a:avLst/>
@@ -6410,29 +6430,29 @@
           <a:p>
             <a:pPr algn="ctr"/>
             <a:r>
-              <a:rPr lang="ko-KR" altLang="en-US" sz="2000" b="1" dirty="0">
-                <a:latin typeface="KoPub돋움체 Light" panose="02020603020101020101" pitchFamily="18" charset="-127"/>
-                <a:ea typeface="KoPub돋움체 Light" panose="02020603020101020101" pitchFamily="18" charset="-127"/>
+              <a:rPr lang="ko-KR" altLang="en-US" sz="2400" b="1" dirty="0">
+                <a:latin typeface="KoPub돋움체 Medium" panose="02020603020101020101" pitchFamily="18" charset="-127"/>
+                <a:ea typeface="KoPub돋움체 Medium" panose="02020603020101020101" pitchFamily="18" charset="-127"/>
               </a:rPr>
               <a:t>하이패스 태그 </a:t>
             </a:r>
             <a:r>
-              <a:rPr lang="en-US" altLang="ko-KR" sz="2000" b="1" dirty="0">
-                <a:latin typeface="KoPub돋움체 Light" panose="02020603020101020101" pitchFamily="18" charset="-127"/>
-                <a:ea typeface="KoPub돋움체 Light" panose="02020603020101020101" pitchFamily="18" charset="-127"/>
+              <a:rPr lang="en-US" altLang="ko-KR" sz="2400" b="1" dirty="0">
+                <a:latin typeface="KoPub돋움체 Medium" panose="02020603020101020101" pitchFamily="18" charset="-127"/>
+                <a:ea typeface="KoPub돋움체 Medium" panose="02020603020101020101" pitchFamily="18" charset="-127"/>
               </a:rPr>
               <a:t>10</a:t>
             </a:r>
             <a:r>
-              <a:rPr lang="ko-KR" altLang="en-US" sz="2000" b="1" dirty="0">
-                <a:latin typeface="KoPub돋움체 Light" panose="02020603020101020101" pitchFamily="18" charset="-127"/>
-                <a:ea typeface="KoPub돋움체 Light" panose="02020603020101020101" pitchFamily="18" charset="-127"/>
+              <a:rPr lang="ko-KR" altLang="en-US" sz="2400" b="1" dirty="0">
+                <a:latin typeface="KoPub돋움체 Medium" panose="02020603020101020101" pitchFamily="18" charset="-127"/>
+                <a:ea typeface="KoPub돋움체 Medium" panose="02020603020101020101" pitchFamily="18" charset="-127"/>
               </a:rPr>
               <a:t>종</a:t>
             </a:r>
-            <a:endParaRPr lang="en-US" altLang="ko-KR" sz="2000" b="1" dirty="0">
-              <a:latin typeface="KoPub돋움체 Light" panose="02020603020101020101" pitchFamily="18" charset="-127"/>
-              <a:ea typeface="KoPub돋움체 Light" panose="02020603020101020101" pitchFamily="18" charset="-127"/>
+            <a:endParaRPr lang="en-US" altLang="ko-KR" sz="2400" b="1" dirty="0">
+              <a:latin typeface="KoPub돋움체 Medium" panose="02020603020101020101" pitchFamily="18" charset="-127"/>
+              <a:ea typeface="KoPub돋움체 Medium" panose="02020603020101020101" pitchFamily="18" charset="-127"/>
             </a:endParaRPr>
           </a:p>
         </p:txBody>
@@ -6442,7 +6462,7 @@
           <p:cNvPr id="8" name="TextBox 7">
             <a:extLst>
               <a:ext uri="{FF2B5EF4-FFF2-40B4-BE49-F238E27FC236}">
-                <a16:creationId xmlns:a16="http://schemas.microsoft.com/office/drawing/2014/main" id="{2D7FF5CD-F432-4D5C-924D-9C31E13C1988}"/>
+                <a16:creationId xmlns:a16="http://schemas.microsoft.com/office/drawing/2014/main" id="{98C6C323-6694-1353-1A0E-9D59B13ED70E}"/>
               </a:ext>
             </a:extLst>
           </p:cNvPr>
@@ -6451,8 +6471,8 @@
         </p:nvSpPr>
         <p:spPr>
           <a:xfrm>
-            <a:off x="5281613" y="1573045"/>
-            <a:ext cx="2843725" cy="584775"/>
+            <a:off x="5193921" y="1509776"/>
+            <a:ext cx="2855080" cy="707886"/>
           </a:xfrm>
           <a:prstGeom prst="rect">
             <a:avLst/>
@@ -6466,43 +6486,43 @@
           <a:lstStyle/>
           <a:p>
             <a:r>
-              <a:rPr lang="ko-KR" altLang="en-US" sz="1600" dirty="0">
-                <a:latin typeface="KoPub돋움체 Light" panose="02020603020101020101" pitchFamily="18" charset="-127"/>
-                <a:ea typeface="KoPub돋움체 Light" panose="02020603020101020101" pitchFamily="18" charset="-127"/>
+              <a:rPr lang="ko-KR" altLang="en-US" sz="2000" b="1" dirty="0">
+                <a:latin typeface="KoPub돋움체 Medium" panose="02020603020101020101" pitchFamily="18" charset="-127"/>
+                <a:ea typeface="KoPub돋움체 Medium" panose="02020603020101020101" pitchFamily="18" charset="-127"/>
               </a:rPr>
               <a:t>근무 교대 시 미완료 건에 </a:t>
             </a:r>
             <a:r>
-              <a:rPr lang="en-US" altLang="ko-KR" sz="1600" dirty="0">
-                <a:latin typeface="KoPub돋움체 Light" panose="02020603020101020101" pitchFamily="18" charset="-127"/>
-                <a:ea typeface="KoPub돋움체 Light" panose="02020603020101020101" pitchFamily="18" charset="-127"/>
+              <a:rPr lang="en-US" altLang="ko-KR" sz="2000" b="1" dirty="0">
+                <a:latin typeface="KoPub돋움체 Medium" panose="02020603020101020101" pitchFamily="18" charset="-127"/>
+                <a:ea typeface="KoPub돋움체 Medium" panose="02020603020101020101" pitchFamily="18" charset="-127"/>
               </a:rPr>
               <a:t>'</a:t>
             </a:r>
             <a:r>
-              <a:rPr lang="ko-KR" altLang="en-US" sz="1600" dirty="0">
-                <a:latin typeface="KoPub돋움체 Light" panose="02020603020101020101" pitchFamily="18" charset="-127"/>
-                <a:ea typeface="KoPub돋움체 Light" panose="02020603020101020101" pitchFamily="18" charset="-127"/>
+              <a:rPr lang="ko-KR" altLang="en-US" sz="2000" b="1" dirty="0">
+                <a:latin typeface="KoPub돋움체 Medium" panose="02020603020101020101" pitchFamily="18" charset="-127"/>
+                <a:ea typeface="KoPub돋움체 Medium" panose="02020603020101020101" pitchFamily="18" charset="-127"/>
               </a:rPr>
               <a:t>답장</a:t>
             </a:r>
             <a:r>
-              <a:rPr lang="en-US" altLang="ko-KR" sz="1600" dirty="0">
-                <a:latin typeface="KoPub돋움체 Light" panose="02020603020101020101" pitchFamily="18" charset="-127"/>
-                <a:ea typeface="KoPub돋움체 Light" panose="02020603020101020101" pitchFamily="18" charset="-127"/>
+              <a:rPr lang="en-US" altLang="ko-KR" sz="2000" b="1" dirty="0">
+                <a:latin typeface="KoPub돋움체 Medium" panose="02020603020101020101" pitchFamily="18" charset="-127"/>
+                <a:ea typeface="KoPub돋움체 Medium" panose="02020603020101020101" pitchFamily="18" charset="-127"/>
               </a:rPr>
               <a:t>'</a:t>
             </a:r>
             <a:r>
-              <a:rPr lang="ko-KR" altLang="en-US" sz="1600" dirty="0">
-                <a:latin typeface="KoPub돋움체 Light" panose="02020603020101020101" pitchFamily="18" charset="-127"/>
-                <a:ea typeface="KoPub돋움체 Light" panose="02020603020101020101" pitchFamily="18" charset="-127"/>
+              <a:rPr lang="ko-KR" altLang="en-US" sz="2000" b="1" dirty="0">
+                <a:latin typeface="KoPub돋움체 Medium" panose="02020603020101020101" pitchFamily="18" charset="-127"/>
+                <a:ea typeface="KoPub돋움체 Medium" panose="02020603020101020101" pitchFamily="18" charset="-127"/>
               </a:rPr>
               <a:t>으로 인계 기록</a:t>
             </a:r>
-            <a:endParaRPr lang="en-US" altLang="ko-KR" sz="1600" dirty="0">
-              <a:latin typeface="KoPub돋움체 Light" panose="02020603020101020101" pitchFamily="18" charset="-127"/>
-              <a:ea typeface="KoPub돋움체 Light" panose="02020603020101020101" pitchFamily="18" charset="-127"/>
+            <a:endParaRPr lang="en-US" altLang="ko-KR" sz="2000" b="1" dirty="0">
+              <a:latin typeface="KoPub돋움체 Medium" panose="02020603020101020101" pitchFamily="18" charset="-127"/>
+              <a:ea typeface="KoPub돋움체 Medium" panose="02020603020101020101" pitchFamily="18" charset="-127"/>
             </a:endParaRPr>
           </a:p>
         </p:txBody>
@@ -6512,7 +6532,7 @@
           <p:cNvPr id="9" name="사각형: 둥근 모서리 8">
             <a:extLst>
               <a:ext uri="{FF2B5EF4-FFF2-40B4-BE49-F238E27FC236}">
-                <a16:creationId xmlns:a16="http://schemas.microsoft.com/office/drawing/2014/main" id="{81771CDF-B55B-4421-928F-D1D7D43CFAC8}"/>
+                <a16:creationId xmlns:a16="http://schemas.microsoft.com/office/drawing/2014/main" id="{242251D4-5AE8-DA83-2549-D4F66CFA8D0E}"/>
               </a:ext>
             </a:extLst>
           </p:cNvPr>
@@ -6521,8 +6541,8 @@
         </p:nvSpPr>
         <p:spPr>
           <a:xfrm>
-            <a:off x="5067299" y="1396134"/>
-            <a:ext cx="3484563" cy="959835"/>
+            <a:off x="5087533" y="1391440"/>
+            <a:ext cx="3498477" cy="963668"/>
           </a:xfrm>
           <a:prstGeom prst="roundRect">
             <a:avLst>
@@ -6559,9 +6579,9 @@
           <a:lstStyle/>
           <a:p>
             <a:pPr algn="ctr"/>
-            <a:endParaRPr lang="ko-KR" altLang="en-US" sz="5080">
+            <a:endParaRPr lang="ko-KR" altLang="en-US" sz="5100">
               <a:latin typeface="KoPub돋움체 Medium" panose="02020603020101020101" pitchFamily="18" charset="-127"/>
-              <a:ea typeface="KoPub돋움체 Light" panose="02020603020101020101"/>
+              <a:ea typeface="KoPub돋움체 Medium" panose="02020603020101020101" pitchFamily="18" charset="-127"/>
             </a:endParaRPr>
           </a:p>
         </p:txBody>
@@ -6571,7 +6591,7 @@
           <p:cNvPr id="11" name="사각형: 둥근 모서리 10">
             <a:extLst>
               <a:ext uri="{FF2B5EF4-FFF2-40B4-BE49-F238E27FC236}">
-                <a16:creationId xmlns:a16="http://schemas.microsoft.com/office/drawing/2014/main" id="{A9BD57B0-0CB8-437B-91FF-358B1B271C52}"/>
+                <a16:creationId xmlns:a16="http://schemas.microsoft.com/office/drawing/2014/main" id="{1B61E606-1BDB-3293-B0F1-1D3965AF8F94}"/>
               </a:ext>
             </a:extLst>
           </p:cNvPr>
@@ -6580,8 +6600,8 @@
         </p:nvSpPr>
         <p:spPr>
           <a:xfrm>
-            <a:off x="3204625" y="1401423"/>
-            <a:ext cx="1811875" cy="954545"/>
+            <a:off x="3217421" y="1396750"/>
+            <a:ext cx="1819110" cy="958357"/>
           </a:xfrm>
           <a:prstGeom prst="roundRect">
             <a:avLst>
@@ -6619,9 +6639,9 @@
           <a:lstStyle/>
           <a:p>
             <a:pPr algn="ctr"/>
-            <a:endParaRPr lang="ko-KR" altLang="en-US" sz="5080">
+            <a:endParaRPr lang="ko-KR" altLang="en-US" sz="5100">
               <a:latin typeface="KoPub돋움체 Medium" panose="02020603020101020101" pitchFamily="18" charset="-127"/>
-              <a:ea typeface="KoPub돋움체 Light" panose="02020603020101020101"/>
+              <a:ea typeface="KoPub돋움체 Medium" panose="02020603020101020101" pitchFamily="18" charset="-127"/>
             </a:endParaRPr>
           </a:p>
         </p:txBody>
@@ -6631,7 +6651,7 @@
           <p:cNvPr id="12" name="TextBox 11">
             <a:extLst>
               <a:ext uri="{FF2B5EF4-FFF2-40B4-BE49-F238E27FC236}">
-                <a16:creationId xmlns:a16="http://schemas.microsoft.com/office/drawing/2014/main" id="{3717CE27-01D2-4557-B697-30F1806A81B3}"/>
+                <a16:creationId xmlns:a16="http://schemas.microsoft.com/office/drawing/2014/main" id="{06F0726F-16CE-B800-0D27-03AF0E44B34D}"/>
               </a:ext>
             </a:extLst>
           </p:cNvPr>
@@ -6640,8 +6660,8 @@
         </p:nvSpPr>
         <p:spPr>
           <a:xfrm>
-            <a:off x="3573396" y="1682514"/>
-            <a:ext cx="1074332" cy="338554"/>
+            <a:off x="3501645" y="1656841"/>
+            <a:ext cx="1250663" cy="400110"/>
           </a:xfrm>
           <a:prstGeom prst="rect">
             <a:avLst/>
@@ -6656,9 +6676,9 @@
           <a:p>
             <a:pPr algn="ctr"/>
             <a:r>
-              <a:rPr lang="en-US" altLang="ko-KR" sz="1600" b="1" dirty="0">
-                <a:latin typeface="KoPub돋움체 Light" panose="02020603020101020101" pitchFamily="18" charset="-127"/>
-                <a:ea typeface="KoPub돋움체 Light" panose="02020603020101020101" pitchFamily="18" charset="-127"/>
+              <a:rPr lang="en-US" altLang="ko-KR" sz="2000" b="1" dirty="0">
+                <a:latin typeface="KoPub돋움체 Medium" panose="02020603020101020101" pitchFamily="18" charset="-127"/>
+                <a:ea typeface="KoPub돋움체 Medium" panose="02020603020101020101" pitchFamily="18" charset="-127"/>
               </a:rPr>
               <a:t>[IN-OUT]</a:t>
             </a:r>
@@ -6670,7 +6690,7 @@
           <p:cNvPr id="4" name="직사각형 3">
             <a:extLst>
               <a:ext uri="{FF2B5EF4-FFF2-40B4-BE49-F238E27FC236}">
-                <a16:creationId xmlns:a16="http://schemas.microsoft.com/office/drawing/2014/main" id="{3306E135-233E-4999-A710-7E3C99EFDAEF}"/>
+                <a16:creationId xmlns:a16="http://schemas.microsoft.com/office/drawing/2014/main" id="{B3A0C8CA-3C67-5208-23D7-0C15D2EE1557}"/>
               </a:ext>
             </a:extLst>
           </p:cNvPr>
@@ -6679,8 +6699,8 @@
         </p:nvSpPr>
         <p:spPr>
           <a:xfrm>
-            <a:off x="4362454" y="860517"/>
-            <a:ext cx="2762295" cy="400110"/>
+            <a:off x="4379873" y="853684"/>
+            <a:ext cx="2863284" cy="461665"/>
           </a:xfrm>
           <a:prstGeom prst="rect">
             <a:avLst/>
@@ -6693,15 +6713,15 @@
           <a:lstStyle/>
           <a:p>
             <a:r>
-              <a:rPr lang="ko-KR" altLang="en-US" sz="2000" b="1" dirty="0">
-                <a:latin typeface="KoPub돋움체 Light" panose="02020603020101020101" pitchFamily="18" charset="-127"/>
-                <a:ea typeface="KoPub돋움체 Light" panose="02020603020101020101" pitchFamily="18" charset="-127"/>
+              <a:rPr lang="ko-KR" altLang="en-US" sz="2400" b="1" dirty="0">
+                <a:latin typeface="KoPub돋움체 Medium" panose="02020603020101020101" pitchFamily="18" charset="-127"/>
+                <a:ea typeface="KoPub돋움체 Medium" panose="02020603020101020101" pitchFamily="18" charset="-127"/>
               </a:rPr>
               <a:t>나를 지키는 방어 기록</a:t>
             </a:r>
-            <a:endParaRPr lang="en-US" altLang="ko-KR" sz="2000" b="1" dirty="0">
-              <a:latin typeface="KoPub돋움체 Light" panose="02020603020101020101" pitchFamily="18" charset="-127"/>
-              <a:ea typeface="KoPub돋움체 Light" panose="02020603020101020101" pitchFamily="18" charset="-127"/>
+            <a:endParaRPr lang="en-US" altLang="ko-KR" sz="2400" b="1" dirty="0">
+              <a:latin typeface="KoPub돋움체 Medium" panose="02020603020101020101" pitchFamily="18" charset="-127"/>
+              <a:ea typeface="KoPub돋움체 Medium" panose="02020603020101020101" pitchFamily="18" charset="-127"/>
             </a:endParaRPr>
           </a:p>
         </p:txBody>
@@ -6711,7 +6731,7 @@
           <p:cNvPr id="27" name="TextBox 26">
             <a:extLst>
               <a:ext uri="{FF2B5EF4-FFF2-40B4-BE49-F238E27FC236}">
-                <a16:creationId xmlns:a16="http://schemas.microsoft.com/office/drawing/2014/main" id="{6950ADB8-A755-4C4B-8102-F58976B5B6D4}"/>
+                <a16:creationId xmlns:a16="http://schemas.microsoft.com/office/drawing/2014/main" id="{2007AAA3-348F-EAE4-D78D-8D4C5C7CED2D}"/>
               </a:ext>
             </a:extLst>
           </p:cNvPr>
@@ -6720,8 +6740,8 @@
         </p:nvSpPr>
         <p:spPr>
           <a:xfrm>
-            <a:off x="5281613" y="3503834"/>
-            <a:ext cx="3119437" cy="584775"/>
+            <a:off x="5193921" y="3448274"/>
+            <a:ext cx="3443091" cy="707886"/>
           </a:xfrm>
           <a:prstGeom prst="rect">
             <a:avLst/>
@@ -6735,92 +6755,92 @@
           <a:lstStyle/>
           <a:p>
             <a:r>
-              <a:rPr lang="en-US" altLang="ko-KR" sz="1600" dirty="0">
-                <a:latin typeface="KoPub돋움체 Light" panose="02020603020101020101" pitchFamily="18" charset="-127"/>
-                <a:ea typeface="KoPub돋움체 Light" panose="02020603020101020101" pitchFamily="18" charset="-127"/>
+              <a:rPr lang="en-US" altLang="ko-KR" sz="2000" b="1" dirty="0">
+                <a:latin typeface="KoPub돋움체 Medium" panose="02020603020101020101" pitchFamily="18" charset="-127"/>
+                <a:ea typeface="KoPub돋움체 Medium" panose="02020603020101020101" pitchFamily="18" charset="-127"/>
               </a:rPr>
               <a:t>PA </a:t>
             </a:r>
             <a:r>
-              <a:rPr lang="ko-KR" altLang="en-US" sz="1600" dirty="0">
-                <a:latin typeface="KoPub돋움체 Light" panose="02020603020101020101" pitchFamily="18" charset="-127"/>
-                <a:ea typeface="KoPub돋움체 Light" panose="02020603020101020101" pitchFamily="18" charset="-127"/>
+              <a:rPr lang="ko-KR" altLang="en-US" sz="2000" b="1" dirty="0">
+                <a:latin typeface="KoPub돋움체 Medium" panose="02020603020101020101" pitchFamily="18" charset="-127"/>
+                <a:ea typeface="KoPub돋움체 Medium" panose="02020603020101020101" pitchFamily="18" charset="-127"/>
               </a:rPr>
               <a:t>지연 사유</a:t>
             </a:r>
             <a:r>
-              <a:rPr lang="en-US" altLang="ko-KR" sz="1600" dirty="0">
-                <a:latin typeface="KoPub돋움체 Light" panose="02020603020101020101" pitchFamily="18" charset="-127"/>
-                <a:ea typeface="KoPub돋움체 Light" panose="02020603020101020101" pitchFamily="18" charset="-127"/>
+              <a:rPr lang="en-US" altLang="ko-KR" sz="2000" b="1" dirty="0">
+                <a:latin typeface="KoPub돋움체 Medium" panose="02020603020101020101" pitchFamily="18" charset="-127"/>
+                <a:ea typeface="KoPub돋움체 Medium" panose="02020603020101020101" pitchFamily="18" charset="-127"/>
               </a:rPr>
               <a:t>(</a:t>
             </a:r>
             <a:r>
-              <a:rPr lang="ko-KR" altLang="en-US" sz="1600" dirty="0">
-                <a:latin typeface="KoPub돋움체 Light" panose="02020603020101020101" pitchFamily="18" charset="-127"/>
-                <a:ea typeface="KoPub돋움체 Light" panose="02020603020101020101" pitchFamily="18" charset="-127"/>
+              <a:rPr lang="ko-KR" altLang="en-US" sz="2000" b="1" dirty="0">
+                <a:latin typeface="KoPub돋움체 Medium" panose="02020603020101020101" pitchFamily="18" charset="-127"/>
+                <a:ea typeface="KoPub돋움체 Medium" panose="02020603020101020101" pitchFamily="18" charset="-127"/>
               </a:rPr>
               <a:t>응급</a:t>
             </a:r>
             <a:r>
-              <a:rPr lang="en-US" altLang="ko-KR" sz="1600" dirty="0">
-                <a:latin typeface="KoPub돋움체 Light" panose="02020603020101020101" pitchFamily="18" charset="-127"/>
-                <a:ea typeface="KoPub돋움체 Light" panose="02020603020101020101" pitchFamily="18" charset="-127"/>
+              <a:rPr lang="en-US" altLang="ko-KR" sz="2000" b="1" dirty="0">
+                <a:latin typeface="KoPub돋움체 Medium" panose="02020603020101020101" pitchFamily="18" charset="-127"/>
+                <a:ea typeface="KoPub돋움체 Medium" panose="02020603020101020101" pitchFamily="18" charset="-127"/>
               </a:rPr>
               <a:t>·</a:t>
             </a:r>
             <a:r>
-              <a:rPr lang="ko-KR" altLang="en-US" sz="1600" dirty="0">
-                <a:latin typeface="KoPub돋움체 Light" panose="02020603020101020101" pitchFamily="18" charset="-127"/>
-                <a:ea typeface="KoPub돋움체 Light" panose="02020603020101020101" pitchFamily="18" charset="-127"/>
+              <a:rPr lang="ko-KR" altLang="en-US" sz="2000" b="1" dirty="0">
+                <a:latin typeface="KoPub돋움체 Medium" panose="02020603020101020101" pitchFamily="18" charset="-127"/>
+                <a:ea typeface="KoPub돋움체 Medium" panose="02020603020101020101" pitchFamily="18" charset="-127"/>
               </a:rPr>
               <a:t>수술</a:t>
             </a:r>
             <a:r>
-              <a:rPr lang="en-US" altLang="ko-KR" sz="1600" dirty="0">
-                <a:latin typeface="KoPub돋움체 Light" panose="02020603020101020101" pitchFamily="18" charset="-127"/>
-                <a:ea typeface="KoPub돋움체 Light" panose="02020603020101020101" pitchFamily="18" charset="-127"/>
+              <a:rPr lang="en-US" altLang="ko-KR" sz="2000" b="1" dirty="0">
+                <a:latin typeface="KoPub돋움체 Medium" panose="02020603020101020101" pitchFamily="18" charset="-127"/>
+                <a:ea typeface="KoPub돋움체 Medium" panose="02020603020101020101" pitchFamily="18" charset="-127"/>
               </a:rPr>
               <a:t>·</a:t>
             </a:r>
             <a:r>
-              <a:rPr lang="ko-KR" altLang="en-US" sz="1600" dirty="0">
-                <a:latin typeface="KoPub돋움체 Light" panose="02020603020101020101" pitchFamily="18" charset="-127"/>
-                <a:ea typeface="KoPub돋움체 Light" panose="02020603020101020101" pitchFamily="18" charset="-127"/>
+              <a:rPr lang="ko-KR" altLang="en-US" sz="2000" b="1" dirty="0">
+                <a:latin typeface="KoPub돋움체 Medium" panose="02020603020101020101" pitchFamily="18" charset="-127"/>
+                <a:ea typeface="KoPub돋움체 Medium" panose="02020603020101020101" pitchFamily="18" charset="-127"/>
               </a:rPr>
               <a:t>대기</a:t>
             </a:r>
             <a:r>
-              <a:rPr lang="en-US" altLang="ko-KR" sz="1600" dirty="0">
-                <a:latin typeface="KoPub돋움체 Light" panose="02020603020101020101" pitchFamily="18" charset="-127"/>
-                <a:ea typeface="KoPub돋움체 Light" panose="02020603020101020101" pitchFamily="18" charset="-127"/>
+              <a:rPr lang="en-US" altLang="ko-KR" sz="2000" b="1" dirty="0">
+                <a:latin typeface="KoPub돋움체 Medium" panose="02020603020101020101" pitchFamily="18" charset="-127"/>
+                <a:ea typeface="KoPub돋움체 Medium" panose="02020603020101020101" pitchFamily="18" charset="-127"/>
               </a:rPr>
               <a:t>·</a:t>
             </a:r>
             <a:r>
-              <a:rPr lang="ko-KR" altLang="en-US" sz="1600" dirty="0" err="1">
-                <a:latin typeface="KoPub돋움체 Light" panose="02020603020101020101" pitchFamily="18" charset="-127"/>
-                <a:ea typeface="KoPub돋움체 Light" panose="02020603020101020101" pitchFamily="18" charset="-127"/>
+              <a:rPr lang="ko-KR" altLang="en-US" sz="2000" b="1" dirty="0" err="1">
+                <a:latin typeface="KoPub돋움체 Medium" panose="02020603020101020101" pitchFamily="18" charset="-127"/>
+                <a:ea typeface="KoPub돋움체 Medium" panose="02020603020101020101" pitchFamily="18" charset="-127"/>
               </a:rPr>
               <a:t>컨펌</a:t>
             </a:r>
             <a:r>
-              <a:rPr lang="en-US" altLang="ko-KR" sz="1600" dirty="0">
-                <a:latin typeface="KoPub돋움체 Light" panose="02020603020101020101" pitchFamily="18" charset="-127"/>
-                <a:ea typeface="KoPub돋움체 Light" panose="02020603020101020101" pitchFamily="18" charset="-127"/>
+              <a:rPr lang="en-US" altLang="ko-KR" sz="2000" b="1" dirty="0">
+                <a:latin typeface="KoPub돋움체 Medium" panose="02020603020101020101" pitchFamily="18" charset="-127"/>
+                <a:ea typeface="KoPub돋움체 Medium" panose="02020603020101020101" pitchFamily="18" charset="-127"/>
               </a:rPr>
               <a:t>) </a:t>
             </a:r>
             <a:r>
-              <a:rPr lang="ko-KR" altLang="en-US" sz="1600" dirty="0">
-                <a:latin typeface="KoPub돋움체 Light" panose="02020603020101020101" pitchFamily="18" charset="-127"/>
-                <a:ea typeface="KoPub돋움체 Light" panose="02020603020101020101" pitchFamily="18" charset="-127"/>
+              <a:rPr lang="ko-KR" altLang="en-US" sz="2000" b="1" dirty="0">
+                <a:latin typeface="KoPub돋움체 Medium" panose="02020603020101020101" pitchFamily="18" charset="-127"/>
+                <a:ea typeface="KoPub돋움체 Medium" panose="02020603020101020101" pitchFamily="18" charset="-127"/>
               </a:rPr>
               <a:t>명시</a:t>
             </a:r>
-            <a:endParaRPr lang="en-US" altLang="ko-KR" sz="1600" dirty="0">
-              <a:latin typeface="KoPub돋움체 Light" panose="02020603020101020101" pitchFamily="18" charset="-127"/>
-              <a:ea typeface="KoPub돋움체 Light" panose="02020603020101020101" pitchFamily="18" charset="-127"/>
+            <a:endParaRPr lang="en-US" altLang="ko-KR" sz="2000" b="1" dirty="0">
+              <a:latin typeface="KoPub돋움체 Medium" panose="02020603020101020101" pitchFamily="18" charset="-127"/>
+              <a:ea typeface="KoPub돋움체 Medium" panose="02020603020101020101" pitchFamily="18" charset="-127"/>
             </a:endParaRPr>
           </a:p>
         </p:txBody>
@@ -6830,7 +6850,7 @@
           <p:cNvPr id="28" name="사각형: 둥근 모서리 27">
             <a:extLst>
               <a:ext uri="{FF2B5EF4-FFF2-40B4-BE49-F238E27FC236}">
-                <a16:creationId xmlns:a16="http://schemas.microsoft.com/office/drawing/2014/main" id="{2A688FE5-A3E9-4A7D-9640-97D9C0317280}"/>
+                <a16:creationId xmlns:a16="http://schemas.microsoft.com/office/drawing/2014/main" id="{3CDA2298-CFE1-6251-CF5D-279ECDEE010F}"/>
               </a:ext>
             </a:extLst>
           </p:cNvPr>
@@ -6839,8 +6859,8 @@
         </p:nvSpPr>
         <p:spPr>
           <a:xfrm>
-            <a:off x="5067299" y="3376222"/>
-            <a:ext cx="3484563" cy="829420"/>
+            <a:off x="5087533" y="3379434"/>
+            <a:ext cx="3498477" cy="832732"/>
           </a:xfrm>
           <a:prstGeom prst="roundRect">
             <a:avLst>
@@ -6877,9 +6897,9 @@
           <a:lstStyle/>
           <a:p>
             <a:pPr algn="ctr"/>
-            <a:endParaRPr lang="ko-KR" altLang="en-US" sz="5080">
+            <a:endParaRPr lang="ko-KR" altLang="en-US" sz="5100">
               <a:latin typeface="KoPub돋움체 Medium" panose="02020603020101020101" pitchFamily="18" charset="-127"/>
-              <a:ea typeface="KoPub돋움체 Light" panose="02020603020101020101"/>
+              <a:ea typeface="KoPub돋움체 Medium" panose="02020603020101020101" pitchFamily="18" charset="-127"/>
             </a:endParaRPr>
           </a:p>
         </p:txBody>
@@ -6889,7 +6909,7 @@
           <p:cNvPr id="29" name="사각형: 둥근 모서리 28">
             <a:extLst>
               <a:ext uri="{FF2B5EF4-FFF2-40B4-BE49-F238E27FC236}">
-                <a16:creationId xmlns:a16="http://schemas.microsoft.com/office/drawing/2014/main" id="{64D39DA0-5EC6-4030-BC9A-5BA4D6820777}"/>
+                <a16:creationId xmlns:a16="http://schemas.microsoft.com/office/drawing/2014/main" id="{4809360B-3D2A-7996-1CC1-48D098A949C6}"/>
               </a:ext>
             </a:extLst>
           </p:cNvPr>
@@ -6898,8 +6918,8 @@
         </p:nvSpPr>
         <p:spPr>
           <a:xfrm>
-            <a:off x="3204625" y="3381511"/>
-            <a:ext cx="1811875" cy="829420"/>
+            <a:off x="3217421" y="3384744"/>
+            <a:ext cx="1819110" cy="832732"/>
           </a:xfrm>
           <a:prstGeom prst="roundRect">
             <a:avLst>
@@ -6937,9 +6957,9 @@
           <a:lstStyle/>
           <a:p>
             <a:pPr algn="ctr"/>
-            <a:endParaRPr lang="ko-KR" altLang="en-US" sz="5080">
+            <a:endParaRPr lang="ko-KR" altLang="en-US" sz="5100">
               <a:latin typeface="KoPub돋움체 Medium" panose="02020603020101020101" pitchFamily="18" charset="-127"/>
-              <a:ea typeface="KoPub돋움체 Light" panose="02020603020101020101"/>
+              <a:ea typeface="KoPub돋움체 Medium" panose="02020603020101020101" pitchFamily="18" charset="-127"/>
             </a:endParaRPr>
           </a:p>
         </p:txBody>
@@ -6949,7 +6969,7 @@
           <p:cNvPr id="30" name="TextBox 29">
             <a:extLst>
               <a:ext uri="{FF2B5EF4-FFF2-40B4-BE49-F238E27FC236}">
-                <a16:creationId xmlns:a16="http://schemas.microsoft.com/office/drawing/2014/main" id="{3C4779CB-7AE4-4301-8B2E-ADD0772F1C8C}"/>
+                <a16:creationId xmlns:a16="http://schemas.microsoft.com/office/drawing/2014/main" id="{E880DAEF-1339-966B-F1DC-5DE81069A5AD}"/>
               </a:ext>
             </a:extLst>
           </p:cNvPr>
@@ -6958,8 +6978,8 @@
         </p:nvSpPr>
         <p:spPr>
           <a:xfrm>
-            <a:off x="3660760" y="3626944"/>
-            <a:ext cx="899605" cy="338554"/>
+            <a:off x="3588368" y="3609035"/>
+            <a:ext cx="1077219" cy="400110"/>
           </a:xfrm>
           <a:prstGeom prst="rect">
             <a:avLst/>
@@ -6974,9 +6994,9 @@
           <a:p>
             <a:pPr algn="ctr"/>
             <a:r>
-              <a:rPr lang="en-US" altLang="ko-KR" sz="1600" b="1" dirty="0">
-                <a:latin typeface="KoPub돋움체 Light" panose="02020603020101020101" pitchFamily="18" charset="-127"/>
-                <a:ea typeface="KoPub돋움체 Light" panose="02020603020101020101" pitchFamily="18" charset="-127"/>
+              <a:rPr lang="en-US" altLang="ko-KR" sz="2000" b="1" dirty="0">
+                <a:latin typeface="KoPub돋움체 Medium" panose="02020603020101020101" pitchFamily="18" charset="-127"/>
+                <a:ea typeface="KoPub돋움체 Medium" panose="02020603020101020101" pitchFamily="18" charset="-127"/>
               </a:rPr>
               <a:t>C-Code</a:t>
             </a:r>
@@ -6988,7 +7008,7 @@
           <p:cNvPr id="33" name="TextBox 32">
             <a:extLst>
               <a:ext uri="{FF2B5EF4-FFF2-40B4-BE49-F238E27FC236}">
-                <a16:creationId xmlns:a16="http://schemas.microsoft.com/office/drawing/2014/main" id="{CE2D936A-A45B-43D0-819F-2B99B59D02C1}"/>
+                <a16:creationId xmlns:a16="http://schemas.microsoft.com/office/drawing/2014/main" id="{4EF64AB2-4B27-E76A-BA62-590B96A1A221}"/>
               </a:ext>
             </a:extLst>
           </p:cNvPr>
@@ -6997,8 +7017,8 @@
         </p:nvSpPr>
         <p:spPr>
           <a:xfrm>
-            <a:off x="1847923" y="4282983"/>
-            <a:ext cx="5424883" cy="461665"/>
+            <a:off x="2192472" y="4289816"/>
+            <a:ext cx="4772204" cy="465054"/>
           </a:xfrm>
           <a:prstGeom prst="rect">
             <a:avLst/>
@@ -7013,72 +7033,72 @@
           <a:p>
             <a:pPr algn="ctr"/>
             <a:r>
-              <a:rPr lang="en-US" altLang="ko-KR" sz="2400" b="1" dirty="0">
+              <a:rPr lang="en-US" altLang="ko-KR" sz="2410" b="1" dirty="0">
                 <a:solidFill>
                   <a:srgbClr val="7030A0"/>
                 </a:solidFill>
-                <a:latin typeface="KoPub돋움체 Light" panose="02020603020101020101" pitchFamily="18" charset="-127"/>
-                <a:ea typeface="KoPub돋움체 Light" panose="02020603020101020101" pitchFamily="18" charset="-127"/>
+                <a:latin typeface="KoPub돋움체 Medium" panose="02020603020101020101" pitchFamily="18" charset="-127"/>
+                <a:ea typeface="KoPub돋움체 Medium" panose="02020603020101020101" pitchFamily="18" charset="-127"/>
               </a:rPr>
               <a:t>“</a:t>
             </a:r>
             <a:r>
-              <a:rPr lang="ko-KR" altLang="en-US" sz="2400" b="1" dirty="0">
+              <a:rPr lang="ko-KR" altLang="en-US" sz="2410" b="1" dirty="0">
                 <a:solidFill>
                   <a:srgbClr val="7030A0"/>
                 </a:solidFill>
-                <a:latin typeface="KoPub돋움체 Light" panose="02020603020101020101" pitchFamily="18" charset="-127"/>
-                <a:ea typeface="KoPub돋움체 Light" panose="02020603020101020101" pitchFamily="18" charset="-127"/>
+                <a:latin typeface="KoPub돋움체 Medium" panose="02020603020101020101" pitchFamily="18" charset="-127"/>
+                <a:ea typeface="KoPub돋움체 Medium" panose="02020603020101020101" pitchFamily="18" charset="-127"/>
               </a:rPr>
               <a:t>기록은 메신저에서</a:t>
             </a:r>
             <a:r>
-              <a:rPr lang="en-US" altLang="ko-KR" sz="2400" b="1" dirty="0">
+              <a:rPr lang="en-US" altLang="ko-KR" sz="2410" b="1" dirty="0">
                 <a:solidFill>
                   <a:srgbClr val="7030A0"/>
                 </a:solidFill>
-                <a:latin typeface="KoPub돋움체 Light" panose="02020603020101020101" pitchFamily="18" charset="-127"/>
-                <a:ea typeface="KoPub돋움체 Light" panose="02020603020101020101" pitchFamily="18" charset="-127"/>
+                <a:latin typeface="KoPub돋움체 Medium" panose="02020603020101020101" pitchFamily="18" charset="-127"/>
+                <a:ea typeface="KoPub돋움체 Medium" panose="02020603020101020101" pitchFamily="18" charset="-127"/>
               </a:rPr>
               <a:t>, </a:t>
             </a:r>
             <a:r>
-              <a:rPr lang="ko-KR" altLang="en-US" sz="2400" b="1" dirty="0">
+              <a:rPr lang="ko-KR" altLang="en-US" sz="2410" b="1" dirty="0">
                 <a:solidFill>
                   <a:srgbClr val="7030A0"/>
                 </a:solidFill>
-                <a:latin typeface="KoPub돋움체 Light" panose="02020603020101020101" pitchFamily="18" charset="-127"/>
-                <a:ea typeface="KoPub돋움체 Light" panose="02020603020101020101" pitchFamily="18" charset="-127"/>
+                <a:latin typeface="KoPub돋움체 Medium" panose="02020603020101020101" pitchFamily="18" charset="-127"/>
+                <a:ea typeface="KoPub돋움체 Medium" panose="02020603020101020101" pitchFamily="18" charset="-127"/>
               </a:rPr>
               <a:t>정보는 </a:t>
             </a:r>
             <a:r>
-              <a:rPr lang="en-US" altLang="ko-KR" sz="2400" b="1" dirty="0">
+              <a:rPr lang="en-US" altLang="ko-KR" sz="2410" b="1" dirty="0">
                 <a:solidFill>
                   <a:srgbClr val="7030A0"/>
                 </a:solidFill>
-                <a:latin typeface="KoPub돋움체 Light" panose="02020603020101020101" pitchFamily="18" charset="-127"/>
-                <a:ea typeface="KoPub돋움체 Light" panose="02020603020101020101" pitchFamily="18" charset="-127"/>
+                <a:latin typeface="KoPub돋움체 Medium" panose="02020603020101020101" pitchFamily="18" charset="-127"/>
+                <a:ea typeface="KoPub돋움체 Medium" panose="02020603020101020101" pitchFamily="18" charset="-127"/>
               </a:rPr>
               <a:t>QR</a:t>
             </a:r>
             <a:r>
-              <a:rPr lang="ko-KR" altLang="en-US" sz="2400" b="1" dirty="0">
+              <a:rPr lang="ko-KR" altLang="en-US" sz="2410" b="1" dirty="0">
                 <a:solidFill>
                   <a:srgbClr val="7030A0"/>
                 </a:solidFill>
-                <a:latin typeface="KoPub돋움체 Light" panose="02020603020101020101" pitchFamily="18" charset="-127"/>
-                <a:ea typeface="KoPub돋움체 Light" panose="02020603020101020101" pitchFamily="18" charset="-127"/>
+                <a:latin typeface="KoPub돋움체 Medium" panose="02020603020101020101" pitchFamily="18" charset="-127"/>
+                <a:ea typeface="KoPub돋움체 Medium" panose="02020603020101020101" pitchFamily="18" charset="-127"/>
               </a:rPr>
               <a:t>에서</a:t>
             </a:r>
             <a:r>
-              <a:rPr lang="en-US" altLang="ko-KR" sz="2400" b="1" dirty="0">
+              <a:rPr lang="en-US" altLang="ko-KR" sz="2410" b="1" dirty="0">
                 <a:solidFill>
                   <a:srgbClr val="7030A0"/>
                 </a:solidFill>
-                <a:latin typeface="KoPub돋움체 Light" panose="02020603020101020101" pitchFamily="18" charset="-127"/>
-                <a:ea typeface="KoPub돋움체 Light" panose="02020603020101020101" pitchFamily="18" charset="-127"/>
+                <a:latin typeface="KoPub돋움체 Medium" panose="02020603020101020101" pitchFamily="18" charset="-127"/>
+                <a:ea typeface="KoPub돋움체 Medium" panose="02020603020101020101" pitchFamily="18" charset="-127"/>
               </a:rPr>
               <a:t>!”</a:t>
             </a:r>
@@ -7088,7 +7108,7 @@
     </p:spTree>
     <p:extLst>
       <p:ext uri="{BB962C8B-B14F-4D97-AF65-F5344CB8AC3E}">
-        <p14:creationId xmlns:p14="http://schemas.microsoft.com/office/powerpoint/2010/main" val="3292255013"/>
+        <p14:creationId xmlns:p14="http://schemas.microsoft.com/office/powerpoint/2010/main" val="4009365647"/>
       </p:ext>
     </p:extLst>
   </p:cSld>
@@ -7106,7 +7126,7 @@
         <p:cNvPr id="1" name="">
           <a:extLst>
             <a:ext uri="{FF2B5EF4-FFF2-40B4-BE49-F238E27FC236}">
-              <a16:creationId xmlns:a16="http://schemas.microsoft.com/office/drawing/2014/main" id="{75C95857-5CB6-E176-FDD7-C77B771BAC79}"/>
+              <a16:creationId xmlns:a16="http://schemas.microsoft.com/office/drawing/2014/main" id="{70593137-ED37-0A87-CFD8-5A03E060986C}"/>
             </a:ext>
           </a:extLst>
         </p:cNvPr>
@@ -7126,7 +7146,7 @@
           <p:cNvPr id="32" name="사각형: 둥근 모서리 31">
             <a:extLst>
               <a:ext uri="{FF2B5EF4-FFF2-40B4-BE49-F238E27FC236}">
-                <a16:creationId xmlns:a16="http://schemas.microsoft.com/office/drawing/2014/main" id="{B0243490-B7C6-42DB-B189-20704EFBD587}"/>
+                <a16:creationId xmlns:a16="http://schemas.microsoft.com/office/drawing/2014/main" id="{52C6F2A5-46AC-E8BF-7DE3-CFACCB973873}"/>
               </a:ext>
             </a:extLst>
           </p:cNvPr>
@@ -7135,8 +7155,8 @@
         </p:nvSpPr>
         <p:spPr>
           <a:xfrm>
-            <a:off x="590790" y="807444"/>
-            <a:ext cx="2561688" cy="548828"/>
+            <a:off x="593149" y="800399"/>
+            <a:ext cx="2571917" cy="551020"/>
           </a:xfrm>
           <a:prstGeom prst="roundRect">
             <a:avLst/>
@@ -7176,7 +7196,10 @@
           <a:lstStyle/>
           <a:p>
             <a:pPr algn="ctr"/>
-            <a:endParaRPr lang="ko-KR" altLang="en-US"/>
+            <a:endParaRPr lang="ko-KR" altLang="en-US" sz="1807">
+              <a:latin typeface="KoPub돋움체 Medium" panose="02020603020101020101" pitchFamily="18" charset="-127"/>
+              <a:ea typeface="KoPub돋움체 Medium" panose="02020603020101020101" pitchFamily="18" charset="-127"/>
+            </a:endParaRPr>
           </a:p>
         </p:txBody>
       </p:sp>
@@ -7185,7 +7208,7 @@
           <p:cNvPr id="31" name="사각형: 둥근 모서리 30">
             <a:extLst>
               <a:ext uri="{FF2B5EF4-FFF2-40B4-BE49-F238E27FC236}">
-                <a16:creationId xmlns:a16="http://schemas.microsoft.com/office/drawing/2014/main" id="{30F47067-F54E-4A90-9F21-57BD24BB9C63}"/>
+                <a16:creationId xmlns:a16="http://schemas.microsoft.com/office/drawing/2014/main" id="{4C973999-D2AD-27CA-94F9-947A50D673B3}"/>
               </a:ext>
             </a:extLst>
           </p:cNvPr>
@@ -7194,8 +7217,8 @@
         </p:nvSpPr>
         <p:spPr>
           <a:xfrm>
-            <a:off x="3204625" y="807444"/>
-            <a:ext cx="5347237" cy="548828"/>
+            <a:off x="3217421" y="800399"/>
+            <a:ext cx="5368589" cy="551020"/>
           </a:xfrm>
           <a:prstGeom prst="roundRect">
             <a:avLst/>
@@ -7235,7 +7258,10 @@
           <a:lstStyle/>
           <a:p>
             <a:pPr algn="ctr"/>
-            <a:endParaRPr lang="ko-KR" altLang="en-US"/>
+            <a:endParaRPr lang="ko-KR" altLang="en-US" sz="1807">
+              <a:latin typeface="KoPub돋움체 Medium" panose="02020603020101020101" pitchFamily="18" charset="-127"/>
+              <a:ea typeface="KoPub돋움체 Medium" panose="02020603020101020101" pitchFamily="18" charset="-127"/>
+            </a:endParaRPr>
           </a:p>
         </p:txBody>
       </p:sp>
@@ -7244,7 +7270,7 @@
           <p:cNvPr id="23" name="TextBox 22">
             <a:extLst>
               <a:ext uri="{FF2B5EF4-FFF2-40B4-BE49-F238E27FC236}">
-                <a16:creationId xmlns:a16="http://schemas.microsoft.com/office/drawing/2014/main" id="{CD41B2AA-F91D-4DF3-86CD-504CE316D08F}"/>
+                <a16:creationId xmlns:a16="http://schemas.microsoft.com/office/drawing/2014/main" id="{818F3061-C630-8F8D-B1BC-8EDFC4759FAA}"/>
               </a:ext>
             </a:extLst>
           </p:cNvPr>
@@ -7253,8 +7279,8 @@
         </p:nvSpPr>
         <p:spPr>
           <a:xfrm>
-            <a:off x="5281613" y="2565733"/>
-            <a:ext cx="2843725" cy="584775"/>
+            <a:off x="5193921" y="2506427"/>
+            <a:ext cx="2855080" cy="707886"/>
           </a:xfrm>
           <a:prstGeom prst="rect">
             <a:avLst/>
@@ -7268,23 +7294,23 @@
           <a:lstStyle/>
           <a:p>
             <a:r>
-              <a:rPr lang="ko-KR" altLang="en-US" sz="1600" dirty="0">
-                <a:latin typeface="KoPub돋움체 Light" panose="02020603020101020101" pitchFamily="18" charset="-127"/>
-                <a:ea typeface="KoPub돋움체 Light" panose="02020603020101020101" pitchFamily="18" charset="-127"/>
+              <a:rPr lang="ko-KR" altLang="en-US" sz="2000" b="1" dirty="0">
+                <a:latin typeface="KoPub돋움체 Medium" panose="02020603020101020101" pitchFamily="18" charset="-127"/>
+                <a:ea typeface="KoPub돋움체 Medium" panose="02020603020101020101" pitchFamily="18" charset="-127"/>
               </a:rPr>
               <a:t>야간 응급 유선 보고 후 사후 </a:t>
             </a:r>
             <a:r>
-              <a:rPr lang="en-US" altLang="ko-KR" sz="1600" dirty="0">
-                <a:latin typeface="KoPub돋움체 Light" panose="02020603020101020101" pitchFamily="18" charset="-127"/>
-                <a:ea typeface="KoPub돋움체 Light" panose="02020603020101020101" pitchFamily="18" charset="-127"/>
+              <a:rPr lang="en-US" altLang="ko-KR" sz="2000" b="1" dirty="0">
+                <a:latin typeface="KoPub돋움체 Medium" panose="02020603020101020101" pitchFamily="18" charset="-127"/>
+                <a:ea typeface="KoPub돋움체 Medium" panose="02020603020101020101" pitchFamily="18" charset="-127"/>
               </a:rPr>
               <a:t>[A]-[D] 1</a:t>
             </a:r>
             <a:r>
-              <a:rPr lang="ko-KR" altLang="en-US" sz="1600" dirty="0">
-                <a:latin typeface="KoPub돋움체 Light" panose="02020603020101020101" pitchFamily="18" charset="-127"/>
-                <a:ea typeface="KoPub돋움체 Light" panose="02020603020101020101" pitchFamily="18" charset="-127"/>
+              <a:rPr lang="ko-KR" altLang="en-US" sz="2000" b="1" dirty="0">
+                <a:latin typeface="KoPub돋움체 Medium" panose="02020603020101020101" pitchFamily="18" charset="-127"/>
+                <a:ea typeface="KoPub돋움체 Medium" panose="02020603020101020101" pitchFamily="18" charset="-127"/>
               </a:rPr>
               <a:t>줄 기록</a:t>
             </a:r>
@@ -7296,7 +7322,7 @@
           <p:cNvPr id="24" name="사각형: 둥근 모서리 23">
             <a:extLst>
               <a:ext uri="{FF2B5EF4-FFF2-40B4-BE49-F238E27FC236}">
-                <a16:creationId xmlns:a16="http://schemas.microsoft.com/office/drawing/2014/main" id="{A193F6F5-6376-4F98-A3BB-96E53249AC9E}"/>
+                <a16:creationId xmlns:a16="http://schemas.microsoft.com/office/drawing/2014/main" id="{1D43DCA1-D747-29AC-7448-5D99D3F5544A}"/>
               </a:ext>
             </a:extLst>
           </p:cNvPr>
@@ -7305,8 +7331,8 @@
         </p:nvSpPr>
         <p:spPr>
           <a:xfrm>
-            <a:off x="5067299" y="2388822"/>
-            <a:ext cx="3484563" cy="959835"/>
+            <a:off x="5087533" y="2388092"/>
+            <a:ext cx="3498477" cy="963668"/>
           </a:xfrm>
           <a:prstGeom prst="roundRect">
             <a:avLst>
@@ -7343,9 +7369,9 @@
           <a:lstStyle/>
           <a:p>
             <a:pPr algn="ctr"/>
-            <a:endParaRPr lang="ko-KR" altLang="en-US" sz="5080">
+            <a:endParaRPr lang="ko-KR" altLang="en-US" sz="5100">
               <a:latin typeface="KoPub돋움체 Medium" panose="02020603020101020101" pitchFamily="18" charset="-127"/>
-              <a:ea typeface="KoPub돋움체 Light" panose="02020603020101020101"/>
+              <a:ea typeface="KoPub돋움체 Medium" panose="02020603020101020101" pitchFamily="18" charset="-127"/>
             </a:endParaRPr>
           </a:p>
         </p:txBody>
@@ -7355,7 +7381,7 @@
           <p:cNvPr id="25" name="사각형: 둥근 모서리 24">
             <a:extLst>
               <a:ext uri="{FF2B5EF4-FFF2-40B4-BE49-F238E27FC236}">
-                <a16:creationId xmlns:a16="http://schemas.microsoft.com/office/drawing/2014/main" id="{ABE07B44-9D20-4CE2-BFB6-8DDA339570CA}"/>
+                <a16:creationId xmlns:a16="http://schemas.microsoft.com/office/drawing/2014/main" id="{61E8BAC9-6099-5245-FF46-008CD08CA333}"/>
               </a:ext>
             </a:extLst>
           </p:cNvPr>
@@ -7364,8 +7390,8 @@
         </p:nvSpPr>
         <p:spPr>
           <a:xfrm>
-            <a:off x="3204625" y="2394111"/>
-            <a:ext cx="1811875" cy="954545"/>
+            <a:off x="3217421" y="2393402"/>
+            <a:ext cx="1819110" cy="958357"/>
           </a:xfrm>
           <a:prstGeom prst="roundRect">
             <a:avLst>
@@ -7403,9 +7429,9 @@
           <a:lstStyle/>
           <a:p>
             <a:pPr algn="ctr"/>
-            <a:endParaRPr lang="ko-KR" altLang="en-US" sz="5080">
+            <a:endParaRPr lang="ko-KR" altLang="en-US" sz="5100">
               <a:latin typeface="KoPub돋움체 Medium" panose="02020603020101020101" pitchFamily="18" charset="-127"/>
-              <a:ea typeface="KoPub돋움체 Light" panose="02020603020101020101"/>
+              <a:ea typeface="KoPub돋움체 Medium" panose="02020603020101020101" pitchFamily="18" charset="-127"/>
             </a:endParaRPr>
           </a:p>
         </p:txBody>
@@ -7415,7 +7441,7 @@
           <p:cNvPr id="26" name="TextBox 25">
             <a:extLst>
               <a:ext uri="{FF2B5EF4-FFF2-40B4-BE49-F238E27FC236}">
-                <a16:creationId xmlns:a16="http://schemas.microsoft.com/office/drawing/2014/main" id="{31132F88-5AA2-43B2-8C2A-F2BB31E51E43}"/>
+                <a16:creationId xmlns:a16="http://schemas.microsoft.com/office/drawing/2014/main" id="{53B6A62F-B2AF-8FA6-88E3-9143E6264F51}"/>
               </a:ext>
             </a:extLst>
           </p:cNvPr>
@@ -7424,8 +7450,8 @@
         </p:nvSpPr>
         <p:spPr>
           <a:xfrm>
-            <a:off x="3415500" y="2675202"/>
-            <a:ext cx="1390125" cy="338554"/>
+            <a:off x="3354969" y="2653493"/>
+            <a:ext cx="1544012" cy="400110"/>
           </a:xfrm>
           <a:prstGeom prst="rect">
             <a:avLst/>
@@ -7440,23 +7466,23 @@
           <a:p>
             <a:pPr algn="ctr"/>
             <a:r>
-              <a:rPr lang="en-US" altLang="ko-KR" sz="1600" b="1" dirty="0">
-                <a:latin typeface="KoPub돋움체 Light" panose="02020603020101020101" pitchFamily="18" charset="-127"/>
-                <a:ea typeface="KoPub돋움체 Light" panose="02020603020101020101" pitchFamily="18" charset="-127"/>
+              <a:rPr lang="en-US" altLang="ko-KR" sz="2000" b="1" dirty="0">
+                <a:latin typeface="KoPub돋움체 Medium" panose="02020603020101020101" pitchFamily="18" charset="-127"/>
+                <a:ea typeface="KoPub돋움체 Medium" panose="02020603020101020101" pitchFamily="18" charset="-127"/>
               </a:rPr>
               <a:t>[D-</a:t>
             </a:r>
             <a:r>
-              <a:rPr lang="ko-KR" altLang="en-US" sz="1600" b="1" dirty="0" err="1">
-                <a:latin typeface="KoPub돋움체 Light" panose="02020603020101020101" pitchFamily="18" charset="-127"/>
-                <a:ea typeface="KoPub돋움체 Light" panose="02020603020101020101" pitchFamily="18" charset="-127"/>
+              <a:rPr lang="ko-KR" altLang="en-US" sz="2000" b="1" dirty="0" err="1">
+                <a:latin typeface="KoPub돋움체 Medium" panose="02020603020101020101" pitchFamily="18" charset="-127"/>
+                <a:ea typeface="KoPub돋움체 Medium" panose="02020603020101020101" pitchFamily="18" charset="-127"/>
               </a:rPr>
               <a:t>야간유선</a:t>
             </a:r>
             <a:r>
-              <a:rPr lang="en-US" altLang="ko-KR" sz="1600" b="1" dirty="0">
-                <a:latin typeface="KoPub돋움체 Light" panose="02020603020101020101" pitchFamily="18" charset="-127"/>
-                <a:ea typeface="KoPub돋움체 Light" panose="02020603020101020101" pitchFamily="18" charset="-127"/>
+              <a:rPr lang="en-US" altLang="ko-KR" sz="2000" b="1" dirty="0">
+                <a:latin typeface="KoPub돋움체 Medium" panose="02020603020101020101" pitchFamily="18" charset="-127"/>
+                <a:ea typeface="KoPub돋움체 Medium" panose="02020603020101020101" pitchFamily="18" charset="-127"/>
               </a:rPr>
               <a:t>]</a:t>
             </a:r>
@@ -7468,7 +7494,7 @@
           <p:cNvPr id="3" name="TextBox 2">
             <a:extLst>
               <a:ext uri="{FF2B5EF4-FFF2-40B4-BE49-F238E27FC236}">
-                <a16:creationId xmlns:a16="http://schemas.microsoft.com/office/drawing/2014/main" id="{BDB8E964-7EED-74B0-E816-8BE4F8865B12}"/>
+                <a16:creationId xmlns:a16="http://schemas.microsoft.com/office/drawing/2014/main" id="{D700974C-1C81-7433-477E-8FF4B95B6112}"/>
               </a:ext>
             </a:extLst>
           </p:cNvPr>
@@ -7477,8 +7503,8 @@
         </p:nvSpPr>
         <p:spPr>
           <a:xfrm>
-            <a:off x="101771" y="184601"/>
-            <a:ext cx="3476336" cy="309444"/>
+            <a:off x="302548" y="175069"/>
+            <a:ext cx="3089475" cy="311645"/>
           </a:xfrm>
           <a:prstGeom prst="rect">
             <a:avLst/>
@@ -7493,21 +7519,21 @@
           <a:p>
             <a:pPr algn="ctr"/>
             <a:r>
-              <a:rPr lang="ko-KR" altLang="en-US" sz="1411" spc="-31" dirty="0">
+              <a:rPr lang="ko-KR" altLang="en-US" sz="1417" spc="-31" dirty="0">
                 <a:latin typeface="KoPub돋움체 Light" panose="02020603020101020101" pitchFamily="18" charset="-127"/>
                 <a:ea typeface="KoPub돋움체 Light" panose="02020603020101020101" pitchFamily="18" charset="-127"/>
               </a:rPr>
               <a:t>순천향대학교 천안병원 </a:t>
             </a:r>
             <a:r>
-              <a:rPr lang="en-US" altLang="ko-KR" sz="1411" spc="-31" dirty="0">
+              <a:rPr lang="en-US" altLang="ko-KR" sz="1417" spc="-31" dirty="0">
                 <a:latin typeface="KoPub돋움체 Light" panose="02020603020101020101" pitchFamily="18" charset="-127"/>
                 <a:ea typeface="KoPub돋움체 Light" panose="02020603020101020101" pitchFamily="18" charset="-127"/>
               </a:rPr>
               <a:t>| </a:t>
             </a:r>
             <a:r>
-              <a:rPr lang="ko-KR" altLang="en-US" sz="1411" spc="-31" dirty="0">
+              <a:rPr lang="ko-KR" altLang="en-US" sz="1417" spc="-31" dirty="0">
                 <a:latin typeface="KoPub돋움체 Light" panose="02020603020101020101" pitchFamily="18" charset="-127"/>
                 <a:ea typeface="KoPub돋움체 Light" panose="02020603020101020101" pitchFamily="18" charset="-127"/>
               </a:rPr>
@@ -7521,7 +7547,7 @@
           <p:cNvPr id="7" name="그룹 6">
             <a:extLst>
               <a:ext uri="{FF2B5EF4-FFF2-40B4-BE49-F238E27FC236}">
-                <a16:creationId xmlns:a16="http://schemas.microsoft.com/office/drawing/2014/main" id="{399CA2A2-FAD0-4681-B98C-3A7AA0484B78}"/>
+                <a16:creationId xmlns:a16="http://schemas.microsoft.com/office/drawing/2014/main" id="{E217199C-B5F8-6099-5826-17EF37254266}"/>
               </a:ext>
             </a:extLst>
           </p:cNvPr>
@@ -7530,8 +7556,8 @@
         </p:nvGrpSpPr>
         <p:grpSpPr>
           <a:xfrm>
-            <a:off x="592138" y="1396134"/>
-            <a:ext cx="2585305" cy="2814796"/>
+            <a:off x="594503" y="1391440"/>
+            <a:ext cx="2595628" cy="2826036"/>
             <a:chOff x="592138" y="1592949"/>
             <a:chExt cx="2585305" cy="2814796"/>
           </a:xfrm>
@@ -7541,7 +7567,7 @@
             <p:cNvPr id="22" name="사각형: 둥근 모서리 21">
               <a:extLst>
                 <a:ext uri="{FF2B5EF4-FFF2-40B4-BE49-F238E27FC236}">
-                  <a16:creationId xmlns:a16="http://schemas.microsoft.com/office/drawing/2014/main" id="{8DA9AE8C-7191-4002-98F1-FF77B72D519F}"/>
+                  <a16:creationId xmlns:a16="http://schemas.microsoft.com/office/drawing/2014/main" id="{64E5891C-1491-57F2-1478-6C49886C6112}"/>
                 </a:ext>
               </a:extLst>
             </p:cNvPr>
@@ -7590,11 +7616,12 @@
             <a:lstStyle/>
             <a:p>
               <a:pPr algn="ctr"/>
-              <a:endParaRPr lang="ko-KR" altLang="en-US" sz="5080">
+              <a:endParaRPr lang="ko-KR" altLang="en-US" sz="5100">
                 <a:solidFill>
                   <a:schemeClr val="tx1"/>
                 </a:solidFill>
-                <a:ea typeface="KoPub돋움체 Light" panose="02020603020101020101"/>
+                <a:latin typeface="KoPub돋움체 Medium" panose="02020603020101020101" pitchFamily="18" charset="-127"/>
+                <a:ea typeface="KoPub돋움체 Medium" panose="02020603020101020101" pitchFamily="18" charset="-127"/>
               </a:endParaRPr>
             </a:p>
           </p:txBody>
@@ -7604,7 +7631,7 @@
             <p:cNvPr id="17" name="TextBox 16">
               <a:extLst>
                 <a:ext uri="{FF2B5EF4-FFF2-40B4-BE49-F238E27FC236}">
-                  <a16:creationId xmlns:a16="http://schemas.microsoft.com/office/drawing/2014/main" id="{5E33DDDA-6085-D01E-695B-8DCA20A2A084}"/>
+                  <a16:creationId xmlns:a16="http://schemas.microsoft.com/office/drawing/2014/main" id="{AA1449DA-1DB7-2E48-BDFC-7A4C0383A3E1}"/>
                 </a:ext>
               </a:extLst>
             </p:cNvPr>
@@ -7628,251 +7655,254 @@
             <a:lstStyle/>
             <a:p>
               <a:r>
-                <a:rPr lang="en-US" altLang="ko-KR" sz="1600" b="1" dirty="0">
-                  <a:latin typeface="KoPub돋움체 Light" panose="02020603020101020101" pitchFamily="18" charset="-127"/>
-                  <a:ea typeface="KoPub돋움체 Light" panose="02020603020101020101" pitchFamily="18" charset="-127"/>
+                <a:rPr lang="en-US" altLang="ko-KR" sz="1606" b="1" dirty="0">
+                  <a:latin typeface="KoPub돋움체 Medium" panose="02020603020101020101" pitchFamily="18" charset="-127"/>
+                  <a:ea typeface="KoPub돋움체 Medium" panose="02020603020101020101" pitchFamily="18" charset="-127"/>
                 </a:rPr>
                 <a:t>[CHEMO] </a:t>
               </a:r>
               <a:r>
-                <a:rPr lang="ko-KR" altLang="en-US" sz="1600" dirty="0"/>
+                <a:rPr lang="ko-KR" altLang="en-US" sz="1606" dirty="0">
+                  <a:latin typeface="KoPub돋움체 Medium" panose="02020603020101020101" pitchFamily="18" charset="-127"/>
+                  <a:ea typeface="KoPub돋움체 Medium" panose="02020603020101020101" pitchFamily="18" charset="-127"/>
+                </a:rPr>
                 <a:t>항암 관리</a:t>
               </a:r>
             </a:p>
             <a:p>
               <a:r>
-                <a:rPr lang="en-US" altLang="ko-KR" sz="1600" b="1" dirty="0">
-                  <a:latin typeface="KoPub돋움체 Light" panose="02020603020101020101" pitchFamily="18" charset="-127"/>
-                  <a:ea typeface="KoPub돋움체 Light" panose="02020603020101020101" pitchFamily="18" charset="-127"/>
+                <a:rPr lang="en-US" altLang="ko-KR" sz="1606" b="1" dirty="0">
+                  <a:latin typeface="KoPub돋움체 Medium" panose="02020603020101020101" pitchFamily="18" charset="-127"/>
+                  <a:ea typeface="KoPub돋움체 Medium" panose="02020603020101020101" pitchFamily="18" charset="-127"/>
                 </a:rPr>
                 <a:t>[BLOOD]</a:t>
               </a:r>
               <a:r>
-                <a:rPr lang="en-US" altLang="ko-KR" sz="1600" dirty="0">
-                  <a:latin typeface="KoPub돋움체 Light" panose="02020603020101020101" pitchFamily="18" charset="-127"/>
-                  <a:ea typeface="KoPub돋움체 Light" panose="02020603020101020101" pitchFamily="18" charset="-127"/>
+                <a:rPr lang="en-US" altLang="ko-KR" sz="1606" dirty="0">
+                  <a:latin typeface="KoPub돋움체 Medium" panose="02020603020101020101" pitchFamily="18" charset="-127"/>
+                  <a:ea typeface="KoPub돋움체 Medium" panose="02020603020101020101" pitchFamily="18" charset="-127"/>
                 </a:rPr>
                 <a:t> </a:t>
               </a:r>
               <a:r>
-                <a:rPr lang="ko-KR" altLang="en-US" sz="1600" dirty="0">
-                  <a:latin typeface="KoPub돋움체 Light" panose="02020603020101020101" pitchFamily="18" charset="-127"/>
-                  <a:ea typeface="KoPub돋움체 Light" panose="02020603020101020101" pitchFamily="18" charset="-127"/>
+                <a:rPr lang="ko-KR" altLang="en-US" sz="1606" dirty="0">
+                  <a:latin typeface="KoPub돋움체 Medium" panose="02020603020101020101" pitchFamily="18" charset="-127"/>
+                  <a:ea typeface="KoPub돋움체 Medium" panose="02020603020101020101" pitchFamily="18" charset="-127"/>
                 </a:rPr>
                 <a:t>수혈 관리</a:t>
               </a:r>
-              <a:endParaRPr lang="en-US" altLang="ko-KR" sz="1600" dirty="0">
-                <a:latin typeface="KoPub돋움체 Light" panose="02020603020101020101" pitchFamily="18" charset="-127"/>
-                <a:ea typeface="KoPub돋움체 Light" panose="02020603020101020101" pitchFamily="18" charset="-127"/>
+              <a:endParaRPr lang="en-US" altLang="ko-KR" sz="1606" dirty="0">
+                <a:latin typeface="KoPub돋움체 Medium" panose="02020603020101020101" pitchFamily="18" charset="-127"/>
+                <a:ea typeface="KoPub돋움체 Medium" panose="02020603020101020101" pitchFamily="18" charset="-127"/>
               </a:endParaRPr>
             </a:p>
             <a:p>
               <a:r>
-                <a:rPr lang="en-US" altLang="ko-KR" sz="1600" b="1" dirty="0">
-                  <a:latin typeface="KoPub돋움체 Light" panose="02020603020101020101" pitchFamily="18" charset="-127"/>
-                  <a:ea typeface="KoPub돋움체 Light" panose="02020603020101020101" pitchFamily="18" charset="-127"/>
+                <a:rPr lang="en-US" altLang="ko-KR" sz="1606" b="1" dirty="0">
+                  <a:latin typeface="KoPub돋움체 Medium" panose="02020603020101020101" pitchFamily="18" charset="-127"/>
+                  <a:ea typeface="KoPub돋움체 Medium" panose="02020603020101020101" pitchFamily="18" charset="-127"/>
                 </a:rPr>
                 <a:t>[CVR]</a:t>
               </a:r>
               <a:r>
-                <a:rPr lang="en-US" altLang="ko-KR" sz="1600" dirty="0">
-                  <a:latin typeface="KoPub돋움체 Light" panose="02020603020101020101" pitchFamily="18" charset="-127"/>
-                  <a:ea typeface="KoPub돋움체 Light" panose="02020603020101020101" pitchFamily="18" charset="-127"/>
+                <a:rPr lang="en-US" altLang="ko-KR" sz="1606" dirty="0">
+                  <a:latin typeface="KoPub돋움체 Medium" panose="02020603020101020101" pitchFamily="18" charset="-127"/>
+                  <a:ea typeface="KoPub돋움체 Medium" panose="02020603020101020101" pitchFamily="18" charset="-127"/>
                 </a:rPr>
                 <a:t> </a:t>
               </a:r>
               <a:r>
-                <a:rPr lang="ko-KR" altLang="en-US" sz="1600" dirty="0">
-                  <a:latin typeface="KoPub돋움체 Light" panose="02020603020101020101" pitchFamily="18" charset="-127"/>
-                  <a:ea typeface="KoPub돋움체 Light" panose="02020603020101020101" pitchFamily="18" charset="-127"/>
+                <a:rPr lang="ko-KR" altLang="en-US" sz="1606" dirty="0">
+                  <a:latin typeface="KoPub돋움체 Medium" panose="02020603020101020101" pitchFamily="18" charset="-127"/>
+                  <a:ea typeface="KoPub돋움체 Medium" panose="02020603020101020101" pitchFamily="18" charset="-127"/>
                 </a:rPr>
                 <a:t>위험 수치</a:t>
               </a:r>
-              <a:endParaRPr lang="en-US" altLang="ko-KR" sz="1600" dirty="0">
-                <a:latin typeface="KoPub돋움체 Light" panose="02020603020101020101" pitchFamily="18" charset="-127"/>
-                <a:ea typeface="KoPub돋움체 Light" panose="02020603020101020101" pitchFamily="18" charset="-127"/>
+              <a:endParaRPr lang="en-US" altLang="ko-KR" sz="1606" dirty="0">
+                <a:latin typeface="KoPub돋움체 Medium" panose="02020603020101020101" pitchFamily="18" charset="-127"/>
+                <a:ea typeface="KoPub돋움체 Medium" panose="02020603020101020101" pitchFamily="18" charset="-127"/>
               </a:endParaRPr>
             </a:p>
             <a:p>
               <a:r>
-                <a:rPr lang="en-US" altLang="ko-KR" sz="1600" b="1" dirty="0">
-                  <a:latin typeface="KoPub돋움체 Light" panose="02020603020101020101" pitchFamily="18" charset="-127"/>
-                  <a:ea typeface="KoPub돋움체 Light" panose="02020603020101020101" pitchFamily="18" charset="-127"/>
+                <a:rPr lang="en-US" altLang="ko-KR" sz="1606" b="1" dirty="0">
+                  <a:latin typeface="KoPub돋움체 Medium" panose="02020603020101020101" pitchFamily="18" charset="-127"/>
+                  <a:ea typeface="KoPub돋움체 Medium" panose="02020603020101020101" pitchFamily="18" charset="-127"/>
                 </a:rPr>
                 <a:t>[LIFE] </a:t>
               </a:r>
               <a:r>
-                <a:rPr lang="ko-KR" altLang="en-US" sz="1600" dirty="0">
-                  <a:latin typeface="KoPub돋움체 Light" panose="02020603020101020101" pitchFamily="18" charset="-127"/>
-                  <a:ea typeface="KoPub돋움체 Light" panose="02020603020101020101" pitchFamily="18" charset="-127"/>
+                <a:rPr lang="ko-KR" altLang="en-US" sz="1606" dirty="0">
+                  <a:latin typeface="KoPub돋움체 Medium" panose="02020603020101020101" pitchFamily="18" charset="-127"/>
+                  <a:ea typeface="KoPub돋움체 Medium" panose="02020603020101020101" pitchFamily="18" charset="-127"/>
                 </a:rPr>
                 <a:t>존엄</a:t>
               </a:r>
               <a:r>
-                <a:rPr lang="en-US" altLang="ko-KR" sz="1600" dirty="0">
-                  <a:latin typeface="KoPub돋움체 Light" panose="02020603020101020101" pitchFamily="18" charset="-127"/>
-                  <a:ea typeface="KoPub돋움체 Light" panose="02020603020101020101" pitchFamily="18" charset="-127"/>
+                <a:rPr lang="en-US" altLang="ko-KR" sz="1606" dirty="0">
+                  <a:latin typeface="KoPub돋움체 Medium" panose="02020603020101020101" pitchFamily="18" charset="-127"/>
+                  <a:ea typeface="KoPub돋움체 Medium" panose="02020603020101020101" pitchFamily="18" charset="-127"/>
                 </a:rPr>
                 <a:t>/</a:t>
               </a:r>
               <a:r>
-                <a:rPr lang="ko-KR" altLang="en-US" sz="1600" dirty="0">
-                  <a:latin typeface="KoPub돋움체 Light" panose="02020603020101020101" pitchFamily="18" charset="-127"/>
-                  <a:ea typeface="KoPub돋움체 Light" panose="02020603020101020101" pitchFamily="18" charset="-127"/>
+                <a:rPr lang="ko-KR" altLang="en-US" sz="1606" dirty="0">
+                  <a:latin typeface="KoPub돋움체 Medium" panose="02020603020101020101" pitchFamily="18" charset="-127"/>
+                  <a:ea typeface="KoPub돋움체 Medium" panose="02020603020101020101" pitchFamily="18" charset="-127"/>
                 </a:rPr>
                 <a:t>임종</a:t>
               </a:r>
-              <a:endParaRPr lang="en-US" altLang="ko-KR" sz="1600" dirty="0">
-                <a:latin typeface="KoPub돋움체 Light" panose="02020603020101020101" pitchFamily="18" charset="-127"/>
-                <a:ea typeface="KoPub돋움체 Light" panose="02020603020101020101" pitchFamily="18" charset="-127"/>
+              <a:endParaRPr lang="en-US" altLang="ko-KR" sz="1606" dirty="0">
+                <a:latin typeface="KoPub돋움체 Medium" panose="02020603020101020101" pitchFamily="18" charset="-127"/>
+                <a:ea typeface="KoPub돋움체 Medium" panose="02020603020101020101" pitchFamily="18" charset="-127"/>
               </a:endParaRPr>
             </a:p>
             <a:p>
               <a:r>
-                <a:rPr lang="en-US" altLang="ko-KR" sz="1600" b="1" dirty="0">
-                  <a:latin typeface="KoPub돋움체 Light" panose="02020603020101020101" pitchFamily="18" charset="-127"/>
-                  <a:ea typeface="KoPub돋움체 Light" panose="02020603020101020101" pitchFamily="18" charset="-127"/>
+                <a:rPr lang="en-US" altLang="ko-KR" sz="1606" b="1" dirty="0">
+                  <a:latin typeface="KoPub돋움체 Medium" panose="02020603020101020101" pitchFamily="18" charset="-127"/>
+                  <a:ea typeface="KoPub돋움체 Medium" panose="02020603020101020101" pitchFamily="18" charset="-127"/>
                 </a:rPr>
                 <a:t>[MEET] </a:t>
               </a:r>
               <a:r>
-                <a:rPr lang="ko-KR" altLang="en-US" sz="1600" dirty="0">
-                  <a:latin typeface="KoPub돋움체 Light" panose="02020603020101020101" pitchFamily="18" charset="-127"/>
-                  <a:ea typeface="KoPub돋움체 Light" panose="02020603020101020101" pitchFamily="18" charset="-127"/>
+                <a:rPr lang="ko-KR" altLang="en-US" sz="1606" dirty="0">
+                  <a:latin typeface="KoPub돋움체 Medium" panose="02020603020101020101" pitchFamily="18" charset="-127"/>
+                  <a:ea typeface="KoPub돋움체 Medium" panose="02020603020101020101" pitchFamily="18" charset="-127"/>
                 </a:rPr>
                 <a:t>보호자 면담</a:t>
               </a:r>
-              <a:endParaRPr lang="en-US" altLang="ko-KR" sz="1600" dirty="0">
-                <a:latin typeface="KoPub돋움체 Light" panose="02020603020101020101" pitchFamily="18" charset="-127"/>
-                <a:ea typeface="KoPub돋움체 Light" panose="02020603020101020101" pitchFamily="18" charset="-127"/>
+              <a:endParaRPr lang="en-US" altLang="ko-KR" sz="1606" dirty="0">
+                <a:latin typeface="KoPub돋움체 Medium" panose="02020603020101020101" pitchFamily="18" charset="-127"/>
+                <a:ea typeface="KoPub돋움체 Medium" panose="02020603020101020101" pitchFamily="18" charset="-127"/>
               </a:endParaRPr>
             </a:p>
             <a:p>
               <a:r>
-                <a:rPr lang="en-US" altLang="ko-KR" sz="1600" b="1" dirty="0">
-                  <a:latin typeface="KoPub돋움체 Light" panose="02020603020101020101" pitchFamily="18" charset="-127"/>
-                  <a:ea typeface="KoPub돋움체 Light" panose="02020603020101020101" pitchFamily="18" charset="-127"/>
+                <a:rPr lang="en-US" altLang="ko-KR" sz="1606" b="1" dirty="0">
+                  <a:latin typeface="KoPub돋움체 Medium" panose="02020603020101020101" pitchFamily="18" charset="-127"/>
+                  <a:ea typeface="KoPub돋움체 Medium" panose="02020603020101020101" pitchFamily="18" charset="-127"/>
                 </a:rPr>
                 <a:t>[MARROW] </a:t>
               </a:r>
               <a:r>
-                <a:rPr lang="ko-KR" altLang="en-US" sz="1600" dirty="0">
-                  <a:latin typeface="KoPub돋움체 Light" panose="02020603020101020101" pitchFamily="18" charset="-127"/>
-                  <a:ea typeface="KoPub돋움체 Light" panose="02020603020101020101" pitchFamily="18" charset="-127"/>
+                <a:rPr lang="ko-KR" altLang="en-US" sz="1606" dirty="0">
+                  <a:latin typeface="KoPub돋움체 Medium" panose="02020603020101020101" pitchFamily="18" charset="-127"/>
+                  <a:ea typeface="KoPub돋움체 Medium" panose="02020603020101020101" pitchFamily="18" charset="-127"/>
                 </a:rPr>
                 <a:t>골수 검사</a:t>
               </a:r>
-              <a:endParaRPr lang="en-US" altLang="ko-KR" sz="1600" dirty="0">
-                <a:latin typeface="KoPub돋움체 Light" panose="02020603020101020101" pitchFamily="18" charset="-127"/>
-                <a:ea typeface="KoPub돋움체 Light" panose="02020603020101020101" pitchFamily="18" charset="-127"/>
+              <a:endParaRPr lang="en-US" altLang="ko-KR" sz="1606" dirty="0">
+                <a:latin typeface="KoPub돋움체 Medium" panose="02020603020101020101" pitchFamily="18" charset="-127"/>
+                <a:ea typeface="KoPub돋움체 Medium" panose="02020603020101020101" pitchFamily="18" charset="-127"/>
               </a:endParaRPr>
             </a:p>
             <a:p>
               <a:r>
-                <a:rPr lang="en-US" altLang="ko-KR" sz="1600" b="1" dirty="0">
-                  <a:latin typeface="KoPub돋움체 Light" panose="02020603020101020101" pitchFamily="18" charset="-127"/>
-                  <a:ea typeface="KoPub돋움체 Light" panose="02020603020101020101" pitchFamily="18" charset="-127"/>
+                <a:rPr lang="en-US" altLang="ko-KR" sz="1606" b="1" dirty="0">
+                  <a:latin typeface="KoPub돋움체 Medium" panose="02020603020101020101" pitchFamily="18" charset="-127"/>
+                  <a:ea typeface="KoPub돋움체 Medium" panose="02020603020101020101" pitchFamily="18" charset="-127"/>
                 </a:rPr>
                 <a:t>[ISO] </a:t>
               </a:r>
               <a:r>
-                <a:rPr lang="ko-KR" altLang="en-US" sz="1600" dirty="0">
-                  <a:latin typeface="KoPub돋움체 Light" panose="02020603020101020101" pitchFamily="18" charset="-127"/>
-                  <a:ea typeface="KoPub돋움체 Light" panose="02020603020101020101" pitchFamily="18" charset="-127"/>
+                <a:rPr lang="ko-KR" altLang="en-US" sz="1606" dirty="0">
+                  <a:latin typeface="KoPub돋움체 Medium" panose="02020603020101020101" pitchFamily="18" charset="-127"/>
+                  <a:ea typeface="KoPub돋움체 Medium" panose="02020603020101020101" pitchFamily="18" charset="-127"/>
                 </a:rPr>
                 <a:t>격리 관리</a:t>
               </a:r>
-              <a:endParaRPr lang="en-US" altLang="ko-KR" sz="1600" dirty="0">
-                <a:latin typeface="KoPub돋움체 Light" panose="02020603020101020101" pitchFamily="18" charset="-127"/>
-                <a:ea typeface="KoPub돋움체 Light" panose="02020603020101020101" pitchFamily="18" charset="-127"/>
+              <a:endParaRPr lang="en-US" altLang="ko-KR" sz="1606" dirty="0">
+                <a:latin typeface="KoPub돋움체 Medium" panose="02020603020101020101" pitchFamily="18" charset="-127"/>
+                <a:ea typeface="KoPub돋움체 Medium" panose="02020603020101020101" pitchFamily="18" charset="-127"/>
               </a:endParaRPr>
             </a:p>
             <a:p>
               <a:r>
-                <a:rPr lang="en-US" altLang="ko-KR" sz="1600" b="1" dirty="0">
-                  <a:latin typeface="KoPub돋움체 Light" panose="02020603020101020101" pitchFamily="18" charset="-127"/>
-                  <a:ea typeface="KoPub돋움체 Light" panose="02020603020101020101" pitchFamily="18" charset="-127"/>
+                <a:rPr lang="en-US" altLang="ko-KR" sz="1606" b="1" dirty="0">
+                  <a:latin typeface="KoPub돋움체 Medium" panose="02020603020101020101" pitchFamily="18" charset="-127"/>
+                  <a:ea typeface="KoPub돋움체 Medium" panose="02020603020101020101" pitchFamily="18" charset="-127"/>
                 </a:rPr>
                 <a:t>[C-Status] </a:t>
               </a:r>
               <a:r>
-                <a:rPr lang="ko-KR" altLang="en-US" sz="1600" dirty="0">
-                  <a:latin typeface="KoPub돋움체 Light" panose="02020603020101020101" pitchFamily="18" charset="-127"/>
-                  <a:ea typeface="KoPub돋움체 Light" panose="02020603020101020101" pitchFamily="18" charset="-127"/>
+                <a:rPr lang="ko-KR" altLang="en-US" sz="1606" dirty="0">
+                  <a:latin typeface="KoPub돋움체 Medium" panose="02020603020101020101" pitchFamily="18" charset="-127"/>
+                  <a:ea typeface="KoPub돋움체 Medium" panose="02020603020101020101" pitchFamily="18" charset="-127"/>
                 </a:rPr>
                 <a:t>상태 악화</a:t>
               </a:r>
-              <a:endParaRPr lang="en-US" altLang="ko-KR" sz="1600" dirty="0">
-                <a:latin typeface="KoPub돋움체 Light" panose="02020603020101020101" pitchFamily="18" charset="-127"/>
-                <a:ea typeface="KoPub돋움체 Light" panose="02020603020101020101" pitchFamily="18" charset="-127"/>
+              <a:endParaRPr lang="en-US" altLang="ko-KR" sz="1606" dirty="0">
+                <a:latin typeface="KoPub돋움체 Medium" panose="02020603020101020101" pitchFamily="18" charset="-127"/>
+                <a:ea typeface="KoPub돋움체 Medium" panose="02020603020101020101" pitchFamily="18" charset="-127"/>
               </a:endParaRPr>
             </a:p>
             <a:p>
               <a:r>
-                <a:rPr lang="en-US" altLang="ko-KR" sz="1600" b="1" dirty="0">
-                  <a:latin typeface="KoPub돋움체 Light" panose="02020603020101020101" pitchFamily="18" charset="-127"/>
-                  <a:ea typeface="KoPub돋움체 Light" panose="02020603020101020101" pitchFamily="18" charset="-127"/>
+                <a:rPr lang="en-US" altLang="ko-KR" sz="1606" b="1" dirty="0">
+                  <a:latin typeface="KoPub돋움체 Medium" panose="02020603020101020101" pitchFamily="18" charset="-127"/>
+                  <a:ea typeface="KoPub돋움체 Medium" panose="02020603020101020101" pitchFamily="18" charset="-127"/>
                 </a:rPr>
                 <a:t>[PAIN] </a:t>
               </a:r>
               <a:r>
-                <a:rPr lang="ko-KR" altLang="en-US" sz="1600" dirty="0">
-                  <a:latin typeface="KoPub돋움체 Light" panose="02020603020101020101" pitchFamily="18" charset="-127"/>
-                  <a:ea typeface="KoPub돋움체 Light" panose="02020603020101020101" pitchFamily="18" charset="-127"/>
+                <a:rPr lang="ko-KR" altLang="en-US" sz="1606" dirty="0">
+                  <a:latin typeface="KoPub돋움체 Medium" panose="02020603020101020101" pitchFamily="18" charset="-127"/>
+                  <a:ea typeface="KoPub돋움체 Medium" panose="02020603020101020101" pitchFamily="18" charset="-127"/>
                 </a:rPr>
                 <a:t>통증 조절</a:t>
               </a:r>
-              <a:endParaRPr lang="en-US" altLang="ko-KR" sz="1600" dirty="0">
-                <a:latin typeface="KoPub돋움체 Light" panose="02020603020101020101" pitchFamily="18" charset="-127"/>
-                <a:ea typeface="KoPub돋움체 Light" panose="02020603020101020101" pitchFamily="18" charset="-127"/>
+              <a:endParaRPr lang="en-US" altLang="ko-KR" sz="1606" dirty="0">
+                <a:latin typeface="KoPub돋움체 Medium" panose="02020603020101020101" pitchFamily="18" charset="-127"/>
+                <a:ea typeface="KoPub돋움체 Medium" panose="02020603020101020101" pitchFamily="18" charset="-127"/>
               </a:endParaRPr>
             </a:p>
             <a:p>
               <a:r>
-                <a:rPr lang="en-US" altLang="ko-KR" sz="1600" b="1" dirty="0">
-                  <a:latin typeface="KoPub돋움체 Light" panose="02020603020101020101" pitchFamily="18" charset="-127"/>
-                  <a:ea typeface="KoPub돋움체 Light" panose="02020603020101020101" pitchFamily="18" charset="-127"/>
+                <a:rPr lang="en-US" altLang="ko-KR" sz="1606" b="1" dirty="0">
+                  <a:latin typeface="KoPub돋움체 Medium" panose="02020603020101020101" pitchFamily="18" charset="-127"/>
+                  <a:ea typeface="KoPub돋움체 Medium" panose="02020603020101020101" pitchFamily="18" charset="-127"/>
                 </a:rPr>
                 <a:t>[OUT] </a:t>
               </a:r>
               <a:r>
-                <a:rPr lang="ko-KR" altLang="en-US" sz="1600" dirty="0">
-                  <a:latin typeface="KoPub돋움체 Light" panose="02020603020101020101" pitchFamily="18" charset="-127"/>
-                  <a:ea typeface="KoPub돋움체 Light" panose="02020603020101020101" pitchFamily="18" charset="-127"/>
+                <a:rPr lang="ko-KR" altLang="en-US" sz="1606" dirty="0">
+                  <a:latin typeface="KoPub돋움체 Medium" panose="02020603020101020101" pitchFamily="18" charset="-127"/>
+                  <a:ea typeface="KoPub돋움체 Medium" panose="02020603020101020101" pitchFamily="18" charset="-127"/>
                 </a:rPr>
                 <a:t>퇴원</a:t>
               </a:r>
               <a:r>
-                <a:rPr lang="en-US" altLang="ko-KR" sz="1600" dirty="0">
-                  <a:latin typeface="KoPub돋움체 Light" panose="02020603020101020101" pitchFamily="18" charset="-127"/>
-                  <a:ea typeface="KoPub돋움체 Light" panose="02020603020101020101" pitchFamily="18" charset="-127"/>
+                <a:rPr lang="en-US" altLang="ko-KR" sz="1606" dirty="0">
+                  <a:latin typeface="KoPub돋움체 Medium" panose="02020603020101020101" pitchFamily="18" charset="-127"/>
+                  <a:ea typeface="KoPub돋움체 Medium" panose="02020603020101020101" pitchFamily="18" charset="-127"/>
                 </a:rPr>
                 <a:t>/</a:t>
               </a:r>
               <a:r>
-                <a:rPr lang="ko-KR" altLang="en-US" sz="1600" dirty="0">
-                  <a:latin typeface="KoPub돋움체 Light" panose="02020603020101020101" pitchFamily="18" charset="-127"/>
-                  <a:ea typeface="KoPub돋움체 Light" panose="02020603020101020101" pitchFamily="18" charset="-127"/>
+                <a:rPr lang="ko-KR" altLang="en-US" sz="1606" dirty="0">
+                  <a:latin typeface="KoPub돋움체 Medium" panose="02020603020101020101" pitchFamily="18" charset="-127"/>
+                  <a:ea typeface="KoPub돋움체 Medium" panose="02020603020101020101" pitchFamily="18" charset="-127"/>
                 </a:rPr>
                 <a:t>전과</a:t>
               </a:r>
               <a:r>
-                <a:rPr lang="en-US" altLang="ko-KR" sz="1600" dirty="0">
-                  <a:latin typeface="KoPub돋움체 Light" panose="02020603020101020101" pitchFamily="18" charset="-127"/>
-                  <a:ea typeface="KoPub돋움체 Light" panose="02020603020101020101" pitchFamily="18" charset="-127"/>
+                <a:rPr lang="en-US" altLang="ko-KR" sz="1606" dirty="0">
+                  <a:latin typeface="KoPub돋움체 Medium" panose="02020603020101020101" pitchFamily="18" charset="-127"/>
+                  <a:ea typeface="KoPub돋움체 Medium" panose="02020603020101020101" pitchFamily="18" charset="-127"/>
                 </a:rPr>
                 <a:t>/</a:t>
               </a:r>
               <a:r>
-                <a:rPr lang="ko-KR" altLang="en-US" sz="1600" dirty="0">
-                  <a:latin typeface="KoPub돋움체 Light" panose="02020603020101020101" pitchFamily="18" charset="-127"/>
-                  <a:ea typeface="KoPub돋움체 Light" panose="02020603020101020101" pitchFamily="18" charset="-127"/>
+                <a:rPr lang="ko-KR" altLang="en-US" sz="1606" dirty="0">
+                  <a:latin typeface="KoPub돋움체 Medium" panose="02020603020101020101" pitchFamily="18" charset="-127"/>
+                  <a:ea typeface="KoPub돋움체 Medium" panose="02020603020101020101" pitchFamily="18" charset="-127"/>
                 </a:rPr>
                 <a:t>사망</a:t>
               </a:r>
-              <a:endParaRPr lang="en-US" altLang="ko-KR" sz="1600" dirty="0">
-                <a:latin typeface="KoPub돋움체 Light" panose="02020603020101020101" pitchFamily="18" charset="-127"/>
-                <a:ea typeface="KoPub돋움체 Light" panose="02020603020101020101" pitchFamily="18" charset="-127"/>
+              <a:endParaRPr lang="en-US" altLang="ko-KR" sz="1606" dirty="0">
+                <a:latin typeface="KoPub돋움체 Medium" panose="02020603020101020101" pitchFamily="18" charset="-127"/>
+                <a:ea typeface="KoPub돋움체 Medium" panose="02020603020101020101" pitchFamily="18" charset="-127"/>
               </a:endParaRPr>
             </a:p>
           </p:txBody>
@@ -7883,7 +7913,7 @@
           <p:cNvPr id="2" name="TextBox 1">
             <a:extLst>
               <a:ext uri="{FF2B5EF4-FFF2-40B4-BE49-F238E27FC236}">
-                <a16:creationId xmlns:a16="http://schemas.microsoft.com/office/drawing/2014/main" id="{5C7E232E-6B0D-4C30-967C-1D82B967BC1B}"/>
+                <a16:creationId xmlns:a16="http://schemas.microsoft.com/office/drawing/2014/main" id="{196EB6C8-C5C3-CB8A-F040-B99A52E2DADA}"/>
               </a:ext>
             </a:extLst>
           </p:cNvPr>
@@ -7892,8 +7922,8 @@
         </p:nvSpPr>
         <p:spPr>
           <a:xfrm>
-            <a:off x="589442" y="881803"/>
-            <a:ext cx="2564384" cy="400110"/>
+            <a:off x="591795" y="875055"/>
+            <a:ext cx="2574624" cy="461665"/>
           </a:xfrm>
           <a:prstGeom prst="rect">
             <a:avLst/>
@@ -7908,29 +7938,29 @@
           <a:p>
             <a:pPr algn="ctr"/>
             <a:r>
-              <a:rPr lang="ko-KR" altLang="en-US" sz="2000" b="1" dirty="0">
-                <a:latin typeface="KoPub돋움체 Light" panose="02020603020101020101" pitchFamily="18" charset="-127"/>
-                <a:ea typeface="KoPub돋움체 Light" panose="02020603020101020101" pitchFamily="18" charset="-127"/>
+              <a:rPr lang="ko-KR" altLang="en-US" sz="2400" b="1" dirty="0">
+                <a:latin typeface="KoPub돋움체 Medium" panose="02020603020101020101" pitchFamily="18" charset="-127"/>
+                <a:ea typeface="KoPub돋움체 Medium" panose="02020603020101020101" pitchFamily="18" charset="-127"/>
               </a:rPr>
               <a:t>하이패스 태그 </a:t>
             </a:r>
             <a:r>
-              <a:rPr lang="en-US" altLang="ko-KR" sz="2000" b="1" dirty="0">
-                <a:latin typeface="KoPub돋움체 Light" panose="02020603020101020101" pitchFamily="18" charset="-127"/>
-                <a:ea typeface="KoPub돋움체 Light" panose="02020603020101020101" pitchFamily="18" charset="-127"/>
+              <a:rPr lang="en-US" altLang="ko-KR" sz="2400" b="1" dirty="0">
+                <a:latin typeface="KoPub돋움체 Medium" panose="02020603020101020101" pitchFamily="18" charset="-127"/>
+                <a:ea typeface="KoPub돋움체 Medium" panose="02020603020101020101" pitchFamily="18" charset="-127"/>
               </a:rPr>
               <a:t>10</a:t>
             </a:r>
             <a:r>
-              <a:rPr lang="ko-KR" altLang="en-US" sz="2000" b="1" dirty="0">
-                <a:latin typeface="KoPub돋움체 Light" panose="02020603020101020101" pitchFamily="18" charset="-127"/>
-                <a:ea typeface="KoPub돋움체 Light" panose="02020603020101020101" pitchFamily="18" charset="-127"/>
+              <a:rPr lang="ko-KR" altLang="en-US" sz="2400" b="1" dirty="0">
+                <a:latin typeface="KoPub돋움체 Medium" panose="02020603020101020101" pitchFamily="18" charset="-127"/>
+                <a:ea typeface="KoPub돋움체 Medium" panose="02020603020101020101" pitchFamily="18" charset="-127"/>
               </a:rPr>
               <a:t>종</a:t>
             </a:r>
-            <a:endParaRPr lang="en-US" altLang="ko-KR" sz="2000" b="1" dirty="0">
-              <a:latin typeface="KoPub돋움체 Light" panose="02020603020101020101" pitchFamily="18" charset="-127"/>
-              <a:ea typeface="KoPub돋움체 Light" panose="02020603020101020101" pitchFamily="18" charset="-127"/>
+            <a:endParaRPr lang="en-US" altLang="ko-KR" sz="2400" b="1" dirty="0">
+              <a:latin typeface="KoPub돋움체 Medium" panose="02020603020101020101" pitchFamily="18" charset="-127"/>
+              <a:ea typeface="KoPub돋움체 Medium" panose="02020603020101020101" pitchFamily="18" charset="-127"/>
             </a:endParaRPr>
           </a:p>
         </p:txBody>
@@ -7940,7 +7970,7 @@
           <p:cNvPr id="8" name="TextBox 7">
             <a:extLst>
               <a:ext uri="{FF2B5EF4-FFF2-40B4-BE49-F238E27FC236}">
-                <a16:creationId xmlns:a16="http://schemas.microsoft.com/office/drawing/2014/main" id="{2D7FF5CD-F432-4D5C-924D-9C31E13C1988}"/>
+                <a16:creationId xmlns:a16="http://schemas.microsoft.com/office/drawing/2014/main" id="{6A2BC0D4-04BB-F8C5-ECAE-E502B266F64D}"/>
               </a:ext>
             </a:extLst>
           </p:cNvPr>
@@ -7949,8 +7979,8 @@
         </p:nvSpPr>
         <p:spPr>
           <a:xfrm>
-            <a:off x="5281613" y="1573045"/>
-            <a:ext cx="2843725" cy="584775"/>
+            <a:off x="5193921" y="1509776"/>
+            <a:ext cx="2855080" cy="707886"/>
           </a:xfrm>
           <a:prstGeom prst="rect">
             <a:avLst/>
@@ -7964,43 +7994,43 @@
           <a:lstStyle/>
           <a:p>
             <a:r>
-              <a:rPr lang="ko-KR" altLang="en-US" sz="1600" dirty="0">
-                <a:latin typeface="KoPub돋움체 Light" panose="02020603020101020101" pitchFamily="18" charset="-127"/>
-                <a:ea typeface="KoPub돋움체 Light" panose="02020603020101020101" pitchFamily="18" charset="-127"/>
+              <a:rPr lang="ko-KR" altLang="en-US" sz="2000" b="1" dirty="0">
+                <a:latin typeface="KoPub돋움체 Medium" panose="02020603020101020101" pitchFamily="18" charset="-127"/>
+                <a:ea typeface="KoPub돋움체 Medium" panose="02020603020101020101" pitchFamily="18" charset="-127"/>
               </a:rPr>
               <a:t>근무 교대 시 미완료 건에 </a:t>
             </a:r>
             <a:r>
-              <a:rPr lang="en-US" altLang="ko-KR" sz="1600" dirty="0">
-                <a:latin typeface="KoPub돋움체 Light" panose="02020603020101020101" pitchFamily="18" charset="-127"/>
-                <a:ea typeface="KoPub돋움체 Light" panose="02020603020101020101" pitchFamily="18" charset="-127"/>
+              <a:rPr lang="en-US" altLang="ko-KR" sz="2000" b="1" dirty="0">
+                <a:latin typeface="KoPub돋움체 Medium" panose="02020603020101020101" pitchFamily="18" charset="-127"/>
+                <a:ea typeface="KoPub돋움체 Medium" panose="02020603020101020101" pitchFamily="18" charset="-127"/>
               </a:rPr>
               <a:t>'</a:t>
             </a:r>
             <a:r>
-              <a:rPr lang="ko-KR" altLang="en-US" sz="1600" dirty="0">
-                <a:latin typeface="KoPub돋움체 Light" panose="02020603020101020101" pitchFamily="18" charset="-127"/>
-                <a:ea typeface="KoPub돋움체 Light" panose="02020603020101020101" pitchFamily="18" charset="-127"/>
+              <a:rPr lang="ko-KR" altLang="en-US" sz="2000" b="1" dirty="0">
+                <a:latin typeface="KoPub돋움체 Medium" panose="02020603020101020101" pitchFamily="18" charset="-127"/>
+                <a:ea typeface="KoPub돋움체 Medium" panose="02020603020101020101" pitchFamily="18" charset="-127"/>
               </a:rPr>
               <a:t>답장</a:t>
             </a:r>
             <a:r>
-              <a:rPr lang="en-US" altLang="ko-KR" sz="1600" dirty="0">
-                <a:latin typeface="KoPub돋움체 Light" panose="02020603020101020101" pitchFamily="18" charset="-127"/>
-                <a:ea typeface="KoPub돋움체 Light" panose="02020603020101020101" pitchFamily="18" charset="-127"/>
+              <a:rPr lang="en-US" altLang="ko-KR" sz="2000" b="1" dirty="0">
+                <a:latin typeface="KoPub돋움체 Medium" panose="02020603020101020101" pitchFamily="18" charset="-127"/>
+                <a:ea typeface="KoPub돋움체 Medium" panose="02020603020101020101" pitchFamily="18" charset="-127"/>
               </a:rPr>
               <a:t>'</a:t>
             </a:r>
             <a:r>
-              <a:rPr lang="ko-KR" altLang="en-US" sz="1600" dirty="0">
-                <a:latin typeface="KoPub돋움체 Light" panose="02020603020101020101" pitchFamily="18" charset="-127"/>
-                <a:ea typeface="KoPub돋움체 Light" panose="02020603020101020101" pitchFamily="18" charset="-127"/>
+              <a:rPr lang="ko-KR" altLang="en-US" sz="2000" b="1" dirty="0">
+                <a:latin typeface="KoPub돋움체 Medium" panose="02020603020101020101" pitchFamily="18" charset="-127"/>
+                <a:ea typeface="KoPub돋움체 Medium" panose="02020603020101020101" pitchFamily="18" charset="-127"/>
               </a:rPr>
               <a:t>으로 인계 기록</a:t>
             </a:r>
-            <a:endParaRPr lang="en-US" altLang="ko-KR" sz="1600" dirty="0">
-              <a:latin typeface="KoPub돋움체 Light" panose="02020603020101020101" pitchFamily="18" charset="-127"/>
-              <a:ea typeface="KoPub돋움체 Light" panose="02020603020101020101" pitchFamily="18" charset="-127"/>
+            <a:endParaRPr lang="en-US" altLang="ko-KR" sz="2000" b="1" dirty="0">
+              <a:latin typeface="KoPub돋움체 Medium" panose="02020603020101020101" pitchFamily="18" charset="-127"/>
+              <a:ea typeface="KoPub돋움체 Medium" panose="02020603020101020101" pitchFamily="18" charset="-127"/>
             </a:endParaRPr>
           </a:p>
         </p:txBody>
@@ -8010,7 +8040,7 @@
           <p:cNvPr id="9" name="사각형: 둥근 모서리 8">
             <a:extLst>
               <a:ext uri="{FF2B5EF4-FFF2-40B4-BE49-F238E27FC236}">
-                <a16:creationId xmlns:a16="http://schemas.microsoft.com/office/drawing/2014/main" id="{81771CDF-B55B-4421-928F-D1D7D43CFAC8}"/>
+                <a16:creationId xmlns:a16="http://schemas.microsoft.com/office/drawing/2014/main" id="{CF28CAB5-AEE1-ACB1-631A-5F3028FA4BDE}"/>
               </a:ext>
             </a:extLst>
           </p:cNvPr>
@@ -8019,8 +8049,8 @@
         </p:nvSpPr>
         <p:spPr>
           <a:xfrm>
-            <a:off x="5067299" y="1396134"/>
-            <a:ext cx="3484563" cy="959835"/>
+            <a:off x="5087533" y="1391440"/>
+            <a:ext cx="3498477" cy="963668"/>
           </a:xfrm>
           <a:prstGeom prst="roundRect">
             <a:avLst>
@@ -8057,9 +8087,9 @@
           <a:lstStyle/>
           <a:p>
             <a:pPr algn="ctr"/>
-            <a:endParaRPr lang="ko-KR" altLang="en-US" sz="5080">
+            <a:endParaRPr lang="ko-KR" altLang="en-US" sz="5100">
               <a:latin typeface="KoPub돋움체 Medium" panose="02020603020101020101" pitchFamily="18" charset="-127"/>
-              <a:ea typeface="KoPub돋움체 Light" panose="02020603020101020101"/>
+              <a:ea typeface="KoPub돋움체 Medium" panose="02020603020101020101" pitchFamily="18" charset="-127"/>
             </a:endParaRPr>
           </a:p>
         </p:txBody>
@@ -8069,7 +8099,7 @@
           <p:cNvPr id="11" name="사각형: 둥근 모서리 10">
             <a:extLst>
               <a:ext uri="{FF2B5EF4-FFF2-40B4-BE49-F238E27FC236}">
-                <a16:creationId xmlns:a16="http://schemas.microsoft.com/office/drawing/2014/main" id="{A9BD57B0-0CB8-437B-91FF-358B1B271C52}"/>
+                <a16:creationId xmlns:a16="http://schemas.microsoft.com/office/drawing/2014/main" id="{1BBF0A20-E419-C03C-9D4B-59099E5257F7}"/>
               </a:ext>
             </a:extLst>
           </p:cNvPr>
@@ -8078,8 +8108,8 @@
         </p:nvSpPr>
         <p:spPr>
           <a:xfrm>
-            <a:off x="3204625" y="1401423"/>
-            <a:ext cx="1811875" cy="954545"/>
+            <a:off x="3217421" y="1396750"/>
+            <a:ext cx="1819110" cy="958357"/>
           </a:xfrm>
           <a:prstGeom prst="roundRect">
             <a:avLst>
@@ -8117,9 +8147,9 @@
           <a:lstStyle/>
           <a:p>
             <a:pPr algn="ctr"/>
-            <a:endParaRPr lang="ko-KR" altLang="en-US" sz="5080">
+            <a:endParaRPr lang="ko-KR" altLang="en-US" sz="5100">
               <a:latin typeface="KoPub돋움체 Medium" panose="02020603020101020101" pitchFamily="18" charset="-127"/>
-              <a:ea typeface="KoPub돋움체 Light" panose="02020603020101020101"/>
+              <a:ea typeface="KoPub돋움체 Medium" panose="02020603020101020101" pitchFamily="18" charset="-127"/>
             </a:endParaRPr>
           </a:p>
         </p:txBody>
@@ -8129,7 +8159,7 @@
           <p:cNvPr id="12" name="TextBox 11">
             <a:extLst>
               <a:ext uri="{FF2B5EF4-FFF2-40B4-BE49-F238E27FC236}">
-                <a16:creationId xmlns:a16="http://schemas.microsoft.com/office/drawing/2014/main" id="{3717CE27-01D2-4557-B697-30F1806A81B3}"/>
+                <a16:creationId xmlns:a16="http://schemas.microsoft.com/office/drawing/2014/main" id="{0E4E8DA3-552E-B54F-57A4-CE4894D3CE5A}"/>
               </a:ext>
             </a:extLst>
           </p:cNvPr>
@@ -8138,8 +8168,8 @@
         </p:nvSpPr>
         <p:spPr>
           <a:xfrm>
-            <a:off x="3573396" y="1682514"/>
-            <a:ext cx="1074332" cy="338554"/>
+            <a:off x="3501645" y="1656841"/>
+            <a:ext cx="1250663" cy="400110"/>
           </a:xfrm>
           <a:prstGeom prst="rect">
             <a:avLst/>
@@ -8154,9 +8184,9 @@
           <a:p>
             <a:pPr algn="ctr"/>
             <a:r>
-              <a:rPr lang="en-US" altLang="ko-KR" sz="1600" b="1" dirty="0">
-                <a:latin typeface="KoPub돋움체 Light" panose="02020603020101020101" pitchFamily="18" charset="-127"/>
-                <a:ea typeface="KoPub돋움체 Light" panose="02020603020101020101" pitchFamily="18" charset="-127"/>
+              <a:rPr lang="en-US" altLang="ko-KR" sz="2000" b="1" dirty="0">
+                <a:latin typeface="KoPub돋움체 Medium" panose="02020603020101020101" pitchFamily="18" charset="-127"/>
+                <a:ea typeface="KoPub돋움체 Medium" panose="02020603020101020101" pitchFamily="18" charset="-127"/>
               </a:rPr>
               <a:t>[IN-OUT]</a:t>
             </a:r>
@@ -8168,7 +8198,7 @@
           <p:cNvPr id="4" name="직사각형 3">
             <a:extLst>
               <a:ext uri="{FF2B5EF4-FFF2-40B4-BE49-F238E27FC236}">
-                <a16:creationId xmlns:a16="http://schemas.microsoft.com/office/drawing/2014/main" id="{3306E135-233E-4999-A710-7E3C99EFDAEF}"/>
+                <a16:creationId xmlns:a16="http://schemas.microsoft.com/office/drawing/2014/main" id="{D35535E3-4980-6B7B-BE8D-8EC4AB94594A}"/>
               </a:ext>
             </a:extLst>
           </p:cNvPr>
@@ -8177,8 +8207,8 @@
         </p:nvSpPr>
         <p:spPr>
           <a:xfrm>
-            <a:off x="4362454" y="860517"/>
-            <a:ext cx="2762295" cy="400110"/>
+            <a:off x="4379873" y="853684"/>
+            <a:ext cx="2863284" cy="461665"/>
           </a:xfrm>
           <a:prstGeom prst="rect">
             <a:avLst/>
@@ -8191,15 +8221,15 @@
           <a:lstStyle/>
           <a:p>
             <a:r>
-              <a:rPr lang="ko-KR" altLang="en-US" sz="2000" b="1" dirty="0">
-                <a:latin typeface="KoPub돋움체 Light" panose="02020603020101020101" pitchFamily="18" charset="-127"/>
-                <a:ea typeface="KoPub돋움체 Light" panose="02020603020101020101" pitchFamily="18" charset="-127"/>
+              <a:rPr lang="ko-KR" altLang="en-US" sz="2400" b="1" dirty="0">
+                <a:latin typeface="KoPub돋움체 Medium" panose="02020603020101020101" pitchFamily="18" charset="-127"/>
+                <a:ea typeface="KoPub돋움체 Medium" panose="02020603020101020101" pitchFamily="18" charset="-127"/>
               </a:rPr>
               <a:t>나를 지키는 방어 기록</a:t>
             </a:r>
-            <a:endParaRPr lang="en-US" altLang="ko-KR" sz="2000" b="1" dirty="0">
-              <a:latin typeface="KoPub돋움체 Light" panose="02020603020101020101" pitchFamily="18" charset="-127"/>
-              <a:ea typeface="KoPub돋움체 Light" panose="02020603020101020101" pitchFamily="18" charset="-127"/>
+            <a:endParaRPr lang="en-US" altLang="ko-KR" sz="2400" b="1" dirty="0">
+              <a:latin typeface="KoPub돋움체 Medium" panose="02020603020101020101" pitchFamily="18" charset="-127"/>
+              <a:ea typeface="KoPub돋움체 Medium" panose="02020603020101020101" pitchFamily="18" charset="-127"/>
             </a:endParaRPr>
           </a:p>
         </p:txBody>
@@ -8209,7 +8239,7 @@
           <p:cNvPr id="27" name="TextBox 26">
             <a:extLst>
               <a:ext uri="{FF2B5EF4-FFF2-40B4-BE49-F238E27FC236}">
-                <a16:creationId xmlns:a16="http://schemas.microsoft.com/office/drawing/2014/main" id="{6950ADB8-A755-4C4B-8102-F58976B5B6D4}"/>
+                <a16:creationId xmlns:a16="http://schemas.microsoft.com/office/drawing/2014/main" id="{BE212D9F-9BAC-5AE0-01B0-D1B97227F909}"/>
               </a:ext>
             </a:extLst>
           </p:cNvPr>
@@ -8218,8 +8248,8 @@
         </p:nvSpPr>
         <p:spPr>
           <a:xfrm>
-            <a:off x="5281613" y="3503834"/>
-            <a:ext cx="3119437" cy="584775"/>
+            <a:off x="5193921" y="3448274"/>
+            <a:ext cx="3443091" cy="707886"/>
           </a:xfrm>
           <a:prstGeom prst="rect">
             <a:avLst/>
@@ -8233,92 +8263,92 @@
           <a:lstStyle/>
           <a:p>
             <a:r>
-              <a:rPr lang="en-US" altLang="ko-KR" sz="1600" dirty="0">
-                <a:latin typeface="KoPub돋움체 Light" panose="02020603020101020101" pitchFamily="18" charset="-127"/>
-                <a:ea typeface="KoPub돋움체 Light" panose="02020603020101020101" pitchFamily="18" charset="-127"/>
+              <a:rPr lang="en-US" altLang="ko-KR" sz="2000" b="1" dirty="0">
+                <a:latin typeface="KoPub돋움체 Medium" panose="02020603020101020101" pitchFamily="18" charset="-127"/>
+                <a:ea typeface="KoPub돋움체 Medium" panose="02020603020101020101" pitchFamily="18" charset="-127"/>
               </a:rPr>
               <a:t>PA </a:t>
             </a:r>
             <a:r>
-              <a:rPr lang="ko-KR" altLang="en-US" sz="1600" dirty="0">
-                <a:latin typeface="KoPub돋움체 Light" panose="02020603020101020101" pitchFamily="18" charset="-127"/>
-                <a:ea typeface="KoPub돋움체 Light" panose="02020603020101020101" pitchFamily="18" charset="-127"/>
+              <a:rPr lang="ko-KR" altLang="en-US" sz="2000" b="1" dirty="0">
+                <a:latin typeface="KoPub돋움체 Medium" panose="02020603020101020101" pitchFamily="18" charset="-127"/>
+                <a:ea typeface="KoPub돋움체 Medium" panose="02020603020101020101" pitchFamily="18" charset="-127"/>
               </a:rPr>
               <a:t>지연 사유</a:t>
             </a:r>
             <a:r>
-              <a:rPr lang="en-US" altLang="ko-KR" sz="1600" dirty="0">
-                <a:latin typeface="KoPub돋움체 Light" panose="02020603020101020101" pitchFamily="18" charset="-127"/>
-                <a:ea typeface="KoPub돋움체 Light" panose="02020603020101020101" pitchFamily="18" charset="-127"/>
+              <a:rPr lang="en-US" altLang="ko-KR" sz="2000" b="1" dirty="0">
+                <a:latin typeface="KoPub돋움체 Medium" panose="02020603020101020101" pitchFamily="18" charset="-127"/>
+                <a:ea typeface="KoPub돋움체 Medium" panose="02020603020101020101" pitchFamily="18" charset="-127"/>
               </a:rPr>
               <a:t>(</a:t>
             </a:r>
             <a:r>
-              <a:rPr lang="ko-KR" altLang="en-US" sz="1600" dirty="0">
-                <a:latin typeface="KoPub돋움체 Light" panose="02020603020101020101" pitchFamily="18" charset="-127"/>
-                <a:ea typeface="KoPub돋움체 Light" panose="02020603020101020101" pitchFamily="18" charset="-127"/>
+              <a:rPr lang="ko-KR" altLang="en-US" sz="2000" b="1" dirty="0">
+                <a:latin typeface="KoPub돋움체 Medium" panose="02020603020101020101" pitchFamily="18" charset="-127"/>
+                <a:ea typeface="KoPub돋움체 Medium" panose="02020603020101020101" pitchFamily="18" charset="-127"/>
               </a:rPr>
               <a:t>응급</a:t>
             </a:r>
             <a:r>
-              <a:rPr lang="en-US" altLang="ko-KR" sz="1600" dirty="0">
-                <a:latin typeface="KoPub돋움체 Light" panose="02020603020101020101" pitchFamily="18" charset="-127"/>
-                <a:ea typeface="KoPub돋움체 Light" panose="02020603020101020101" pitchFamily="18" charset="-127"/>
+              <a:rPr lang="en-US" altLang="ko-KR" sz="2000" b="1" dirty="0">
+                <a:latin typeface="KoPub돋움체 Medium" panose="02020603020101020101" pitchFamily="18" charset="-127"/>
+                <a:ea typeface="KoPub돋움체 Medium" panose="02020603020101020101" pitchFamily="18" charset="-127"/>
               </a:rPr>
               <a:t>·</a:t>
             </a:r>
             <a:r>
-              <a:rPr lang="ko-KR" altLang="en-US" sz="1600" dirty="0">
-                <a:latin typeface="KoPub돋움체 Light" panose="02020603020101020101" pitchFamily="18" charset="-127"/>
-                <a:ea typeface="KoPub돋움체 Light" panose="02020603020101020101" pitchFamily="18" charset="-127"/>
+              <a:rPr lang="ko-KR" altLang="en-US" sz="2000" b="1" dirty="0">
+                <a:latin typeface="KoPub돋움체 Medium" panose="02020603020101020101" pitchFamily="18" charset="-127"/>
+                <a:ea typeface="KoPub돋움체 Medium" panose="02020603020101020101" pitchFamily="18" charset="-127"/>
               </a:rPr>
               <a:t>수술</a:t>
             </a:r>
             <a:r>
-              <a:rPr lang="en-US" altLang="ko-KR" sz="1600" dirty="0">
-                <a:latin typeface="KoPub돋움체 Light" panose="02020603020101020101" pitchFamily="18" charset="-127"/>
-                <a:ea typeface="KoPub돋움체 Light" panose="02020603020101020101" pitchFamily="18" charset="-127"/>
+              <a:rPr lang="en-US" altLang="ko-KR" sz="2000" b="1" dirty="0">
+                <a:latin typeface="KoPub돋움체 Medium" panose="02020603020101020101" pitchFamily="18" charset="-127"/>
+                <a:ea typeface="KoPub돋움체 Medium" panose="02020603020101020101" pitchFamily="18" charset="-127"/>
               </a:rPr>
               <a:t>·</a:t>
             </a:r>
             <a:r>
-              <a:rPr lang="ko-KR" altLang="en-US" sz="1600" dirty="0">
-                <a:latin typeface="KoPub돋움체 Light" panose="02020603020101020101" pitchFamily="18" charset="-127"/>
-                <a:ea typeface="KoPub돋움체 Light" panose="02020603020101020101" pitchFamily="18" charset="-127"/>
+              <a:rPr lang="ko-KR" altLang="en-US" sz="2000" b="1" dirty="0">
+                <a:latin typeface="KoPub돋움체 Medium" panose="02020603020101020101" pitchFamily="18" charset="-127"/>
+                <a:ea typeface="KoPub돋움체 Medium" panose="02020603020101020101" pitchFamily="18" charset="-127"/>
               </a:rPr>
               <a:t>대기</a:t>
             </a:r>
             <a:r>
-              <a:rPr lang="en-US" altLang="ko-KR" sz="1600" dirty="0">
-                <a:latin typeface="KoPub돋움체 Light" panose="02020603020101020101" pitchFamily="18" charset="-127"/>
-                <a:ea typeface="KoPub돋움체 Light" panose="02020603020101020101" pitchFamily="18" charset="-127"/>
+              <a:rPr lang="en-US" altLang="ko-KR" sz="2000" b="1" dirty="0">
+                <a:latin typeface="KoPub돋움체 Medium" panose="02020603020101020101" pitchFamily="18" charset="-127"/>
+                <a:ea typeface="KoPub돋움체 Medium" panose="02020603020101020101" pitchFamily="18" charset="-127"/>
               </a:rPr>
               <a:t>·</a:t>
             </a:r>
             <a:r>
-              <a:rPr lang="ko-KR" altLang="en-US" sz="1600" dirty="0" err="1">
-                <a:latin typeface="KoPub돋움체 Light" panose="02020603020101020101" pitchFamily="18" charset="-127"/>
-                <a:ea typeface="KoPub돋움체 Light" panose="02020603020101020101" pitchFamily="18" charset="-127"/>
+              <a:rPr lang="ko-KR" altLang="en-US" sz="2000" b="1" dirty="0" err="1">
+                <a:latin typeface="KoPub돋움체 Medium" panose="02020603020101020101" pitchFamily="18" charset="-127"/>
+                <a:ea typeface="KoPub돋움체 Medium" panose="02020603020101020101" pitchFamily="18" charset="-127"/>
               </a:rPr>
               <a:t>컨펌</a:t>
             </a:r>
             <a:r>
-              <a:rPr lang="en-US" altLang="ko-KR" sz="1600" dirty="0">
-                <a:latin typeface="KoPub돋움체 Light" panose="02020603020101020101" pitchFamily="18" charset="-127"/>
-                <a:ea typeface="KoPub돋움체 Light" panose="02020603020101020101" pitchFamily="18" charset="-127"/>
+              <a:rPr lang="en-US" altLang="ko-KR" sz="2000" b="1" dirty="0">
+                <a:latin typeface="KoPub돋움체 Medium" panose="02020603020101020101" pitchFamily="18" charset="-127"/>
+                <a:ea typeface="KoPub돋움체 Medium" panose="02020603020101020101" pitchFamily="18" charset="-127"/>
               </a:rPr>
               <a:t>) </a:t>
             </a:r>
             <a:r>
-              <a:rPr lang="ko-KR" altLang="en-US" sz="1600" dirty="0">
-                <a:latin typeface="KoPub돋움체 Light" panose="02020603020101020101" pitchFamily="18" charset="-127"/>
-                <a:ea typeface="KoPub돋움체 Light" panose="02020603020101020101" pitchFamily="18" charset="-127"/>
+              <a:rPr lang="ko-KR" altLang="en-US" sz="2000" b="1" dirty="0">
+                <a:latin typeface="KoPub돋움체 Medium" panose="02020603020101020101" pitchFamily="18" charset="-127"/>
+                <a:ea typeface="KoPub돋움체 Medium" panose="02020603020101020101" pitchFamily="18" charset="-127"/>
               </a:rPr>
               <a:t>명시</a:t>
             </a:r>
-            <a:endParaRPr lang="en-US" altLang="ko-KR" sz="1600" dirty="0">
-              <a:latin typeface="KoPub돋움체 Light" panose="02020603020101020101" pitchFamily="18" charset="-127"/>
-              <a:ea typeface="KoPub돋움체 Light" panose="02020603020101020101" pitchFamily="18" charset="-127"/>
+            <a:endParaRPr lang="en-US" altLang="ko-KR" sz="2000" b="1" dirty="0">
+              <a:latin typeface="KoPub돋움체 Medium" panose="02020603020101020101" pitchFamily="18" charset="-127"/>
+              <a:ea typeface="KoPub돋움체 Medium" panose="02020603020101020101" pitchFamily="18" charset="-127"/>
             </a:endParaRPr>
           </a:p>
         </p:txBody>
@@ -8328,7 +8358,7 @@
           <p:cNvPr id="28" name="사각형: 둥근 모서리 27">
             <a:extLst>
               <a:ext uri="{FF2B5EF4-FFF2-40B4-BE49-F238E27FC236}">
-                <a16:creationId xmlns:a16="http://schemas.microsoft.com/office/drawing/2014/main" id="{2A688FE5-A3E9-4A7D-9640-97D9C0317280}"/>
+                <a16:creationId xmlns:a16="http://schemas.microsoft.com/office/drawing/2014/main" id="{7A826D77-1BA6-3A5C-DC6C-483A74847A80}"/>
               </a:ext>
             </a:extLst>
           </p:cNvPr>
@@ -8337,8 +8367,8 @@
         </p:nvSpPr>
         <p:spPr>
           <a:xfrm>
-            <a:off x="5067299" y="3376222"/>
-            <a:ext cx="3484563" cy="829420"/>
+            <a:off x="5087533" y="3379434"/>
+            <a:ext cx="3498477" cy="832732"/>
           </a:xfrm>
           <a:prstGeom prst="roundRect">
             <a:avLst>
@@ -8375,9 +8405,9 @@
           <a:lstStyle/>
           <a:p>
             <a:pPr algn="ctr"/>
-            <a:endParaRPr lang="ko-KR" altLang="en-US" sz="5080">
+            <a:endParaRPr lang="ko-KR" altLang="en-US" sz="5100">
               <a:latin typeface="KoPub돋움체 Medium" panose="02020603020101020101" pitchFamily="18" charset="-127"/>
-              <a:ea typeface="KoPub돋움체 Light" panose="02020603020101020101"/>
+              <a:ea typeface="KoPub돋움체 Medium" panose="02020603020101020101" pitchFamily="18" charset="-127"/>
             </a:endParaRPr>
           </a:p>
         </p:txBody>
@@ -8387,7 +8417,7 @@
           <p:cNvPr id="29" name="사각형: 둥근 모서리 28">
             <a:extLst>
               <a:ext uri="{FF2B5EF4-FFF2-40B4-BE49-F238E27FC236}">
-                <a16:creationId xmlns:a16="http://schemas.microsoft.com/office/drawing/2014/main" id="{64D39DA0-5EC6-4030-BC9A-5BA4D6820777}"/>
+                <a16:creationId xmlns:a16="http://schemas.microsoft.com/office/drawing/2014/main" id="{38967012-4C80-7DD8-C2A4-2679288AF517}"/>
               </a:ext>
             </a:extLst>
           </p:cNvPr>
@@ -8396,8 +8426,8 @@
         </p:nvSpPr>
         <p:spPr>
           <a:xfrm>
-            <a:off x="3204625" y="3381511"/>
-            <a:ext cx="1811875" cy="829420"/>
+            <a:off x="3217421" y="3384744"/>
+            <a:ext cx="1819110" cy="832732"/>
           </a:xfrm>
           <a:prstGeom prst="roundRect">
             <a:avLst>
@@ -8435,9 +8465,9 @@
           <a:lstStyle/>
           <a:p>
             <a:pPr algn="ctr"/>
-            <a:endParaRPr lang="ko-KR" altLang="en-US" sz="5080">
+            <a:endParaRPr lang="ko-KR" altLang="en-US" sz="5100">
               <a:latin typeface="KoPub돋움체 Medium" panose="02020603020101020101" pitchFamily="18" charset="-127"/>
-              <a:ea typeface="KoPub돋움체 Light" panose="02020603020101020101"/>
+              <a:ea typeface="KoPub돋움체 Medium" panose="02020603020101020101" pitchFamily="18" charset="-127"/>
             </a:endParaRPr>
           </a:p>
         </p:txBody>
@@ -8447,7 +8477,7 @@
           <p:cNvPr id="30" name="TextBox 29">
             <a:extLst>
               <a:ext uri="{FF2B5EF4-FFF2-40B4-BE49-F238E27FC236}">
-                <a16:creationId xmlns:a16="http://schemas.microsoft.com/office/drawing/2014/main" id="{3C4779CB-7AE4-4301-8B2E-ADD0772F1C8C}"/>
+                <a16:creationId xmlns:a16="http://schemas.microsoft.com/office/drawing/2014/main" id="{D5B45438-AE69-D0DE-61CF-141996BFEA94}"/>
               </a:ext>
             </a:extLst>
           </p:cNvPr>
@@ -8456,8 +8486,8 @@
         </p:nvSpPr>
         <p:spPr>
           <a:xfrm>
-            <a:off x="3660760" y="3626944"/>
-            <a:ext cx="899605" cy="338554"/>
+            <a:off x="3588368" y="3609035"/>
+            <a:ext cx="1077219" cy="400110"/>
           </a:xfrm>
           <a:prstGeom prst="rect">
             <a:avLst/>
@@ -8472,9 +8502,9 @@
           <a:p>
             <a:pPr algn="ctr"/>
             <a:r>
-              <a:rPr lang="en-US" altLang="ko-KR" sz="1600" b="1" dirty="0">
-                <a:latin typeface="KoPub돋움체 Light" panose="02020603020101020101" pitchFamily="18" charset="-127"/>
-                <a:ea typeface="KoPub돋움체 Light" panose="02020603020101020101" pitchFamily="18" charset="-127"/>
+              <a:rPr lang="en-US" altLang="ko-KR" sz="2000" b="1" dirty="0">
+                <a:latin typeface="KoPub돋움체 Medium" panose="02020603020101020101" pitchFamily="18" charset="-127"/>
+                <a:ea typeface="KoPub돋움체 Medium" panose="02020603020101020101" pitchFamily="18" charset="-127"/>
               </a:rPr>
               <a:t>C-Code</a:t>
             </a:r>
@@ -8486,7 +8516,7 @@
           <p:cNvPr id="33" name="TextBox 32">
             <a:extLst>
               <a:ext uri="{FF2B5EF4-FFF2-40B4-BE49-F238E27FC236}">
-                <a16:creationId xmlns:a16="http://schemas.microsoft.com/office/drawing/2014/main" id="{CE2D936A-A45B-43D0-819F-2B99B59D02C1}"/>
+                <a16:creationId xmlns:a16="http://schemas.microsoft.com/office/drawing/2014/main" id="{0BCD88DB-33DB-F02B-AFA9-2BDC4517AA8D}"/>
               </a:ext>
             </a:extLst>
           </p:cNvPr>
@@ -8495,8 +8525,8 @@
         </p:nvSpPr>
         <p:spPr>
           <a:xfrm>
-            <a:off x="1847923" y="4282983"/>
-            <a:ext cx="5424883" cy="461665"/>
+            <a:off x="2192472" y="4289816"/>
+            <a:ext cx="4772204" cy="465054"/>
           </a:xfrm>
           <a:prstGeom prst="rect">
             <a:avLst/>
@@ -8511,72 +8541,72 @@
           <a:p>
             <a:pPr algn="ctr"/>
             <a:r>
-              <a:rPr lang="en-US" altLang="ko-KR" sz="2400" b="1" dirty="0">
+              <a:rPr lang="en-US" altLang="ko-KR" sz="2410" b="1" dirty="0">
                 <a:solidFill>
                   <a:srgbClr val="7030A0"/>
                 </a:solidFill>
-                <a:latin typeface="KoPub돋움체 Light" panose="02020603020101020101" pitchFamily="18" charset="-127"/>
-                <a:ea typeface="KoPub돋움체 Light" panose="02020603020101020101" pitchFamily="18" charset="-127"/>
+                <a:latin typeface="KoPub돋움체 Medium" panose="02020603020101020101" pitchFamily="18" charset="-127"/>
+                <a:ea typeface="KoPub돋움체 Medium" panose="02020603020101020101" pitchFamily="18" charset="-127"/>
               </a:rPr>
               <a:t>“</a:t>
             </a:r>
             <a:r>
-              <a:rPr lang="ko-KR" altLang="en-US" sz="2400" b="1" dirty="0">
+              <a:rPr lang="ko-KR" altLang="en-US" sz="2410" b="1" dirty="0">
                 <a:solidFill>
                   <a:srgbClr val="7030A0"/>
                 </a:solidFill>
-                <a:latin typeface="KoPub돋움체 Light" panose="02020603020101020101" pitchFamily="18" charset="-127"/>
-                <a:ea typeface="KoPub돋움체 Light" panose="02020603020101020101" pitchFamily="18" charset="-127"/>
+                <a:latin typeface="KoPub돋움체 Medium" panose="02020603020101020101" pitchFamily="18" charset="-127"/>
+                <a:ea typeface="KoPub돋움체 Medium" panose="02020603020101020101" pitchFamily="18" charset="-127"/>
               </a:rPr>
               <a:t>기록은 메신저에서</a:t>
             </a:r>
             <a:r>
-              <a:rPr lang="en-US" altLang="ko-KR" sz="2400" b="1" dirty="0">
+              <a:rPr lang="en-US" altLang="ko-KR" sz="2410" b="1" dirty="0">
                 <a:solidFill>
                   <a:srgbClr val="7030A0"/>
                 </a:solidFill>
-                <a:latin typeface="KoPub돋움체 Light" panose="02020603020101020101" pitchFamily="18" charset="-127"/>
-                <a:ea typeface="KoPub돋움체 Light" panose="02020603020101020101" pitchFamily="18" charset="-127"/>
+                <a:latin typeface="KoPub돋움체 Medium" panose="02020603020101020101" pitchFamily="18" charset="-127"/>
+                <a:ea typeface="KoPub돋움체 Medium" panose="02020603020101020101" pitchFamily="18" charset="-127"/>
               </a:rPr>
               <a:t>, </a:t>
             </a:r>
             <a:r>
-              <a:rPr lang="ko-KR" altLang="en-US" sz="2400" b="1" dirty="0">
+              <a:rPr lang="ko-KR" altLang="en-US" sz="2410" b="1" dirty="0">
                 <a:solidFill>
                   <a:srgbClr val="7030A0"/>
                 </a:solidFill>
-                <a:latin typeface="KoPub돋움체 Light" panose="02020603020101020101" pitchFamily="18" charset="-127"/>
-                <a:ea typeface="KoPub돋움체 Light" panose="02020603020101020101" pitchFamily="18" charset="-127"/>
+                <a:latin typeface="KoPub돋움체 Medium" panose="02020603020101020101" pitchFamily="18" charset="-127"/>
+                <a:ea typeface="KoPub돋움체 Medium" panose="02020603020101020101" pitchFamily="18" charset="-127"/>
               </a:rPr>
               <a:t>정보는 </a:t>
             </a:r>
             <a:r>
-              <a:rPr lang="en-US" altLang="ko-KR" sz="2400" b="1" dirty="0">
+              <a:rPr lang="en-US" altLang="ko-KR" sz="2410" b="1" dirty="0">
                 <a:solidFill>
                   <a:srgbClr val="7030A0"/>
                 </a:solidFill>
-                <a:latin typeface="KoPub돋움체 Light" panose="02020603020101020101" pitchFamily="18" charset="-127"/>
-                <a:ea typeface="KoPub돋움체 Light" panose="02020603020101020101" pitchFamily="18" charset="-127"/>
+                <a:latin typeface="KoPub돋움체 Medium" panose="02020603020101020101" pitchFamily="18" charset="-127"/>
+                <a:ea typeface="KoPub돋움체 Medium" panose="02020603020101020101" pitchFamily="18" charset="-127"/>
               </a:rPr>
               <a:t>QR</a:t>
             </a:r>
             <a:r>
-              <a:rPr lang="ko-KR" altLang="en-US" sz="2400" b="1" dirty="0">
+              <a:rPr lang="ko-KR" altLang="en-US" sz="2410" b="1" dirty="0">
                 <a:solidFill>
                   <a:srgbClr val="7030A0"/>
                 </a:solidFill>
-                <a:latin typeface="KoPub돋움체 Light" panose="02020603020101020101" pitchFamily="18" charset="-127"/>
-                <a:ea typeface="KoPub돋움체 Light" panose="02020603020101020101" pitchFamily="18" charset="-127"/>
+                <a:latin typeface="KoPub돋움체 Medium" panose="02020603020101020101" pitchFamily="18" charset="-127"/>
+                <a:ea typeface="KoPub돋움체 Medium" panose="02020603020101020101" pitchFamily="18" charset="-127"/>
               </a:rPr>
               <a:t>에서</a:t>
             </a:r>
             <a:r>
-              <a:rPr lang="en-US" altLang="ko-KR" sz="2400" b="1" dirty="0">
+              <a:rPr lang="en-US" altLang="ko-KR" sz="2410" b="1" dirty="0">
                 <a:solidFill>
                   <a:srgbClr val="7030A0"/>
                 </a:solidFill>
-                <a:latin typeface="KoPub돋움체 Light" panose="02020603020101020101" pitchFamily="18" charset="-127"/>
-                <a:ea typeface="KoPub돋움체 Light" panose="02020603020101020101" pitchFamily="18" charset="-127"/>
+                <a:latin typeface="KoPub돋움체 Medium" panose="02020603020101020101" pitchFamily="18" charset="-127"/>
+                <a:ea typeface="KoPub돋움체 Medium" panose="02020603020101020101" pitchFamily="18" charset="-127"/>
               </a:rPr>
               <a:t>!”</a:t>
             </a:r>
@@ -8586,7 +8616,7 @@
     </p:spTree>
     <p:extLst>
       <p:ext uri="{BB962C8B-B14F-4D97-AF65-F5344CB8AC3E}">
-        <p14:creationId xmlns:p14="http://schemas.microsoft.com/office/powerpoint/2010/main" val="3706853975"/>
+        <p14:creationId xmlns:p14="http://schemas.microsoft.com/office/powerpoint/2010/main" val="3132546172"/>
       </p:ext>
     </p:extLst>
   </p:cSld>
@@ -8604,7 +8634,7 @@
         <p:cNvPr id="1" name="">
           <a:extLst>
             <a:ext uri="{FF2B5EF4-FFF2-40B4-BE49-F238E27FC236}">
-              <a16:creationId xmlns:a16="http://schemas.microsoft.com/office/drawing/2014/main" id="{75C95857-5CB6-E176-FDD7-C77B771BAC79}"/>
+              <a16:creationId xmlns:a16="http://schemas.microsoft.com/office/drawing/2014/main" id="{7751F57F-E96B-F75D-4B53-F75B35D71E9B}"/>
             </a:ext>
           </a:extLst>
         </p:cNvPr>
@@ -8624,7 +8654,7 @@
           <p:cNvPr id="32" name="사각형: 둥근 모서리 31">
             <a:extLst>
               <a:ext uri="{FF2B5EF4-FFF2-40B4-BE49-F238E27FC236}">
-                <a16:creationId xmlns:a16="http://schemas.microsoft.com/office/drawing/2014/main" id="{B0243490-B7C6-42DB-B189-20704EFBD587}"/>
+                <a16:creationId xmlns:a16="http://schemas.microsoft.com/office/drawing/2014/main" id="{58DA3752-0EF7-B345-20A7-F8302DB8E64D}"/>
               </a:ext>
             </a:extLst>
           </p:cNvPr>
@@ -8633,8 +8663,8 @@
         </p:nvSpPr>
         <p:spPr>
           <a:xfrm>
-            <a:off x="590790" y="807444"/>
-            <a:ext cx="2561688" cy="548828"/>
+            <a:off x="593149" y="800399"/>
+            <a:ext cx="2571917" cy="551020"/>
           </a:xfrm>
           <a:prstGeom prst="roundRect">
             <a:avLst/>
@@ -8674,7 +8704,10 @@
           <a:lstStyle/>
           <a:p>
             <a:pPr algn="ctr"/>
-            <a:endParaRPr lang="ko-KR" altLang="en-US"/>
+            <a:endParaRPr lang="ko-KR" altLang="en-US" sz="1807">
+              <a:latin typeface="KoPub돋움체 Medium" panose="02020603020101020101" pitchFamily="18" charset="-127"/>
+              <a:ea typeface="KoPub돋움체 Medium" panose="02020603020101020101" pitchFamily="18" charset="-127"/>
+            </a:endParaRPr>
           </a:p>
         </p:txBody>
       </p:sp>
@@ -8683,7 +8716,7 @@
           <p:cNvPr id="31" name="사각형: 둥근 모서리 30">
             <a:extLst>
               <a:ext uri="{FF2B5EF4-FFF2-40B4-BE49-F238E27FC236}">
-                <a16:creationId xmlns:a16="http://schemas.microsoft.com/office/drawing/2014/main" id="{30F47067-F54E-4A90-9F21-57BD24BB9C63}"/>
+                <a16:creationId xmlns:a16="http://schemas.microsoft.com/office/drawing/2014/main" id="{9C6E467D-FACC-80EF-314F-3832B4461E3B}"/>
               </a:ext>
             </a:extLst>
           </p:cNvPr>
@@ -8692,8 +8725,8 @@
         </p:nvSpPr>
         <p:spPr>
           <a:xfrm>
-            <a:off x="3204625" y="807444"/>
-            <a:ext cx="5347237" cy="548828"/>
+            <a:off x="3217421" y="800399"/>
+            <a:ext cx="5368589" cy="551020"/>
           </a:xfrm>
           <a:prstGeom prst="roundRect">
             <a:avLst/>
@@ -8733,7 +8766,10 @@
           <a:lstStyle/>
           <a:p>
             <a:pPr algn="ctr"/>
-            <a:endParaRPr lang="ko-KR" altLang="en-US"/>
+            <a:endParaRPr lang="ko-KR" altLang="en-US" sz="1807">
+              <a:latin typeface="KoPub돋움체 Medium" panose="02020603020101020101" pitchFamily="18" charset="-127"/>
+              <a:ea typeface="KoPub돋움체 Medium" panose="02020603020101020101" pitchFamily="18" charset="-127"/>
+            </a:endParaRPr>
           </a:p>
         </p:txBody>
       </p:sp>
@@ -8742,7 +8778,7 @@
           <p:cNvPr id="23" name="TextBox 22">
             <a:extLst>
               <a:ext uri="{FF2B5EF4-FFF2-40B4-BE49-F238E27FC236}">
-                <a16:creationId xmlns:a16="http://schemas.microsoft.com/office/drawing/2014/main" id="{CD41B2AA-F91D-4DF3-86CD-504CE316D08F}"/>
+                <a16:creationId xmlns:a16="http://schemas.microsoft.com/office/drawing/2014/main" id="{D67DD5AB-E806-7D82-FA15-4294350C9878}"/>
               </a:ext>
             </a:extLst>
           </p:cNvPr>
@@ -8751,8 +8787,8 @@
         </p:nvSpPr>
         <p:spPr>
           <a:xfrm>
-            <a:off x="5281613" y="2565733"/>
-            <a:ext cx="2843725" cy="584775"/>
+            <a:off x="5193921" y="2506427"/>
+            <a:ext cx="2855080" cy="707886"/>
           </a:xfrm>
           <a:prstGeom prst="rect">
             <a:avLst/>
@@ -8766,23 +8802,23 @@
           <a:lstStyle/>
           <a:p>
             <a:r>
-              <a:rPr lang="ko-KR" altLang="en-US" sz="1600" dirty="0">
-                <a:latin typeface="KoPub돋움체 Light" panose="02020603020101020101" pitchFamily="18" charset="-127"/>
-                <a:ea typeface="KoPub돋움체 Light" panose="02020603020101020101" pitchFamily="18" charset="-127"/>
+              <a:rPr lang="ko-KR" altLang="en-US" sz="2000" b="1" dirty="0">
+                <a:latin typeface="KoPub돋움체 Medium" panose="02020603020101020101" pitchFamily="18" charset="-127"/>
+                <a:ea typeface="KoPub돋움체 Medium" panose="02020603020101020101" pitchFamily="18" charset="-127"/>
               </a:rPr>
               <a:t>야간 응급 유선 보고 후 사후 </a:t>
             </a:r>
             <a:r>
-              <a:rPr lang="en-US" altLang="ko-KR" sz="1600" dirty="0">
-                <a:latin typeface="KoPub돋움체 Light" panose="02020603020101020101" pitchFamily="18" charset="-127"/>
-                <a:ea typeface="KoPub돋움체 Light" panose="02020603020101020101" pitchFamily="18" charset="-127"/>
+              <a:rPr lang="en-US" altLang="ko-KR" sz="2000" b="1" dirty="0">
+                <a:latin typeface="KoPub돋움체 Medium" panose="02020603020101020101" pitchFamily="18" charset="-127"/>
+                <a:ea typeface="KoPub돋움체 Medium" panose="02020603020101020101" pitchFamily="18" charset="-127"/>
               </a:rPr>
               <a:t>[A]-[D] 1</a:t>
             </a:r>
             <a:r>
-              <a:rPr lang="ko-KR" altLang="en-US" sz="1600" dirty="0">
-                <a:latin typeface="KoPub돋움체 Light" panose="02020603020101020101" pitchFamily="18" charset="-127"/>
-                <a:ea typeface="KoPub돋움체 Light" panose="02020603020101020101" pitchFamily="18" charset="-127"/>
+              <a:rPr lang="ko-KR" altLang="en-US" sz="2000" b="1" dirty="0">
+                <a:latin typeface="KoPub돋움체 Medium" panose="02020603020101020101" pitchFamily="18" charset="-127"/>
+                <a:ea typeface="KoPub돋움체 Medium" panose="02020603020101020101" pitchFamily="18" charset="-127"/>
               </a:rPr>
               <a:t>줄 기록</a:t>
             </a:r>
@@ -8794,7 +8830,7 @@
           <p:cNvPr id="24" name="사각형: 둥근 모서리 23">
             <a:extLst>
               <a:ext uri="{FF2B5EF4-FFF2-40B4-BE49-F238E27FC236}">
-                <a16:creationId xmlns:a16="http://schemas.microsoft.com/office/drawing/2014/main" id="{A193F6F5-6376-4F98-A3BB-96E53249AC9E}"/>
+                <a16:creationId xmlns:a16="http://schemas.microsoft.com/office/drawing/2014/main" id="{57CB09B7-DE50-D34B-5787-D85B8769079B}"/>
               </a:ext>
             </a:extLst>
           </p:cNvPr>
@@ -8803,8 +8839,8 @@
         </p:nvSpPr>
         <p:spPr>
           <a:xfrm>
-            <a:off x="5067299" y="2388822"/>
-            <a:ext cx="3484563" cy="959835"/>
+            <a:off x="5087533" y="2388092"/>
+            <a:ext cx="3498477" cy="963668"/>
           </a:xfrm>
           <a:prstGeom prst="roundRect">
             <a:avLst>
@@ -8841,9 +8877,9 @@
           <a:lstStyle/>
           <a:p>
             <a:pPr algn="ctr"/>
-            <a:endParaRPr lang="ko-KR" altLang="en-US" sz="5080">
+            <a:endParaRPr lang="ko-KR" altLang="en-US" sz="5100">
               <a:latin typeface="KoPub돋움체 Medium" panose="02020603020101020101" pitchFamily="18" charset="-127"/>
-              <a:ea typeface="KoPub돋움체 Light" panose="02020603020101020101"/>
+              <a:ea typeface="KoPub돋움체 Medium" panose="02020603020101020101" pitchFamily="18" charset="-127"/>
             </a:endParaRPr>
           </a:p>
         </p:txBody>
@@ -8853,7 +8889,7 @@
           <p:cNvPr id="25" name="사각형: 둥근 모서리 24">
             <a:extLst>
               <a:ext uri="{FF2B5EF4-FFF2-40B4-BE49-F238E27FC236}">
-                <a16:creationId xmlns:a16="http://schemas.microsoft.com/office/drawing/2014/main" id="{ABE07B44-9D20-4CE2-BFB6-8DDA339570CA}"/>
+                <a16:creationId xmlns:a16="http://schemas.microsoft.com/office/drawing/2014/main" id="{CB20227E-227F-2F7B-D179-094807C1D782}"/>
               </a:ext>
             </a:extLst>
           </p:cNvPr>
@@ -8862,8 +8898,8 @@
         </p:nvSpPr>
         <p:spPr>
           <a:xfrm>
-            <a:off x="3204625" y="2394111"/>
-            <a:ext cx="1811875" cy="954545"/>
+            <a:off x="3217421" y="2393402"/>
+            <a:ext cx="1819110" cy="958357"/>
           </a:xfrm>
           <a:prstGeom prst="roundRect">
             <a:avLst>
@@ -8901,9 +8937,9 @@
           <a:lstStyle/>
           <a:p>
             <a:pPr algn="ctr"/>
-            <a:endParaRPr lang="ko-KR" altLang="en-US" sz="5080">
+            <a:endParaRPr lang="ko-KR" altLang="en-US" sz="5100">
               <a:latin typeface="KoPub돋움체 Medium" panose="02020603020101020101" pitchFamily="18" charset="-127"/>
-              <a:ea typeface="KoPub돋움체 Light" panose="02020603020101020101"/>
+              <a:ea typeface="KoPub돋움체 Medium" panose="02020603020101020101" pitchFamily="18" charset="-127"/>
             </a:endParaRPr>
           </a:p>
         </p:txBody>
@@ -8913,7 +8949,7 @@
           <p:cNvPr id="26" name="TextBox 25">
             <a:extLst>
               <a:ext uri="{FF2B5EF4-FFF2-40B4-BE49-F238E27FC236}">
-                <a16:creationId xmlns:a16="http://schemas.microsoft.com/office/drawing/2014/main" id="{31132F88-5AA2-43B2-8C2A-F2BB31E51E43}"/>
+                <a16:creationId xmlns:a16="http://schemas.microsoft.com/office/drawing/2014/main" id="{C63288B6-E823-DC5B-14E8-37DB8B61BD03}"/>
               </a:ext>
             </a:extLst>
           </p:cNvPr>
@@ -8922,8 +8958,8 @@
         </p:nvSpPr>
         <p:spPr>
           <a:xfrm>
-            <a:off x="3415500" y="2675202"/>
-            <a:ext cx="1390125" cy="338554"/>
+            <a:off x="3354969" y="2653493"/>
+            <a:ext cx="1544012" cy="400110"/>
           </a:xfrm>
           <a:prstGeom prst="rect">
             <a:avLst/>
@@ -8938,23 +8974,23 @@
           <a:p>
             <a:pPr algn="ctr"/>
             <a:r>
-              <a:rPr lang="en-US" altLang="ko-KR" sz="1600" b="1" dirty="0">
-                <a:latin typeface="KoPub돋움체 Light" panose="02020603020101020101" pitchFamily="18" charset="-127"/>
-                <a:ea typeface="KoPub돋움체 Light" panose="02020603020101020101" pitchFamily="18" charset="-127"/>
+              <a:rPr lang="en-US" altLang="ko-KR" sz="2000" b="1" dirty="0">
+                <a:latin typeface="KoPub돋움체 Medium" panose="02020603020101020101" pitchFamily="18" charset="-127"/>
+                <a:ea typeface="KoPub돋움체 Medium" panose="02020603020101020101" pitchFamily="18" charset="-127"/>
               </a:rPr>
               <a:t>[D-</a:t>
             </a:r>
             <a:r>
-              <a:rPr lang="ko-KR" altLang="en-US" sz="1600" b="1" dirty="0" err="1">
-                <a:latin typeface="KoPub돋움체 Light" panose="02020603020101020101" pitchFamily="18" charset="-127"/>
-                <a:ea typeface="KoPub돋움체 Light" panose="02020603020101020101" pitchFamily="18" charset="-127"/>
+              <a:rPr lang="ko-KR" altLang="en-US" sz="2000" b="1" dirty="0" err="1">
+                <a:latin typeface="KoPub돋움체 Medium" panose="02020603020101020101" pitchFamily="18" charset="-127"/>
+                <a:ea typeface="KoPub돋움체 Medium" panose="02020603020101020101" pitchFamily="18" charset="-127"/>
               </a:rPr>
               <a:t>야간유선</a:t>
             </a:r>
             <a:r>
-              <a:rPr lang="en-US" altLang="ko-KR" sz="1600" b="1" dirty="0">
-                <a:latin typeface="KoPub돋움체 Light" panose="02020603020101020101" pitchFamily="18" charset="-127"/>
-                <a:ea typeface="KoPub돋움체 Light" panose="02020603020101020101" pitchFamily="18" charset="-127"/>
+              <a:rPr lang="en-US" altLang="ko-KR" sz="2000" b="1" dirty="0">
+                <a:latin typeface="KoPub돋움체 Medium" panose="02020603020101020101" pitchFamily="18" charset="-127"/>
+                <a:ea typeface="KoPub돋움체 Medium" panose="02020603020101020101" pitchFamily="18" charset="-127"/>
               </a:rPr>
               <a:t>]</a:t>
             </a:r>
@@ -8966,7 +9002,7 @@
           <p:cNvPr id="3" name="TextBox 2">
             <a:extLst>
               <a:ext uri="{FF2B5EF4-FFF2-40B4-BE49-F238E27FC236}">
-                <a16:creationId xmlns:a16="http://schemas.microsoft.com/office/drawing/2014/main" id="{BDB8E964-7EED-74B0-E816-8BE4F8865B12}"/>
+                <a16:creationId xmlns:a16="http://schemas.microsoft.com/office/drawing/2014/main" id="{F4C9D6C2-F3DB-0336-0325-25BF2F3F43EF}"/>
               </a:ext>
             </a:extLst>
           </p:cNvPr>
@@ -8975,8 +9011,8 @@
         </p:nvSpPr>
         <p:spPr>
           <a:xfrm>
-            <a:off x="101771" y="184601"/>
-            <a:ext cx="3476336" cy="309444"/>
+            <a:off x="302548" y="175069"/>
+            <a:ext cx="3089475" cy="311645"/>
           </a:xfrm>
           <a:prstGeom prst="rect">
             <a:avLst/>
@@ -8991,21 +9027,21 @@
           <a:p>
             <a:pPr algn="ctr"/>
             <a:r>
-              <a:rPr lang="ko-KR" altLang="en-US" sz="1411" spc="-31" dirty="0">
+              <a:rPr lang="ko-KR" altLang="en-US" sz="1417" spc="-31" dirty="0">
                 <a:latin typeface="KoPub돋움체 Light" panose="02020603020101020101" pitchFamily="18" charset="-127"/>
                 <a:ea typeface="KoPub돋움체 Light" panose="02020603020101020101" pitchFamily="18" charset="-127"/>
               </a:rPr>
               <a:t>순천향대학교 천안병원 </a:t>
             </a:r>
             <a:r>
-              <a:rPr lang="en-US" altLang="ko-KR" sz="1411" spc="-31" dirty="0">
+              <a:rPr lang="en-US" altLang="ko-KR" sz="1417" spc="-31" dirty="0">
                 <a:latin typeface="KoPub돋움체 Light" panose="02020603020101020101" pitchFamily="18" charset="-127"/>
                 <a:ea typeface="KoPub돋움체 Light" panose="02020603020101020101" pitchFamily="18" charset="-127"/>
               </a:rPr>
               <a:t>| </a:t>
             </a:r>
             <a:r>
-              <a:rPr lang="ko-KR" altLang="en-US" sz="1411" spc="-31" dirty="0">
+              <a:rPr lang="ko-KR" altLang="en-US" sz="1417" spc="-31" dirty="0">
                 <a:latin typeface="KoPub돋움체 Light" panose="02020603020101020101" pitchFamily="18" charset="-127"/>
                 <a:ea typeface="KoPub돋움체 Light" panose="02020603020101020101" pitchFamily="18" charset="-127"/>
               </a:rPr>
@@ -9019,7 +9055,7 @@
           <p:cNvPr id="7" name="그룹 6">
             <a:extLst>
               <a:ext uri="{FF2B5EF4-FFF2-40B4-BE49-F238E27FC236}">
-                <a16:creationId xmlns:a16="http://schemas.microsoft.com/office/drawing/2014/main" id="{399CA2A2-FAD0-4681-B98C-3A7AA0484B78}"/>
+                <a16:creationId xmlns:a16="http://schemas.microsoft.com/office/drawing/2014/main" id="{8ACA73A7-D3EA-9548-00A0-5D148FDF10F3}"/>
               </a:ext>
             </a:extLst>
           </p:cNvPr>
@@ -9028,8 +9064,8 @@
         </p:nvGrpSpPr>
         <p:grpSpPr>
           <a:xfrm>
-            <a:off x="592138" y="1396134"/>
-            <a:ext cx="2585305" cy="2814796"/>
+            <a:off x="594503" y="1391440"/>
+            <a:ext cx="2595628" cy="2826036"/>
             <a:chOff x="592138" y="1592949"/>
             <a:chExt cx="2585305" cy="2814796"/>
           </a:xfrm>
@@ -9039,7 +9075,7 @@
             <p:cNvPr id="22" name="사각형: 둥근 모서리 21">
               <a:extLst>
                 <a:ext uri="{FF2B5EF4-FFF2-40B4-BE49-F238E27FC236}">
-                  <a16:creationId xmlns:a16="http://schemas.microsoft.com/office/drawing/2014/main" id="{8DA9AE8C-7191-4002-98F1-FF77B72D519F}"/>
+                  <a16:creationId xmlns:a16="http://schemas.microsoft.com/office/drawing/2014/main" id="{E120B616-CC54-685C-ED46-FEA0488CA7CF}"/>
                 </a:ext>
               </a:extLst>
             </p:cNvPr>
@@ -9088,11 +9124,12 @@
             <a:lstStyle/>
             <a:p>
               <a:pPr algn="ctr"/>
-              <a:endParaRPr lang="ko-KR" altLang="en-US" sz="5080">
+              <a:endParaRPr lang="ko-KR" altLang="en-US" sz="5100">
                 <a:solidFill>
                   <a:schemeClr val="tx1"/>
                 </a:solidFill>
-                <a:ea typeface="KoPub돋움체 Light" panose="02020603020101020101"/>
+                <a:latin typeface="KoPub돋움체 Medium" panose="02020603020101020101" pitchFamily="18" charset="-127"/>
+                <a:ea typeface="KoPub돋움체 Medium" panose="02020603020101020101" pitchFamily="18" charset="-127"/>
               </a:endParaRPr>
             </a:p>
           </p:txBody>
@@ -9102,7 +9139,7 @@
             <p:cNvPr id="17" name="TextBox 16">
               <a:extLst>
                 <a:ext uri="{FF2B5EF4-FFF2-40B4-BE49-F238E27FC236}">
-                  <a16:creationId xmlns:a16="http://schemas.microsoft.com/office/drawing/2014/main" id="{5E33DDDA-6085-D01E-695B-8DCA20A2A084}"/>
+                  <a16:creationId xmlns:a16="http://schemas.microsoft.com/office/drawing/2014/main" id="{FE1E58A6-5047-5588-97EE-09E3C3D65E3B}"/>
                 </a:ext>
               </a:extLst>
             </p:cNvPr>
@@ -9126,251 +9163,254 @@
             <a:lstStyle/>
             <a:p>
               <a:r>
-                <a:rPr lang="en-US" altLang="ko-KR" sz="1600" b="1" dirty="0">
-                  <a:latin typeface="KoPub돋움체 Light" panose="02020603020101020101" pitchFamily="18" charset="-127"/>
-                  <a:ea typeface="KoPub돋움체 Light" panose="02020603020101020101" pitchFamily="18" charset="-127"/>
+                <a:rPr lang="en-US" altLang="ko-KR" sz="1606" b="1" dirty="0">
+                  <a:latin typeface="KoPub돋움체 Medium" panose="02020603020101020101" pitchFamily="18" charset="-127"/>
+                  <a:ea typeface="KoPub돋움체 Medium" panose="02020603020101020101" pitchFamily="18" charset="-127"/>
                 </a:rPr>
                 <a:t>[CHEMO] </a:t>
               </a:r>
               <a:r>
-                <a:rPr lang="ko-KR" altLang="en-US" sz="1600" dirty="0"/>
+                <a:rPr lang="ko-KR" altLang="en-US" sz="1606" dirty="0">
+                  <a:latin typeface="KoPub돋움체 Medium" panose="02020603020101020101" pitchFamily="18" charset="-127"/>
+                  <a:ea typeface="KoPub돋움체 Medium" panose="02020603020101020101" pitchFamily="18" charset="-127"/>
+                </a:rPr>
                 <a:t>항암 관리</a:t>
               </a:r>
             </a:p>
             <a:p>
               <a:r>
-                <a:rPr lang="en-US" altLang="ko-KR" sz="1600" b="1" dirty="0">
-                  <a:latin typeface="KoPub돋움체 Light" panose="02020603020101020101" pitchFamily="18" charset="-127"/>
-                  <a:ea typeface="KoPub돋움체 Light" panose="02020603020101020101" pitchFamily="18" charset="-127"/>
+                <a:rPr lang="en-US" altLang="ko-KR" sz="1606" b="1" dirty="0">
+                  <a:latin typeface="KoPub돋움체 Medium" panose="02020603020101020101" pitchFamily="18" charset="-127"/>
+                  <a:ea typeface="KoPub돋움체 Medium" panose="02020603020101020101" pitchFamily="18" charset="-127"/>
                 </a:rPr>
                 <a:t>[BLOOD]</a:t>
               </a:r>
               <a:r>
-                <a:rPr lang="en-US" altLang="ko-KR" sz="1600" dirty="0">
-                  <a:latin typeface="KoPub돋움체 Light" panose="02020603020101020101" pitchFamily="18" charset="-127"/>
-                  <a:ea typeface="KoPub돋움체 Light" panose="02020603020101020101" pitchFamily="18" charset="-127"/>
+                <a:rPr lang="en-US" altLang="ko-KR" sz="1606" dirty="0">
+                  <a:latin typeface="KoPub돋움체 Medium" panose="02020603020101020101" pitchFamily="18" charset="-127"/>
+                  <a:ea typeface="KoPub돋움체 Medium" panose="02020603020101020101" pitchFamily="18" charset="-127"/>
                 </a:rPr>
                 <a:t> </a:t>
               </a:r>
               <a:r>
-                <a:rPr lang="ko-KR" altLang="en-US" sz="1600" dirty="0">
-                  <a:latin typeface="KoPub돋움체 Light" panose="02020603020101020101" pitchFamily="18" charset="-127"/>
-                  <a:ea typeface="KoPub돋움체 Light" panose="02020603020101020101" pitchFamily="18" charset="-127"/>
+                <a:rPr lang="ko-KR" altLang="en-US" sz="1606" dirty="0">
+                  <a:latin typeface="KoPub돋움체 Medium" panose="02020603020101020101" pitchFamily="18" charset="-127"/>
+                  <a:ea typeface="KoPub돋움체 Medium" panose="02020603020101020101" pitchFamily="18" charset="-127"/>
                 </a:rPr>
                 <a:t>수혈 관리</a:t>
               </a:r>
-              <a:endParaRPr lang="en-US" altLang="ko-KR" sz="1600" dirty="0">
-                <a:latin typeface="KoPub돋움체 Light" panose="02020603020101020101" pitchFamily="18" charset="-127"/>
-                <a:ea typeface="KoPub돋움체 Light" panose="02020603020101020101" pitchFamily="18" charset="-127"/>
+              <a:endParaRPr lang="en-US" altLang="ko-KR" sz="1606" dirty="0">
+                <a:latin typeface="KoPub돋움체 Medium" panose="02020603020101020101" pitchFamily="18" charset="-127"/>
+                <a:ea typeface="KoPub돋움체 Medium" panose="02020603020101020101" pitchFamily="18" charset="-127"/>
               </a:endParaRPr>
             </a:p>
             <a:p>
               <a:r>
-                <a:rPr lang="en-US" altLang="ko-KR" sz="1600" b="1" dirty="0">
-                  <a:latin typeface="KoPub돋움체 Light" panose="02020603020101020101" pitchFamily="18" charset="-127"/>
-                  <a:ea typeface="KoPub돋움체 Light" panose="02020603020101020101" pitchFamily="18" charset="-127"/>
+                <a:rPr lang="en-US" altLang="ko-KR" sz="1606" b="1" dirty="0">
+                  <a:latin typeface="KoPub돋움체 Medium" panose="02020603020101020101" pitchFamily="18" charset="-127"/>
+                  <a:ea typeface="KoPub돋움체 Medium" panose="02020603020101020101" pitchFamily="18" charset="-127"/>
                 </a:rPr>
                 <a:t>[CVR]</a:t>
               </a:r>
               <a:r>
-                <a:rPr lang="en-US" altLang="ko-KR" sz="1600" dirty="0">
-                  <a:latin typeface="KoPub돋움체 Light" panose="02020603020101020101" pitchFamily="18" charset="-127"/>
-                  <a:ea typeface="KoPub돋움체 Light" panose="02020603020101020101" pitchFamily="18" charset="-127"/>
+                <a:rPr lang="en-US" altLang="ko-KR" sz="1606" dirty="0">
+                  <a:latin typeface="KoPub돋움체 Medium" panose="02020603020101020101" pitchFamily="18" charset="-127"/>
+                  <a:ea typeface="KoPub돋움체 Medium" panose="02020603020101020101" pitchFamily="18" charset="-127"/>
                 </a:rPr>
                 <a:t> </a:t>
               </a:r>
               <a:r>
-                <a:rPr lang="ko-KR" altLang="en-US" sz="1600" dirty="0">
-                  <a:latin typeface="KoPub돋움체 Light" panose="02020603020101020101" pitchFamily="18" charset="-127"/>
-                  <a:ea typeface="KoPub돋움체 Light" panose="02020603020101020101" pitchFamily="18" charset="-127"/>
+                <a:rPr lang="ko-KR" altLang="en-US" sz="1606" dirty="0">
+                  <a:latin typeface="KoPub돋움체 Medium" panose="02020603020101020101" pitchFamily="18" charset="-127"/>
+                  <a:ea typeface="KoPub돋움체 Medium" panose="02020603020101020101" pitchFamily="18" charset="-127"/>
                 </a:rPr>
                 <a:t>위험 수치</a:t>
               </a:r>
-              <a:endParaRPr lang="en-US" altLang="ko-KR" sz="1600" dirty="0">
-                <a:latin typeface="KoPub돋움체 Light" panose="02020603020101020101" pitchFamily="18" charset="-127"/>
-                <a:ea typeface="KoPub돋움체 Light" panose="02020603020101020101" pitchFamily="18" charset="-127"/>
+              <a:endParaRPr lang="en-US" altLang="ko-KR" sz="1606" dirty="0">
+                <a:latin typeface="KoPub돋움체 Medium" panose="02020603020101020101" pitchFamily="18" charset="-127"/>
+                <a:ea typeface="KoPub돋움체 Medium" panose="02020603020101020101" pitchFamily="18" charset="-127"/>
               </a:endParaRPr>
             </a:p>
             <a:p>
               <a:r>
-                <a:rPr lang="en-US" altLang="ko-KR" sz="1600" b="1" dirty="0">
-                  <a:latin typeface="KoPub돋움체 Light" panose="02020603020101020101" pitchFamily="18" charset="-127"/>
-                  <a:ea typeface="KoPub돋움체 Light" panose="02020603020101020101" pitchFamily="18" charset="-127"/>
+                <a:rPr lang="en-US" altLang="ko-KR" sz="1606" b="1" dirty="0">
+                  <a:latin typeface="KoPub돋움체 Medium" panose="02020603020101020101" pitchFamily="18" charset="-127"/>
+                  <a:ea typeface="KoPub돋움체 Medium" panose="02020603020101020101" pitchFamily="18" charset="-127"/>
                 </a:rPr>
                 <a:t>[LIFE] </a:t>
               </a:r>
               <a:r>
-                <a:rPr lang="ko-KR" altLang="en-US" sz="1600" dirty="0">
-                  <a:latin typeface="KoPub돋움체 Light" panose="02020603020101020101" pitchFamily="18" charset="-127"/>
-                  <a:ea typeface="KoPub돋움체 Light" panose="02020603020101020101" pitchFamily="18" charset="-127"/>
+                <a:rPr lang="ko-KR" altLang="en-US" sz="1606" dirty="0">
+                  <a:latin typeface="KoPub돋움체 Medium" panose="02020603020101020101" pitchFamily="18" charset="-127"/>
+                  <a:ea typeface="KoPub돋움체 Medium" panose="02020603020101020101" pitchFamily="18" charset="-127"/>
                 </a:rPr>
                 <a:t>존엄</a:t>
               </a:r>
               <a:r>
-                <a:rPr lang="en-US" altLang="ko-KR" sz="1600" dirty="0">
-                  <a:latin typeface="KoPub돋움체 Light" panose="02020603020101020101" pitchFamily="18" charset="-127"/>
-                  <a:ea typeface="KoPub돋움체 Light" panose="02020603020101020101" pitchFamily="18" charset="-127"/>
+                <a:rPr lang="en-US" altLang="ko-KR" sz="1606" dirty="0">
+                  <a:latin typeface="KoPub돋움체 Medium" panose="02020603020101020101" pitchFamily="18" charset="-127"/>
+                  <a:ea typeface="KoPub돋움체 Medium" panose="02020603020101020101" pitchFamily="18" charset="-127"/>
                 </a:rPr>
                 <a:t>/</a:t>
               </a:r>
               <a:r>
-                <a:rPr lang="ko-KR" altLang="en-US" sz="1600" dirty="0">
-                  <a:latin typeface="KoPub돋움체 Light" panose="02020603020101020101" pitchFamily="18" charset="-127"/>
-                  <a:ea typeface="KoPub돋움체 Light" panose="02020603020101020101" pitchFamily="18" charset="-127"/>
+                <a:rPr lang="ko-KR" altLang="en-US" sz="1606" dirty="0">
+                  <a:latin typeface="KoPub돋움체 Medium" panose="02020603020101020101" pitchFamily="18" charset="-127"/>
+                  <a:ea typeface="KoPub돋움체 Medium" panose="02020603020101020101" pitchFamily="18" charset="-127"/>
                 </a:rPr>
                 <a:t>임종</a:t>
               </a:r>
-              <a:endParaRPr lang="en-US" altLang="ko-KR" sz="1600" dirty="0">
-                <a:latin typeface="KoPub돋움체 Light" panose="02020603020101020101" pitchFamily="18" charset="-127"/>
-                <a:ea typeface="KoPub돋움체 Light" panose="02020603020101020101" pitchFamily="18" charset="-127"/>
+              <a:endParaRPr lang="en-US" altLang="ko-KR" sz="1606" dirty="0">
+                <a:latin typeface="KoPub돋움체 Medium" panose="02020603020101020101" pitchFamily="18" charset="-127"/>
+                <a:ea typeface="KoPub돋움체 Medium" panose="02020603020101020101" pitchFamily="18" charset="-127"/>
               </a:endParaRPr>
             </a:p>
             <a:p>
               <a:r>
-                <a:rPr lang="en-US" altLang="ko-KR" sz="1600" b="1" dirty="0">
-                  <a:latin typeface="KoPub돋움체 Light" panose="02020603020101020101" pitchFamily="18" charset="-127"/>
-                  <a:ea typeface="KoPub돋움체 Light" panose="02020603020101020101" pitchFamily="18" charset="-127"/>
+                <a:rPr lang="en-US" altLang="ko-KR" sz="1606" b="1" dirty="0">
+                  <a:latin typeface="KoPub돋움체 Medium" panose="02020603020101020101" pitchFamily="18" charset="-127"/>
+                  <a:ea typeface="KoPub돋움체 Medium" panose="02020603020101020101" pitchFamily="18" charset="-127"/>
                 </a:rPr>
                 <a:t>[MEET] </a:t>
               </a:r>
               <a:r>
-                <a:rPr lang="ko-KR" altLang="en-US" sz="1600" dirty="0">
-                  <a:latin typeface="KoPub돋움체 Light" panose="02020603020101020101" pitchFamily="18" charset="-127"/>
-                  <a:ea typeface="KoPub돋움체 Light" panose="02020603020101020101" pitchFamily="18" charset="-127"/>
+                <a:rPr lang="ko-KR" altLang="en-US" sz="1606" dirty="0">
+                  <a:latin typeface="KoPub돋움체 Medium" panose="02020603020101020101" pitchFamily="18" charset="-127"/>
+                  <a:ea typeface="KoPub돋움체 Medium" panose="02020603020101020101" pitchFamily="18" charset="-127"/>
                 </a:rPr>
                 <a:t>보호자 면담</a:t>
               </a:r>
-              <a:endParaRPr lang="en-US" altLang="ko-KR" sz="1600" dirty="0">
-                <a:latin typeface="KoPub돋움체 Light" panose="02020603020101020101" pitchFamily="18" charset="-127"/>
-                <a:ea typeface="KoPub돋움체 Light" panose="02020603020101020101" pitchFamily="18" charset="-127"/>
+              <a:endParaRPr lang="en-US" altLang="ko-KR" sz="1606" dirty="0">
+                <a:latin typeface="KoPub돋움체 Medium" panose="02020603020101020101" pitchFamily="18" charset="-127"/>
+                <a:ea typeface="KoPub돋움체 Medium" panose="02020603020101020101" pitchFamily="18" charset="-127"/>
               </a:endParaRPr>
             </a:p>
             <a:p>
               <a:r>
-                <a:rPr lang="en-US" altLang="ko-KR" sz="1600" b="1" dirty="0">
-                  <a:latin typeface="KoPub돋움체 Light" panose="02020603020101020101" pitchFamily="18" charset="-127"/>
-                  <a:ea typeface="KoPub돋움체 Light" panose="02020603020101020101" pitchFamily="18" charset="-127"/>
+                <a:rPr lang="en-US" altLang="ko-KR" sz="1606" b="1" dirty="0">
+                  <a:latin typeface="KoPub돋움체 Medium" panose="02020603020101020101" pitchFamily="18" charset="-127"/>
+                  <a:ea typeface="KoPub돋움체 Medium" panose="02020603020101020101" pitchFamily="18" charset="-127"/>
                 </a:rPr>
                 <a:t>[MARROW] </a:t>
               </a:r>
               <a:r>
-                <a:rPr lang="ko-KR" altLang="en-US" sz="1600" dirty="0">
-                  <a:latin typeface="KoPub돋움체 Light" panose="02020603020101020101" pitchFamily="18" charset="-127"/>
-                  <a:ea typeface="KoPub돋움체 Light" panose="02020603020101020101" pitchFamily="18" charset="-127"/>
+                <a:rPr lang="ko-KR" altLang="en-US" sz="1606" dirty="0">
+                  <a:latin typeface="KoPub돋움체 Medium" panose="02020603020101020101" pitchFamily="18" charset="-127"/>
+                  <a:ea typeface="KoPub돋움체 Medium" panose="02020603020101020101" pitchFamily="18" charset="-127"/>
                 </a:rPr>
                 <a:t>골수 검사</a:t>
               </a:r>
-              <a:endParaRPr lang="en-US" altLang="ko-KR" sz="1600" dirty="0">
-                <a:latin typeface="KoPub돋움체 Light" panose="02020603020101020101" pitchFamily="18" charset="-127"/>
-                <a:ea typeface="KoPub돋움체 Light" panose="02020603020101020101" pitchFamily="18" charset="-127"/>
+              <a:endParaRPr lang="en-US" altLang="ko-KR" sz="1606" dirty="0">
+                <a:latin typeface="KoPub돋움체 Medium" panose="02020603020101020101" pitchFamily="18" charset="-127"/>
+                <a:ea typeface="KoPub돋움체 Medium" panose="02020603020101020101" pitchFamily="18" charset="-127"/>
               </a:endParaRPr>
             </a:p>
             <a:p>
               <a:r>
-                <a:rPr lang="en-US" altLang="ko-KR" sz="1600" b="1" dirty="0">
-                  <a:latin typeface="KoPub돋움체 Light" panose="02020603020101020101" pitchFamily="18" charset="-127"/>
-                  <a:ea typeface="KoPub돋움체 Light" panose="02020603020101020101" pitchFamily="18" charset="-127"/>
+                <a:rPr lang="en-US" altLang="ko-KR" sz="1606" b="1" dirty="0">
+                  <a:latin typeface="KoPub돋움체 Medium" panose="02020603020101020101" pitchFamily="18" charset="-127"/>
+                  <a:ea typeface="KoPub돋움체 Medium" panose="02020603020101020101" pitchFamily="18" charset="-127"/>
                 </a:rPr>
                 <a:t>[ISO] </a:t>
               </a:r>
               <a:r>
-                <a:rPr lang="ko-KR" altLang="en-US" sz="1600" dirty="0">
-                  <a:latin typeface="KoPub돋움체 Light" panose="02020603020101020101" pitchFamily="18" charset="-127"/>
-                  <a:ea typeface="KoPub돋움체 Light" panose="02020603020101020101" pitchFamily="18" charset="-127"/>
+                <a:rPr lang="ko-KR" altLang="en-US" sz="1606" dirty="0">
+                  <a:latin typeface="KoPub돋움체 Medium" panose="02020603020101020101" pitchFamily="18" charset="-127"/>
+                  <a:ea typeface="KoPub돋움체 Medium" panose="02020603020101020101" pitchFamily="18" charset="-127"/>
                 </a:rPr>
                 <a:t>격리 관리</a:t>
               </a:r>
-              <a:endParaRPr lang="en-US" altLang="ko-KR" sz="1600" dirty="0">
-                <a:latin typeface="KoPub돋움체 Light" panose="02020603020101020101" pitchFamily="18" charset="-127"/>
-                <a:ea typeface="KoPub돋움체 Light" panose="02020603020101020101" pitchFamily="18" charset="-127"/>
+              <a:endParaRPr lang="en-US" altLang="ko-KR" sz="1606" dirty="0">
+                <a:latin typeface="KoPub돋움체 Medium" panose="02020603020101020101" pitchFamily="18" charset="-127"/>
+                <a:ea typeface="KoPub돋움체 Medium" panose="02020603020101020101" pitchFamily="18" charset="-127"/>
               </a:endParaRPr>
             </a:p>
             <a:p>
               <a:r>
-                <a:rPr lang="en-US" altLang="ko-KR" sz="1600" b="1" dirty="0">
-                  <a:latin typeface="KoPub돋움체 Light" panose="02020603020101020101" pitchFamily="18" charset="-127"/>
-                  <a:ea typeface="KoPub돋움체 Light" panose="02020603020101020101" pitchFamily="18" charset="-127"/>
+                <a:rPr lang="en-US" altLang="ko-KR" sz="1606" b="1" dirty="0">
+                  <a:latin typeface="KoPub돋움체 Medium" panose="02020603020101020101" pitchFamily="18" charset="-127"/>
+                  <a:ea typeface="KoPub돋움체 Medium" panose="02020603020101020101" pitchFamily="18" charset="-127"/>
                 </a:rPr>
                 <a:t>[C-Status] </a:t>
               </a:r>
               <a:r>
-                <a:rPr lang="ko-KR" altLang="en-US" sz="1600" dirty="0">
-                  <a:latin typeface="KoPub돋움체 Light" panose="02020603020101020101" pitchFamily="18" charset="-127"/>
-                  <a:ea typeface="KoPub돋움체 Light" panose="02020603020101020101" pitchFamily="18" charset="-127"/>
+                <a:rPr lang="ko-KR" altLang="en-US" sz="1606" dirty="0">
+                  <a:latin typeface="KoPub돋움체 Medium" panose="02020603020101020101" pitchFamily="18" charset="-127"/>
+                  <a:ea typeface="KoPub돋움체 Medium" panose="02020603020101020101" pitchFamily="18" charset="-127"/>
                 </a:rPr>
                 <a:t>상태 악화</a:t>
               </a:r>
-              <a:endParaRPr lang="en-US" altLang="ko-KR" sz="1600" dirty="0">
-                <a:latin typeface="KoPub돋움체 Light" panose="02020603020101020101" pitchFamily="18" charset="-127"/>
-                <a:ea typeface="KoPub돋움체 Light" panose="02020603020101020101" pitchFamily="18" charset="-127"/>
+              <a:endParaRPr lang="en-US" altLang="ko-KR" sz="1606" dirty="0">
+                <a:latin typeface="KoPub돋움체 Medium" panose="02020603020101020101" pitchFamily="18" charset="-127"/>
+                <a:ea typeface="KoPub돋움체 Medium" panose="02020603020101020101" pitchFamily="18" charset="-127"/>
               </a:endParaRPr>
             </a:p>
             <a:p>
               <a:r>
-                <a:rPr lang="en-US" altLang="ko-KR" sz="1600" b="1" dirty="0">
-                  <a:latin typeface="KoPub돋움체 Light" panose="02020603020101020101" pitchFamily="18" charset="-127"/>
-                  <a:ea typeface="KoPub돋움체 Light" panose="02020603020101020101" pitchFamily="18" charset="-127"/>
+                <a:rPr lang="en-US" altLang="ko-KR" sz="1606" b="1" dirty="0">
+                  <a:latin typeface="KoPub돋움체 Medium" panose="02020603020101020101" pitchFamily="18" charset="-127"/>
+                  <a:ea typeface="KoPub돋움체 Medium" panose="02020603020101020101" pitchFamily="18" charset="-127"/>
                 </a:rPr>
                 <a:t>[PAIN] </a:t>
               </a:r>
               <a:r>
-                <a:rPr lang="ko-KR" altLang="en-US" sz="1600" dirty="0">
-                  <a:latin typeface="KoPub돋움체 Light" panose="02020603020101020101" pitchFamily="18" charset="-127"/>
-                  <a:ea typeface="KoPub돋움체 Light" panose="02020603020101020101" pitchFamily="18" charset="-127"/>
+                <a:rPr lang="ko-KR" altLang="en-US" sz="1606" dirty="0">
+                  <a:latin typeface="KoPub돋움체 Medium" panose="02020603020101020101" pitchFamily="18" charset="-127"/>
+                  <a:ea typeface="KoPub돋움체 Medium" panose="02020603020101020101" pitchFamily="18" charset="-127"/>
                 </a:rPr>
                 <a:t>통증 조절</a:t>
               </a:r>
-              <a:endParaRPr lang="en-US" altLang="ko-KR" sz="1600" dirty="0">
-                <a:latin typeface="KoPub돋움체 Light" panose="02020603020101020101" pitchFamily="18" charset="-127"/>
-                <a:ea typeface="KoPub돋움체 Light" panose="02020603020101020101" pitchFamily="18" charset="-127"/>
+              <a:endParaRPr lang="en-US" altLang="ko-KR" sz="1606" dirty="0">
+                <a:latin typeface="KoPub돋움체 Medium" panose="02020603020101020101" pitchFamily="18" charset="-127"/>
+                <a:ea typeface="KoPub돋움체 Medium" panose="02020603020101020101" pitchFamily="18" charset="-127"/>
               </a:endParaRPr>
             </a:p>
             <a:p>
               <a:r>
-                <a:rPr lang="en-US" altLang="ko-KR" sz="1600" b="1" dirty="0">
-                  <a:latin typeface="KoPub돋움체 Light" panose="02020603020101020101" pitchFamily="18" charset="-127"/>
-                  <a:ea typeface="KoPub돋움체 Light" panose="02020603020101020101" pitchFamily="18" charset="-127"/>
+                <a:rPr lang="en-US" altLang="ko-KR" sz="1606" b="1" dirty="0">
+                  <a:latin typeface="KoPub돋움체 Medium" panose="02020603020101020101" pitchFamily="18" charset="-127"/>
+                  <a:ea typeface="KoPub돋움체 Medium" panose="02020603020101020101" pitchFamily="18" charset="-127"/>
                 </a:rPr>
                 <a:t>[OUT] </a:t>
               </a:r>
               <a:r>
-                <a:rPr lang="ko-KR" altLang="en-US" sz="1600" dirty="0">
-                  <a:latin typeface="KoPub돋움체 Light" panose="02020603020101020101" pitchFamily="18" charset="-127"/>
-                  <a:ea typeface="KoPub돋움체 Light" panose="02020603020101020101" pitchFamily="18" charset="-127"/>
+                <a:rPr lang="ko-KR" altLang="en-US" sz="1606" dirty="0">
+                  <a:latin typeface="KoPub돋움체 Medium" panose="02020603020101020101" pitchFamily="18" charset="-127"/>
+                  <a:ea typeface="KoPub돋움체 Medium" panose="02020603020101020101" pitchFamily="18" charset="-127"/>
                 </a:rPr>
                 <a:t>퇴원</a:t>
               </a:r>
               <a:r>
-                <a:rPr lang="en-US" altLang="ko-KR" sz="1600" dirty="0">
-                  <a:latin typeface="KoPub돋움체 Light" panose="02020603020101020101" pitchFamily="18" charset="-127"/>
-                  <a:ea typeface="KoPub돋움체 Light" panose="02020603020101020101" pitchFamily="18" charset="-127"/>
+                <a:rPr lang="en-US" altLang="ko-KR" sz="1606" dirty="0">
+                  <a:latin typeface="KoPub돋움체 Medium" panose="02020603020101020101" pitchFamily="18" charset="-127"/>
+                  <a:ea typeface="KoPub돋움체 Medium" panose="02020603020101020101" pitchFamily="18" charset="-127"/>
                 </a:rPr>
                 <a:t>/</a:t>
               </a:r>
               <a:r>
-                <a:rPr lang="ko-KR" altLang="en-US" sz="1600" dirty="0">
-                  <a:latin typeface="KoPub돋움체 Light" panose="02020603020101020101" pitchFamily="18" charset="-127"/>
-                  <a:ea typeface="KoPub돋움체 Light" panose="02020603020101020101" pitchFamily="18" charset="-127"/>
+                <a:rPr lang="ko-KR" altLang="en-US" sz="1606" dirty="0">
+                  <a:latin typeface="KoPub돋움체 Medium" panose="02020603020101020101" pitchFamily="18" charset="-127"/>
+                  <a:ea typeface="KoPub돋움체 Medium" panose="02020603020101020101" pitchFamily="18" charset="-127"/>
                 </a:rPr>
                 <a:t>전과</a:t>
               </a:r>
               <a:r>
-                <a:rPr lang="en-US" altLang="ko-KR" sz="1600" dirty="0">
-                  <a:latin typeface="KoPub돋움체 Light" panose="02020603020101020101" pitchFamily="18" charset="-127"/>
-                  <a:ea typeface="KoPub돋움체 Light" panose="02020603020101020101" pitchFamily="18" charset="-127"/>
+                <a:rPr lang="en-US" altLang="ko-KR" sz="1606" dirty="0">
+                  <a:latin typeface="KoPub돋움체 Medium" panose="02020603020101020101" pitchFamily="18" charset="-127"/>
+                  <a:ea typeface="KoPub돋움체 Medium" panose="02020603020101020101" pitchFamily="18" charset="-127"/>
                 </a:rPr>
                 <a:t>/</a:t>
               </a:r>
               <a:r>
-                <a:rPr lang="ko-KR" altLang="en-US" sz="1600" dirty="0">
-                  <a:latin typeface="KoPub돋움체 Light" panose="02020603020101020101" pitchFamily="18" charset="-127"/>
-                  <a:ea typeface="KoPub돋움체 Light" panose="02020603020101020101" pitchFamily="18" charset="-127"/>
+                <a:rPr lang="ko-KR" altLang="en-US" sz="1606" dirty="0">
+                  <a:latin typeface="KoPub돋움체 Medium" panose="02020603020101020101" pitchFamily="18" charset="-127"/>
+                  <a:ea typeface="KoPub돋움체 Medium" panose="02020603020101020101" pitchFamily="18" charset="-127"/>
                 </a:rPr>
                 <a:t>사망</a:t>
               </a:r>
-              <a:endParaRPr lang="en-US" altLang="ko-KR" sz="1600" dirty="0">
-                <a:latin typeface="KoPub돋움체 Light" panose="02020603020101020101" pitchFamily="18" charset="-127"/>
-                <a:ea typeface="KoPub돋움체 Light" panose="02020603020101020101" pitchFamily="18" charset="-127"/>
+              <a:endParaRPr lang="en-US" altLang="ko-KR" sz="1606" dirty="0">
+                <a:latin typeface="KoPub돋움체 Medium" panose="02020603020101020101" pitchFamily="18" charset="-127"/>
+                <a:ea typeface="KoPub돋움체 Medium" panose="02020603020101020101" pitchFamily="18" charset="-127"/>
               </a:endParaRPr>
             </a:p>
           </p:txBody>
@@ -9381,7 +9421,7 @@
           <p:cNvPr id="2" name="TextBox 1">
             <a:extLst>
               <a:ext uri="{FF2B5EF4-FFF2-40B4-BE49-F238E27FC236}">
-                <a16:creationId xmlns:a16="http://schemas.microsoft.com/office/drawing/2014/main" id="{5C7E232E-6B0D-4C30-967C-1D82B967BC1B}"/>
+                <a16:creationId xmlns:a16="http://schemas.microsoft.com/office/drawing/2014/main" id="{C6947DE9-DED1-9903-3FD7-C89E991F2856}"/>
               </a:ext>
             </a:extLst>
           </p:cNvPr>
@@ -9390,8 +9430,8 @@
         </p:nvSpPr>
         <p:spPr>
           <a:xfrm>
-            <a:off x="589442" y="881803"/>
-            <a:ext cx="2564384" cy="400110"/>
+            <a:off x="591795" y="875055"/>
+            <a:ext cx="2574624" cy="461665"/>
           </a:xfrm>
           <a:prstGeom prst="rect">
             <a:avLst/>
@@ -9406,29 +9446,29 @@
           <a:p>
             <a:pPr algn="ctr"/>
             <a:r>
-              <a:rPr lang="ko-KR" altLang="en-US" sz="2000" b="1" dirty="0">
-                <a:latin typeface="KoPub돋움체 Light" panose="02020603020101020101" pitchFamily="18" charset="-127"/>
-                <a:ea typeface="KoPub돋움체 Light" panose="02020603020101020101" pitchFamily="18" charset="-127"/>
+              <a:rPr lang="ko-KR" altLang="en-US" sz="2400" b="1" dirty="0">
+                <a:latin typeface="KoPub돋움체 Medium" panose="02020603020101020101" pitchFamily="18" charset="-127"/>
+                <a:ea typeface="KoPub돋움체 Medium" panose="02020603020101020101" pitchFamily="18" charset="-127"/>
               </a:rPr>
               <a:t>하이패스 태그 </a:t>
             </a:r>
             <a:r>
-              <a:rPr lang="en-US" altLang="ko-KR" sz="2000" b="1" dirty="0">
-                <a:latin typeface="KoPub돋움체 Light" panose="02020603020101020101" pitchFamily="18" charset="-127"/>
-                <a:ea typeface="KoPub돋움체 Light" panose="02020603020101020101" pitchFamily="18" charset="-127"/>
+              <a:rPr lang="en-US" altLang="ko-KR" sz="2400" b="1" dirty="0">
+                <a:latin typeface="KoPub돋움체 Medium" panose="02020603020101020101" pitchFamily="18" charset="-127"/>
+                <a:ea typeface="KoPub돋움체 Medium" panose="02020603020101020101" pitchFamily="18" charset="-127"/>
               </a:rPr>
               <a:t>10</a:t>
             </a:r>
             <a:r>
-              <a:rPr lang="ko-KR" altLang="en-US" sz="2000" b="1" dirty="0">
-                <a:latin typeface="KoPub돋움체 Light" panose="02020603020101020101" pitchFamily="18" charset="-127"/>
-                <a:ea typeface="KoPub돋움체 Light" panose="02020603020101020101" pitchFamily="18" charset="-127"/>
+              <a:rPr lang="ko-KR" altLang="en-US" sz="2400" b="1" dirty="0">
+                <a:latin typeface="KoPub돋움체 Medium" panose="02020603020101020101" pitchFamily="18" charset="-127"/>
+                <a:ea typeface="KoPub돋움체 Medium" panose="02020603020101020101" pitchFamily="18" charset="-127"/>
               </a:rPr>
               <a:t>종</a:t>
             </a:r>
-            <a:endParaRPr lang="en-US" altLang="ko-KR" sz="2000" b="1" dirty="0">
-              <a:latin typeface="KoPub돋움체 Light" panose="02020603020101020101" pitchFamily="18" charset="-127"/>
-              <a:ea typeface="KoPub돋움체 Light" panose="02020603020101020101" pitchFamily="18" charset="-127"/>
+            <a:endParaRPr lang="en-US" altLang="ko-KR" sz="2400" b="1" dirty="0">
+              <a:latin typeface="KoPub돋움체 Medium" panose="02020603020101020101" pitchFamily="18" charset="-127"/>
+              <a:ea typeface="KoPub돋움체 Medium" panose="02020603020101020101" pitchFamily="18" charset="-127"/>
             </a:endParaRPr>
           </a:p>
         </p:txBody>
@@ -9438,7 +9478,7 @@
           <p:cNvPr id="8" name="TextBox 7">
             <a:extLst>
               <a:ext uri="{FF2B5EF4-FFF2-40B4-BE49-F238E27FC236}">
-                <a16:creationId xmlns:a16="http://schemas.microsoft.com/office/drawing/2014/main" id="{2D7FF5CD-F432-4D5C-924D-9C31E13C1988}"/>
+                <a16:creationId xmlns:a16="http://schemas.microsoft.com/office/drawing/2014/main" id="{D4B07858-B5FC-C458-6201-DF02B55294E6}"/>
               </a:ext>
             </a:extLst>
           </p:cNvPr>
@@ -9447,8 +9487,8 @@
         </p:nvSpPr>
         <p:spPr>
           <a:xfrm>
-            <a:off x="5281613" y="1573045"/>
-            <a:ext cx="2843725" cy="584775"/>
+            <a:off x="5193921" y="1509776"/>
+            <a:ext cx="2855080" cy="707886"/>
           </a:xfrm>
           <a:prstGeom prst="rect">
             <a:avLst/>
@@ -9462,43 +9502,43 @@
           <a:lstStyle/>
           <a:p>
             <a:r>
-              <a:rPr lang="ko-KR" altLang="en-US" sz="1600" dirty="0">
-                <a:latin typeface="KoPub돋움체 Light" panose="02020603020101020101" pitchFamily="18" charset="-127"/>
-                <a:ea typeface="KoPub돋움체 Light" panose="02020603020101020101" pitchFamily="18" charset="-127"/>
+              <a:rPr lang="ko-KR" altLang="en-US" sz="2000" b="1" dirty="0">
+                <a:latin typeface="KoPub돋움체 Medium" panose="02020603020101020101" pitchFamily="18" charset="-127"/>
+                <a:ea typeface="KoPub돋움체 Medium" panose="02020603020101020101" pitchFamily="18" charset="-127"/>
               </a:rPr>
               <a:t>근무 교대 시 미완료 건에 </a:t>
             </a:r>
             <a:r>
-              <a:rPr lang="en-US" altLang="ko-KR" sz="1600" dirty="0">
-                <a:latin typeface="KoPub돋움체 Light" panose="02020603020101020101" pitchFamily="18" charset="-127"/>
-                <a:ea typeface="KoPub돋움체 Light" panose="02020603020101020101" pitchFamily="18" charset="-127"/>
+              <a:rPr lang="en-US" altLang="ko-KR" sz="2000" b="1" dirty="0">
+                <a:latin typeface="KoPub돋움체 Medium" panose="02020603020101020101" pitchFamily="18" charset="-127"/>
+                <a:ea typeface="KoPub돋움체 Medium" panose="02020603020101020101" pitchFamily="18" charset="-127"/>
               </a:rPr>
               <a:t>'</a:t>
             </a:r>
             <a:r>
-              <a:rPr lang="ko-KR" altLang="en-US" sz="1600" dirty="0">
-                <a:latin typeface="KoPub돋움체 Light" panose="02020603020101020101" pitchFamily="18" charset="-127"/>
-                <a:ea typeface="KoPub돋움체 Light" panose="02020603020101020101" pitchFamily="18" charset="-127"/>
+              <a:rPr lang="ko-KR" altLang="en-US" sz="2000" b="1" dirty="0">
+                <a:latin typeface="KoPub돋움체 Medium" panose="02020603020101020101" pitchFamily="18" charset="-127"/>
+                <a:ea typeface="KoPub돋움체 Medium" panose="02020603020101020101" pitchFamily="18" charset="-127"/>
               </a:rPr>
               <a:t>답장</a:t>
             </a:r>
             <a:r>
-              <a:rPr lang="en-US" altLang="ko-KR" sz="1600" dirty="0">
-                <a:latin typeface="KoPub돋움체 Light" panose="02020603020101020101" pitchFamily="18" charset="-127"/>
-                <a:ea typeface="KoPub돋움체 Light" panose="02020603020101020101" pitchFamily="18" charset="-127"/>
+              <a:rPr lang="en-US" altLang="ko-KR" sz="2000" b="1" dirty="0">
+                <a:latin typeface="KoPub돋움체 Medium" panose="02020603020101020101" pitchFamily="18" charset="-127"/>
+                <a:ea typeface="KoPub돋움체 Medium" panose="02020603020101020101" pitchFamily="18" charset="-127"/>
               </a:rPr>
               <a:t>'</a:t>
             </a:r>
             <a:r>
-              <a:rPr lang="ko-KR" altLang="en-US" sz="1600" dirty="0">
-                <a:latin typeface="KoPub돋움체 Light" panose="02020603020101020101" pitchFamily="18" charset="-127"/>
-                <a:ea typeface="KoPub돋움체 Light" panose="02020603020101020101" pitchFamily="18" charset="-127"/>
+              <a:rPr lang="ko-KR" altLang="en-US" sz="2000" b="1" dirty="0">
+                <a:latin typeface="KoPub돋움체 Medium" panose="02020603020101020101" pitchFamily="18" charset="-127"/>
+                <a:ea typeface="KoPub돋움체 Medium" panose="02020603020101020101" pitchFamily="18" charset="-127"/>
               </a:rPr>
               <a:t>으로 인계 기록</a:t>
             </a:r>
-            <a:endParaRPr lang="en-US" altLang="ko-KR" sz="1600" dirty="0">
-              <a:latin typeface="KoPub돋움체 Light" panose="02020603020101020101" pitchFamily="18" charset="-127"/>
-              <a:ea typeface="KoPub돋움체 Light" panose="02020603020101020101" pitchFamily="18" charset="-127"/>
+            <a:endParaRPr lang="en-US" altLang="ko-KR" sz="2000" b="1" dirty="0">
+              <a:latin typeface="KoPub돋움체 Medium" panose="02020603020101020101" pitchFamily="18" charset="-127"/>
+              <a:ea typeface="KoPub돋움체 Medium" panose="02020603020101020101" pitchFamily="18" charset="-127"/>
             </a:endParaRPr>
           </a:p>
         </p:txBody>
@@ -9508,7 +9548,7 @@
           <p:cNvPr id="9" name="사각형: 둥근 모서리 8">
             <a:extLst>
               <a:ext uri="{FF2B5EF4-FFF2-40B4-BE49-F238E27FC236}">
-                <a16:creationId xmlns:a16="http://schemas.microsoft.com/office/drawing/2014/main" id="{81771CDF-B55B-4421-928F-D1D7D43CFAC8}"/>
+                <a16:creationId xmlns:a16="http://schemas.microsoft.com/office/drawing/2014/main" id="{DAD284FC-B987-5600-5C2C-AAD8F03B810C}"/>
               </a:ext>
             </a:extLst>
           </p:cNvPr>
@@ -9517,8 +9557,8 @@
         </p:nvSpPr>
         <p:spPr>
           <a:xfrm>
-            <a:off x="5067299" y="1396134"/>
-            <a:ext cx="3484563" cy="959835"/>
+            <a:off x="5087533" y="1391440"/>
+            <a:ext cx="3498477" cy="963668"/>
           </a:xfrm>
           <a:prstGeom prst="roundRect">
             <a:avLst>
@@ -9555,9 +9595,9 @@
           <a:lstStyle/>
           <a:p>
             <a:pPr algn="ctr"/>
-            <a:endParaRPr lang="ko-KR" altLang="en-US" sz="5080">
+            <a:endParaRPr lang="ko-KR" altLang="en-US" sz="5100">
               <a:latin typeface="KoPub돋움체 Medium" panose="02020603020101020101" pitchFamily="18" charset="-127"/>
-              <a:ea typeface="KoPub돋움체 Light" panose="02020603020101020101"/>
+              <a:ea typeface="KoPub돋움체 Medium" panose="02020603020101020101" pitchFamily="18" charset="-127"/>
             </a:endParaRPr>
           </a:p>
         </p:txBody>
@@ -9567,7 +9607,7 @@
           <p:cNvPr id="11" name="사각형: 둥근 모서리 10">
             <a:extLst>
               <a:ext uri="{FF2B5EF4-FFF2-40B4-BE49-F238E27FC236}">
-                <a16:creationId xmlns:a16="http://schemas.microsoft.com/office/drawing/2014/main" id="{A9BD57B0-0CB8-437B-91FF-358B1B271C52}"/>
+                <a16:creationId xmlns:a16="http://schemas.microsoft.com/office/drawing/2014/main" id="{E4B2826B-049F-B77F-D710-6BD388BA1109}"/>
               </a:ext>
             </a:extLst>
           </p:cNvPr>
@@ -9576,8 +9616,8 @@
         </p:nvSpPr>
         <p:spPr>
           <a:xfrm>
-            <a:off x="3204625" y="1401423"/>
-            <a:ext cx="1811875" cy="954545"/>
+            <a:off x="3217421" y="1396750"/>
+            <a:ext cx="1819110" cy="958357"/>
           </a:xfrm>
           <a:prstGeom prst="roundRect">
             <a:avLst>
@@ -9615,9 +9655,9 @@
           <a:lstStyle/>
           <a:p>
             <a:pPr algn="ctr"/>
-            <a:endParaRPr lang="ko-KR" altLang="en-US" sz="5080">
+            <a:endParaRPr lang="ko-KR" altLang="en-US" sz="5100">
               <a:latin typeface="KoPub돋움체 Medium" panose="02020603020101020101" pitchFamily="18" charset="-127"/>
-              <a:ea typeface="KoPub돋움체 Light" panose="02020603020101020101"/>
+              <a:ea typeface="KoPub돋움체 Medium" panose="02020603020101020101" pitchFamily="18" charset="-127"/>
             </a:endParaRPr>
           </a:p>
         </p:txBody>
@@ -9627,7 +9667,7 @@
           <p:cNvPr id="12" name="TextBox 11">
             <a:extLst>
               <a:ext uri="{FF2B5EF4-FFF2-40B4-BE49-F238E27FC236}">
-                <a16:creationId xmlns:a16="http://schemas.microsoft.com/office/drawing/2014/main" id="{3717CE27-01D2-4557-B697-30F1806A81B3}"/>
+                <a16:creationId xmlns:a16="http://schemas.microsoft.com/office/drawing/2014/main" id="{F61A40A7-A989-5343-6AD4-F738F0967F35}"/>
               </a:ext>
             </a:extLst>
           </p:cNvPr>
@@ -9636,8 +9676,8 @@
         </p:nvSpPr>
         <p:spPr>
           <a:xfrm>
-            <a:off x="3573396" y="1682514"/>
-            <a:ext cx="1074332" cy="338554"/>
+            <a:off x="3501645" y="1656841"/>
+            <a:ext cx="1250663" cy="400110"/>
           </a:xfrm>
           <a:prstGeom prst="rect">
             <a:avLst/>
@@ -9652,9 +9692,9 @@
           <a:p>
             <a:pPr algn="ctr"/>
             <a:r>
-              <a:rPr lang="en-US" altLang="ko-KR" sz="1600" b="1" dirty="0">
-                <a:latin typeface="KoPub돋움체 Light" panose="02020603020101020101" pitchFamily="18" charset="-127"/>
-                <a:ea typeface="KoPub돋움체 Light" panose="02020603020101020101" pitchFamily="18" charset="-127"/>
+              <a:rPr lang="en-US" altLang="ko-KR" sz="2000" b="1" dirty="0">
+                <a:latin typeface="KoPub돋움체 Medium" panose="02020603020101020101" pitchFamily="18" charset="-127"/>
+                <a:ea typeface="KoPub돋움체 Medium" panose="02020603020101020101" pitchFamily="18" charset="-127"/>
               </a:rPr>
               <a:t>[IN-OUT]</a:t>
             </a:r>
@@ -9666,7 +9706,7 @@
           <p:cNvPr id="4" name="직사각형 3">
             <a:extLst>
               <a:ext uri="{FF2B5EF4-FFF2-40B4-BE49-F238E27FC236}">
-                <a16:creationId xmlns:a16="http://schemas.microsoft.com/office/drawing/2014/main" id="{3306E135-233E-4999-A710-7E3C99EFDAEF}"/>
+                <a16:creationId xmlns:a16="http://schemas.microsoft.com/office/drawing/2014/main" id="{CC4B9C35-A24B-4D76-50D3-5BF05EE5659B}"/>
               </a:ext>
             </a:extLst>
           </p:cNvPr>
@@ -9675,8 +9715,8 @@
         </p:nvSpPr>
         <p:spPr>
           <a:xfrm>
-            <a:off x="4362454" y="860517"/>
-            <a:ext cx="2762295" cy="400110"/>
+            <a:off x="4379873" y="853684"/>
+            <a:ext cx="2863284" cy="461665"/>
           </a:xfrm>
           <a:prstGeom prst="rect">
             <a:avLst/>
@@ -9689,15 +9729,15 @@
           <a:lstStyle/>
           <a:p>
             <a:r>
-              <a:rPr lang="ko-KR" altLang="en-US" sz="2000" b="1" dirty="0">
-                <a:latin typeface="KoPub돋움체 Light" panose="02020603020101020101" pitchFamily="18" charset="-127"/>
-                <a:ea typeface="KoPub돋움체 Light" panose="02020603020101020101" pitchFamily="18" charset="-127"/>
+              <a:rPr lang="ko-KR" altLang="en-US" sz="2400" b="1" dirty="0">
+                <a:latin typeface="KoPub돋움체 Medium" panose="02020603020101020101" pitchFamily="18" charset="-127"/>
+                <a:ea typeface="KoPub돋움체 Medium" panose="02020603020101020101" pitchFamily="18" charset="-127"/>
               </a:rPr>
               <a:t>나를 지키는 방어 기록</a:t>
             </a:r>
-            <a:endParaRPr lang="en-US" altLang="ko-KR" sz="2000" b="1" dirty="0">
-              <a:latin typeface="KoPub돋움체 Light" panose="02020603020101020101" pitchFamily="18" charset="-127"/>
-              <a:ea typeface="KoPub돋움체 Light" panose="02020603020101020101" pitchFamily="18" charset="-127"/>
+            <a:endParaRPr lang="en-US" altLang="ko-KR" sz="2400" b="1" dirty="0">
+              <a:latin typeface="KoPub돋움체 Medium" panose="02020603020101020101" pitchFamily="18" charset="-127"/>
+              <a:ea typeface="KoPub돋움체 Medium" panose="02020603020101020101" pitchFamily="18" charset="-127"/>
             </a:endParaRPr>
           </a:p>
         </p:txBody>
@@ -9707,7 +9747,7 @@
           <p:cNvPr id="27" name="TextBox 26">
             <a:extLst>
               <a:ext uri="{FF2B5EF4-FFF2-40B4-BE49-F238E27FC236}">
-                <a16:creationId xmlns:a16="http://schemas.microsoft.com/office/drawing/2014/main" id="{6950ADB8-A755-4C4B-8102-F58976B5B6D4}"/>
+                <a16:creationId xmlns:a16="http://schemas.microsoft.com/office/drawing/2014/main" id="{15A2DB03-5BA2-14D6-BBB7-FD7341FBF3E3}"/>
               </a:ext>
             </a:extLst>
           </p:cNvPr>
@@ -9716,8 +9756,8 @@
         </p:nvSpPr>
         <p:spPr>
           <a:xfrm>
-            <a:off x="5281613" y="3503834"/>
-            <a:ext cx="3119437" cy="584775"/>
+            <a:off x="5193921" y="3448274"/>
+            <a:ext cx="3443091" cy="707886"/>
           </a:xfrm>
           <a:prstGeom prst="rect">
             <a:avLst/>
@@ -9731,92 +9771,92 @@
           <a:lstStyle/>
           <a:p>
             <a:r>
-              <a:rPr lang="en-US" altLang="ko-KR" sz="1600" dirty="0">
-                <a:latin typeface="KoPub돋움체 Light" panose="02020603020101020101" pitchFamily="18" charset="-127"/>
-                <a:ea typeface="KoPub돋움체 Light" panose="02020603020101020101" pitchFamily="18" charset="-127"/>
+              <a:rPr lang="en-US" altLang="ko-KR" sz="2000" b="1" dirty="0">
+                <a:latin typeface="KoPub돋움체 Medium" panose="02020603020101020101" pitchFamily="18" charset="-127"/>
+                <a:ea typeface="KoPub돋움체 Medium" panose="02020603020101020101" pitchFamily="18" charset="-127"/>
               </a:rPr>
               <a:t>PA </a:t>
             </a:r>
             <a:r>
-              <a:rPr lang="ko-KR" altLang="en-US" sz="1600" dirty="0">
-                <a:latin typeface="KoPub돋움체 Light" panose="02020603020101020101" pitchFamily="18" charset="-127"/>
-                <a:ea typeface="KoPub돋움체 Light" panose="02020603020101020101" pitchFamily="18" charset="-127"/>
+              <a:rPr lang="ko-KR" altLang="en-US" sz="2000" b="1" dirty="0">
+                <a:latin typeface="KoPub돋움체 Medium" panose="02020603020101020101" pitchFamily="18" charset="-127"/>
+                <a:ea typeface="KoPub돋움체 Medium" panose="02020603020101020101" pitchFamily="18" charset="-127"/>
               </a:rPr>
               <a:t>지연 사유</a:t>
             </a:r>
             <a:r>
-              <a:rPr lang="en-US" altLang="ko-KR" sz="1600" dirty="0">
-                <a:latin typeface="KoPub돋움체 Light" panose="02020603020101020101" pitchFamily="18" charset="-127"/>
-                <a:ea typeface="KoPub돋움체 Light" panose="02020603020101020101" pitchFamily="18" charset="-127"/>
+              <a:rPr lang="en-US" altLang="ko-KR" sz="2000" b="1" dirty="0">
+                <a:latin typeface="KoPub돋움체 Medium" panose="02020603020101020101" pitchFamily="18" charset="-127"/>
+                <a:ea typeface="KoPub돋움체 Medium" panose="02020603020101020101" pitchFamily="18" charset="-127"/>
               </a:rPr>
               <a:t>(</a:t>
             </a:r>
             <a:r>
-              <a:rPr lang="ko-KR" altLang="en-US" sz="1600" dirty="0">
-                <a:latin typeface="KoPub돋움체 Light" panose="02020603020101020101" pitchFamily="18" charset="-127"/>
-                <a:ea typeface="KoPub돋움체 Light" panose="02020603020101020101" pitchFamily="18" charset="-127"/>
+              <a:rPr lang="ko-KR" altLang="en-US" sz="2000" b="1" dirty="0">
+                <a:latin typeface="KoPub돋움체 Medium" panose="02020603020101020101" pitchFamily="18" charset="-127"/>
+                <a:ea typeface="KoPub돋움체 Medium" panose="02020603020101020101" pitchFamily="18" charset="-127"/>
               </a:rPr>
               <a:t>응급</a:t>
             </a:r>
             <a:r>
-              <a:rPr lang="en-US" altLang="ko-KR" sz="1600" dirty="0">
-                <a:latin typeface="KoPub돋움체 Light" panose="02020603020101020101" pitchFamily="18" charset="-127"/>
-                <a:ea typeface="KoPub돋움체 Light" panose="02020603020101020101" pitchFamily="18" charset="-127"/>
+              <a:rPr lang="en-US" altLang="ko-KR" sz="2000" b="1" dirty="0">
+                <a:latin typeface="KoPub돋움체 Medium" panose="02020603020101020101" pitchFamily="18" charset="-127"/>
+                <a:ea typeface="KoPub돋움체 Medium" panose="02020603020101020101" pitchFamily="18" charset="-127"/>
               </a:rPr>
               <a:t>·</a:t>
             </a:r>
             <a:r>
-              <a:rPr lang="ko-KR" altLang="en-US" sz="1600" dirty="0">
-                <a:latin typeface="KoPub돋움체 Light" panose="02020603020101020101" pitchFamily="18" charset="-127"/>
-                <a:ea typeface="KoPub돋움체 Light" panose="02020603020101020101" pitchFamily="18" charset="-127"/>
+              <a:rPr lang="ko-KR" altLang="en-US" sz="2000" b="1" dirty="0">
+                <a:latin typeface="KoPub돋움체 Medium" panose="02020603020101020101" pitchFamily="18" charset="-127"/>
+                <a:ea typeface="KoPub돋움체 Medium" panose="02020603020101020101" pitchFamily="18" charset="-127"/>
               </a:rPr>
               <a:t>수술</a:t>
             </a:r>
             <a:r>
-              <a:rPr lang="en-US" altLang="ko-KR" sz="1600" dirty="0">
-                <a:latin typeface="KoPub돋움체 Light" panose="02020603020101020101" pitchFamily="18" charset="-127"/>
-                <a:ea typeface="KoPub돋움체 Light" panose="02020603020101020101" pitchFamily="18" charset="-127"/>
+              <a:rPr lang="en-US" altLang="ko-KR" sz="2000" b="1" dirty="0">
+                <a:latin typeface="KoPub돋움체 Medium" panose="02020603020101020101" pitchFamily="18" charset="-127"/>
+                <a:ea typeface="KoPub돋움체 Medium" panose="02020603020101020101" pitchFamily="18" charset="-127"/>
               </a:rPr>
               <a:t>·</a:t>
             </a:r>
             <a:r>
-              <a:rPr lang="ko-KR" altLang="en-US" sz="1600" dirty="0">
-                <a:latin typeface="KoPub돋움체 Light" panose="02020603020101020101" pitchFamily="18" charset="-127"/>
-                <a:ea typeface="KoPub돋움체 Light" panose="02020603020101020101" pitchFamily="18" charset="-127"/>
+              <a:rPr lang="ko-KR" altLang="en-US" sz="2000" b="1" dirty="0">
+                <a:latin typeface="KoPub돋움체 Medium" panose="02020603020101020101" pitchFamily="18" charset="-127"/>
+                <a:ea typeface="KoPub돋움체 Medium" panose="02020603020101020101" pitchFamily="18" charset="-127"/>
               </a:rPr>
               <a:t>대기</a:t>
             </a:r>
             <a:r>
-              <a:rPr lang="en-US" altLang="ko-KR" sz="1600" dirty="0">
-                <a:latin typeface="KoPub돋움체 Light" panose="02020603020101020101" pitchFamily="18" charset="-127"/>
-                <a:ea typeface="KoPub돋움체 Light" panose="02020603020101020101" pitchFamily="18" charset="-127"/>
+              <a:rPr lang="en-US" altLang="ko-KR" sz="2000" b="1" dirty="0">
+                <a:latin typeface="KoPub돋움체 Medium" panose="02020603020101020101" pitchFamily="18" charset="-127"/>
+                <a:ea typeface="KoPub돋움체 Medium" panose="02020603020101020101" pitchFamily="18" charset="-127"/>
               </a:rPr>
               <a:t>·</a:t>
             </a:r>
             <a:r>
-              <a:rPr lang="ko-KR" altLang="en-US" sz="1600" dirty="0" err="1">
-                <a:latin typeface="KoPub돋움체 Light" panose="02020603020101020101" pitchFamily="18" charset="-127"/>
-                <a:ea typeface="KoPub돋움체 Light" panose="02020603020101020101" pitchFamily="18" charset="-127"/>
+              <a:rPr lang="ko-KR" altLang="en-US" sz="2000" b="1" dirty="0" err="1">
+                <a:latin typeface="KoPub돋움체 Medium" panose="02020603020101020101" pitchFamily="18" charset="-127"/>
+                <a:ea typeface="KoPub돋움체 Medium" panose="02020603020101020101" pitchFamily="18" charset="-127"/>
               </a:rPr>
               <a:t>컨펌</a:t>
             </a:r>
             <a:r>
-              <a:rPr lang="en-US" altLang="ko-KR" sz="1600" dirty="0">
-                <a:latin typeface="KoPub돋움체 Light" panose="02020603020101020101" pitchFamily="18" charset="-127"/>
-                <a:ea typeface="KoPub돋움체 Light" panose="02020603020101020101" pitchFamily="18" charset="-127"/>
+              <a:rPr lang="en-US" altLang="ko-KR" sz="2000" b="1" dirty="0">
+                <a:latin typeface="KoPub돋움체 Medium" panose="02020603020101020101" pitchFamily="18" charset="-127"/>
+                <a:ea typeface="KoPub돋움체 Medium" panose="02020603020101020101" pitchFamily="18" charset="-127"/>
               </a:rPr>
               <a:t>) </a:t>
             </a:r>
             <a:r>
-              <a:rPr lang="ko-KR" altLang="en-US" sz="1600" dirty="0">
-                <a:latin typeface="KoPub돋움체 Light" panose="02020603020101020101" pitchFamily="18" charset="-127"/>
-                <a:ea typeface="KoPub돋움체 Light" panose="02020603020101020101" pitchFamily="18" charset="-127"/>
+              <a:rPr lang="ko-KR" altLang="en-US" sz="2000" b="1" dirty="0">
+                <a:latin typeface="KoPub돋움체 Medium" panose="02020603020101020101" pitchFamily="18" charset="-127"/>
+                <a:ea typeface="KoPub돋움체 Medium" panose="02020603020101020101" pitchFamily="18" charset="-127"/>
               </a:rPr>
               <a:t>명시</a:t>
             </a:r>
-            <a:endParaRPr lang="en-US" altLang="ko-KR" sz="1600" dirty="0">
-              <a:latin typeface="KoPub돋움체 Light" panose="02020603020101020101" pitchFamily="18" charset="-127"/>
-              <a:ea typeface="KoPub돋움체 Light" panose="02020603020101020101" pitchFamily="18" charset="-127"/>
+            <a:endParaRPr lang="en-US" altLang="ko-KR" sz="2000" b="1" dirty="0">
+              <a:latin typeface="KoPub돋움체 Medium" panose="02020603020101020101" pitchFamily="18" charset="-127"/>
+              <a:ea typeface="KoPub돋움체 Medium" panose="02020603020101020101" pitchFamily="18" charset="-127"/>
             </a:endParaRPr>
           </a:p>
         </p:txBody>
@@ -9826,7 +9866,7 @@
           <p:cNvPr id="28" name="사각형: 둥근 모서리 27">
             <a:extLst>
               <a:ext uri="{FF2B5EF4-FFF2-40B4-BE49-F238E27FC236}">
-                <a16:creationId xmlns:a16="http://schemas.microsoft.com/office/drawing/2014/main" id="{2A688FE5-A3E9-4A7D-9640-97D9C0317280}"/>
+                <a16:creationId xmlns:a16="http://schemas.microsoft.com/office/drawing/2014/main" id="{9145F3EB-D771-5C22-6844-0F4218ED0FDF}"/>
               </a:ext>
             </a:extLst>
           </p:cNvPr>
@@ -9835,8 +9875,8 @@
         </p:nvSpPr>
         <p:spPr>
           <a:xfrm>
-            <a:off x="5067299" y="3376222"/>
-            <a:ext cx="3484563" cy="829420"/>
+            <a:off x="5087533" y="3379434"/>
+            <a:ext cx="3498477" cy="832732"/>
           </a:xfrm>
           <a:prstGeom prst="roundRect">
             <a:avLst>
@@ -9873,9 +9913,9 @@
           <a:lstStyle/>
           <a:p>
             <a:pPr algn="ctr"/>
-            <a:endParaRPr lang="ko-KR" altLang="en-US" sz="5080">
+            <a:endParaRPr lang="ko-KR" altLang="en-US" sz="5100">
               <a:latin typeface="KoPub돋움체 Medium" panose="02020603020101020101" pitchFamily="18" charset="-127"/>
-              <a:ea typeface="KoPub돋움체 Light" panose="02020603020101020101"/>
+              <a:ea typeface="KoPub돋움체 Medium" panose="02020603020101020101" pitchFamily="18" charset="-127"/>
             </a:endParaRPr>
           </a:p>
         </p:txBody>
@@ -9885,7 +9925,7 @@
           <p:cNvPr id="29" name="사각형: 둥근 모서리 28">
             <a:extLst>
               <a:ext uri="{FF2B5EF4-FFF2-40B4-BE49-F238E27FC236}">
-                <a16:creationId xmlns:a16="http://schemas.microsoft.com/office/drawing/2014/main" id="{64D39DA0-5EC6-4030-BC9A-5BA4D6820777}"/>
+                <a16:creationId xmlns:a16="http://schemas.microsoft.com/office/drawing/2014/main" id="{07A38269-1130-C55F-A5CA-A5E71629CAE3}"/>
               </a:ext>
             </a:extLst>
           </p:cNvPr>
@@ -9894,8 +9934,8 @@
         </p:nvSpPr>
         <p:spPr>
           <a:xfrm>
-            <a:off x="3204625" y="3381511"/>
-            <a:ext cx="1811875" cy="829420"/>
+            <a:off x="3217421" y="3384744"/>
+            <a:ext cx="1819110" cy="832732"/>
           </a:xfrm>
           <a:prstGeom prst="roundRect">
             <a:avLst>
@@ -9933,9 +9973,9 @@
           <a:lstStyle/>
           <a:p>
             <a:pPr algn="ctr"/>
-            <a:endParaRPr lang="ko-KR" altLang="en-US" sz="5080">
+            <a:endParaRPr lang="ko-KR" altLang="en-US" sz="5100">
               <a:latin typeface="KoPub돋움체 Medium" panose="02020603020101020101" pitchFamily="18" charset="-127"/>
-              <a:ea typeface="KoPub돋움체 Light" panose="02020603020101020101"/>
+              <a:ea typeface="KoPub돋움체 Medium" panose="02020603020101020101" pitchFamily="18" charset="-127"/>
             </a:endParaRPr>
           </a:p>
         </p:txBody>
@@ -9945,7 +9985,7 @@
           <p:cNvPr id="30" name="TextBox 29">
             <a:extLst>
               <a:ext uri="{FF2B5EF4-FFF2-40B4-BE49-F238E27FC236}">
-                <a16:creationId xmlns:a16="http://schemas.microsoft.com/office/drawing/2014/main" id="{3C4779CB-7AE4-4301-8B2E-ADD0772F1C8C}"/>
+                <a16:creationId xmlns:a16="http://schemas.microsoft.com/office/drawing/2014/main" id="{EDB9D114-B073-BFCB-4F31-1FB3F7912B61}"/>
               </a:ext>
             </a:extLst>
           </p:cNvPr>
@@ -9954,8 +9994,8 @@
         </p:nvSpPr>
         <p:spPr>
           <a:xfrm>
-            <a:off x="3660760" y="3626944"/>
-            <a:ext cx="899605" cy="338554"/>
+            <a:off x="3588368" y="3609035"/>
+            <a:ext cx="1077219" cy="400110"/>
           </a:xfrm>
           <a:prstGeom prst="rect">
             <a:avLst/>
@@ -9970,9 +10010,9 @@
           <a:p>
             <a:pPr algn="ctr"/>
             <a:r>
-              <a:rPr lang="en-US" altLang="ko-KR" sz="1600" b="1" dirty="0">
-                <a:latin typeface="KoPub돋움체 Light" panose="02020603020101020101" pitchFamily="18" charset="-127"/>
-                <a:ea typeface="KoPub돋움체 Light" panose="02020603020101020101" pitchFamily="18" charset="-127"/>
+              <a:rPr lang="en-US" altLang="ko-KR" sz="2000" b="1" dirty="0">
+                <a:latin typeface="KoPub돋움체 Medium" panose="02020603020101020101" pitchFamily="18" charset="-127"/>
+                <a:ea typeface="KoPub돋움체 Medium" panose="02020603020101020101" pitchFamily="18" charset="-127"/>
               </a:rPr>
               <a:t>C-Code</a:t>
             </a:r>
@@ -9984,7 +10024,7 @@
           <p:cNvPr id="33" name="TextBox 32">
             <a:extLst>
               <a:ext uri="{FF2B5EF4-FFF2-40B4-BE49-F238E27FC236}">
-                <a16:creationId xmlns:a16="http://schemas.microsoft.com/office/drawing/2014/main" id="{CE2D936A-A45B-43D0-819F-2B99B59D02C1}"/>
+                <a16:creationId xmlns:a16="http://schemas.microsoft.com/office/drawing/2014/main" id="{0743D035-85D4-FAB3-4D6D-00AA870D0EFD}"/>
               </a:ext>
             </a:extLst>
           </p:cNvPr>
@@ -9993,8 +10033,8 @@
         </p:nvSpPr>
         <p:spPr>
           <a:xfrm>
-            <a:off x="1847923" y="4282983"/>
-            <a:ext cx="5424883" cy="461665"/>
+            <a:off x="2192472" y="4289816"/>
+            <a:ext cx="4772204" cy="465054"/>
           </a:xfrm>
           <a:prstGeom prst="rect">
             <a:avLst/>
@@ -10009,72 +10049,72 @@
           <a:p>
             <a:pPr algn="ctr"/>
             <a:r>
-              <a:rPr lang="en-US" altLang="ko-KR" sz="2400" b="1" dirty="0">
+              <a:rPr lang="en-US" altLang="ko-KR" sz="2410" b="1" dirty="0">
                 <a:solidFill>
                   <a:srgbClr val="7030A0"/>
                 </a:solidFill>
-                <a:latin typeface="KoPub돋움체 Light" panose="02020603020101020101" pitchFamily="18" charset="-127"/>
-                <a:ea typeface="KoPub돋움체 Light" panose="02020603020101020101" pitchFamily="18" charset="-127"/>
+                <a:latin typeface="KoPub돋움체 Medium" panose="02020603020101020101" pitchFamily="18" charset="-127"/>
+                <a:ea typeface="KoPub돋움체 Medium" panose="02020603020101020101" pitchFamily="18" charset="-127"/>
               </a:rPr>
               <a:t>“</a:t>
             </a:r>
             <a:r>
-              <a:rPr lang="ko-KR" altLang="en-US" sz="2400" b="1" dirty="0">
+              <a:rPr lang="ko-KR" altLang="en-US" sz="2410" b="1" dirty="0">
                 <a:solidFill>
                   <a:srgbClr val="7030A0"/>
                 </a:solidFill>
-                <a:latin typeface="KoPub돋움체 Light" panose="02020603020101020101" pitchFamily="18" charset="-127"/>
-                <a:ea typeface="KoPub돋움체 Light" panose="02020603020101020101" pitchFamily="18" charset="-127"/>
+                <a:latin typeface="KoPub돋움체 Medium" panose="02020603020101020101" pitchFamily="18" charset="-127"/>
+                <a:ea typeface="KoPub돋움체 Medium" panose="02020603020101020101" pitchFamily="18" charset="-127"/>
               </a:rPr>
               <a:t>기록은 메신저에서</a:t>
             </a:r>
             <a:r>
-              <a:rPr lang="en-US" altLang="ko-KR" sz="2400" b="1" dirty="0">
+              <a:rPr lang="en-US" altLang="ko-KR" sz="2410" b="1" dirty="0">
                 <a:solidFill>
                   <a:srgbClr val="7030A0"/>
                 </a:solidFill>
-                <a:latin typeface="KoPub돋움체 Light" panose="02020603020101020101" pitchFamily="18" charset="-127"/>
-                <a:ea typeface="KoPub돋움체 Light" panose="02020603020101020101" pitchFamily="18" charset="-127"/>
+                <a:latin typeface="KoPub돋움체 Medium" panose="02020603020101020101" pitchFamily="18" charset="-127"/>
+                <a:ea typeface="KoPub돋움체 Medium" panose="02020603020101020101" pitchFamily="18" charset="-127"/>
               </a:rPr>
               <a:t>, </a:t>
             </a:r>
             <a:r>
-              <a:rPr lang="ko-KR" altLang="en-US" sz="2400" b="1" dirty="0">
+              <a:rPr lang="ko-KR" altLang="en-US" sz="2410" b="1" dirty="0">
                 <a:solidFill>
                   <a:srgbClr val="7030A0"/>
                 </a:solidFill>
-                <a:latin typeface="KoPub돋움체 Light" panose="02020603020101020101" pitchFamily="18" charset="-127"/>
-                <a:ea typeface="KoPub돋움체 Light" panose="02020603020101020101" pitchFamily="18" charset="-127"/>
+                <a:latin typeface="KoPub돋움체 Medium" panose="02020603020101020101" pitchFamily="18" charset="-127"/>
+                <a:ea typeface="KoPub돋움체 Medium" panose="02020603020101020101" pitchFamily="18" charset="-127"/>
               </a:rPr>
               <a:t>정보는 </a:t>
             </a:r>
             <a:r>
-              <a:rPr lang="en-US" altLang="ko-KR" sz="2400" b="1" dirty="0">
+              <a:rPr lang="en-US" altLang="ko-KR" sz="2410" b="1" dirty="0">
                 <a:solidFill>
                   <a:srgbClr val="7030A0"/>
                 </a:solidFill>
-                <a:latin typeface="KoPub돋움체 Light" panose="02020603020101020101" pitchFamily="18" charset="-127"/>
-                <a:ea typeface="KoPub돋움체 Light" panose="02020603020101020101" pitchFamily="18" charset="-127"/>
+                <a:latin typeface="KoPub돋움체 Medium" panose="02020603020101020101" pitchFamily="18" charset="-127"/>
+                <a:ea typeface="KoPub돋움체 Medium" panose="02020603020101020101" pitchFamily="18" charset="-127"/>
               </a:rPr>
               <a:t>QR</a:t>
             </a:r>
             <a:r>
-              <a:rPr lang="ko-KR" altLang="en-US" sz="2400" b="1" dirty="0">
+              <a:rPr lang="ko-KR" altLang="en-US" sz="2410" b="1" dirty="0">
                 <a:solidFill>
                   <a:srgbClr val="7030A0"/>
                 </a:solidFill>
-                <a:latin typeface="KoPub돋움체 Light" panose="02020603020101020101" pitchFamily="18" charset="-127"/>
-                <a:ea typeface="KoPub돋움체 Light" panose="02020603020101020101" pitchFamily="18" charset="-127"/>
+                <a:latin typeface="KoPub돋움체 Medium" panose="02020603020101020101" pitchFamily="18" charset="-127"/>
+                <a:ea typeface="KoPub돋움체 Medium" panose="02020603020101020101" pitchFamily="18" charset="-127"/>
               </a:rPr>
               <a:t>에서</a:t>
             </a:r>
             <a:r>
-              <a:rPr lang="en-US" altLang="ko-KR" sz="2400" b="1" dirty="0">
+              <a:rPr lang="en-US" altLang="ko-KR" sz="2410" b="1" dirty="0">
                 <a:solidFill>
                   <a:srgbClr val="7030A0"/>
                 </a:solidFill>
-                <a:latin typeface="KoPub돋움체 Light" panose="02020603020101020101" pitchFamily="18" charset="-127"/>
-                <a:ea typeface="KoPub돋움체 Light" panose="02020603020101020101" pitchFamily="18" charset="-127"/>
+                <a:latin typeface="KoPub돋움체 Medium" panose="02020603020101020101" pitchFamily="18" charset="-127"/>
+                <a:ea typeface="KoPub돋움체 Medium" panose="02020603020101020101" pitchFamily="18" charset="-127"/>
               </a:rPr>
               <a:t>!”</a:t>
             </a:r>
@@ -10084,7 +10124,7 @@
     </p:spTree>
     <p:extLst>
       <p:ext uri="{BB962C8B-B14F-4D97-AF65-F5344CB8AC3E}">
-        <p14:creationId xmlns:p14="http://schemas.microsoft.com/office/powerpoint/2010/main" val="3976614071"/>
+        <p14:creationId xmlns:p14="http://schemas.microsoft.com/office/powerpoint/2010/main" val="2114337950"/>
       </p:ext>
     </p:extLst>
   </p:cSld>
@@ -10102,7 +10142,7 @@
         <p:cNvPr id="1" name="">
           <a:extLst>
             <a:ext uri="{FF2B5EF4-FFF2-40B4-BE49-F238E27FC236}">
-              <a16:creationId xmlns:a16="http://schemas.microsoft.com/office/drawing/2014/main" id="{75C95857-5CB6-E176-FDD7-C77B771BAC79}"/>
+              <a16:creationId xmlns:a16="http://schemas.microsoft.com/office/drawing/2014/main" id="{9111E4BA-7A1D-F854-F39B-78E7047A9FD1}"/>
             </a:ext>
           </a:extLst>
         </p:cNvPr>
@@ -10122,7 +10162,7 @@
           <p:cNvPr id="32" name="사각형: 둥근 모서리 31">
             <a:extLst>
               <a:ext uri="{FF2B5EF4-FFF2-40B4-BE49-F238E27FC236}">
-                <a16:creationId xmlns:a16="http://schemas.microsoft.com/office/drawing/2014/main" id="{B0243490-B7C6-42DB-B189-20704EFBD587}"/>
+                <a16:creationId xmlns:a16="http://schemas.microsoft.com/office/drawing/2014/main" id="{E0A6521C-7D76-6C94-0E57-C4E960218D2A}"/>
               </a:ext>
             </a:extLst>
           </p:cNvPr>
@@ -10131,8 +10171,8 @@
         </p:nvSpPr>
         <p:spPr>
           <a:xfrm>
-            <a:off x="590790" y="807444"/>
-            <a:ext cx="2561688" cy="548828"/>
+            <a:off x="593149" y="800399"/>
+            <a:ext cx="2571917" cy="551020"/>
           </a:xfrm>
           <a:prstGeom prst="roundRect">
             <a:avLst/>
@@ -10172,7 +10212,10 @@
           <a:lstStyle/>
           <a:p>
             <a:pPr algn="ctr"/>
-            <a:endParaRPr lang="ko-KR" altLang="en-US"/>
+            <a:endParaRPr lang="ko-KR" altLang="en-US" sz="1807">
+              <a:latin typeface="KoPub돋움체 Medium" panose="02020603020101020101" pitchFamily="18" charset="-127"/>
+              <a:ea typeface="KoPub돋움체 Medium" panose="02020603020101020101" pitchFamily="18" charset="-127"/>
+            </a:endParaRPr>
           </a:p>
         </p:txBody>
       </p:sp>
@@ -10181,7 +10224,7 @@
           <p:cNvPr id="31" name="사각형: 둥근 모서리 30">
             <a:extLst>
               <a:ext uri="{FF2B5EF4-FFF2-40B4-BE49-F238E27FC236}">
-                <a16:creationId xmlns:a16="http://schemas.microsoft.com/office/drawing/2014/main" id="{30F47067-F54E-4A90-9F21-57BD24BB9C63}"/>
+                <a16:creationId xmlns:a16="http://schemas.microsoft.com/office/drawing/2014/main" id="{2264A3FA-12C4-3B7F-AEE8-960A975C4A8F}"/>
               </a:ext>
             </a:extLst>
           </p:cNvPr>
@@ -10190,8 +10233,8 @@
         </p:nvSpPr>
         <p:spPr>
           <a:xfrm>
-            <a:off x="3204625" y="807444"/>
-            <a:ext cx="5347237" cy="548828"/>
+            <a:off x="3217421" y="800399"/>
+            <a:ext cx="5368589" cy="551020"/>
           </a:xfrm>
           <a:prstGeom prst="roundRect">
             <a:avLst/>
@@ -10231,7 +10274,10 @@
           <a:lstStyle/>
           <a:p>
             <a:pPr algn="ctr"/>
-            <a:endParaRPr lang="ko-KR" altLang="en-US"/>
+            <a:endParaRPr lang="ko-KR" altLang="en-US" sz="1807">
+              <a:latin typeface="KoPub돋움체 Medium" panose="02020603020101020101" pitchFamily="18" charset="-127"/>
+              <a:ea typeface="KoPub돋움체 Medium" panose="02020603020101020101" pitchFamily="18" charset="-127"/>
+            </a:endParaRPr>
           </a:p>
         </p:txBody>
       </p:sp>
@@ -10240,7 +10286,7 @@
           <p:cNvPr id="23" name="TextBox 22">
             <a:extLst>
               <a:ext uri="{FF2B5EF4-FFF2-40B4-BE49-F238E27FC236}">
-                <a16:creationId xmlns:a16="http://schemas.microsoft.com/office/drawing/2014/main" id="{CD41B2AA-F91D-4DF3-86CD-504CE316D08F}"/>
+                <a16:creationId xmlns:a16="http://schemas.microsoft.com/office/drawing/2014/main" id="{AA330537-CDBD-7764-7669-424386466FDC}"/>
               </a:ext>
             </a:extLst>
           </p:cNvPr>
@@ -10249,8 +10295,8 @@
         </p:nvSpPr>
         <p:spPr>
           <a:xfrm>
-            <a:off x="5281613" y="2565733"/>
-            <a:ext cx="2843725" cy="584775"/>
+            <a:off x="5193921" y="2506427"/>
+            <a:ext cx="2855080" cy="707886"/>
           </a:xfrm>
           <a:prstGeom prst="rect">
             <a:avLst/>
@@ -10264,23 +10310,23 @@
           <a:lstStyle/>
           <a:p>
             <a:r>
-              <a:rPr lang="ko-KR" altLang="en-US" sz="1600" dirty="0">
-                <a:latin typeface="KoPub돋움체 Light" panose="02020603020101020101" pitchFamily="18" charset="-127"/>
-                <a:ea typeface="KoPub돋움체 Light" panose="02020603020101020101" pitchFamily="18" charset="-127"/>
+              <a:rPr lang="ko-KR" altLang="en-US" sz="2000" b="1" dirty="0">
+                <a:latin typeface="KoPub돋움체 Medium" panose="02020603020101020101" pitchFamily="18" charset="-127"/>
+                <a:ea typeface="KoPub돋움체 Medium" panose="02020603020101020101" pitchFamily="18" charset="-127"/>
               </a:rPr>
               <a:t>야간 응급 유선 보고 후 사후 </a:t>
             </a:r>
             <a:r>
-              <a:rPr lang="en-US" altLang="ko-KR" sz="1600" dirty="0">
-                <a:latin typeface="KoPub돋움체 Light" panose="02020603020101020101" pitchFamily="18" charset="-127"/>
-                <a:ea typeface="KoPub돋움체 Light" panose="02020603020101020101" pitchFamily="18" charset="-127"/>
+              <a:rPr lang="en-US" altLang="ko-KR" sz="2000" b="1" dirty="0">
+                <a:latin typeface="KoPub돋움체 Medium" panose="02020603020101020101" pitchFamily="18" charset="-127"/>
+                <a:ea typeface="KoPub돋움체 Medium" panose="02020603020101020101" pitchFamily="18" charset="-127"/>
               </a:rPr>
               <a:t>[A]-[D] 1</a:t>
             </a:r>
             <a:r>
-              <a:rPr lang="ko-KR" altLang="en-US" sz="1600" dirty="0">
-                <a:latin typeface="KoPub돋움체 Light" panose="02020603020101020101" pitchFamily="18" charset="-127"/>
-                <a:ea typeface="KoPub돋움체 Light" panose="02020603020101020101" pitchFamily="18" charset="-127"/>
+              <a:rPr lang="ko-KR" altLang="en-US" sz="2000" b="1" dirty="0">
+                <a:latin typeface="KoPub돋움체 Medium" panose="02020603020101020101" pitchFamily="18" charset="-127"/>
+                <a:ea typeface="KoPub돋움체 Medium" panose="02020603020101020101" pitchFamily="18" charset="-127"/>
               </a:rPr>
               <a:t>줄 기록</a:t>
             </a:r>
@@ -10292,7 +10338,7 @@
           <p:cNvPr id="24" name="사각형: 둥근 모서리 23">
             <a:extLst>
               <a:ext uri="{FF2B5EF4-FFF2-40B4-BE49-F238E27FC236}">
-                <a16:creationId xmlns:a16="http://schemas.microsoft.com/office/drawing/2014/main" id="{A193F6F5-6376-4F98-A3BB-96E53249AC9E}"/>
+                <a16:creationId xmlns:a16="http://schemas.microsoft.com/office/drawing/2014/main" id="{AB163EA5-16C0-08A7-542E-AB2774A41988}"/>
               </a:ext>
             </a:extLst>
           </p:cNvPr>
@@ -10301,8 +10347,8 @@
         </p:nvSpPr>
         <p:spPr>
           <a:xfrm>
-            <a:off x="5067299" y="2388822"/>
-            <a:ext cx="3484563" cy="959835"/>
+            <a:off x="5087533" y="2388092"/>
+            <a:ext cx="3498477" cy="963668"/>
           </a:xfrm>
           <a:prstGeom prst="roundRect">
             <a:avLst>
@@ -10339,9 +10385,9 @@
           <a:lstStyle/>
           <a:p>
             <a:pPr algn="ctr"/>
-            <a:endParaRPr lang="ko-KR" altLang="en-US" sz="5080">
+            <a:endParaRPr lang="ko-KR" altLang="en-US" sz="5100">
               <a:latin typeface="KoPub돋움체 Medium" panose="02020603020101020101" pitchFamily="18" charset="-127"/>
-              <a:ea typeface="KoPub돋움체 Light" panose="02020603020101020101"/>
+              <a:ea typeface="KoPub돋움체 Medium" panose="02020603020101020101" pitchFamily="18" charset="-127"/>
             </a:endParaRPr>
           </a:p>
         </p:txBody>
@@ -10351,7 +10397,7 @@
           <p:cNvPr id="25" name="사각형: 둥근 모서리 24">
             <a:extLst>
               <a:ext uri="{FF2B5EF4-FFF2-40B4-BE49-F238E27FC236}">
-                <a16:creationId xmlns:a16="http://schemas.microsoft.com/office/drawing/2014/main" id="{ABE07B44-9D20-4CE2-BFB6-8DDA339570CA}"/>
+                <a16:creationId xmlns:a16="http://schemas.microsoft.com/office/drawing/2014/main" id="{230E952D-43BD-E3F7-2791-04739A9256BA}"/>
               </a:ext>
             </a:extLst>
           </p:cNvPr>
@@ -10360,8 +10406,8 @@
         </p:nvSpPr>
         <p:spPr>
           <a:xfrm>
-            <a:off x="3204625" y="2394111"/>
-            <a:ext cx="1811875" cy="954545"/>
+            <a:off x="3217421" y="2393402"/>
+            <a:ext cx="1819110" cy="958357"/>
           </a:xfrm>
           <a:prstGeom prst="roundRect">
             <a:avLst>
@@ -10399,9 +10445,9 @@
           <a:lstStyle/>
           <a:p>
             <a:pPr algn="ctr"/>
-            <a:endParaRPr lang="ko-KR" altLang="en-US" sz="5080">
+            <a:endParaRPr lang="ko-KR" altLang="en-US" sz="5100">
               <a:latin typeface="KoPub돋움체 Medium" panose="02020603020101020101" pitchFamily="18" charset="-127"/>
-              <a:ea typeface="KoPub돋움체 Light" panose="02020603020101020101"/>
+              <a:ea typeface="KoPub돋움체 Medium" panose="02020603020101020101" pitchFamily="18" charset="-127"/>
             </a:endParaRPr>
           </a:p>
         </p:txBody>
@@ -10411,7 +10457,7 @@
           <p:cNvPr id="26" name="TextBox 25">
             <a:extLst>
               <a:ext uri="{FF2B5EF4-FFF2-40B4-BE49-F238E27FC236}">
-                <a16:creationId xmlns:a16="http://schemas.microsoft.com/office/drawing/2014/main" id="{31132F88-5AA2-43B2-8C2A-F2BB31E51E43}"/>
+                <a16:creationId xmlns:a16="http://schemas.microsoft.com/office/drawing/2014/main" id="{87EF8968-A148-048A-6B3B-00F9FEB14419}"/>
               </a:ext>
             </a:extLst>
           </p:cNvPr>
@@ -10420,8 +10466,8 @@
         </p:nvSpPr>
         <p:spPr>
           <a:xfrm>
-            <a:off x="3415500" y="2675202"/>
-            <a:ext cx="1390125" cy="338554"/>
+            <a:off x="3354969" y="2653493"/>
+            <a:ext cx="1544012" cy="400110"/>
           </a:xfrm>
           <a:prstGeom prst="rect">
             <a:avLst/>
@@ -10436,23 +10482,23 @@
           <a:p>
             <a:pPr algn="ctr"/>
             <a:r>
-              <a:rPr lang="en-US" altLang="ko-KR" sz="1600" b="1" dirty="0">
-                <a:latin typeface="KoPub돋움체 Light" panose="02020603020101020101" pitchFamily="18" charset="-127"/>
-                <a:ea typeface="KoPub돋움체 Light" panose="02020603020101020101" pitchFamily="18" charset="-127"/>
+              <a:rPr lang="en-US" altLang="ko-KR" sz="2000" b="1" dirty="0">
+                <a:latin typeface="KoPub돋움체 Medium" panose="02020603020101020101" pitchFamily="18" charset="-127"/>
+                <a:ea typeface="KoPub돋움체 Medium" panose="02020603020101020101" pitchFamily="18" charset="-127"/>
               </a:rPr>
               <a:t>[D-</a:t>
             </a:r>
             <a:r>
-              <a:rPr lang="ko-KR" altLang="en-US" sz="1600" b="1" dirty="0" err="1">
-                <a:latin typeface="KoPub돋움체 Light" panose="02020603020101020101" pitchFamily="18" charset="-127"/>
-                <a:ea typeface="KoPub돋움체 Light" panose="02020603020101020101" pitchFamily="18" charset="-127"/>
+              <a:rPr lang="ko-KR" altLang="en-US" sz="2000" b="1" dirty="0" err="1">
+                <a:latin typeface="KoPub돋움체 Medium" panose="02020603020101020101" pitchFamily="18" charset="-127"/>
+                <a:ea typeface="KoPub돋움체 Medium" panose="02020603020101020101" pitchFamily="18" charset="-127"/>
               </a:rPr>
               <a:t>야간유선</a:t>
             </a:r>
             <a:r>
-              <a:rPr lang="en-US" altLang="ko-KR" sz="1600" b="1" dirty="0">
-                <a:latin typeface="KoPub돋움체 Light" panose="02020603020101020101" pitchFamily="18" charset="-127"/>
-                <a:ea typeface="KoPub돋움체 Light" panose="02020603020101020101" pitchFamily="18" charset="-127"/>
+              <a:rPr lang="en-US" altLang="ko-KR" sz="2000" b="1" dirty="0">
+                <a:latin typeface="KoPub돋움체 Medium" panose="02020603020101020101" pitchFamily="18" charset="-127"/>
+                <a:ea typeface="KoPub돋움체 Medium" panose="02020603020101020101" pitchFamily="18" charset="-127"/>
               </a:rPr>
               <a:t>]</a:t>
             </a:r>
@@ -10464,7 +10510,7 @@
           <p:cNvPr id="3" name="TextBox 2">
             <a:extLst>
               <a:ext uri="{FF2B5EF4-FFF2-40B4-BE49-F238E27FC236}">
-                <a16:creationId xmlns:a16="http://schemas.microsoft.com/office/drawing/2014/main" id="{BDB8E964-7EED-74B0-E816-8BE4F8865B12}"/>
+                <a16:creationId xmlns:a16="http://schemas.microsoft.com/office/drawing/2014/main" id="{3F2E8136-71CB-3516-914E-65A980B258DD}"/>
               </a:ext>
             </a:extLst>
           </p:cNvPr>
@@ -10473,8 +10519,8 @@
         </p:nvSpPr>
         <p:spPr>
           <a:xfrm>
-            <a:off x="101771" y="184601"/>
-            <a:ext cx="3476336" cy="309444"/>
+            <a:off x="302548" y="175069"/>
+            <a:ext cx="3089475" cy="311645"/>
           </a:xfrm>
           <a:prstGeom prst="rect">
             <a:avLst/>
@@ -10489,21 +10535,21 @@
           <a:p>
             <a:pPr algn="ctr"/>
             <a:r>
-              <a:rPr lang="ko-KR" altLang="en-US" sz="1411" spc="-31" dirty="0">
+              <a:rPr lang="ko-KR" altLang="en-US" sz="1417" spc="-31" dirty="0">
                 <a:latin typeface="KoPub돋움체 Light" panose="02020603020101020101" pitchFamily="18" charset="-127"/>
                 <a:ea typeface="KoPub돋움체 Light" panose="02020603020101020101" pitchFamily="18" charset="-127"/>
               </a:rPr>
               <a:t>순천향대학교 천안병원 </a:t>
             </a:r>
             <a:r>
-              <a:rPr lang="en-US" altLang="ko-KR" sz="1411" spc="-31" dirty="0">
+              <a:rPr lang="en-US" altLang="ko-KR" sz="1417" spc="-31" dirty="0">
                 <a:latin typeface="KoPub돋움체 Light" panose="02020603020101020101" pitchFamily="18" charset="-127"/>
                 <a:ea typeface="KoPub돋움체 Light" panose="02020603020101020101" pitchFamily="18" charset="-127"/>
               </a:rPr>
               <a:t>| </a:t>
             </a:r>
             <a:r>
-              <a:rPr lang="ko-KR" altLang="en-US" sz="1411" spc="-31" dirty="0">
+              <a:rPr lang="ko-KR" altLang="en-US" sz="1417" spc="-31" dirty="0">
                 <a:latin typeface="KoPub돋움체 Light" panose="02020603020101020101" pitchFamily="18" charset="-127"/>
                 <a:ea typeface="KoPub돋움체 Light" panose="02020603020101020101" pitchFamily="18" charset="-127"/>
               </a:rPr>
@@ -10517,7 +10563,7 @@
           <p:cNvPr id="7" name="그룹 6">
             <a:extLst>
               <a:ext uri="{FF2B5EF4-FFF2-40B4-BE49-F238E27FC236}">
-                <a16:creationId xmlns:a16="http://schemas.microsoft.com/office/drawing/2014/main" id="{399CA2A2-FAD0-4681-B98C-3A7AA0484B78}"/>
+                <a16:creationId xmlns:a16="http://schemas.microsoft.com/office/drawing/2014/main" id="{5F8278FD-EF8C-3A06-C91E-3321C3C92A55}"/>
               </a:ext>
             </a:extLst>
           </p:cNvPr>
@@ -10526,8 +10572,8 @@
         </p:nvGrpSpPr>
         <p:grpSpPr>
           <a:xfrm>
-            <a:off x="592138" y="1396134"/>
-            <a:ext cx="2585305" cy="2814796"/>
+            <a:off x="594503" y="1391440"/>
+            <a:ext cx="2595628" cy="2826036"/>
             <a:chOff x="592138" y="1592949"/>
             <a:chExt cx="2585305" cy="2814796"/>
           </a:xfrm>
@@ -10537,7 +10583,7 @@
             <p:cNvPr id="22" name="사각형: 둥근 모서리 21">
               <a:extLst>
                 <a:ext uri="{FF2B5EF4-FFF2-40B4-BE49-F238E27FC236}">
-                  <a16:creationId xmlns:a16="http://schemas.microsoft.com/office/drawing/2014/main" id="{8DA9AE8C-7191-4002-98F1-FF77B72D519F}"/>
+                  <a16:creationId xmlns:a16="http://schemas.microsoft.com/office/drawing/2014/main" id="{2CCAD410-D671-90E6-8827-3D28A7E1E1B8}"/>
                 </a:ext>
               </a:extLst>
             </p:cNvPr>
@@ -10586,11 +10632,12 @@
             <a:lstStyle/>
             <a:p>
               <a:pPr algn="ctr"/>
-              <a:endParaRPr lang="ko-KR" altLang="en-US" sz="5080">
+              <a:endParaRPr lang="ko-KR" altLang="en-US" sz="5100">
                 <a:solidFill>
                   <a:schemeClr val="tx1"/>
                 </a:solidFill>
-                <a:ea typeface="KoPub돋움체 Light" panose="02020603020101020101"/>
+                <a:latin typeface="KoPub돋움체 Medium" panose="02020603020101020101" pitchFamily="18" charset="-127"/>
+                <a:ea typeface="KoPub돋움체 Medium" panose="02020603020101020101" pitchFamily="18" charset="-127"/>
               </a:endParaRPr>
             </a:p>
           </p:txBody>
@@ -10600,7 +10647,7 @@
             <p:cNvPr id="17" name="TextBox 16">
               <a:extLst>
                 <a:ext uri="{FF2B5EF4-FFF2-40B4-BE49-F238E27FC236}">
-                  <a16:creationId xmlns:a16="http://schemas.microsoft.com/office/drawing/2014/main" id="{5E33DDDA-6085-D01E-695B-8DCA20A2A084}"/>
+                  <a16:creationId xmlns:a16="http://schemas.microsoft.com/office/drawing/2014/main" id="{8D6E9067-3E7E-D8AB-B317-B078328B5E4F}"/>
                 </a:ext>
               </a:extLst>
             </p:cNvPr>
@@ -10624,251 +10671,254 @@
             <a:lstStyle/>
             <a:p>
               <a:r>
-                <a:rPr lang="en-US" altLang="ko-KR" sz="1600" b="1" dirty="0">
-                  <a:latin typeface="KoPub돋움체 Light" panose="02020603020101020101" pitchFamily="18" charset="-127"/>
-                  <a:ea typeface="KoPub돋움체 Light" panose="02020603020101020101" pitchFamily="18" charset="-127"/>
+                <a:rPr lang="en-US" altLang="ko-KR" sz="1606" b="1" dirty="0">
+                  <a:latin typeface="KoPub돋움체 Medium" panose="02020603020101020101" pitchFamily="18" charset="-127"/>
+                  <a:ea typeface="KoPub돋움체 Medium" panose="02020603020101020101" pitchFamily="18" charset="-127"/>
                 </a:rPr>
                 <a:t>[CHEMO] </a:t>
               </a:r>
               <a:r>
-                <a:rPr lang="ko-KR" altLang="en-US" sz="1600" dirty="0"/>
+                <a:rPr lang="ko-KR" altLang="en-US" sz="1606" dirty="0">
+                  <a:latin typeface="KoPub돋움체 Medium" panose="02020603020101020101" pitchFamily="18" charset="-127"/>
+                  <a:ea typeface="KoPub돋움체 Medium" panose="02020603020101020101" pitchFamily="18" charset="-127"/>
+                </a:rPr>
                 <a:t>항암 관리</a:t>
               </a:r>
             </a:p>
             <a:p>
               <a:r>
-                <a:rPr lang="en-US" altLang="ko-KR" sz="1600" b="1" dirty="0">
-                  <a:latin typeface="KoPub돋움체 Light" panose="02020603020101020101" pitchFamily="18" charset="-127"/>
-                  <a:ea typeface="KoPub돋움체 Light" panose="02020603020101020101" pitchFamily="18" charset="-127"/>
+                <a:rPr lang="en-US" altLang="ko-KR" sz="1606" b="1" dirty="0">
+                  <a:latin typeface="KoPub돋움체 Medium" panose="02020603020101020101" pitchFamily="18" charset="-127"/>
+                  <a:ea typeface="KoPub돋움체 Medium" panose="02020603020101020101" pitchFamily="18" charset="-127"/>
                 </a:rPr>
                 <a:t>[BLOOD]</a:t>
               </a:r>
               <a:r>
-                <a:rPr lang="en-US" altLang="ko-KR" sz="1600" dirty="0">
-                  <a:latin typeface="KoPub돋움체 Light" panose="02020603020101020101" pitchFamily="18" charset="-127"/>
-                  <a:ea typeface="KoPub돋움체 Light" panose="02020603020101020101" pitchFamily="18" charset="-127"/>
+                <a:rPr lang="en-US" altLang="ko-KR" sz="1606" dirty="0">
+                  <a:latin typeface="KoPub돋움체 Medium" panose="02020603020101020101" pitchFamily="18" charset="-127"/>
+                  <a:ea typeface="KoPub돋움체 Medium" panose="02020603020101020101" pitchFamily="18" charset="-127"/>
                 </a:rPr>
                 <a:t> </a:t>
               </a:r>
               <a:r>
-                <a:rPr lang="ko-KR" altLang="en-US" sz="1600" dirty="0">
-                  <a:latin typeface="KoPub돋움체 Light" panose="02020603020101020101" pitchFamily="18" charset="-127"/>
-                  <a:ea typeface="KoPub돋움체 Light" panose="02020603020101020101" pitchFamily="18" charset="-127"/>
+                <a:rPr lang="ko-KR" altLang="en-US" sz="1606" dirty="0">
+                  <a:latin typeface="KoPub돋움체 Medium" panose="02020603020101020101" pitchFamily="18" charset="-127"/>
+                  <a:ea typeface="KoPub돋움체 Medium" panose="02020603020101020101" pitchFamily="18" charset="-127"/>
                 </a:rPr>
                 <a:t>수혈 관리</a:t>
               </a:r>
-              <a:endParaRPr lang="en-US" altLang="ko-KR" sz="1600" dirty="0">
-                <a:latin typeface="KoPub돋움체 Light" panose="02020603020101020101" pitchFamily="18" charset="-127"/>
-                <a:ea typeface="KoPub돋움체 Light" panose="02020603020101020101" pitchFamily="18" charset="-127"/>
+              <a:endParaRPr lang="en-US" altLang="ko-KR" sz="1606" dirty="0">
+                <a:latin typeface="KoPub돋움체 Medium" panose="02020603020101020101" pitchFamily="18" charset="-127"/>
+                <a:ea typeface="KoPub돋움체 Medium" panose="02020603020101020101" pitchFamily="18" charset="-127"/>
               </a:endParaRPr>
             </a:p>
             <a:p>
               <a:r>
-                <a:rPr lang="en-US" altLang="ko-KR" sz="1600" b="1" dirty="0">
-                  <a:latin typeface="KoPub돋움체 Light" panose="02020603020101020101" pitchFamily="18" charset="-127"/>
-                  <a:ea typeface="KoPub돋움체 Light" panose="02020603020101020101" pitchFamily="18" charset="-127"/>
+                <a:rPr lang="en-US" altLang="ko-KR" sz="1606" b="1" dirty="0">
+                  <a:latin typeface="KoPub돋움체 Medium" panose="02020603020101020101" pitchFamily="18" charset="-127"/>
+                  <a:ea typeface="KoPub돋움체 Medium" panose="02020603020101020101" pitchFamily="18" charset="-127"/>
                 </a:rPr>
                 <a:t>[CVR]</a:t>
               </a:r>
               <a:r>
-                <a:rPr lang="en-US" altLang="ko-KR" sz="1600" dirty="0">
-                  <a:latin typeface="KoPub돋움체 Light" panose="02020603020101020101" pitchFamily="18" charset="-127"/>
-                  <a:ea typeface="KoPub돋움체 Light" panose="02020603020101020101" pitchFamily="18" charset="-127"/>
+                <a:rPr lang="en-US" altLang="ko-KR" sz="1606" dirty="0">
+                  <a:latin typeface="KoPub돋움체 Medium" panose="02020603020101020101" pitchFamily="18" charset="-127"/>
+                  <a:ea typeface="KoPub돋움체 Medium" panose="02020603020101020101" pitchFamily="18" charset="-127"/>
                 </a:rPr>
                 <a:t> </a:t>
               </a:r>
               <a:r>
-                <a:rPr lang="ko-KR" altLang="en-US" sz="1600" dirty="0">
-                  <a:latin typeface="KoPub돋움체 Light" panose="02020603020101020101" pitchFamily="18" charset="-127"/>
-                  <a:ea typeface="KoPub돋움체 Light" panose="02020603020101020101" pitchFamily="18" charset="-127"/>
+                <a:rPr lang="ko-KR" altLang="en-US" sz="1606" dirty="0">
+                  <a:latin typeface="KoPub돋움체 Medium" panose="02020603020101020101" pitchFamily="18" charset="-127"/>
+                  <a:ea typeface="KoPub돋움체 Medium" panose="02020603020101020101" pitchFamily="18" charset="-127"/>
                 </a:rPr>
                 <a:t>위험 수치</a:t>
               </a:r>
-              <a:endParaRPr lang="en-US" altLang="ko-KR" sz="1600" dirty="0">
-                <a:latin typeface="KoPub돋움체 Light" panose="02020603020101020101" pitchFamily="18" charset="-127"/>
-                <a:ea typeface="KoPub돋움체 Light" panose="02020603020101020101" pitchFamily="18" charset="-127"/>
+              <a:endParaRPr lang="en-US" altLang="ko-KR" sz="1606" dirty="0">
+                <a:latin typeface="KoPub돋움체 Medium" panose="02020603020101020101" pitchFamily="18" charset="-127"/>
+                <a:ea typeface="KoPub돋움체 Medium" panose="02020603020101020101" pitchFamily="18" charset="-127"/>
               </a:endParaRPr>
             </a:p>
             <a:p>
               <a:r>
-                <a:rPr lang="en-US" altLang="ko-KR" sz="1600" b="1" dirty="0">
-                  <a:latin typeface="KoPub돋움체 Light" panose="02020603020101020101" pitchFamily="18" charset="-127"/>
-                  <a:ea typeface="KoPub돋움체 Light" panose="02020603020101020101" pitchFamily="18" charset="-127"/>
+                <a:rPr lang="en-US" altLang="ko-KR" sz="1606" b="1" dirty="0">
+                  <a:latin typeface="KoPub돋움체 Medium" panose="02020603020101020101" pitchFamily="18" charset="-127"/>
+                  <a:ea typeface="KoPub돋움체 Medium" panose="02020603020101020101" pitchFamily="18" charset="-127"/>
                 </a:rPr>
                 <a:t>[LIFE] </a:t>
               </a:r>
               <a:r>
-                <a:rPr lang="ko-KR" altLang="en-US" sz="1600" dirty="0">
-                  <a:latin typeface="KoPub돋움체 Light" panose="02020603020101020101" pitchFamily="18" charset="-127"/>
-                  <a:ea typeface="KoPub돋움체 Light" panose="02020603020101020101" pitchFamily="18" charset="-127"/>
+                <a:rPr lang="ko-KR" altLang="en-US" sz="1606" dirty="0">
+                  <a:latin typeface="KoPub돋움체 Medium" panose="02020603020101020101" pitchFamily="18" charset="-127"/>
+                  <a:ea typeface="KoPub돋움체 Medium" panose="02020603020101020101" pitchFamily="18" charset="-127"/>
                 </a:rPr>
                 <a:t>존엄</a:t>
               </a:r>
               <a:r>
-                <a:rPr lang="en-US" altLang="ko-KR" sz="1600" dirty="0">
-                  <a:latin typeface="KoPub돋움체 Light" panose="02020603020101020101" pitchFamily="18" charset="-127"/>
-                  <a:ea typeface="KoPub돋움체 Light" panose="02020603020101020101" pitchFamily="18" charset="-127"/>
+                <a:rPr lang="en-US" altLang="ko-KR" sz="1606" dirty="0">
+                  <a:latin typeface="KoPub돋움체 Medium" panose="02020603020101020101" pitchFamily="18" charset="-127"/>
+                  <a:ea typeface="KoPub돋움체 Medium" panose="02020603020101020101" pitchFamily="18" charset="-127"/>
                 </a:rPr>
                 <a:t>/</a:t>
               </a:r>
               <a:r>
-                <a:rPr lang="ko-KR" altLang="en-US" sz="1600" dirty="0">
-                  <a:latin typeface="KoPub돋움체 Light" panose="02020603020101020101" pitchFamily="18" charset="-127"/>
-                  <a:ea typeface="KoPub돋움체 Light" panose="02020603020101020101" pitchFamily="18" charset="-127"/>
+                <a:rPr lang="ko-KR" altLang="en-US" sz="1606" dirty="0">
+                  <a:latin typeface="KoPub돋움체 Medium" panose="02020603020101020101" pitchFamily="18" charset="-127"/>
+                  <a:ea typeface="KoPub돋움체 Medium" panose="02020603020101020101" pitchFamily="18" charset="-127"/>
                 </a:rPr>
                 <a:t>임종</a:t>
               </a:r>
-              <a:endParaRPr lang="en-US" altLang="ko-KR" sz="1600" dirty="0">
-                <a:latin typeface="KoPub돋움체 Light" panose="02020603020101020101" pitchFamily="18" charset="-127"/>
-                <a:ea typeface="KoPub돋움체 Light" panose="02020603020101020101" pitchFamily="18" charset="-127"/>
+              <a:endParaRPr lang="en-US" altLang="ko-KR" sz="1606" dirty="0">
+                <a:latin typeface="KoPub돋움체 Medium" panose="02020603020101020101" pitchFamily="18" charset="-127"/>
+                <a:ea typeface="KoPub돋움체 Medium" panose="02020603020101020101" pitchFamily="18" charset="-127"/>
               </a:endParaRPr>
             </a:p>
             <a:p>
               <a:r>
-                <a:rPr lang="en-US" altLang="ko-KR" sz="1600" b="1" dirty="0">
-                  <a:latin typeface="KoPub돋움체 Light" panose="02020603020101020101" pitchFamily="18" charset="-127"/>
-                  <a:ea typeface="KoPub돋움체 Light" panose="02020603020101020101" pitchFamily="18" charset="-127"/>
+                <a:rPr lang="en-US" altLang="ko-KR" sz="1606" b="1" dirty="0">
+                  <a:latin typeface="KoPub돋움체 Medium" panose="02020603020101020101" pitchFamily="18" charset="-127"/>
+                  <a:ea typeface="KoPub돋움체 Medium" panose="02020603020101020101" pitchFamily="18" charset="-127"/>
                 </a:rPr>
                 <a:t>[MEET] </a:t>
               </a:r>
               <a:r>
-                <a:rPr lang="ko-KR" altLang="en-US" sz="1600" dirty="0">
-                  <a:latin typeface="KoPub돋움체 Light" panose="02020603020101020101" pitchFamily="18" charset="-127"/>
-                  <a:ea typeface="KoPub돋움체 Light" panose="02020603020101020101" pitchFamily="18" charset="-127"/>
+                <a:rPr lang="ko-KR" altLang="en-US" sz="1606" dirty="0">
+                  <a:latin typeface="KoPub돋움체 Medium" panose="02020603020101020101" pitchFamily="18" charset="-127"/>
+                  <a:ea typeface="KoPub돋움체 Medium" panose="02020603020101020101" pitchFamily="18" charset="-127"/>
                 </a:rPr>
                 <a:t>보호자 면담</a:t>
               </a:r>
-              <a:endParaRPr lang="en-US" altLang="ko-KR" sz="1600" dirty="0">
-                <a:latin typeface="KoPub돋움체 Light" panose="02020603020101020101" pitchFamily="18" charset="-127"/>
-                <a:ea typeface="KoPub돋움체 Light" panose="02020603020101020101" pitchFamily="18" charset="-127"/>
+              <a:endParaRPr lang="en-US" altLang="ko-KR" sz="1606" dirty="0">
+                <a:latin typeface="KoPub돋움체 Medium" panose="02020603020101020101" pitchFamily="18" charset="-127"/>
+                <a:ea typeface="KoPub돋움체 Medium" panose="02020603020101020101" pitchFamily="18" charset="-127"/>
               </a:endParaRPr>
             </a:p>
             <a:p>
               <a:r>
-                <a:rPr lang="en-US" altLang="ko-KR" sz="1600" b="1" dirty="0">
-                  <a:latin typeface="KoPub돋움체 Light" panose="02020603020101020101" pitchFamily="18" charset="-127"/>
-                  <a:ea typeface="KoPub돋움체 Light" panose="02020603020101020101" pitchFamily="18" charset="-127"/>
+                <a:rPr lang="en-US" altLang="ko-KR" sz="1606" b="1" dirty="0">
+                  <a:latin typeface="KoPub돋움체 Medium" panose="02020603020101020101" pitchFamily="18" charset="-127"/>
+                  <a:ea typeface="KoPub돋움체 Medium" panose="02020603020101020101" pitchFamily="18" charset="-127"/>
                 </a:rPr>
                 <a:t>[MARROW] </a:t>
               </a:r>
               <a:r>
-                <a:rPr lang="ko-KR" altLang="en-US" sz="1600" dirty="0">
-                  <a:latin typeface="KoPub돋움체 Light" panose="02020603020101020101" pitchFamily="18" charset="-127"/>
-                  <a:ea typeface="KoPub돋움체 Light" panose="02020603020101020101" pitchFamily="18" charset="-127"/>
+                <a:rPr lang="ko-KR" altLang="en-US" sz="1606" dirty="0">
+                  <a:latin typeface="KoPub돋움체 Medium" panose="02020603020101020101" pitchFamily="18" charset="-127"/>
+                  <a:ea typeface="KoPub돋움체 Medium" panose="02020603020101020101" pitchFamily="18" charset="-127"/>
                 </a:rPr>
                 <a:t>골수 검사</a:t>
               </a:r>
-              <a:endParaRPr lang="en-US" altLang="ko-KR" sz="1600" dirty="0">
-                <a:latin typeface="KoPub돋움체 Light" panose="02020603020101020101" pitchFamily="18" charset="-127"/>
-                <a:ea typeface="KoPub돋움체 Light" panose="02020603020101020101" pitchFamily="18" charset="-127"/>
+              <a:endParaRPr lang="en-US" altLang="ko-KR" sz="1606" dirty="0">
+                <a:latin typeface="KoPub돋움체 Medium" panose="02020603020101020101" pitchFamily="18" charset="-127"/>
+                <a:ea typeface="KoPub돋움체 Medium" panose="02020603020101020101" pitchFamily="18" charset="-127"/>
               </a:endParaRPr>
             </a:p>
             <a:p>
               <a:r>
-                <a:rPr lang="en-US" altLang="ko-KR" sz="1600" b="1" dirty="0">
-                  <a:latin typeface="KoPub돋움체 Light" panose="02020603020101020101" pitchFamily="18" charset="-127"/>
-                  <a:ea typeface="KoPub돋움체 Light" panose="02020603020101020101" pitchFamily="18" charset="-127"/>
+                <a:rPr lang="en-US" altLang="ko-KR" sz="1606" b="1" dirty="0">
+                  <a:latin typeface="KoPub돋움체 Medium" panose="02020603020101020101" pitchFamily="18" charset="-127"/>
+                  <a:ea typeface="KoPub돋움체 Medium" panose="02020603020101020101" pitchFamily="18" charset="-127"/>
                 </a:rPr>
                 <a:t>[ISO] </a:t>
               </a:r>
               <a:r>
-                <a:rPr lang="ko-KR" altLang="en-US" sz="1600" dirty="0">
-                  <a:latin typeface="KoPub돋움체 Light" panose="02020603020101020101" pitchFamily="18" charset="-127"/>
-                  <a:ea typeface="KoPub돋움체 Light" panose="02020603020101020101" pitchFamily="18" charset="-127"/>
+                <a:rPr lang="ko-KR" altLang="en-US" sz="1606" dirty="0">
+                  <a:latin typeface="KoPub돋움체 Medium" panose="02020603020101020101" pitchFamily="18" charset="-127"/>
+                  <a:ea typeface="KoPub돋움체 Medium" panose="02020603020101020101" pitchFamily="18" charset="-127"/>
                 </a:rPr>
                 <a:t>격리 관리</a:t>
               </a:r>
-              <a:endParaRPr lang="en-US" altLang="ko-KR" sz="1600" dirty="0">
-                <a:latin typeface="KoPub돋움체 Light" panose="02020603020101020101" pitchFamily="18" charset="-127"/>
-                <a:ea typeface="KoPub돋움체 Light" panose="02020603020101020101" pitchFamily="18" charset="-127"/>
+              <a:endParaRPr lang="en-US" altLang="ko-KR" sz="1606" dirty="0">
+                <a:latin typeface="KoPub돋움체 Medium" panose="02020603020101020101" pitchFamily="18" charset="-127"/>
+                <a:ea typeface="KoPub돋움체 Medium" panose="02020603020101020101" pitchFamily="18" charset="-127"/>
               </a:endParaRPr>
             </a:p>
             <a:p>
               <a:r>
-                <a:rPr lang="en-US" altLang="ko-KR" sz="1600" b="1" dirty="0">
-                  <a:latin typeface="KoPub돋움체 Light" panose="02020603020101020101" pitchFamily="18" charset="-127"/>
-                  <a:ea typeface="KoPub돋움체 Light" panose="02020603020101020101" pitchFamily="18" charset="-127"/>
+                <a:rPr lang="en-US" altLang="ko-KR" sz="1606" b="1" dirty="0">
+                  <a:latin typeface="KoPub돋움체 Medium" panose="02020603020101020101" pitchFamily="18" charset="-127"/>
+                  <a:ea typeface="KoPub돋움체 Medium" panose="02020603020101020101" pitchFamily="18" charset="-127"/>
                 </a:rPr>
                 <a:t>[C-Status] </a:t>
               </a:r>
               <a:r>
-                <a:rPr lang="ko-KR" altLang="en-US" sz="1600" dirty="0">
-                  <a:latin typeface="KoPub돋움체 Light" panose="02020603020101020101" pitchFamily="18" charset="-127"/>
-                  <a:ea typeface="KoPub돋움체 Light" panose="02020603020101020101" pitchFamily="18" charset="-127"/>
+                <a:rPr lang="ko-KR" altLang="en-US" sz="1606" dirty="0">
+                  <a:latin typeface="KoPub돋움체 Medium" panose="02020603020101020101" pitchFamily="18" charset="-127"/>
+                  <a:ea typeface="KoPub돋움체 Medium" panose="02020603020101020101" pitchFamily="18" charset="-127"/>
                 </a:rPr>
                 <a:t>상태 악화</a:t>
               </a:r>
-              <a:endParaRPr lang="en-US" altLang="ko-KR" sz="1600" dirty="0">
-                <a:latin typeface="KoPub돋움체 Light" panose="02020603020101020101" pitchFamily="18" charset="-127"/>
-                <a:ea typeface="KoPub돋움체 Light" panose="02020603020101020101" pitchFamily="18" charset="-127"/>
+              <a:endParaRPr lang="en-US" altLang="ko-KR" sz="1606" dirty="0">
+                <a:latin typeface="KoPub돋움체 Medium" panose="02020603020101020101" pitchFamily="18" charset="-127"/>
+                <a:ea typeface="KoPub돋움체 Medium" panose="02020603020101020101" pitchFamily="18" charset="-127"/>
               </a:endParaRPr>
             </a:p>
             <a:p>
               <a:r>
-                <a:rPr lang="en-US" altLang="ko-KR" sz="1600" b="1" dirty="0">
-                  <a:latin typeface="KoPub돋움체 Light" panose="02020603020101020101" pitchFamily="18" charset="-127"/>
-                  <a:ea typeface="KoPub돋움체 Light" panose="02020603020101020101" pitchFamily="18" charset="-127"/>
+                <a:rPr lang="en-US" altLang="ko-KR" sz="1606" b="1" dirty="0">
+                  <a:latin typeface="KoPub돋움체 Medium" panose="02020603020101020101" pitchFamily="18" charset="-127"/>
+                  <a:ea typeface="KoPub돋움체 Medium" panose="02020603020101020101" pitchFamily="18" charset="-127"/>
                 </a:rPr>
                 <a:t>[PAIN] </a:t>
               </a:r>
               <a:r>
-                <a:rPr lang="ko-KR" altLang="en-US" sz="1600" dirty="0">
-                  <a:latin typeface="KoPub돋움체 Light" panose="02020603020101020101" pitchFamily="18" charset="-127"/>
-                  <a:ea typeface="KoPub돋움체 Light" panose="02020603020101020101" pitchFamily="18" charset="-127"/>
+                <a:rPr lang="ko-KR" altLang="en-US" sz="1606" dirty="0">
+                  <a:latin typeface="KoPub돋움체 Medium" panose="02020603020101020101" pitchFamily="18" charset="-127"/>
+                  <a:ea typeface="KoPub돋움체 Medium" panose="02020603020101020101" pitchFamily="18" charset="-127"/>
                 </a:rPr>
                 <a:t>통증 조절</a:t>
               </a:r>
-              <a:endParaRPr lang="en-US" altLang="ko-KR" sz="1600" dirty="0">
-                <a:latin typeface="KoPub돋움체 Light" panose="02020603020101020101" pitchFamily="18" charset="-127"/>
-                <a:ea typeface="KoPub돋움체 Light" panose="02020603020101020101" pitchFamily="18" charset="-127"/>
+              <a:endParaRPr lang="en-US" altLang="ko-KR" sz="1606" dirty="0">
+                <a:latin typeface="KoPub돋움체 Medium" panose="02020603020101020101" pitchFamily="18" charset="-127"/>
+                <a:ea typeface="KoPub돋움체 Medium" panose="02020603020101020101" pitchFamily="18" charset="-127"/>
               </a:endParaRPr>
             </a:p>
             <a:p>
               <a:r>
-                <a:rPr lang="en-US" altLang="ko-KR" sz="1600" b="1" dirty="0">
-                  <a:latin typeface="KoPub돋움체 Light" panose="02020603020101020101" pitchFamily="18" charset="-127"/>
-                  <a:ea typeface="KoPub돋움체 Light" panose="02020603020101020101" pitchFamily="18" charset="-127"/>
+                <a:rPr lang="en-US" altLang="ko-KR" sz="1606" b="1" dirty="0">
+                  <a:latin typeface="KoPub돋움체 Medium" panose="02020603020101020101" pitchFamily="18" charset="-127"/>
+                  <a:ea typeface="KoPub돋움체 Medium" panose="02020603020101020101" pitchFamily="18" charset="-127"/>
                 </a:rPr>
                 <a:t>[OUT] </a:t>
               </a:r>
               <a:r>
-                <a:rPr lang="ko-KR" altLang="en-US" sz="1600" dirty="0">
-                  <a:latin typeface="KoPub돋움체 Light" panose="02020603020101020101" pitchFamily="18" charset="-127"/>
-                  <a:ea typeface="KoPub돋움체 Light" panose="02020603020101020101" pitchFamily="18" charset="-127"/>
+                <a:rPr lang="ko-KR" altLang="en-US" sz="1606" dirty="0">
+                  <a:latin typeface="KoPub돋움체 Medium" panose="02020603020101020101" pitchFamily="18" charset="-127"/>
+                  <a:ea typeface="KoPub돋움체 Medium" panose="02020603020101020101" pitchFamily="18" charset="-127"/>
                 </a:rPr>
                 <a:t>퇴원</a:t>
               </a:r>
               <a:r>
-                <a:rPr lang="en-US" altLang="ko-KR" sz="1600" dirty="0">
-                  <a:latin typeface="KoPub돋움체 Light" panose="02020603020101020101" pitchFamily="18" charset="-127"/>
-                  <a:ea typeface="KoPub돋움체 Light" panose="02020603020101020101" pitchFamily="18" charset="-127"/>
+                <a:rPr lang="en-US" altLang="ko-KR" sz="1606" dirty="0">
+                  <a:latin typeface="KoPub돋움체 Medium" panose="02020603020101020101" pitchFamily="18" charset="-127"/>
+                  <a:ea typeface="KoPub돋움체 Medium" panose="02020603020101020101" pitchFamily="18" charset="-127"/>
                 </a:rPr>
                 <a:t>/</a:t>
               </a:r>
               <a:r>
-                <a:rPr lang="ko-KR" altLang="en-US" sz="1600" dirty="0">
-                  <a:latin typeface="KoPub돋움체 Light" panose="02020603020101020101" pitchFamily="18" charset="-127"/>
-                  <a:ea typeface="KoPub돋움체 Light" panose="02020603020101020101" pitchFamily="18" charset="-127"/>
+                <a:rPr lang="ko-KR" altLang="en-US" sz="1606" dirty="0">
+                  <a:latin typeface="KoPub돋움체 Medium" panose="02020603020101020101" pitchFamily="18" charset="-127"/>
+                  <a:ea typeface="KoPub돋움체 Medium" panose="02020603020101020101" pitchFamily="18" charset="-127"/>
                 </a:rPr>
                 <a:t>전과</a:t>
               </a:r>
               <a:r>
-                <a:rPr lang="en-US" altLang="ko-KR" sz="1600" dirty="0">
-                  <a:latin typeface="KoPub돋움체 Light" panose="02020603020101020101" pitchFamily="18" charset="-127"/>
-                  <a:ea typeface="KoPub돋움체 Light" panose="02020603020101020101" pitchFamily="18" charset="-127"/>
+                <a:rPr lang="en-US" altLang="ko-KR" sz="1606" dirty="0">
+                  <a:latin typeface="KoPub돋움체 Medium" panose="02020603020101020101" pitchFamily="18" charset="-127"/>
+                  <a:ea typeface="KoPub돋움체 Medium" panose="02020603020101020101" pitchFamily="18" charset="-127"/>
                 </a:rPr>
                 <a:t>/</a:t>
               </a:r>
               <a:r>
-                <a:rPr lang="ko-KR" altLang="en-US" sz="1600" dirty="0">
-                  <a:latin typeface="KoPub돋움체 Light" panose="02020603020101020101" pitchFamily="18" charset="-127"/>
-                  <a:ea typeface="KoPub돋움체 Light" panose="02020603020101020101" pitchFamily="18" charset="-127"/>
+                <a:rPr lang="ko-KR" altLang="en-US" sz="1606" dirty="0">
+                  <a:latin typeface="KoPub돋움체 Medium" panose="02020603020101020101" pitchFamily="18" charset="-127"/>
+                  <a:ea typeface="KoPub돋움체 Medium" panose="02020603020101020101" pitchFamily="18" charset="-127"/>
                 </a:rPr>
                 <a:t>사망</a:t>
               </a:r>
-              <a:endParaRPr lang="en-US" altLang="ko-KR" sz="1600" dirty="0">
-                <a:latin typeface="KoPub돋움체 Light" panose="02020603020101020101" pitchFamily="18" charset="-127"/>
-                <a:ea typeface="KoPub돋움체 Light" panose="02020603020101020101" pitchFamily="18" charset="-127"/>
+              <a:endParaRPr lang="en-US" altLang="ko-KR" sz="1606" dirty="0">
+                <a:latin typeface="KoPub돋움체 Medium" panose="02020603020101020101" pitchFamily="18" charset="-127"/>
+                <a:ea typeface="KoPub돋움체 Medium" panose="02020603020101020101" pitchFamily="18" charset="-127"/>
               </a:endParaRPr>
             </a:p>
           </p:txBody>
@@ -10879,7 +10929,7 @@
           <p:cNvPr id="2" name="TextBox 1">
             <a:extLst>
               <a:ext uri="{FF2B5EF4-FFF2-40B4-BE49-F238E27FC236}">
-                <a16:creationId xmlns:a16="http://schemas.microsoft.com/office/drawing/2014/main" id="{5C7E232E-6B0D-4C30-967C-1D82B967BC1B}"/>
+                <a16:creationId xmlns:a16="http://schemas.microsoft.com/office/drawing/2014/main" id="{1EF41990-9F78-10A3-8B26-5F706F297B04}"/>
               </a:ext>
             </a:extLst>
           </p:cNvPr>
@@ -10888,8 +10938,8 @@
         </p:nvSpPr>
         <p:spPr>
           <a:xfrm>
-            <a:off x="589442" y="881803"/>
-            <a:ext cx="2564384" cy="400110"/>
+            <a:off x="591795" y="875055"/>
+            <a:ext cx="2574624" cy="461665"/>
           </a:xfrm>
           <a:prstGeom prst="rect">
             <a:avLst/>
@@ -10904,29 +10954,29 @@
           <a:p>
             <a:pPr algn="ctr"/>
             <a:r>
-              <a:rPr lang="ko-KR" altLang="en-US" sz="2000" b="1" dirty="0">
-                <a:latin typeface="KoPub돋움체 Light" panose="02020603020101020101" pitchFamily="18" charset="-127"/>
-                <a:ea typeface="KoPub돋움체 Light" panose="02020603020101020101" pitchFamily="18" charset="-127"/>
+              <a:rPr lang="ko-KR" altLang="en-US" sz="2400" b="1" dirty="0">
+                <a:latin typeface="KoPub돋움체 Medium" panose="02020603020101020101" pitchFamily="18" charset="-127"/>
+                <a:ea typeface="KoPub돋움체 Medium" panose="02020603020101020101" pitchFamily="18" charset="-127"/>
               </a:rPr>
               <a:t>하이패스 태그 </a:t>
             </a:r>
             <a:r>
-              <a:rPr lang="en-US" altLang="ko-KR" sz="2000" b="1" dirty="0">
-                <a:latin typeface="KoPub돋움체 Light" panose="02020603020101020101" pitchFamily="18" charset="-127"/>
-                <a:ea typeface="KoPub돋움체 Light" panose="02020603020101020101" pitchFamily="18" charset="-127"/>
+              <a:rPr lang="en-US" altLang="ko-KR" sz="2400" b="1" dirty="0">
+                <a:latin typeface="KoPub돋움체 Medium" panose="02020603020101020101" pitchFamily="18" charset="-127"/>
+                <a:ea typeface="KoPub돋움체 Medium" panose="02020603020101020101" pitchFamily="18" charset="-127"/>
               </a:rPr>
               <a:t>10</a:t>
             </a:r>
             <a:r>
-              <a:rPr lang="ko-KR" altLang="en-US" sz="2000" b="1" dirty="0">
-                <a:latin typeface="KoPub돋움체 Light" panose="02020603020101020101" pitchFamily="18" charset="-127"/>
-                <a:ea typeface="KoPub돋움체 Light" panose="02020603020101020101" pitchFamily="18" charset="-127"/>
+              <a:rPr lang="ko-KR" altLang="en-US" sz="2400" b="1" dirty="0">
+                <a:latin typeface="KoPub돋움체 Medium" panose="02020603020101020101" pitchFamily="18" charset="-127"/>
+                <a:ea typeface="KoPub돋움체 Medium" panose="02020603020101020101" pitchFamily="18" charset="-127"/>
               </a:rPr>
               <a:t>종</a:t>
             </a:r>
-            <a:endParaRPr lang="en-US" altLang="ko-KR" sz="2000" b="1" dirty="0">
-              <a:latin typeface="KoPub돋움체 Light" panose="02020603020101020101" pitchFamily="18" charset="-127"/>
-              <a:ea typeface="KoPub돋움체 Light" panose="02020603020101020101" pitchFamily="18" charset="-127"/>
+            <a:endParaRPr lang="en-US" altLang="ko-KR" sz="2400" b="1" dirty="0">
+              <a:latin typeface="KoPub돋움체 Medium" panose="02020603020101020101" pitchFamily="18" charset="-127"/>
+              <a:ea typeface="KoPub돋움체 Medium" panose="02020603020101020101" pitchFamily="18" charset="-127"/>
             </a:endParaRPr>
           </a:p>
         </p:txBody>
@@ -10936,7 +10986,7 @@
           <p:cNvPr id="8" name="TextBox 7">
             <a:extLst>
               <a:ext uri="{FF2B5EF4-FFF2-40B4-BE49-F238E27FC236}">
-                <a16:creationId xmlns:a16="http://schemas.microsoft.com/office/drawing/2014/main" id="{2D7FF5CD-F432-4D5C-924D-9C31E13C1988}"/>
+                <a16:creationId xmlns:a16="http://schemas.microsoft.com/office/drawing/2014/main" id="{DAD3E866-98DD-17E8-1686-A3657F68A48B}"/>
               </a:ext>
             </a:extLst>
           </p:cNvPr>
@@ -10945,8 +10995,8 @@
         </p:nvSpPr>
         <p:spPr>
           <a:xfrm>
-            <a:off x="5281613" y="1573045"/>
-            <a:ext cx="2843725" cy="584775"/>
+            <a:off x="5193921" y="1509776"/>
+            <a:ext cx="2855080" cy="707886"/>
           </a:xfrm>
           <a:prstGeom prst="rect">
             <a:avLst/>
@@ -10960,43 +11010,43 @@
           <a:lstStyle/>
           <a:p>
             <a:r>
-              <a:rPr lang="ko-KR" altLang="en-US" sz="1600" dirty="0">
-                <a:latin typeface="KoPub돋움체 Light" panose="02020603020101020101" pitchFamily="18" charset="-127"/>
-                <a:ea typeface="KoPub돋움체 Light" panose="02020603020101020101" pitchFamily="18" charset="-127"/>
+              <a:rPr lang="ko-KR" altLang="en-US" sz="2000" b="1" dirty="0">
+                <a:latin typeface="KoPub돋움체 Medium" panose="02020603020101020101" pitchFamily="18" charset="-127"/>
+                <a:ea typeface="KoPub돋움체 Medium" panose="02020603020101020101" pitchFamily="18" charset="-127"/>
               </a:rPr>
               <a:t>근무 교대 시 미완료 건에 </a:t>
             </a:r>
             <a:r>
-              <a:rPr lang="en-US" altLang="ko-KR" sz="1600" dirty="0">
-                <a:latin typeface="KoPub돋움체 Light" panose="02020603020101020101" pitchFamily="18" charset="-127"/>
-                <a:ea typeface="KoPub돋움체 Light" panose="02020603020101020101" pitchFamily="18" charset="-127"/>
+              <a:rPr lang="en-US" altLang="ko-KR" sz="2000" b="1" dirty="0">
+                <a:latin typeface="KoPub돋움체 Medium" panose="02020603020101020101" pitchFamily="18" charset="-127"/>
+                <a:ea typeface="KoPub돋움체 Medium" panose="02020603020101020101" pitchFamily="18" charset="-127"/>
               </a:rPr>
               <a:t>'</a:t>
             </a:r>
             <a:r>
-              <a:rPr lang="ko-KR" altLang="en-US" sz="1600" dirty="0">
-                <a:latin typeface="KoPub돋움체 Light" panose="02020603020101020101" pitchFamily="18" charset="-127"/>
-                <a:ea typeface="KoPub돋움체 Light" panose="02020603020101020101" pitchFamily="18" charset="-127"/>
+              <a:rPr lang="ko-KR" altLang="en-US" sz="2000" b="1" dirty="0">
+                <a:latin typeface="KoPub돋움체 Medium" panose="02020603020101020101" pitchFamily="18" charset="-127"/>
+                <a:ea typeface="KoPub돋움체 Medium" panose="02020603020101020101" pitchFamily="18" charset="-127"/>
               </a:rPr>
               <a:t>답장</a:t>
             </a:r>
             <a:r>
-              <a:rPr lang="en-US" altLang="ko-KR" sz="1600" dirty="0">
-                <a:latin typeface="KoPub돋움체 Light" panose="02020603020101020101" pitchFamily="18" charset="-127"/>
-                <a:ea typeface="KoPub돋움체 Light" panose="02020603020101020101" pitchFamily="18" charset="-127"/>
+              <a:rPr lang="en-US" altLang="ko-KR" sz="2000" b="1" dirty="0">
+                <a:latin typeface="KoPub돋움체 Medium" panose="02020603020101020101" pitchFamily="18" charset="-127"/>
+                <a:ea typeface="KoPub돋움체 Medium" panose="02020603020101020101" pitchFamily="18" charset="-127"/>
               </a:rPr>
               <a:t>'</a:t>
             </a:r>
             <a:r>
-              <a:rPr lang="ko-KR" altLang="en-US" sz="1600" dirty="0">
-                <a:latin typeface="KoPub돋움체 Light" panose="02020603020101020101" pitchFamily="18" charset="-127"/>
-                <a:ea typeface="KoPub돋움체 Light" panose="02020603020101020101" pitchFamily="18" charset="-127"/>
+              <a:rPr lang="ko-KR" altLang="en-US" sz="2000" b="1" dirty="0">
+                <a:latin typeface="KoPub돋움체 Medium" panose="02020603020101020101" pitchFamily="18" charset="-127"/>
+                <a:ea typeface="KoPub돋움체 Medium" panose="02020603020101020101" pitchFamily="18" charset="-127"/>
               </a:rPr>
               <a:t>으로 인계 기록</a:t>
             </a:r>
-            <a:endParaRPr lang="en-US" altLang="ko-KR" sz="1600" dirty="0">
-              <a:latin typeface="KoPub돋움체 Light" panose="02020603020101020101" pitchFamily="18" charset="-127"/>
-              <a:ea typeface="KoPub돋움체 Light" panose="02020603020101020101" pitchFamily="18" charset="-127"/>
+            <a:endParaRPr lang="en-US" altLang="ko-KR" sz="2000" b="1" dirty="0">
+              <a:latin typeface="KoPub돋움체 Medium" panose="02020603020101020101" pitchFamily="18" charset="-127"/>
+              <a:ea typeface="KoPub돋움체 Medium" panose="02020603020101020101" pitchFamily="18" charset="-127"/>
             </a:endParaRPr>
           </a:p>
         </p:txBody>
@@ -11006,7 +11056,7 @@
           <p:cNvPr id="9" name="사각형: 둥근 모서리 8">
             <a:extLst>
               <a:ext uri="{FF2B5EF4-FFF2-40B4-BE49-F238E27FC236}">
-                <a16:creationId xmlns:a16="http://schemas.microsoft.com/office/drawing/2014/main" id="{81771CDF-B55B-4421-928F-D1D7D43CFAC8}"/>
+                <a16:creationId xmlns:a16="http://schemas.microsoft.com/office/drawing/2014/main" id="{D6FC6F3D-F285-CF8E-326C-6D3E594F6364}"/>
               </a:ext>
             </a:extLst>
           </p:cNvPr>
@@ -11015,8 +11065,8 @@
         </p:nvSpPr>
         <p:spPr>
           <a:xfrm>
-            <a:off x="5067299" y="1396134"/>
-            <a:ext cx="3484563" cy="959835"/>
+            <a:off x="5087533" y="1391440"/>
+            <a:ext cx="3498477" cy="963668"/>
           </a:xfrm>
           <a:prstGeom prst="roundRect">
             <a:avLst>
@@ -11053,9 +11103,9 @@
           <a:lstStyle/>
           <a:p>
             <a:pPr algn="ctr"/>
-            <a:endParaRPr lang="ko-KR" altLang="en-US" sz="5080">
+            <a:endParaRPr lang="ko-KR" altLang="en-US" sz="5100">
               <a:latin typeface="KoPub돋움체 Medium" panose="02020603020101020101" pitchFamily="18" charset="-127"/>
-              <a:ea typeface="KoPub돋움체 Light" panose="02020603020101020101"/>
+              <a:ea typeface="KoPub돋움체 Medium" panose="02020603020101020101" pitchFamily="18" charset="-127"/>
             </a:endParaRPr>
           </a:p>
         </p:txBody>
@@ -11065,7 +11115,7 @@
           <p:cNvPr id="11" name="사각형: 둥근 모서리 10">
             <a:extLst>
               <a:ext uri="{FF2B5EF4-FFF2-40B4-BE49-F238E27FC236}">
-                <a16:creationId xmlns:a16="http://schemas.microsoft.com/office/drawing/2014/main" id="{A9BD57B0-0CB8-437B-91FF-358B1B271C52}"/>
+                <a16:creationId xmlns:a16="http://schemas.microsoft.com/office/drawing/2014/main" id="{53F191C0-1D4E-9EB6-E143-64E75B482430}"/>
               </a:ext>
             </a:extLst>
           </p:cNvPr>
@@ -11074,8 +11124,8 @@
         </p:nvSpPr>
         <p:spPr>
           <a:xfrm>
-            <a:off x="3204625" y="1401423"/>
-            <a:ext cx="1811875" cy="954545"/>
+            <a:off x="3217421" y="1396750"/>
+            <a:ext cx="1819110" cy="958357"/>
           </a:xfrm>
           <a:prstGeom prst="roundRect">
             <a:avLst>
@@ -11113,9 +11163,9 @@
           <a:lstStyle/>
           <a:p>
             <a:pPr algn="ctr"/>
-            <a:endParaRPr lang="ko-KR" altLang="en-US" sz="5080">
+            <a:endParaRPr lang="ko-KR" altLang="en-US" sz="5100">
               <a:latin typeface="KoPub돋움체 Medium" panose="02020603020101020101" pitchFamily="18" charset="-127"/>
-              <a:ea typeface="KoPub돋움체 Light" panose="02020603020101020101"/>
+              <a:ea typeface="KoPub돋움체 Medium" panose="02020603020101020101" pitchFamily="18" charset="-127"/>
             </a:endParaRPr>
           </a:p>
         </p:txBody>
@@ -11125,7 +11175,7 @@
           <p:cNvPr id="12" name="TextBox 11">
             <a:extLst>
               <a:ext uri="{FF2B5EF4-FFF2-40B4-BE49-F238E27FC236}">
-                <a16:creationId xmlns:a16="http://schemas.microsoft.com/office/drawing/2014/main" id="{3717CE27-01D2-4557-B697-30F1806A81B3}"/>
+                <a16:creationId xmlns:a16="http://schemas.microsoft.com/office/drawing/2014/main" id="{6CF69FFE-48E9-D992-EB83-F3A8CF0BA63C}"/>
               </a:ext>
             </a:extLst>
           </p:cNvPr>
@@ -11134,8 +11184,8 @@
         </p:nvSpPr>
         <p:spPr>
           <a:xfrm>
-            <a:off x="3573396" y="1682514"/>
-            <a:ext cx="1074332" cy="338554"/>
+            <a:off x="3501645" y="1656841"/>
+            <a:ext cx="1250663" cy="400110"/>
           </a:xfrm>
           <a:prstGeom prst="rect">
             <a:avLst/>
@@ -11150,9 +11200,9 @@
           <a:p>
             <a:pPr algn="ctr"/>
             <a:r>
-              <a:rPr lang="en-US" altLang="ko-KR" sz="1600" b="1" dirty="0">
-                <a:latin typeface="KoPub돋움체 Light" panose="02020603020101020101" pitchFamily="18" charset="-127"/>
-                <a:ea typeface="KoPub돋움체 Light" panose="02020603020101020101" pitchFamily="18" charset="-127"/>
+              <a:rPr lang="en-US" altLang="ko-KR" sz="2000" b="1" dirty="0">
+                <a:latin typeface="KoPub돋움체 Medium" panose="02020603020101020101" pitchFamily="18" charset="-127"/>
+                <a:ea typeface="KoPub돋움체 Medium" panose="02020603020101020101" pitchFamily="18" charset="-127"/>
               </a:rPr>
               <a:t>[IN-OUT]</a:t>
             </a:r>
@@ -11164,7 +11214,7 @@
           <p:cNvPr id="4" name="직사각형 3">
             <a:extLst>
               <a:ext uri="{FF2B5EF4-FFF2-40B4-BE49-F238E27FC236}">
-                <a16:creationId xmlns:a16="http://schemas.microsoft.com/office/drawing/2014/main" id="{3306E135-233E-4999-A710-7E3C99EFDAEF}"/>
+                <a16:creationId xmlns:a16="http://schemas.microsoft.com/office/drawing/2014/main" id="{7FE0F88B-04F7-647F-6CE7-7D595FC5E87A}"/>
               </a:ext>
             </a:extLst>
           </p:cNvPr>
@@ -11173,8 +11223,8 @@
         </p:nvSpPr>
         <p:spPr>
           <a:xfrm>
-            <a:off x="4362454" y="860517"/>
-            <a:ext cx="2762295" cy="400110"/>
+            <a:off x="4379873" y="853684"/>
+            <a:ext cx="2863284" cy="461665"/>
           </a:xfrm>
           <a:prstGeom prst="rect">
             <a:avLst/>
@@ -11187,15 +11237,15 @@
           <a:lstStyle/>
           <a:p>
             <a:r>
-              <a:rPr lang="ko-KR" altLang="en-US" sz="2000" b="1" dirty="0">
-                <a:latin typeface="KoPub돋움체 Light" panose="02020603020101020101" pitchFamily="18" charset="-127"/>
-                <a:ea typeface="KoPub돋움체 Light" panose="02020603020101020101" pitchFamily="18" charset="-127"/>
+              <a:rPr lang="ko-KR" altLang="en-US" sz="2400" b="1" dirty="0">
+                <a:latin typeface="KoPub돋움체 Medium" panose="02020603020101020101" pitchFamily="18" charset="-127"/>
+                <a:ea typeface="KoPub돋움체 Medium" panose="02020603020101020101" pitchFamily="18" charset="-127"/>
               </a:rPr>
               <a:t>나를 지키는 방어 기록</a:t>
             </a:r>
-            <a:endParaRPr lang="en-US" altLang="ko-KR" sz="2000" b="1" dirty="0">
-              <a:latin typeface="KoPub돋움체 Light" panose="02020603020101020101" pitchFamily="18" charset="-127"/>
-              <a:ea typeface="KoPub돋움체 Light" panose="02020603020101020101" pitchFamily="18" charset="-127"/>
+            <a:endParaRPr lang="en-US" altLang="ko-KR" sz="2400" b="1" dirty="0">
+              <a:latin typeface="KoPub돋움체 Medium" panose="02020603020101020101" pitchFamily="18" charset="-127"/>
+              <a:ea typeface="KoPub돋움체 Medium" panose="02020603020101020101" pitchFamily="18" charset="-127"/>
             </a:endParaRPr>
           </a:p>
         </p:txBody>
@@ -11205,7 +11255,7 @@
           <p:cNvPr id="27" name="TextBox 26">
             <a:extLst>
               <a:ext uri="{FF2B5EF4-FFF2-40B4-BE49-F238E27FC236}">
-                <a16:creationId xmlns:a16="http://schemas.microsoft.com/office/drawing/2014/main" id="{6950ADB8-A755-4C4B-8102-F58976B5B6D4}"/>
+                <a16:creationId xmlns:a16="http://schemas.microsoft.com/office/drawing/2014/main" id="{538305DC-C47C-99FB-0BC8-4862796A2D57}"/>
               </a:ext>
             </a:extLst>
           </p:cNvPr>
@@ -11214,8 +11264,8 @@
         </p:nvSpPr>
         <p:spPr>
           <a:xfrm>
-            <a:off x="5281613" y="3503834"/>
-            <a:ext cx="3119437" cy="584775"/>
+            <a:off x="5193921" y="3448274"/>
+            <a:ext cx="3443091" cy="707886"/>
           </a:xfrm>
           <a:prstGeom prst="rect">
             <a:avLst/>
@@ -11229,92 +11279,92 @@
           <a:lstStyle/>
           <a:p>
             <a:r>
-              <a:rPr lang="en-US" altLang="ko-KR" sz="1600" dirty="0">
-                <a:latin typeface="KoPub돋움체 Light" panose="02020603020101020101" pitchFamily="18" charset="-127"/>
-                <a:ea typeface="KoPub돋움체 Light" panose="02020603020101020101" pitchFamily="18" charset="-127"/>
+              <a:rPr lang="en-US" altLang="ko-KR" sz="2000" b="1" dirty="0">
+                <a:latin typeface="KoPub돋움체 Medium" panose="02020603020101020101" pitchFamily="18" charset="-127"/>
+                <a:ea typeface="KoPub돋움체 Medium" panose="02020603020101020101" pitchFamily="18" charset="-127"/>
               </a:rPr>
               <a:t>PA </a:t>
             </a:r>
             <a:r>
-              <a:rPr lang="ko-KR" altLang="en-US" sz="1600" dirty="0">
-                <a:latin typeface="KoPub돋움체 Light" panose="02020603020101020101" pitchFamily="18" charset="-127"/>
-                <a:ea typeface="KoPub돋움체 Light" panose="02020603020101020101" pitchFamily="18" charset="-127"/>
+              <a:rPr lang="ko-KR" altLang="en-US" sz="2000" b="1" dirty="0">
+                <a:latin typeface="KoPub돋움체 Medium" panose="02020603020101020101" pitchFamily="18" charset="-127"/>
+                <a:ea typeface="KoPub돋움체 Medium" panose="02020603020101020101" pitchFamily="18" charset="-127"/>
               </a:rPr>
               <a:t>지연 사유</a:t>
             </a:r>
             <a:r>
-              <a:rPr lang="en-US" altLang="ko-KR" sz="1600" dirty="0">
-                <a:latin typeface="KoPub돋움체 Light" panose="02020603020101020101" pitchFamily="18" charset="-127"/>
-                <a:ea typeface="KoPub돋움체 Light" panose="02020603020101020101" pitchFamily="18" charset="-127"/>
+              <a:rPr lang="en-US" altLang="ko-KR" sz="2000" b="1" dirty="0">
+                <a:latin typeface="KoPub돋움체 Medium" panose="02020603020101020101" pitchFamily="18" charset="-127"/>
+                <a:ea typeface="KoPub돋움체 Medium" panose="02020603020101020101" pitchFamily="18" charset="-127"/>
               </a:rPr>
               <a:t>(</a:t>
             </a:r>
             <a:r>
-              <a:rPr lang="ko-KR" altLang="en-US" sz="1600" dirty="0">
-                <a:latin typeface="KoPub돋움체 Light" panose="02020603020101020101" pitchFamily="18" charset="-127"/>
-                <a:ea typeface="KoPub돋움체 Light" panose="02020603020101020101" pitchFamily="18" charset="-127"/>
+              <a:rPr lang="ko-KR" altLang="en-US" sz="2000" b="1" dirty="0">
+                <a:latin typeface="KoPub돋움체 Medium" panose="02020603020101020101" pitchFamily="18" charset="-127"/>
+                <a:ea typeface="KoPub돋움체 Medium" panose="02020603020101020101" pitchFamily="18" charset="-127"/>
               </a:rPr>
               <a:t>응급</a:t>
             </a:r>
             <a:r>
-              <a:rPr lang="en-US" altLang="ko-KR" sz="1600" dirty="0">
-                <a:latin typeface="KoPub돋움체 Light" panose="02020603020101020101" pitchFamily="18" charset="-127"/>
-                <a:ea typeface="KoPub돋움체 Light" panose="02020603020101020101" pitchFamily="18" charset="-127"/>
+              <a:rPr lang="en-US" altLang="ko-KR" sz="2000" b="1" dirty="0">
+                <a:latin typeface="KoPub돋움체 Medium" panose="02020603020101020101" pitchFamily="18" charset="-127"/>
+                <a:ea typeface="KoPub돋움체 Medium" panose="02020603020101020101" pitchFamily="18" charset="-127"/>
               </a:rPr>
               <a:t>·</a:t>
             </a:r>
             <a:r>
-              <a:rPr lang="ko-KR" altLang="en-US" sz="1600" dirty="0">
-                <a:latin typeface="KoPub돋움체 Light" panose="02020603020101020101" pitchFamily="18" charset="-127"/>
-                <a:ea typeface="KoPub돋움체 Light" panose="02020603020101020101" pitchFamily="18" charset="-127"/>
+              <a:rPr lang="ko-KR" altLang="en-US" sz="2000" b="1" dirty="0">
+                <a:latin typeface="KoPub돋움체 Medium" panose="02020603020101020101" pitchFamily="18" charset="-127"/>
+                <a:ea typeface="KoPub돋움체 Medium" panose="02020603020101020101" pitchFamily="18" charset="-127"/>
               </a:rPr>
               <a:t>수술</a:t>
             </a:r>
             <a:r>
-              <a:rPr lang="en-US" altLang="ko-KR" sz="1600" dirty="0">
-                <a:latin typeface="KoPub돋움체 Light" panose="02020603020101020101" pitchFamily="18" charset="-127"/>
-                <a:ea typeface="KoPub돋움체 Light" panose="02020603020101020101" pitchFamily="18" charset="-127"/>
+              <a:rPr lang="en-US" altLang="ko-KR" sz="2000" b="1" dirty="0">
+                <a:latin typeface="KoPub돋움체 Medium" panose="02020603020101020101" pitchFamily="18" charset="-127"/>
+                <a:ea typeface="KoPub돋움체 Medium" panose="02020603020101020101" pitchFamily="18" charset="-127"/>
               </a:rPr>
               <a:t>·</a:t>
             </a:r>
             <a:r>
-              <a:rPr lang="ko-KR" altLang="en-US" sz="1600" dirty="0">
-                <a:latin typeface="KoPub돋움체 Light" panose="02020603020101020101" pitchFamily="18" charset="-127"/>
-                <a:ea typeface="KoPub돋움체 Light" panose="02020603020101020101" pitchFamily="18" charset="-127"/>
+              <a:rPr lang="ko-KR" altLang="en-US" sz="2000" b="1" dirty="0">
+                <a:latin typeface="KoPub돋움체 Medium" panose="02020603020101020101" pitchFamily="18" charset="-127"/>
+                <a:ea typeface="KoPub돋움체 Medium" panose="02020603020101020101" pitchFamily="18" charset="-127"/>
               </a:rPr>
               <a:t>대기</a:t>
             </a:r>
             <a:r>
-              <a:rPr lang="en-US" altLang="ko-KR" sz="1600" dirty="0">
-                <a:latin typeface="KoPub돋움체 Light" panose="02020603020101020101" pitchFamily="18" charset="-127"/>
-                <a:ea typeface="KoPub돋움체 Light" panose="02020603020101020101" pitchFamily="18" charset="-127"/>
+              <a:rPr lang="en-US" altLang="ko-KR" sz="2000" b="1" dirty="0">
+                <a:latin typeface="KoPub돋움체 Medium" panose="02020603020101020101" pitchFamily="18" charset="-127"/>
+                <a:ea typeface="KoPub돋움체 Medium" panose="02020603020101020101" pitchFamily="18" charset="-127"/>
               </a:rPr>
               <a:t>·</a:t>
             </a:r>
             <a:r>
-              <a:rPr lang="ko-KR" altLang="en-US" sz="1600" dirty="0" err="1">
-                <a:latin typeface="KoPub돋움체 Light" panose="02020603020101020101" pitchFamily="18" charset="-127"/>
-                <a:ea typeface="KoPub돋움체 Light" panose="02020603020101020101" pitchFamily="18" charset="-127"/>
+              <a:rPr lang="ko-KR" altLang="en-US" sz="2000" b="1" dirty="0" err="1">
+                <a:latin typeface="KoPub돋움체 Medium" panose="02020603020101020101" pitchFamily="18" charset="-127"/>
+                <a:ea typeface="KoPub돋움체 Medium" panose="02020603020101020101" pitchFamily="18" charset="-127"/>
               </a:rPr>
               <a:t>컨펌</a:t>
             </a:r>
             <a:r>
-              <a:rPr lang="en-US" altLang="ko-KR" sz="1600" dirty="0">
-                <a:latin typeface="KoPub돋움체 Light" panose="02020603020101020101" pitchFamily="18" charset="-127"/>
-                <a:ea typeface="KoPub돋움체 Light" panose="02020603020101020101" pitchFamily="18" charset="-127"/>
+              <a:rPr lang="en-US" altLang="ko-KR" sz="2000" b="1" dirty="0">
+                <a:latin typeface="KoPub돋움체 Medium" panose="02020603020101020101" pitchFamily="18" charset="-127"/>
+                <a:ea typeface="KoPub돋움체 Medium" panose="02020603020101020101" pitchFamily="18" charset="-127"/>
               </a:rPr>
               <a:t>) </a:t>
             </a:r>
             <a:r>
-              <a:rPr lang="ko-KR" altLang="en-US" sz="1600" dirty="0">
-                <a:latin typeface="KoPub돋움체 Light" panose="02020603020101020101" pitchFamily="18" charset="-127"/>
-                <a:ea typeface="KoPub돋움체 Light" panose="02020603020101020101" pitchFamily="18" charset="-127"/>
+              <a:rPr lang="ko-KR" altLang="en-US" sz="2000" b="1" dirty="0">
+                <a:latin typeface="KoPub돋움체 Medium" panose="02020603020101020101" pitchFamily="18" charset="-127"/>
+                <a:ea typeface="KoPub돋움체 Medium" panose="02020603020101020101" pitchFamily="18" charset="-127"/>
               </a:rPr>
               <a:t>명시</a:t>
             </a:r>
-            <a:endParaRPr lang="en-US" altLang="ko-KR" sz="1600" dirty="0">
-              <a:latin typeface="KoPub돋움체 Light" panose="02020603020101020101" pitchFamily="18" charset="-127"/>
-              <a:ea typeface="KoPub돋움체 Light" panose="02020603020101020101" pitchFamily="18" charset="-127"/>
+            <a:endParaRPr lang="en-US" altLang="ko-KR" sz="2000" b="1" dirty="0">
+              <a:latin typeface="KoPub돋움체 Medium" panose="02020603020101020101" pitchFamily="18" charset="-127"/>
+              <a:ea typeface="KoPub돋움체 Medium" panose="02020603020101020101" pitchFamily="18" charset="-127"/>
             </a:endParaRPr>
           </a:p>
         </p:txBody>
@@ -11324,7 +11374,7 @@
           <p:cNvPr id="28" name="사각형: 둥근 모서리 27">
             <a:extLst>
               <a:ext uri="{FF2B5EF4-FFF2-40B4-BE49-F238E27FC236}">
-                <a16:creationId xmlns:a16="http://schemas.microsoft.com/office/drawing/2014/main" id="{2A688FE5-A3E9-4A7D-9640-97D9C0317280}"/>
+                <a16:creationId xmlns:a16="http://schemas.microsoft.com/office/drawing/2014/main" id="{ADF97D1B-B6AB-D5AD-B701-21358A35D5F9}"/>
               </a:ext>
             </a:extLst>
           </p:cNvPr>
@@ -11333,8 +11383,8 @@
         </p:nvSpPr>
         <p:spPr>
           <a:xfrm>
-            <a:off x="5067299" y="3376222"/>
-            <a:ext cx="3484563" cy="829420"/>
+            <a:off x="5087533" y="3379434"/>
+            <a:ext cx="3498477" cy="832732"/>
           </a:xfrm>
           <a:prstGeom prst="roundRect">
             <a:avLst>
@@ -11371,9 +11421,9 @@
           <a:lstStyle/>
           <a:p>
             <a:pPr algn="ctr"/>
-            <a:endParaRPr lang="ko-KR" altLang="en-US" sz="5080">
+            <a:endParaRPr lang="ko-KR" altLang="en-US" sz="5100">
               <a:latin typeface="KoPub돋움체 Medium" panose="02020603020101020101" pitchFamily="18" charset="-127"/>
-              <a:ea typeface="KoPub돋움체 Light" panose="02020603020101020101"/>
+              <a:ea typeface="KoPub돋움체 Medium" panose="02020603020101020101" pitchFamily="18" charset="-127"/>
             </a:endParaRPr>
           </a:p>
         </p:txBody>
@@ -11383,7 +11433,7 @@
           <p:cNvPr id="29" name="사각형: 둥근 모서리 28">
             <a:extLst>
               <a:ext uri="{FF2B5EF4-FFF2-40B4-BE49-F238E27FC236}">
-                <a16:creationId xmlns:a16="http://schemas.microsoft.com/office/drawing/2014/main" id="{64D39DA0-5EC6-4030-BC9A-5BA4D6820777}"/>
+                <a16:creationId xmlns:a16="http://schemas.microsoft.com/office/drawing/2014/main" id="{D8002F01-5D0A-5CE6-51BA-825EDF62209F}"/>
               </a:ext>
             </a:extLst>
           </p:cNvPr>
@@ -11392,8 +11442,8 @@
         </p:nvSpPr>
         <p:spPr>
           <a:xfrm>
-            <a:off x="3204625" y="3381511"/>
-            <a:ext cx="1811875" cy="829420"/>
+            <a:off x="3217421" y="3384744"/>
+            <a:ext cx="1819110" cy="832732"/>
           </a:xfrm>
           <a:prstGeom prst="roundRect">
             <a:avLst>
@@ -11431,9 +11481,9 @@
           <a:lstStyle/>
           <a:p>
             <a:pPr algn="ctr"/>
-            <a:endParaRPr lang="ko-KR" altLang="en-US" sz="5080">
+            <a:endParaRPr lang="ko-KR" altLang="en-US" sz="5100">
               <a:latin typeface="KoPub돋움체 Medium" panose="02020603020101020101" pitchFamily="18" charset="-127"/>
-              <a:ea typeface="KoPub돋움체 Light" panose="02020603020101020101"/>
+              <a:ea typeface="KoPub돋움체 Medium" panose="02020603020101020101" pitchFamily="18" charset="-127"/>
             </a:endParaRPr>
           </a:p>
         </p:txBody>
@@ -11443,7 +11493,7 @@
           <p:cNvPr id="30" name="TextBox 29">
             <a:extLst>
               <a:ext uri="{FF2B5EF4-FFF2-40B4-BE49-F238E27FC236}">
-                <a16:creationId xmlns:a16="http://schemas.microsoft.com/office/drawing/2014/main" id="{3C4779CB-7AE4-4301-8B2E-ADD0772F1C8C}"/>
+                <a16:creationId xmlns:a16="http://schemas.microsoft.com/office/drawing/2014/main" id="{C0A7B9BE-98ED-61D5-BB29-3572DC4F41C4}"/>
               </a:ext>
             </a:extLst>
           </p:cNvPr>
@@ -11452,8 +11502,8 @@
         </p:nvSpPr>
         <p:spPr>
           <a:xfrm>
-            <a:off x="3660760" y="3626944"/>
-            <a:ext cx="899605" cy="338554"/>
+            <a:off x="3588368" y="3609035"/>
+            <a:ext cx="1077219" cy="400110"/>
           </a:xfrm>
           <a:prstGeom prst="rect">
             <a:avLst/>
@@ -11468,9 +11518,9 @@
           <a:p>
             <a:pPr algn="ctr"/>
             <a:r>
-              <a:rPr lang="en-US" altLang="ko-KR" sz="1600" b="1" dirty="0">
-                <a:latin typeface="KoPub돋움체 Light" panose="02020603020101020101" pitchFamily="18" charset="-127"/>
-                <a:ea typeface="KoPub돋움체 Light" panose="02020603020101020101" pitchFamily="18" charset="-127"/>
+              <a:rPr lang="en-US" altLang="ko-KR" sz="2000" b="1" dirty="0">
+                <a:latin typeface="KoPub돋움체 Medium" panose="02020603020101020101" pitchFamily="18" charset="-127"/>
+                <a:ea typeface="KoPub돋움체 Medium" panose="02020603020101020101" pitchFamily="18" charset="-127"/>
               </a:rPr>
               <a:t>C-Code</a:t>
             </a:r>
@@ -11482,7 +11532,7 @@
           <p:cNvPr id="33" name="TextBox 32">
             <a:extLst>
               <a:ext uri="{FF2B5EF4-FFF2-40B4-BE49-F238E27FC236}">
-                <a16:creationId xmlns:a16="http://schemas.microsoft.com/office/drawing/2014/main" id="{CE2D936A-A45B-43D0-819F-2B99B59D02C1}"/>
+                <a16:creationId xmlns:a16="http://schemas.microsoft.com/office/drawing/2014/main" id="{BA6AA51B-7ADF-3EE6-8929-BA20D17E6225}"/>
               </a:ext>
             </a:extLst>
           </p:cNvPr>
@@ -11491,8 +11541,8 @@
         </p:nvSpPr>
         <p:spPr>
           <a:xfrm>
-            <a:off x="1847923" y="4282983"/>
-            <a:ext cx="5424883" cy="461665"/>
+            <a:off x="2192472" y="4289816"/>
+            <a:ext cx="4772204" cy="465054"/>
           </a:xfrm>
           <a:prstGeom prst="rect">
             <a:avLst/>
@@ -11507,72 +11557,72 @@
           <a:p>
             <a:pPr algn="ctr"/>
             <a:r>
-              <a:rPr lang="en-US" altLang="ko-KR" sz="2400" b="1" dirty="0">
+              <a:rPr lang="en-US" altLang="ko-KR" sz="2410" b="1" dirty="0">
                 <a:solidFill>
                   <a:srgbClr val="7030A0"/>
                 </a:solidFill>
-                <a:latin typeface="KoPub돋움체 Light" panose="02020603020101020101" pitchFamily="18" charset="-127"/>
-                <a:ea typeface="KoPub돋움체 Light" panose="02020603020101020101" pitchFamily="18" charset="-127"/>
+                <a:latin typeface="KoPub돋움체 Medium" panose="02020603020101020101" pitchFamily="18" charset="-127"/>
+                <a:ea typeface="KoPub돋움체 Medium" panose="02020603020101020101" pitchFamily="18" charset="-127"/>
               </a:rPr>
               <a:t>“</a:t>
             </a:r>
             <a:r>
-              <a:rPr lang="ko-KR" altLang="en-US" sz="2400" b="1" dirty="0">
+              <a:rPr lang="ko-KR" altLang="en-US" sz="2410" b="1" dirty="0">
                 <a:solidFill>
                   <a:srgbClr val="7030A0"/>
                 </a:solidFill>
-                <a:latin typeface="KoPub돋움체 Light" panose="02020603020101020101" pitchFamily="18" charset="-127"/>
-                <a:ea typeface="KoPub돋움체 Light" panose="02020603020101020101" pitchFamily="18" charset="-127"/>
+                <a:latin typeface="KoPub돋움체 Medium" panose="02020603020101020101" pitchFamily="18" charset="-127"/>
+                <a:ea typeface="KoPub돋움체 Medium" panose="02020603020101020101" pitchFamily="18" charset="-127"/>
               </a:rPr>
               <a:t>기록은 메신저에서</a:t>
             </a:r>
             <a:r>
-              <a:rPr lang="en-US" altLang="ko-KR" sz="2400" b="1" dirty="0">
+              <a:rPr lang="en-US" altLang="ko-KR" sz="2410" b="1" dirty="0">
                 <a:solidFill>
                   <a:srgbClr val="7030A0"/>
                 </a:solidFill>
-                <a:latin typeface="KoPub돋움체 Light" panose="02020603020101020101" pitchFamily="18" charset="-127"/>
-                <a:ea typeface="KoPub돋움체 Light" panose="02020603020101020101" pitchFamily="18" charset="-127"/>
+                <a:latin typeface="KoPub돋움체 Medium" panose="02020603020101020101" pitchFamily="18" charset="-127"/>
+                <a:ea typeface="KoPub돋움체 Medium" panose="02020603020101020101" pitchFamily="18" charset="-127"/>
               </a:rPr>
               <a:t>, </a:t>
             </a:r>
             <a:r>
-              <a:rPr lang="ko-KR" altLang="en-US" sz="2400" b="1" dirty="0">
+              <a:rPr lang="ko-KR" altLang="en-US" sz="2410" b="1" dirty="0">
                 <a:solidFill>
                   <a:srgbClr val="7030A0"/>
                 </a:solidFill>
-                <a:latin typeface="KoPub돋움체 Light" panose="02020603020101020101" pitchFamily="18" charset="-127"/>
-                <a:ea typeface="KoPub돋움체 Light" panose="02020603020101020101" pitchFamily="18" charset="-127"/>
+                <a:latin typeface="KoPub돋움체 Medium" panose="02020603020101020101" pitchFamily="18" charset="-127"/>
+                <a:ea typeface="KoPub돋움체 Medium" panose="02020603020101020101" pitchFamily="18" charset="-127"/>
               </a:rPr>
               <a:t>정보는 </a:t>
             </a:r>
             <a:r>
-              <a:rPr lang="en-US" altLang="ko-KR" sz="2400" b="1" dirty="0">
+              <a:rPr lang="en-US" altLang="ko-KR" sz="2410" b="1" dirty="0">
                 <a:solidFill>
                   <a:srgbClr val="7030A0"/>
                 </a:solidFill>
-                <a:latin typeface="KoPub돋움체 Light" panose="02020603020101020101" pitchFamily="18" charset="-127"/>
-                <a:ea typeface="KoPub돋움체 Light" panose="02020603020101020101" pitchFamily="18" charset="-127"/>
+                <a:latin typeface="KoPub돋움체 Medium" panose="02020603020101020101" pitchFamily="18" charset="-127"/>
+                <a:ea typeface="KoPub돋움체 Medium" panose="02020603020101020101" pitchFamily="18" charset="-127"/>
               </a:rPr>
               <a:t>QR</a:t>
             </a:r>
             <a:r>
-              <a:rPr lang="ko-KR" altLang="en-US" sz="2400" b="1" dirty="0">
+              <a:rPr lang="ko-KR" altLang="en-US" sz="2410" b="1" dirty="0">
                 <a:solidFill>
                   <a:srgbClr val="7030A0"/>
                 </a:solidFill>
-                <a:latin typeface="KoPub돋움체 Light" panose="02020603020101020101" pitchFamily="18" charset="-127"/>
-                <a:ea typeface="KoPub돋움체 Light" panose="02020603020101020101" pitchFamily="18" charset="-127"/>
+                <a:latin typeface="KoPub돋움체 Medium" panose="02020603020101020101" pitchFamily="18" charset="-127"/>
+                <a:ea typeface="KoPub돋움체 Medium" panose="02020603020101020101" pitchFamily="18" charset="-127"/>
               </a:rPr>
               <a:t>에서</a:t>
             </a:r>
             <a:r>
-              <a:rPr lang="en-US" altLang="ko-KR" sz="2400" b="1" dirty="0">
+              <a:rPr lang="en-US" altLang="ko-KR" sz="2410" b="1" dirty="0">
                 <a:solidFill>
                   <a:srgbClr val="7030A0"/>
                 </a:solidFill>
-                <a:latin typeface="KoPub돋움체 Light" panose="02020603020101020101" pitchFamily="18" charset="-127"/>
-                <a:ea typeface="KoPub돋움체 Light" panose="02020603020101020101" pitchFamily="18" charset="-127"/>
+                <a:latin typeface="KoPub돋움체 Medium" panose="02020603020101020101" pitchFamily="18" charset="-127"/>
+                <a:ea typeface="KoPub돋움체 Medium" panose="02020603020101020101" pitchFamily="18" charset="-127"/>
               </a:rPr>
               <a:t>!”</a:t>
             </a:r>
@@ -11582,7 +11632,7 @@
     </p:spTree>
     <p:extLst>
       <p:ext uri="{BB962C8B-B14F-4D97-AF65-F5344CB8AC3E}">
-        <p14:creationId xmlns:p14="http://schemas.microsoft.com/office/powerpoint/2010/main" val="1610996040"/>
+        <p14:creationId xmlns:p14="http://schemas.microsoft.com/office/powerpoint/2010/main" val="231824372"/>
       </p:ext>
     </p:extLst>
   </p:cSld>
@@ -11600,7 +11650,7 @@
         <p:cNvPr id="1" name="">
           <a:extLst>
             <a:ext uri="{FF2B5EF4-FFF2-40B4-BE49-F238E27FC236}">
-              <a16:creationId xmlns:a16="http://schemas.microsoft.com/office/drawing/2014/main" id="{75C95857-5CB6-E176-FDD7-C77B771BAC79}"/>
+              <a16:creationId xmlns:a16="http://schemas.microsoft.com/office/drawing/2014/main" id="{F746A123-8B5F-CAF7-5A8D-82107CC3DA14}"/>
             </a:ext>
           </a:extLst>
         </p:cNvPr>
@@ -11620,7 +11670,7 @@
           <p:cNvPr id="32" name="사각형: 둥근 모서리 31">
             <a:extLst>
               <a:ext uri="{FF2B5EF4-FFF2-40B4-BE49-F238E27FC236}">
-                <a16:creationId xmlns:a16="http://schemas.microsoft.com/office/drawing/2014/main" id="{B0243490-B7C6-42DB-B189-20704EFBD587}"/>
+                <a16:creationId xmlns:a16="http://schemas.microsoft.com/office/drawing/2014/main" id="{C23C391A-F9EA-9DDE-A7C4-6777C5FFB881}"/>
               </a:ext>
             </a:extLst>
           </p:cNvPr>
@@ -11629,8 +11679,8 @@
         </p:nvSpPr>
         <p:spPr>
           <a:xfrm>
-            <a:off x="590790" y="807444"/>
-            <a:ext cx="2561688" cy="548828"/>
+            <a:off x="593149" y="800399"/>
+            <a:ext cx="2571917" cy="551020"/>
           </a:xfrm>
           <a:prstGeom prst="roundRect">
             <a:avLst/>
@@ -11670,7 +11720,10 @@
           <a:lstStyle/>
           <a:p>
             <a:pPr algn="ctr"/>
-            <a:endParaRPr lang="ko-KR" altLang="en-US"/>
+            <a:endParaRPr lang="ko-KR" altLang="en-US" sz="1807">
+              <a:latin typeface="KoPub돋움체 Medium" panose="02020603020101020101" pitchFamily="18" charset="-127"/>
+              <a:ea typeface="KoPub돋움체 Medium" panose="02020603020101020101" pitchFamily="18" charset="-127"/>
+            </a:endParaRPr>
           </a:p>
         </p:txBody>
       </p:sp>
@@ -11679,7 +11732,7 @@
           <p:cNvPr id="31" name="사각형: 둥근 모서리 30">
             <a:extLst>
               <a:ext uri="{FF2B5EF4-FFF2-40B4-BE49-F238E27FC236}">
-                <a16:creationId xmlns:a16="http://schemas.microsoft.com/office/drawing/2014/main" id="{30F47067-F54E-4A90-9F21-57BD24BB9C63}"/>
+                <a16:creationId xmlns:a16="http://schemas.microsoft.com/office/drawing/2014/main" id="{648ABFA5-B66E-F0EC-C902-433AD5ECAEBE}"/>
               </a:ext>
             </a:extLst>
           </p:cNvPr>
@@ -11688,8 +11741,8 @@
         </p:nvSpPr>
         <p:spPr>
           <a:xfrm>
-            <a:off x="3204625" y="807444"/>
-            <a:ext cx="5347237" cy="548828"/>
+            <a:off x="3217421" y="800399"/>
+            <a:ext cx="5368589" cy="551020"/>
           </a:xfrm>
           <a:prstGeom prst="roundRect">
             <a:avLst/>
@@ -11729,7 +11782,10 @@
           <a:lstStyle/>
           <a:p>
             <a:pPr algn="ctr"/>
-            <a:endParaRPr lang="ko-KR" altLang="en-US"/>
+            <a:endParaRPr lang="ko-KR" altLang="en-US" sz="1807">
+              <a:latin typeface="KoPub돋움체 Medium" panose="02020603020101020101" pitchFamily="18" charset="-127"/>
+              <a:ea typeface="KoPub돋움체 Medium" panose="02020603020101020101" pitchFamily="18" charset="-127"/>
+            </a:endParaRPr>
           </a:p>
         </p:txBody>
       </p:sp>
@@ -11738,7 +11794,7 @@
           <p:cNvPr id="23" name="TextBox 22">
             <a:extLst>
               <a:ext uri="{FF2B5EF4-FFF2-40B4-BE49-F238E27FC236}">
-                <a16:creationId xmlns:a16="http://schemas.microsoft.com/office/drawing/2014/main" id="{CD41B2AA-F91D-4DF3-86CD-504CE316D08F}"/>
+                <a16:creationId xmlns:a16="http://schemas.microsoft.com/office/drawing/2014/main" id="{DDB85AED-3368-88D1-B8BB-12A94D6F08CD}"/>
               </a:ext>
             </a:extLst>
           </p:cNvPr>
@@ -11747,8 +11803,8 @@
         </p:nvSpPr>
         <p:spPr>
           <a:xfrm>
-            <a:off x="5281613" y="2565733"/>
-            <a:ext cx="2843725" cy="584775"/>
+            <a:off x="5193921" y="2506427"/>
+            <a:ext cx="2855080" cy="707886"/>
           </a:xfrm>
           <a:prstGeom prst="rect">
             <a:avLst/>
@@ -11762,23 +11818,23 @@
           <a:lstStyle/>
           <a:p>
             <a:r>
-              <a:rPr lang="ko-KR" altLang="en-US" sz="1600" dirty="0">
-                <a:latin typeface="KoPub돋움체 Light" panose="02020603020101020101" pitchFamily="18" charset="-127"/>
-                <a:ea typeface="KoPub돋움체 Light" panose="02020603020101020101" pitchFamily="18" charset="-127"/>
+              <a:rPr lang="ko-KR" altLang="en-US" sz="2000" b="1" dirty="0">
+                <a:latin typeface="KoPub돋움체 Medium" panose="02020603020101020101" pitchFamily="18" charset="-127"/>
+                <a:ea typeface="KoPub돋움체 Medium" panose="02020603020101020101" pitchFamily="18" charset="-127"/>
               </a:rPr>
               <a:t>야간 응급 유선 보고 후 사후 </a:t>
             </a:r>
             <a:r>
-              <a:rPr lang="en-US" altLang="ko-KR" sz="1600" dirty="0">
-                <a:latin typeface="KoPub돋움체 Light" panose="02020603020101020101" pitchFamily="18" charset="-127"/>
-                <a:ea typeface="KoPub돋움체 Light" panose="02020603020101020101" pitchFamily="18" charset="-127"/>
+              <a:rPr lang="en-US" altLang="ko-KR" sz="2000" b="1" dirty="0">
+                <a:latin typeface="KoPub돋움체 Medium" panose="02020603020101020101" pitchFamily="18" charset="-127"/>
+                <a:ea typeface="KoPub돋움체 Medium" panose="02020603020101020101" pitchFamily="18" charset="-127"/>
               </a:rPr>
               <a:t>[A]-[D] 1</a:t>
             </a:r>
             <a:r>
-              <a:rPr lang="ko-KR" altLang="en-US" sz="1600" dirty="0">
-                <a:latin typeface="KoPub돋움체 Light" panose="02020603020101020101" pitchFamily="18" charset="-127"/>
-                <a:ea typeface="KoPub돋움체 Light" panose="02020603020101020101" pitchFamily="18" charset="-127"/>
+              <a:rPr lang="ko-KR" altLang="en-US" sz="2000" b="1" dirty="0">
+                <a:latin typeface="KoPub돋움체 Medium" panose="02020603020101020101" pitchFamily="18" charset="-127"/>
+                <a:ea typeface="KoPub돋움체 Medium" panose="02020603020101020101" pitchFamily="18" charset="-127"/>
               </a:rPr>
               <a:t>줄 기록</a:t>
             </a:r>
@@ -11790,7 +11846,7 @@
           <p:cNvPr id="24" name="사각형: 둥근 모서리 23">
             <a:extLst>
               <a:ext uri="{FF2B5EF4-FFF2-40B4-BE49-F238E27FC236}">
-                <a16:creationId xmlns:a16="http://schemas.microsoft.com/office/drawing/2014/main" id="{A193F6F5-6376-4F98-A3BB-96E53249AC9E}"/>
+                <a16:creationId xmlns:a16="http://schemas.microsoft.com/office/drawing/2014/main" id="{F634AE2B-F9BC-F3E9-22E2-B1377E2495F4}"/>
               </a:ext>
             </a:extLst>
           </p:cNvPr>
@@ -11799,8 +11855,8 @@
         </p:nvSpPr>
         <p:spPr>
           <a:xfrm>
-            <a:off x="5067299" y="2388822"/>
-            <a:ext cx="3484563" cy="959835"/>
+            <a:off x="5087533" y="2388092"/>
+            <a:ext cx="3498477" cy="963668"/>
           </a:xfrm>
           <a:prstGeom prst="roundRect">
             <a:avLst>
@@ -11837,9 +11893,9 @@
           <a:lstStyle/>
           <a:p>
             <a:pPr algn="ctr"/>
-            <a:endParaRPr lang="ko-KR" altLang="en-US" sz="5080">
+            <a:endParaRPr lang="ko-KR" altLang="en-US" sz="5100">
               <a:latin typeface="KoPub돋움체 Medium" panose="02020603020101020101" pitchFamily="18" charset="-127"/>
-              <a:ea typeface="KoPub돋움체 Light" panose="02020603020101020101"/>
+              <a:ea typeface="KoPub돋움체 Medium" panose="02020603020101020101" pitchFamily="18" charset="-127"/>
             </a:endParaRPr>
           </a:p>
         </p:txBody>
@@ -11849,7 +11905,7 @@
           <p:cNvPr id="25" name="사각형: 둥근 모서리 24">
             <a:extLst>
               <a:ext uri="{FF2B5EF4-FFF2-40B4-BE49-F238E27FC236}">
-                <a16:creationId xmlns:a16="http://schemas.microsoft.com/office/drawing/2014/main" id="{ABE07B44-9D20-4CE2-BFB6-8DDA339570CA}"/>
+                <a16:creationId xmlns:a16="http://schemas.microsoft.com/office/drawing/2014/main" id="{50FF1BAC-4BDB-FD37-8021-5CE9779E8BB8}"/>
               </a:ext>
             </a:extLst>
           </p:cNvPr>
@@ -11858,8 +11914,8 @@
         </p:nvSpPr>
         <p:spPr>
           <a:xfrm>
-            <a:off x="3204625" y="2394111"/>
-            <a:ext cx="1811875" cy="954545"/>
+            <a:off x="3217421" y="2393402"/>
+            <a:ext cx="1819110" cy="958357"/>
           </a:xfrm>
           <a:prstGeom prst="roundRect">
             <a:avLst>
@@ -11897,9 +11953,9 @@
           <a:lstStyle/>
           <a:p>
             <a:pPr algn="ctr"/>
-            <a:endParaRPr lang="ko-KR" altLang="en-US" sz="5080">
+            <a:endParaRPr lang="ko-KR" altLang="en-US" sz="5100">
               <a:latin typeface="KoPub돋움체 Medium" panose="02020603020101020101" pitchFamily="18" charset="-127"/>
-              <a:ea typeface="KoPub돋움체 Light" panose="02020603020101020101"/>
+              <a:ea typeface="KoPub돋움체 Medium" panose="02020603020101020101" pitchFamily="18" charset="-127"/>
             </a:endParaRPr>
           </a:p>
         </p:txBody>
@@ -11909,7 +11965,7 @@
           <p:cNvPr id="26" name="TextBox 25">
             <a:extLst>
               <a:ext uri="{FF2B5EF4-FFF2-40B4-BE49-F238E27FC236}">
-                <a16:creationId xmlns:a16="http://schemas.microsoft.com/office/drawing/2014/main" id="{31132F88-5AA2-43B2-8C2A-F2BB31E51E43}"/>
+                <a16:creationId xmlns:a16="http://schemas.microsoft.com/office/drawing/2014/main" id="{33FD4369-5EAD-5C5D-73C4-AD6AA1F543E0}"/>
               </a:ext>
             </a:extLst>
           </p:cNvPr>
@@ -11918,8 +11974,8 @@
         </p:nvSpPr>
         <p:spPr>
           <a:xfrm>
-            <a:off x="3415500" y="2675202"/>
-            <a:ext cx="1390125" cy="338554"/>
+            <a:off x="3354969" y="2653493"/>
+            <a:ext cx="1544012" cy="400110"/>
           </a:xfrm>
           <a:prstGeom prst="rect">
             <a:avLst/>
@@ -11934,23 +11990,23 @@
           <a:p>
             <a:pPr algn="ctr"/>
             <a:r>
-              <a:rPr lang="en-US" altLang="ko-KR" sz="1600" b="1" dirty="0">
-                <a:latin typeface="KoPub돋움체 Light" panose="02020603020101020101" pitchFamily="18" charset="-127"/>
-                <a:ea typeface="KoPub돋움체 Light" panose="02020603020101020101" pitchFamily="18" charset="-127"/>
+              <a:rPr lang="en-US" altLang="ko-KR" sz="2000" b="1" dirty="0">
+                <a:latin typeface="KoPub돋움체 Medium" panose="02020603020101020101" pitchFamily="18" charset="-127"/>
+                <a:ea typeface="KoPub돋움체 Medium" panose="02020603020101020101" pitchFamily="18" charset="-127"/>
               </a:rPr>
               <a:t>[D-</a:t>
             </a:r>
             <a:r>
-              <a:rPr lang="ko-KR" altLang="en-US" sz="1600" b="1" dirty="0" err="1">
-                <a:latin typeface="KoPub돋움체 Light" panose="02020603020101020101" pitchFamily="18" charset="-127"/>
-                <a:ea typeface="KoPub돋움체 Light" panose="02020603020101020101" pitchFamily="18" charset="-127"/>
+              <a:rPr lang="ko-KR" altLang="en-US" sz="2000" b="1" dirty="0" err="1">
+                <a:latin typeface="KoPub돋움체 Medium" panose="02020603020101020101" pitchFamily="18" charset="-127"/>
+                <a:ea typeface="KoPub돋움체 Medium" panose="02020603020101020101" pitchFamily="18" charset="-127"/>
               </a:rPr>
               <a:t>야간유선</a:t>
             </a:r>
             <a:r>
-              <a:rPr lang="en-US" altLang="ko-KR" sz="1600" b="1" dirty="0">
-                <a:latin typeface="KoPub돋움체 Light" panose="02020603020101020101" pitchFamily="18" charset="-127"/>
-                <a:ea typeface="KoPub돋움체 Light" panose="02020603020101020101" pitchFamily="18" charset="-127"/>
+              <a:rPr lang="en-US" altLang="ko-KR" sz="2000" b="1" dirty="0">
+                <a:latin typeface="KoPub돋움체 Medium" panose="02020603020101020101" pitchFamily="18" charset="-127"/>
+                <a:ea typeface="KoPub돋움체 Medium" panose="02020603020101020101" pitchFamily="18" charset="-127"/>
               </a:rPr>
               <a:t>]</a:t>
             </a:r>
@@ -11962,7 +12018,7 @@
           <p:cNvPr id="3" name="TextBox 2">
             <a:extLst>
               <a:ext uri="{FF2B5EF4-FFF2-40B4-BE49-F238E27FC236}">
-                <a16:creationId xmlns:a16="http://schemas.microsoft.com/office/drawing/2014/main" id="{BDB8E964-7EED-74B0-E816-8BE4F8865B12}"/>
+                <a16:creationId xmlns:a16="http://schemas.microsoft.com/office/drawing/2014/main" id="{EFD32E2A-8A40-BE61-2762-021C4B4FDC34}"/>
               </a:ext>
             </a:extLst>
           </p:cNvPr>
@@ -11971,8 +12027,8 @@
         </p:nvSpPr>
         <p:spPr>
           <a:xfrm>
-            <a:off x="101771" y="184601"/>
-            <a:ext cx="3476336" cy="309444"/>
+            <a:off x="302548" y="175069"/>
+            <a:ext cx="3089475" cy="311645"/>
           </a:xfrm>
           <a:prstGeom prst="rect">
             <a:avLst/>
@@ -11987,21 +12043,21 @@
           <a:p>
             <a:pPr algn="ctr"/>
             <a:r>
-              <a:rPr lang="ko-KR" altLang="en-US" sz="1411" spc="-31" dirty="0">
+              <a:rPr lang="ko-KR" altLang="en-US" sz="1417" spc="-31" dirty="0">
                 <a:latin typeface="KoPub돋움체 Light" panose="02020603020101020101" pitchFamily="18" charset="-127"/>
                 <a:ea typeface="KoPub돋움체 Light" panose="02020603020101020101" pitchFamily="18" charset="-127"/>
               </a:rPr>
               <a:t>순천향대학교 천안병원 </a:t>
             </a:r>
             <a:r>
-              <a:rPr lang="en-US" altLang="ko-KR" sz="1411" spc="-31" dirty="0">
+              <a:rPr lang="en-US" altLang="ko-KR" sz="1417" spc="-31" dirty="0">
                 <a:latin typeface="KoPub돋움체 Light" panose="02020603020101020101" pitchFamily="18" charset="-127"/>
                 <a:ea typeface="KoPub돋움체 Light" panose="02020603020101020101" pitchFamily="18" charset="-127"/>
               </a:rPr>
               <a:t>| </a:t>
             </a:r>
             <a:r>
-              <a:rPr lang="ko-KR" altLang="en-US" sz="1411" spc="-31" dirty="0">
+              <a:rPr lang="ko-KR" altLang="en-US" sz="1417" spc="-31" dirty="0">
                 <a:latin typeface="KoPub돋움체 Light" panose="02020603020101020101" pitchFamily="18" charset="-127"/>
                 <a:ea typeface="KoPub돋움체 Light" panose="02020603020101020101" pitchFamily="18" charset="-127"/>
               </a:rPr>
@@ -12015,7 +12071,7 @@
           <p:cNvPr id="7" name="그룹 6">
             <a:extLst>
               <a:ext uri="{FF2B5EF4-FFF2-40B4-BE49-F238E27FC236}">
-                <a16:creationId xmlns:a16="http://schemas.microsoft.com/office/drawing/2014/main" id="{399CA2A2-FAD0-4681-B98C-3A7AA0484B78}"/>
+                <a16:creationId xmlns:a16="http://schemas.microsoft.com/office/drawing/2014/main" id="{AFE0FED4-1113-B2EB-825C-FAF783BD47A3}"/>
               </a:ext>
             </a:extLst>
           </p:cNvPr>
@@ -12024,8 +12080,8 @@
         </p:nvGrpSpPr>
         <p:grpSpPr>
           <a:xfrm>
-            <a:off x="592138" y="1396134"/>
-            <a:ext cx="2585305" cy="2814796"/>
+            <a:off x="594503" y="1391440"/>
+            <a:ext cx="2595628" cy="2826036"/>
             <a:chOff x="592138" y="1592949"/>
             <a:chExt cx="2585305" cy="2814796"/>
           </a:xfrm>
@@ -12035,7 +12091,7 @@
             <p:cNvPr id="22" name="사각형: 둥근 모서리 21">
               <a:extLst>
                 <a:ext uri="{FF2B5EF4-FFF2-40B4-BE49-F238E27FC236}">
-                  <a16:creationId xmlns:a16="http://schemas.microsoft.com/office/drawing/2014/main" id="{8DA9AE8C-7191-4002-98F1-FF77B72D519F}"/>
+                  <a16:creationId xmlns:a16="http://schemas.microsoft.com/office/drawing/2014/main" id="{86D198F6-0DCB-F78B-2C1B-22CA81C0D223}"/>
                 </a:ext>
               </a:extLst>
             </p:cNvPr>
@@ -12084,11 +12140,12 @@
             <a:lstStyle/>
             <a:p>
               <a:pPr algn="ctr"/>
-              <a:endParaRPr lang="ko-KR" altLang="en-US" sz="5080">
+              <a:endParaRPr lang="ko-KR" altLang="en-US" sz="5100">
                 <a:solidFill>
                   <a:schemeClr val="tx1"/>
                 </a:solidFill>
-                <a:ea typeface="KoPub돋움체 Light" panose="02020603020101020101"/>
+                <a:latin typeface="KoPub돋움체 Medium" panose="02020603020101020101" pitchFamily="18" charset="-127"/>
+                <a:ea typeface="KoPub돋움체 Medium" panose="02020603020101020101" pitchFamily="18" charset="-127"/>
               </a:endParaRPr>
             </a:p>
           </p:txBody>
@@ -12098,7 +12155,7 @@
             <p:cNvPr id="17" name="TextBox 16">
               <a:extLst>
                 <a:ext uri="{FF2B5EF4-FFF2-40B4-BE49-F238E27FC236}">
-                  <a16:creationId xmlns:a16="http://schemas.microsoft.com/office/drawing/2014/main" id="{5E33DDDA-6085-D01E-695B-8DCA20A2A084}"/>
+                  <a16:creationId xmlns:a16="http://schemas.microsoft.com/office/drawing/2014/main" id="{8FAAB80F-D690-7B95-E546-AAA24D3B3348}"/>
                 </a:ext>
               </a:extLst>
             </p:cNvPr>
@@ -12122,251 +12179,254 @@
             <a:lstStyle/>
             <a:p>
               <a:r>
-                <a:rPr lang="en-US" altLang="ko-KR" sz="1600" b="1" dirty="0">
-                  <a:latin typeface="KoPub돋움체 Light" panose="02020603020101020101" pitchFamily="18" charset="-127"/>
-                  <a:ea typeface="KoPub돋움체 Light" panose="02020603020101020101" pitchFamily="18" charset="-127"/>
+                <a:rPr lang="en-US" altLang="ko-KR" sz="1606" b="1" dirty="0">
+                  <a:latin typeface="KoPub돋움체 Medium" panose="02020603020101020101" pitchFamily="18" charset="-127"/>
+                  <a:ea typeface="KoPub돋움체 Medium" panose="02020603020101020101" pitchFamily="18" charset="-127"/>
                 </a:rPr>
                 <a:t>[CHEMO] </a:t>
               </a:r>
               <a:r>
-                <a:rPr lang="ko-KR" altLang="en-US" sz="1600" dirty="0"/>
+                <a:rPr lang="ko-KR" altLang="en-US" sz="1606" dirty="0">
+                  <a:latin typeface="KoPub돋움체 Medium" panose="02020603020101020101" pitchFamily="18" charset="-127"/>
+                  <a:ea typeface="KoPub돋움체 Medium" panose="02020603020101020101" pitchFamily="18" charset="-127"/>
+                </a:rPr>
                 <a:t>항암 관리</a:t>
               </a:r>
             </a:p>
             <a:p>
               <a:r>
-                <a:rPr lang="en-US" altLang="ko-KR" sz="1600" b="1" dirty="0">
-                  <a:latin typeface="KoPub돋움체 Light" panose="02020603020101020101" pitchFamily="18" charset="-127"/>
-                  <a:ea typeface="KoPub돋움체 Light" panose="02020603020101020101" pitchFamily="18" charset="-127"/>
+                <a:rPr lang="en-US" altLang="ko-KR" sz="1606" b="1" dirty="0">
+                  <a:latin typeface="KoPub돋움체 Medium" panose="02020603020101020101" pitchFamily="18" charset="-127"/>
+                  <a:ea typeface="KoPub돋움체 Medium" panose="02020603020101020101" pitchFamily="18" charset="-127"/>
                 </a:rPr>
                 <a:t>[BLOOD]</a:t>
               </a:r>
               <a:r>
-                <a:rPr lang="en-US" altLang="ko-KR" sz="1600" dirty="0">
-                  <a:latin typeface="KoPub돋움체 Light" panose="02020603020101020101" pitchFamily="18" charset="-127"/>
-                  <a:ea typeface="KoPub돋움체 Light" panose="02020603020101020101" pitchFamily="18" charset="-127"/>
+                <a:rPr lang="en-US" altLang="ko-KR" sz="1606" dirty="0">
+                  <a:latin typeface="KoPub돋움체 Medium" panose="02020603020101020101" pitchFamily="18" charset="-127"/>
+                  <a:ea typeface="KoPub돋움체 Medium" panose="02020603020101020101" pitchFamily="18" charset="-127"/>
                 </a:rPr>
                 <a:t> </a:t>
               </a:r>
               <a:r>
-                <a:rPr lang="ko-KR" altLang="en-US" sz="1600" dirty="0">
-                  <a:latin typeface="KoPub돋움체 Light" panose="02020603020101020101" pitchFamily="18" charset="-127"/>
-                  <a:ea typeface="KoPub돋움체 Light" panose="02020603020101020101" pitchFamily="18" charset="-127"/>
+                <a:rPr lang="ko-KR" altLang="en-US" sz="1606" dirty="0">
+                  <a:latin typeface="KoPub돋움체 Medium" panose="02020603020101020101" pitchFamily="18" charset="-127"/>
+                  <a:ea typeface="KoPub돋움체 Medium" panose="02020603020101020101" pitchFamily="18" charset="-127"/>
                 </a:rPr>
                 <a:t>수혈 관리</a:t>
               </a:r>
-              <a:endParaRPr lang="en-US" altLang="ko-KR" sz="1600" dirty="0">
-                <a:latin typeface="KoPub돋움체 Light" panose="02020603020101020101" pitchFamily="18" charset="-127"/>
-                <a:ea typeface="KoPub돋움체 Light" panose="02020603020101020101" pitchFamily="18" charset="-127"/>
+              <a:endParaRPr lang="en-US" altLang="ko-KR" sz="1606" dirty="0">
+                <a:latin typeface="KoPub돋움체 Medium" panose="02020603020101020101" pitchFamily="18" charset="-127"/>
+                <a:ea typeface="KoPub돋움체 Medium" panose="02020603020101020101" pitchFamily="18" charset="-127"/>
               </a:endParaRPr>
             </a:p>
             <a:p>
               <a:r>
-                <a:rPr lang="en-US" altLang="ko-KR" sz="1600" b="1" dirty="0">
-                  <a:latin typeface="KoPub돋움체 Light" panose="02020603020101020101" pitchFamily="18" charset="-127"/>
-                  <a:ea typeface="KoPub돋움체 Light" panose="02020603020101020101" pitchFamily="18" charset="-127"/>
+                <a:rPr lang="en-US" altLang="ko-KR" sz="1606" b="1" dirty="0">
+                  <a:latin typeface="KoPub돋움체 Medium" panose="02020603020101020101" pitchFamily="18" charset="-127"/>
+                  <a:ea typeface="KoPub돋움체 Medium" panose="02020603020101020101" pitchFamily="18" charset="-127"/>
                 </a:rPr>
                 <a:t>[CVR]</a:t>
               </a:r>
               <a:r>
-                <a:rPr lang="en-US" altLang="ko-KR" sz="1600" dirty="0">
-                  <a:latin typeface="KoPub돋움체 Light" panose="02020603020101020101" pitchFamily="18" charset="-127"/>
-                  <a:ea typeface="KoPub돋움체 Light" panose="02020603020101020101" pitchFamily="18" charset="-127"/>
+                <a:rPr lang="en-US" altLang="ko-KR" sz="1606" dirty="0">
+                  <a:latin typeface="KoPub돋움체 Medium" panose="02020603020101020101" pitchFamily="18" charset="-127"/>
+                  <a:ea typeface="KoPub돋움체 Medium" panose="02020603020101020101" pitchFamily="18" charset="-127"/>
                 </a:rPr>
                 <a:t> </a:t>
               </a:r>
               <a:r>
-                <a:rPr lang="ko-KR" altLang="en-US" sz="1600" dirty="0">
-                  <a:latin typeface="KoPub돋움체 Light" panose="02020603020101020101" pitchFamily="18" charset="-127"/>
-                  <a:ea typeface="KoPub돋움체 Light" panose="02020603020101020101" pitchFamily="18" charset="-127"/>
+                <a:rPr lang="ko-KR" altLang="en-US" sz="1606" dirty="0">
+                  <a:latin typeface="KoPub돋움체 Medium" panose="02020603020101020101" pitchFamily="18" charset="-127"/>
+                  <a:ea typeface="KoPub돋움체 Medium" panose="02020603020101020101" pitchFamily="18" charset="-127"/>
                 </a:rPr>
                 <a:t>위험 수치</a:t>
               </a:r>
-              <a:endParaRPr lang="en-US" altLang="ko-KR" sz="1600" dirty="0">
-                <a:latin typeface="KoPub돋움체 Light" panose="02020603020101020101" pitchFamily="18" charset="-127"/>
-                <a:ea typeface="KoPub돋움체 Light" panose="02020603020101020101" pitchFamily="18" charset="-127"/>
+              <a:endParaRPr lang="en-US" altLang="ko-KR" sz="1606" dirty="0">
+                <a:latin typeface="KoPub돋움체 Medium" panose="02020603020101020101" pitchFamily="18" charset="-127"/>
+                <a:ea typeface="KoPub돋움체 Medium" panose="02020603020101020101" pitchFamily="18" charset="-127"/>
               </a:endParaRPr>
             </a:p>
             <a:p>
               <a:r>
-                <a:rPr lang="en-US" altLang="ko-KR" sz="1600" b="1" dirty="0">
-                  <a:latin typeface="KoPub돋움체 Light" panose="02020603020101020101" pitchFamily="18" charset="-127"/>
-                  <a:ea typeface="KoPub돋움체 Light" panose="02020603020101020101" pitchFamily="18" charset="-127"/>
+                <a:rPr lang="en-US" altLang="ko-KR" sz="1606" b="1" dirty="0">
+                  <a:latin typeface="KoPub돋움체 Medium" panose="02020603020101020101" pitchFamily="18" charset="-127"/>
+                  <a:ea typeface="KoPub돋움체 Medium" panose="02020603020101020101" pitchFamily="18" charset="-127"/>
                 </a:rPr>
                 <a:t>[LIFE] </a:t>
               </a:r>
               <a:r>
-                <a:rPr lang="ko-KR" altLang="en-US" sz="1600" dirty="0">
-                  <a:latin typeface="KoPub돋움체 Light" panose="02020603020101020101" pitchFamily="18" charset="-127"/>
-                  <a:ea typeface="KoPub돋움체 Light" panose="02020603020101020101" pitchFamily="18" charset="-127"/>
+                <a:rPr lang="ko-KR" altLang="en-US" sz="1606" dirty="0">
+                  <a:latin typeface="KoPub돋움체 Medium" panose="02020603020101020101" pitchFamily="18" charset="-127"/>
+                  <a:ea typeface="KoPub돋움체 Medium" panose="02020603020101020101" pitchFamily="18" charset="-127"/>
                 </a:rPr>
                 <a:t>존엄</a:t>
               </a:r>
               <a:r>
-                <a:rPr lang="en-US" altLang="ko-KR" sz="1600" dirty="0">
-                  <a:latin typeface="KoPub돋움체 Light" panose="02020603020101020101" pitchFamily="18" charset="-127"/>
-                  <a:ea typeface="KoPub돋움체 Light" panose="02020603020101020101" pitchFamily="18" charset="-127"/>
+                <a:rPr lang="en-US" altLang="ko-KR" sz="1606" dirty="0">
+                  <a:latin typeface="KoPub돋움체 Medium" panose="02020603020101020101" pitchFamily="18" charset="-127"/>
+                  <a:ea typeface="KoPub돋움체 Medium" panose="02020603020101020101" pitchFamily="18" charset="-127"/>
                 </a:rPr>
                 <a:t>/</a:t>
               </a:r>
               <a:r>
-                <a:rPr lang="ko-KR" altLang="en-US" sz="1600" dirty="0">
-                  <a:latin typeface="KoPub돋움체 Light" panose="02020603020101020101" pitchFamily="18" charset="-127"/>
-                  <a:ea typeface="KoPub돋움체 Light" panose="02020603020101020101" pitchFamily="18" charset="-127"/>
+                <a:rPr lang="ko-KR" altLang="en-US" sz="1606" dirty="0">
+                  <a:latin typeface="KoPub돋움체 Medium" panose="02020603020101020101" pitchFamily="18" charset="-127"/>
+                  <a:ea typeface="KoPub돋움체 Medium" panose="02020603020101020101" pitchFamily="18" charset="-127"/>
                 </a:rPr>
                 <a:t>임종</a:t>
               </a:r>
-              <a:endParaRPr lang="en-US" altLang="ko-KR" sz="1600" dirty="0">
-                <a:latin typeface="KoPub돋움체 Light" panose="02020603020101020101" pitchFamily="18" charset="-127"/>
-                <a:ea typeface="KoPub돋움체 Light" panose="02020603020101020101" pitchFamily="18" charset="-127"/>
+              <a:endParaRPr lang="en-US" altLang="ko-KR" sz="1606" dirty="0">
+                <a:latin typeface="KoPub돋움체 Medium" panose="02020603020101020101" pitchFamily="18" charset="-127"/>
+                <a:ea typeface="KoPub돋움체 Medium" panose="02020603020101020101" pitchFamily="18" charset="-127"/>
               </a:endParaRPr>
             </a:p>
             <a:p>
               <a:r>
-                <a:rPr lang="en-US" altLang="ko-KR" sz="1600" b="1" dirty="0">
-                  <a:latin typeface="KoPub돋움체 Light" panose="02020603020101020101" pitchFamily="18" charset="-127"/>
-                  <a:ea typeface="KoPub돋움체 Light" panose="02020603020101020101" pitchFamily="18" charset="-127"/>
+                <a:rPr lang="en-US" altLang="ko-KR" sz="1606" b="1" dirty="0">
+                  <a:latin typeface="KoPub돋움체 Medium" panose="02020603020101020101" pitchFamily="18" charset="-127"/>
+                  <a:ea typeface="KoPub돋움체 Medium" panose="02020603020101020101" pitchFamily="18" charset="-127"/>
                 </a:rPr>
                 <a:t>[MEET] </a:t>
               </a:r>
               <a:r>
-                <a:rPr lang="ko-KR" altLang="en-US" sz="1600" dirty="0">
-                  <a:latin typeface="KoPub돋움체 Light" panose="02020603020101020101" pitchFamily="18" charset="-127"/>
-                  <a:ea typeface="KoPub돋움체 Light" panose="02020603020101020101" pitchFamily="18" charset="-127"/>
+                <a:rPr lang="ko-KR" altLang="en-US" sz="1606" dirty="0">
+                  <a:latin typeface="KoPub돋움체 Medium" panose="02020603020101020101" pitchFamily="18" charset="-127"/>
+                  <a:ea typeface="KoPub돋움체 Medium" panose="02020603020101020101" pitchFamily="18" charset="-127"/>
                 </a:rPr>
                 <a:t>보호자 면담</a:t>
               </a:r>
-              <a:endParaRPr lang="en-US" altLang="ko-KR" sz="1600" dirty="0">
-                <a:latin typeface="KoPub돋움체 Light" panose="02020603020101020101" pitchFamily="18" charset="-127"/>
-                <a:ea typeface="KoPub돋움체 Light" panose="02020603020101020101" pitchFamily="18" charset="-127"/>
+              <a:endParaRPr lang="en-US" altLang="ko-KR" sz="1606" dirty="0">
+                <a:latin typeface="KoPub돋움체 Medium" panose="02020603020101020101" pitchFamily="18" charset="-127"/>
+                <a:ea typeface="KoPub돋움체 Medium" panose="02020603020101020101" pitchFamily="18" charset="-127"/>
               </a:endParaRPr>
             </a:p>
             <a:p>
               <a:r>
-                <a:rPr lang="en-US" altLang="ko-KR" sz="1600" b="1" dirty="0">
-                  <a:latin typeface="KoPub돋움체 Light" panose="02020603020101020101" pitchFamily="18" charset="-127"/>
-                  <a:ea typeface="KoPub돋움체 Light" panose="02020603020101020101" pitchFamily="18" charset="-127"/>
+                <a:rPr lang="en-US" altLang="ko-KR" sz="1606" b="1" dirty="0">
+                  <a:latin typeface="KoPub돋움체 Medium" panose="02020603020101020101" pitchFamily="18" charset="-127"/>
+                  <a:ea typeface="KoPub돋움체 Medium" panose="02020603020101020101" pitchFamily="18" charset="-127"/>
                 </a:rPr>
                 <a:t>[MARROW] </a:t>
               </a:r>
               <a:r>
-                <a:rPr lang="ko-KR" altLang="en-US" sz="1600" dirty="0">
-                  <a:latin typeface="KoPub돋움체 Light" panose="02020603020101020101" pitchFamily="18" charset="-127"/>
-                  <a:ea typeface="KoPub돋움체 Light" panose="02020603020101020101" pitchFamily="18" charset="-127"/>
+                <a:rPr lang="ko-KR" altLang="en-US" sz="1606" dirty="0">
+                  <a:latin typeface="KoPub돋움체 Medium" panose="02020603020101020101" pitchFamily="18" charset="-127"/>
+                  <a:ea typeface="KoPub돋움체 Medium" panose="02020603020101020101" pitchFamily="18" charset="-127"/>
                 </a:rPr>
                 <a:t>골수 검사</a:t>
               </a:r>
-              <a:endParaRPr lang="en-US" altLang="ko-KR" sz="1600" dirty="0">
-                <a:latin typeface="KoPub돋움체 Light" panose="02020603020101020101" pitchFamily="18" charset="-127"/>
-                <a:ea typeface="KoPub돋움체 Light" panose="02020603020101020101" pitchFamily="18" charset="-127"/>
+              <a:endParaRPr lang="en-US" altLang="ko-KR" sz="1606" dirty="0">
+                <a:latin typeface="KoPub돋움체 Medium" panose="02020603020101020101" pitchFamily="18" charset="-127"/>
+                <a:ea typeface="KoPub돋움체 Medium" panose="02020603020101020101" pitchFamily="18" charset="-127"/>
               </a:endParaRPr>
             </a:p>
             <a:p>
               <a:r>
-                <a:rPr lang="en-US" altLang="ko-KR" sz="1600" b="1" dirty="0">
-                  <a:latin typeface="KoPub돋움체 Light" panose="02020603020101020101" pitchFamily="18" charset="-127"/>
-                  <a:ea typeface="KoPub돋움체 Light" panose="02020603020101020101" pitchFamily="18" charset="-127"/>
+                <a:rPr lang="en-US" altLang="ko-KR" sz="1606" b="1" dirty="0">
+                  <a:latin typeface="KoPub돋움체 Medium" panose="02020603020101020101" pitchFamily="18" charset="-127"/>
+                  <a:ea typeface="KoPub돋움체 Medium" panose="02020603020101020101" pitchFamily="18" charset="-127"/>
                 </a:rPr>
                 <a:t>[ISO] </a:t>
               </a:r>
               <a:r>
-                <a:rPr lang="ko-KR" altLang="en-US" sz="1600" dirty="0">
-                  <a:latin typeface="KoPub돋움체 Light" panose="02020603020101020101" pitchFamily="18" charset="-127"/>
-                  <a:ea typeface="KoPub돋움체 Light" panose="02020603020101020101" pitchFamily="18" charset="-127"/>
+                <a:rPr lang="ko-KR" altLang="en-US" sz="1606" dirty="0">
+                  <a:latin typeface="KoPub돋움체 Medium" panose="02020603020101020101" pitchFamily="18" charset="-127"/>
+                  <a:ea typeface="KoPub돋움체 Medium" panose="02020603020101020101" pitchFamily="18" charset="-127"/>
                 </a:rPr>
                 <a:t>격리 관리</a:t>
               </a:r>
-              <a:endParaRPr lang="en-US" altLang="ko-KR" sz="1600" dirty="0">
-                <a:latin typeface="KoPub돋움체 Light" panose="02020603020101020101" pitchFamily="18" charset="-127"/>
-                <a:ea typeface="KoPub돋움체 Light" panose="02020603020101020101" pitchFamily="18" charset="-127"/>
+              <a:endParaRPr lang="en-US" altLang="ko-KR" sz="1606" dirty="0">
+                <a:latin typeface="KoPub돋움체 Medium" panose="02020603020101020101" pitchFamily="18" charset="-127"/>
+                <a:ea typeface="KoPub돋움체 Medium" panose="02020603020101020101" pitchFamily="18" charset="-127"/>
               </a:endParaRPr>
             </a:p>
             <a:p>
               <a:r>
-                <a:rPr lang="en-US" altLang="ko-KR" sz="1600" b="1" dirty="0">
-                  <a:latin typeface="KoPub돋움체 Light" panose="02020603020101020101" pitchFamily="18" charset="-127"/>
-                  <a:ea typeface="KoPub돋움체 Light" panose="02020603020101020101" pitchFamily="18" charset="-127"/>
+                <a:rPr lang="en-US" altLang="ko-KR" sz="1606" b="1" dirty="0">
+                  <a:latin typeface="KoPub돋움체 Medium" panose="02020603020101020101" pitchFamily="18" charset="-127"/>
+                  <a:ea typeface="KoPub돋움체 Medium" panose="02020603020101020101" pitchFamily="18" charset="-127"/>
                 </a:rPr>
                 <a:t>[C-Status] </a:t>
               </a:r>
               <a:r>
-                <a:rPr lang="ko-KR" altLang="en-US" sz="1600" dirty="0">
-                  <a:latin typeface="KoPub돋움체 Light" panose="02020603020101020101" pitchFamily="18" charset="-127"/>
-                  <a:ea typeface="KoPub돋움체 Light" panose="02020603020101020101" pitchFamily="18" charset="-127"/>
+                <a:rPr lang="ko-KR" altLang="en-US" sz="1606" dirty="0">
+                  <a:latin typeface="KoPub돋움체 Medium" panose="02020603020101020101" pitchFamily="18" charset="-127"/>
+                  <a:ea typeface="KoPub돋움체 Medium" panose="02020603020101020101" pitchFamily="18" charset="-127"/>
                 </a:rPr>
                 <a:t>상태 악화</a:t>
               </a:r>
-              <a:endParaRPr lang="en-US" altLang="ko-KR" sz="1600" dirty="0">
-                <a:latin typeface="KoPub돋움체 Light" panose="02020603020101020101" pitchFamily="18" charset="-127"/>
-                <a:ea typeface="KoPub돋움체 Light" panose="02020603020101020101" pitchFamily="18" charset="-127"/>
+              <a:endParaRPr lang="en-US" altLang="ko-KR" sz="1606" dirty="0">
+                <a:latin typeface="KoPub돋움체 Medium" panose="02020603020101020101" pitchFamily="18" charset="-127"/>
+                <a:ea typeface="KoPub돋움체 Medium" panose="02020603020101020101" pitchFamily="18" charset="-127"/>
               </a:endParaRPr>
             </a:p>
             <a:p>
               <a:r>
-                <a:rPr lang="en-US" altLang="ko-KR" sz="1600" b="1" dirty="0">
-                  <a:latin typeface="KoPub돋움체 Light" panose="02020603020101020101" pitchFamily="18" charset="-127"/>
-                  <a:ea typeface="KoPub돋움체 Light" panose="02020603020101020101" pitchFamily="18" charset="-127"/>
+                <a:rPr lang="en-US" altLang="ko-KR" sz="1606" b="1" dirty="0">
+                  <a:latin typeface="KoPub돋움체 Medium" panose="02020603020101020101" pitchFamily="18" charset="-127"/>
+                  <a:ea typeface="KoPub돋움체 Medium" panose="02020603020101020101" pitchFamily="18" charset="-127"/>
                 </a:rPr>
                 <a:t>[PAIN] </a:t>
               </a:r>
               <a:r>
-                <a:rPr lang="ko-KR" altLang="en-US" sz="1600" dirty="0">
-                  <a:latin typeface="KoPub돋움체 Light" panose="02020603020101020101" pitchFamily="18" charset="-127"/>
-                  <a:ea typeface="KoPub돋움체 Light" panose="02020603020101020101" pitchFamily="18" charset="-127"/>
+                <a:rPr lang="ko-KR" altLang="en-US" sz="1606" dirty="0">
+                  <a:latin typeface="KoPub돋움체 Medium" panose="02020603020101020101" pitchFamily="18" charset="-127"/>
+                  <a:ea typeface="KoPub돋움체 Medium" panose="02020603020101020101" pitchFamily="18" charset="-127"/>
                 </a:rPr>
                 <a:t>통증 조절</a:t>
               </a:r>
-              <a:endParaRPr lang="en-US" altLang="ko-KR" sz="1600" dirty="0">
-                <a:latin typeface="KoPub돋움체 Light" panose="02020603020101020101" pitchFamily="18" charset="-127"/>
-                <a:ea typeface="KoPub돋움체 Light" panose="02020603020101020101" pitchFamily="18" charset="-127"/>
+              <a:endParaRPr lang="en-US" altLang="ko-KR" sz="1606" dirty="0">
+                <a:latin typeface="KoPub돋움체 Medium" panose="02020603020101020101" pitchFamily="18" charset="-127"/>
+                <a:ea typeface="KoPub돋움체 Medium" panose="02020603020101020101" pitchFamily="18" charset="-127"/>
               </a:endParaRPr>
             </a:p>
             <a:p>
               <a:r>
-                <a:rPr lang="en-US" altLang="ko-KR" sz="1600" b="1" dirty="0">
-                  <a:latin typeface="KoPub돋움체 Light" panose="02020603020101020101" pitchFamily="18" charset="-127"/>
-                  <a:ea typeface="KoPub돋움체 Light" panose="02020603020101020101" pitchFamily="18" charset="-127"/>
+                <a:rPr lang="en-US" altLang="ko-KR" sz="1606" b="1" dirty="0">
+                  <a:latin typeface="KoPub돋움체 Medium" panose="02020603020101020101" pitchFamily="18" charset="-127"/>
+                  <a:ea typeface="KoPub돋움체 Medium" panose="02020603020101020101" pitchFamily="18" charset="-127"/>
                 </a:rPr>
                 <a:t>[OUT] </a:t>
               </a:r>
               <a:r>
-                <a:rPr lang="ko-KR" altLang="en-US" sz="1600" dirty="0">
-                  <a:latin typeface="KoPub돋움체 Light" panose="02020603020101020101" pitchFamily="18" charset="-127"/>
-                  <a:ea typeface="KoPub돋움체 Light" panose="02020603020101020101" pitchFamily="18" charset="-127"/>
+                <a:rPr lang="ko-KR" altLang="en-US" sz="1606" dirty="0">
+                  <a:latin typeface="KoPub돋움체 Medium" panose="02020603020101020101" pitchFamily="18" charset="-127"/>
+                  <a:ea typeface="KoPub돋움체 Medium" panose="02020603020101020101" pitchFamily="18" charset="-127"/>
                 </a:rPr>
                 <a:t>퇴원</a:t>
               </a:r>
               <a:r>
-                <a:rPr lang="en-US" altLang="ko-KR" sz="1600" dirty="0">
-                  <a:latin typeface="KoPub돋움체 Light" panose="02020603020101020101" pitchFamily="18" charset="-127"/>
-                  <a:ea typeface="KoPub돋움체 Light" panose="02020603020101020101" pitchFamily="18" charset="-127"/>
+                <a:rPr lang="en-US" altLang="ko-KR" sz="1606" dirty="0">
+                  <a:latin typeface="KoPub돋움체 Medium" panose="02020603020101020101" pitchFamily="18" charset="-127"/>
+                  <a:ea typeface="KoPub돋움체 Medium" panose="02020603020101020101" pitchFamily="18" charset="-127"/>
                 </a:rPr>
                 <a:t>/</a:t>
               </a:r>
               <a:r>
-                <a:rPr lang="ko-KR" altLang="en-US" sz="1600" dirty="0">
-                  <a:latin typeface="KoPub돋움체 Light" panose="02020603020101020101" pitchFamily="18" charset="-127"/>
-                  <a:ea typeface="KoPub돋움체 Light" panose="02020603020101020101" pitchFamily="18" charset="-127"/>
+                <a:rPr lang="ko-KR" altLang="en-US" sz="1606" dirty="0">
+                  <a:latin typeface="KoPub돋움체 Medium" panose="02020603020101020101" pitchFamily="18" charset="-127"/>
+                  <a:ea typeface="KoPub돋움체 Medium" panose="02020603020101020101" pitchFamily="18" charset="-127"/>
                 </a:rPr>
                 <a:t>전과</a:t>
               </a:r>
               <a:r>
-                <a:rPr lang="en-US" altLang="ko-KR" sz="1600" dirty="0">
-                  <a:latin typeface="KoPub돋움체 Light" panose="02020603020101020101" pitchFamily="18" charset="-127"/>
-                  <a:ea typeface="KoPub돋움체 Light" panose="02020603020101020101" pitchFamily="18" charset="-127"/>
+                <a:rPr lang="en-US" altLang="ko-KR" sz="1606" dirty="0">
+                  <a:latin typeface="KoPub돋움체 Medium" panose="02020603020101020101" pitchFamily="18" charset="-127"/>
+                  <a:ea typeface="KoPub돋움체 Medium" panose="02020603020101020101" pitchFamily="18" charset="-127"/>
                 </a:rPr>
                 <a:t>/</a:t>
               </a:r>
               <a:r>
-                <a:rPr lang="ko-KR" altLang="en-US" sz="1600" dirty="0">
-                  <a:latin typeface="KoPub돋움체 Light" panose="02020603020101020101" pitchFamily="18" charset="-127"/>
-                  <a:ea typeface="KoPub돋움체 Light" panose="02020603020101020101" pitchFamily="18" charset="-127"/>
+                <a:rPr lang="ko-KR" altLang="en-US" sz="1606" dirty="0">
+                  <a:latin typeface="KoPub돋움체 Medium" panose="02020603020101020101" pitchFamily="18" charset="-127"/>
+                  <a:ea typeface="KoPub돋움체 Medium" panose="02020603020101020101" pitchFamily="18" charset="-127"/>
                 </a:rPr>
                 <a:t>사망</a:t>
               </a:r>
-              <a:endParaRPr lang="en-US" altLang="ko-KR" sz="1600" dirty="0">
-                <a:latin typeface="KoPub돋움체 Light" panose="02020603020101020101" pitchFamily="18" charset="-127"/>
-                <a:ea typeface="KoPub돋움체 Light" panose="02020603020101020101" pitchFamily="18" charset="-127"/>
+              <a:endParaRPr lang="en-US" altLang="ko-KR" sz="1606" dirty="0">
+                <a:latin typeface="KoPub돋움체 Medium" panose="02020603020101020101" pitchFamily="18" charset="-127"/>
+                <a:ea typeface="KoPub돋움체 Medium" panose="02020603020101020101" pitchFamily="18" charset="-127"/>
               </a:endParaRPr>
             </a:p>
           </p:txBody>
@@ -12377,7 +12437,7 @@
           <p:cNvPr id="2" name="TextBox 1">
             <a:extLst>
               <a:ext uri="{FF2B5EF4-FFF2-40B4-BE49-F238E27FC236}">
-                <a16:creationId xmlns:a16="http://schemas.microsoft.com/office/drawing/2014/main" id="{5C7E232E-6B0D-4C30-967C-1D82B967BC1B}"/>
+                <a16:creationId xmlns:a16="http://schemas.microsoft.com/office/drawing/2014/main" id="{E64B3DFA-22B4-73BA-A5AD-21D83B83507E}"/>
               </a:ext>
             </a:extLst>
           </p:cNvPr>
@@ -12386,8 +12446,8 @@
         </p:nvSpPr>
         <p:spPr>
           <a:xfrm>
-            <a:off x="589442" y="881803"/>
-            <a:ext cx="2564384" cy="400110"/>
+            <a:off x="591795" y="875055"/>
+            <a:ext cx="2574624" cy="461665"/>
           </a:xfrm>
           <a:prstGeom prst="rect">
             <a:avLst/>
@@ -12402,29 +12462,29 @@
           <a:p>
             <a:pPr algn="ctr"/>
             <a:r>
-              <a:rPr lang="ko-KR" altLang="en-US" sz="2000" b="1" dirty="0">
-                <a:latin typeface="KoPub돋움체 Light" panose="02020603020101020101" pitchFamily="18" charset="-127"/>
-                <a:ea typeface="KoPub돋움체 Light" panose="02020603020101020101" pitchFamily="18" charset="-127"/>
+              <a:rPr lang="ko-KR" altLang="en-US" sz="2400" b="1" dirty="0">
+                <a:latin typeface="KoPub돋움체 Medium" panose="02020603020101020101" pitchFamily="18" charset="-127"/>
+                <a:ea typeface="KoPub돋움체 Medium" panose="02020603020101020101" pitchFamily="18" charset="-127"/>
               </a:rPr>
               <a:t>하이패스 태그 </a:t>
             </a:r>
             <a:r>
-              <a:rPr lang="en-US" altLang="ko-KR" sz="2000" b="1" dirty="0">
-                <a:latin typeface="KoPub돋움체 Light" panose="02020603020101020101" pitchFamily="18" charset="-127"/>
-                <a:ea typeface="KoPub돋움체 Light" panose="02020603020101020101" pitchFamily="18" charset="-127"/>
+              <a:rPr lang="en-US" altLang="ko-KR" sz="2400" b="1" dirty="0">
+                <a:latin typeface="KoPub돋움체 Medium" panose="02020603020101020101" pitchFamily="18" charset="-127"/>
+                <a:ea typeface="KoPub돋움체 Medium" panose="02020603020101020101" pitchFamily="18" charset="-127"/>
               </a:rPr>
               <a:t>10</a:t>
             </a:r>
             <a:r>
-              <a:rPr lang="ko-KR" altLang="en-US" sz="2000" b="1" dirty="0">
-                <a:latin typeface="KoPub돋움체 Light" panose="02020603020101020101" pitchFamily="18" charset="-127"/>
-                <a:ea typeface="KoPub돋움체 Light" panose="02020603020101020101" pitchFamily="18" charset="-127"/>
+              <a:rPr lang="ko-KR" altLang="en-US" sz="2400" b="1" dirty="0">
+                <a:latin typeface="KoPub돋움체 Medium" panose="02020603020101020101" pitchFamily="18" charset="-127"/>
+                <a:ea typeface="KoPub돋움체 Medium" panose="02020603020101020101" pitchFamily="18" charset="-127"/>
               </a:rPr>
               <a:t>종</a:t>
             </a:r>
-            <a:endParaRPr lang="en-US" altLang="ko-KR" sz="2000" b="1" dirty="0">
-              <a:latin typeface="KoPub돋움체 Light" panose="02020603020101020101" pitchFamily="18" charset="-127"/>
-              <a:ea typeface="KoPub돋움체 Light" panose="02020603020101020101" pitchFamily="18" charset="-127"/>
+            <a:endParaRPr lang="en-US" altLang="ko-KR" sz="2400" b="1" dirty="0">
+              <a:latin typeface="KoPub돋움체 Medium" panose="02020603020101020101" pitchFamily="18" charset="-127"/>
+              <a:ea typeface="KoPub돋움체 Medium" panose="02020603020101020101" pitchFamily="18" charset="-127"/>
             </a:endParaRPr>
           </a:p>
         </p:txBody>
@@ -12434,7 +12494,7 @@
           <p:cNvPr id="8" name="TextBox 7">
             <a:extLst>
               <a:ext uri="{FF2B5EF4-FFF2-40B4-BE49-F238E27FC236}">
-                <a16:creationId xmlns:a16="http://schemas.microsoft.com/office/drawing/2014/main" id="{2D7FF5CD-F432-4D5C-924D-9C31E13C1988}"/>
+                <a16:creationId xmlns:a16="http://schemas.microsoft.com/office/drawing/2014/main" id="{D0A6066B-7E00-6978-5B37-3811364670A0}"/>
               </a:ext>
             </a:extLst>
           </p:cNvPr>
@@ -12443,8 +12503,8 @@
         </p:nvSpPr>
         <p:spPr>
           <a:xfrm>
-            <a:off x="5281613" y="1573045"/>
-            <a:ext cx="2843725" cy="584775"/>
+            <a:off x="5193921" y="1509776"/>
+            <a:ext cx="2855080" cy="707886"/>
           </a:xfrm>
           <a:prstGeom prst="rect">
             <a:avLst/>
@@ -12458,43 +12518,43 @@
           <a:lstStyle/>
           <a:p>
             <a:r>
-              <a:rPr lang="ko-KR" altLang="en-US" sz="1600" dirty="0">
-                <a:latin typeface="KoPub돋움체 Light" panose="02020603020101020101" pitchFamily="18" charset="-127"/>
-                <a:ea typeface="KoPub돋움체 Light" panose="02020603020101020101" pitchFamily="18" charset="-127"/>
+              <a:rPr lang="ko-KR" altLang="en-US" sz="2000" b="1" dirty="0">
+                <a:latin typeface="KoPub돋움체 Medium" panose="02020603020101020101" pitchFamily="18" charset="-127"/>
+                <a:ea typeface="KoPub돋움체 Medium" panose="02020603020101020101" pitchFamily="18" charset="-127"/>
               </a:rPr>
               <a:t>근무 교대 시 미완료 건에 </a:t>
             </a:r>
             <a:r>
-              <a:rPr lang="en-US" altLang="ko-KR" sz="1600" dirty="0">
-                <a:latin typeface="KoPub돋움체 Light" panose="02020603020101020101" pitchFamily="18" charset="-127"/>
-                <a:ea typeface="KoPub돋움체 Light" panose="02020603020101020101" pitchFamily="18" charset="-127"/>
+              <a:rPr lang="en-US" altLang="ko-KR" sz="2000" b="1" dirty="0">
+                <a:latin typeface="KoPub돋움체 Medium" panose="02020603020101020101" pitchFamily="18" charset="-127"/>
+                <a:ea typeface="KoPub돋움체 Medium" panose="02020603020101020101" pitchFamily="18" charset="-127"/>
               </a:rPr>
               <a:t>'</a:t>
             </a:r>
             <a:r>
-              <a:rPr lang="ko-KR" altLang="en-US" sz="1600" dirty="0">
-                <a:latin typeface="KoPub돋움체 Light" panose="02020603020101020101" pitchFamily="18" charset="-127"/>
-                <a:ea typeface="KoPub돋움체 Light" panose="02020603020101020101" pitchFamily="18" charset="-127"/>
+              <a:rPr lang="ko-KR" altLang="en-US" sz="2000" b="1" dirty="0">
+                <a:latin typeface="KoPub돋움체 Medium" panose="02020603020101020101" pitchFamily="18" charset="-127"/>
+                <a:ea typeface="KoPub돋움체 Medium" panose="02020603020101020101" pitchFamily="18" charset="-127"/>
               </a:rPr>
               <a:t>답장</a:t>
             </a:r>
             <a:r>
-              <a:rPr lang="en-US" altLang="ko-KR" sz="1600" dirty="0">
-                <a:latin typeface="KoPub돋움체 Light" panose="02020603020101020101" pitchFamily="18" charset="-127"/>
-                <a:ea typeface="KoPub돋움체 Light" panose="02020603020101020101" pitchFamily="18" charset="-127"/>
+              <a:rPr lang="en-US" altLang="ko-KR" sz="2000" b="1" dirty="0">
+                <a:latin typeface="KoPub돋움체 Medium" panose="02020603020101020101" pitchFamily="18" charset="-127"/>
+                <a:ea typeface="KoPub돋움체 Medium" panose="02020603020101020101" pitchFamily="18" charset="-127"/>
               </a:rPr>
               <a:t>'</a:t>
             </a:r>
             <a:r>
-              <a:rPr lang="ko-KR" altLang="en-US" sz="1600" dirty="0">
-                <a:latin typeface="KoPub돋움체 Light" panose="02020603020101020101" pitchFamily="18" charset="-127"/>
-                <a:ea typeface="KoPub돋움체 Light" panose="02020603020101020101" pitchFamily="18" charset="-127"/>
+              <a:rPr lang="ko-KR" altLang="en-US" sz="2000" b="1" dirty="0">
+                <a:latin typeface="KoPub돋움체 Medium" panose="02020603020101020101" pitchFamily="18" charset="-127"/>
+                <a:ea typeface="KoPub돋움체 Medium" panose="02020603020101020101" pitchFamily="18" charset="-127"/>
               </a:rPr>
               <a:t>으로 인계 기록</a:t>
             </a:r>
-            <a:endParaRPr lang="en-US" altLang="ko-KR" sz="1600" dirty="0">
-              <a:latin typeface="KoPub돋움체 Light" panose="02020603020101020101" pitchFamily="18" charset="-127"/>
-              <a:ea typeface="KoPub돋움체 Light" panose="02020603020101020101" pitchFamily="18" charset="-127"/>
+            <a:endParaRPr lang="en-US" altLang="ko-KR" sz="2000" b="1" dirty="0">
+              <a:latin typeface="KoPub돋움체 Medium" panose="02020603020101020101" pitchFamily="18" charset="-127"/>
+              <a:ea typeface="KoPub돋움체 Medium" panose="02020603020101020101" pitchFamily="18" charset="-127"/>
             </a:endParaRPr>
           </a:p>
         </p:txBody>
@@ -12504,7 +12564,7 @@
           <p:cNvPr id="9" name="사각형: 둥근 모서리 8">
             <a:extLst>
               <a:ext uri="{FF2B5EF4-FFF2-40B4-BE49-F238E27FC236}">
-                <a16:creationId xmlns:a16="http://schemas.microsoft.com/office/drawing/2014/main" id="{81771CDF-B55B-4421-928F-D1D7D43CFAC8}"/>
+                <a16:creationId xmlns:a16="http://schemas.microsoft.com/office/drawing/2014/main" id="{4D929AB7-6770-3E74-53D7-2CB50979F96F}"/>
               </a:ext>
             </a:extLst>
           </p:cNvPr>
@@ -12513,8 +12573,8 @@
         </p:nvSpPr>
         <p:spPr>
           <a:xfrm>
-            <a:off x="5067299" y="1396134"/>
-            <a:ext cx="3484563" cy="959835"/>
+            <a:off x="5087533" y="1391440"/>
+            <a:ext cx="3498477" cy="963668"/>
           </a:xfrm>
           <a:prstGeom prst="roundRect">
             <a:avLst>
@@ -12551,9 +12611,9 @@
           <a:lstStyle/>
           <a:p>
             <a:pPr algn="ctr"/>
-            <a:endParaRPr lang="ko-KR" altLang="en-US" sz="5080">
+            <a:endParaRPr lang="ko-KR" altLang="en-US" sz="5100">
               <a:latin typeface="KoPub돋움체 Medium" panose="02020603020101020101" pitchFamily="18" charset="-127"/>
-              <a:ea typeface="KoPub돋움체 Light" panose="02020603020101020101"/>
+              <a:ea typeface="KoPub돋움체 Medium" panose="02020603020101020101" pitchFamily="18" charset="-127"/>
             </a:endParaRPr>
           </a:p>
         </p:txBody>
@@ -12563,7 +12623,7 @@
           <p:cNvPr id="11" name="사각형: 둥근 모서리 10">
             <a:extLst>
               <a:ext uri="{FF2B5EF4-FFF2-40B4-BE49-F238E27FC236}">
-                <a16:creationId xmlns:a16="http://schemas.microsoft.com/office/drawing/2014/main" id="{A9BD57B0-0CB8-437B-91FF-358B1B271C52}"/>
+                <a16:creationId xmlns:a16="http://schemas.microsoft.com/office/drawing/2014/main" id="{67542B2E-5C05-46B6-9B9E-14A122ED54F4}"/>
               </a:ext>
             </a:extLst>
           </p:cNvPr>
@@ -12572,8 +12632,8 @@
         </p:nvSpPr>
         <p:spPr>
           <a:xfrm>
-            <a:off x="3204625" y="1401423"/>
-            <a:ext cx="1811875" cy="954545"/>
+            <a:off x="3217421" y="1396750"/>
+            <a:ext cx="1819110" cy="958357"/>
           </a:xfrm>
           <a:prstGeom prst="roundRect">
             <a:avLst>
@@ -12611,9 +12671,9 @@
           <a:lstStyle/>
           <a:p>
             <a:pPr algn="ctr"/>
-            <a:endParaRPr lang="ko-KR" altLang="en-US" sz="5080">
+            <a:endParaRPr lang="ko-KR" altLang="en-US" sz="5100">
               <a:latin typeface="KoPub돋움체 Medium" panose="02020603020101020101" pitchFamily="18" charset="-127"/>
-              <a:ea typeface="KoPub돋움체 Light" panose="02020603020101020101"/>
+              <a:ea typeface="KoPub돋움체 Medium" panose="02020603020101020101" pitchFamily="18" charset="-127"/>
             </a:endParaRPr>
           </a:p>
         </p:txBody>
@@ -12623,7 +12683,7 @@
           <p:cNvPr id="12" name="TextBox 11">
             <a:extLst>
               <a:ext uri="{FF2B5EF4-FFF2-40B4-BE49-F238E27FC236}">
-                <a16:creationId xmlns:a16="http://schemas.microsoft.com/office/drawing/2014/main" id="{3717CE27-01D2-4557-B697-30F1806A81B3}"/>
+                <a16:creationId xmlns:a16="http://schemas.microsoft.com/office/drawing/2014/main" id="{DF815E68-4542-9C1C-00A2-69876DCCF04F}"/>
               </a:ext>
             </a:extLst>
           </p:cNvPr>
@@ -12632,8 +12692,8 @@
         </p:nvSpPr>
         <p:spPr>
           <a:xfrm>
-            <a:off x="3573396" y="1682514"/>
-            <a:ext cx="1074332" cy="338554"/>
+            <a:off x="3501645" y="1656841"/>
+            <a:ext cx="1250663" cy="400110"/>
           </a:xfrm>
           <a:prstGeom prst="rect">
             <a:avLst/>
@@ -12648,9 +12708,9 @@
           <a:p>
             <a:pPr algn="ctr"/>
             <a:r>
-              <a:rPr lang="en-US" altLang="ko-KR" sz="1600" b="1" dirty="0">
-                <a:latin typeface="KoPub돋움체 Light" panose="02020603020101020101" pitchFamily="18" charset="-127"/>
-                <a:ea typeface="KoPub돋움체 Light" panose="02020603020101020101" pitchFamily="18" charset="-127"/>
+              <a:rPr lang="en-US" altLang="ko-KR" sz="2000" b="1" dirty="0">
+                <a:latin typeface="KoPub돋움체 Medium" panose="02020603020101020101" pitchFamily="18" charset="-127"/>
+                <a:ea typeface="KoPub돋움체 Medium" panose="02020603020101020101" pitchFamily="18" charset="-127"/>
               </a:rPr>
               <a:t>[IN-OUT]</a:t>
             </a:r>
@@ -12662,7 +12722,7 @@
           <p:cNvPr id="4" name="직사각형 3">
             <a:extLst>
               <a:ext uri="{FF2B5EF4-FFF2-40B4-BE49-F238E27FC236}">
-                <a16:creationId xmlns:a16="http://schemas.microsoft.com/office/drawing/2014/main" id="{3306E135-233E-4999-A710-7E3C99EFDAEF}"/>
+                <a16:creationId xmlns:a16="http://schemas.microsoft.com/office/drawing/2014/main" id="{EE29C3A7-2D4A-A945-2F68-FF5E1200997F}"/>
               </a:ext>
             </a:extLst>
           </p:cNvPr>
@@ -12671,8 +12731,8 @@
         </p:nvSpPr>
         <p:spPr>
           <a:xfrm>
-            <a:off x="4362454" y="860517"/>
-            <a:ext cx="2762295" cy="400110"/>
+            <a:off x="4379873" y="853684"/>
+            <a:ext cx="2863284" cy="461665"/>
           </a:xfrm>
           <a:prstGeom prst="rect">
             <a:avLst/>
@@ -12685,15 +12745,15 @@
           <a:lstStyle/>
           <a:p>
             <a:r>
-              <a:rPr lang="ko-KR" altLang="en-US" sz="2000" b="1" dirty="0">
-                <a:latin typeface="KoPub돋움체 Light" panose="02020603020101020101" pitchFamily="18" charset="-127"/>
-                <a:ea typeface="KoPub돋움체 Light" panose="02020603020101020101" pitchFamily="18" charset="-127"/>
+              <a:rPr lang="ko-KR" altLang="en-US" sz="2400" b="1" dirty="0">
+                <a:latin typeface="KoPub돋움체 Medium" panose="02020603020101020101" pitchFamily="18" charset="-127"/>
+                <a:ea typeface="KoPub돋움체 Medium" panose="02020603020101020101" pitchFamily="18" charset="-127"/>
               </a:rPr>
               <a:t>나를 지키는 방어 기록</a:t>
             </a:r>
-            <a:endParaRPr lang="en-US" altLang="ko-KR" sz="2000" b="1" dirty="0">
-              <a:latin typeface="KoPub돋움체 Light" panose="02020603020101020101" pitchFamily="18" charset="-127"/>
-              <a:ea typeface="KoPub돋움체 Light" panose="02020603020101020101" pitchFamily="18" charset="-127"/>
+            <a:endParaRPr lang="en-US" altLang="ko-KR" sz="2400" b="1" dirty="0">
+              <a:latin typeface="KoPub돋움체 Medium" panose="02020603020101020101" pitchFamily="18" charset="-127"/>
+              <a:ea typeface="KoPub돋움체 Medium" panose="02020603020101020101" pitchFamily="18" charset="-127"/>
             </a:endParaRPr>
           </a:p>
         </p:txBody>
@@ -12703,7 +12763,7 @@
           <p:cNvPr id="27" name="TextBox 26">
             <a:extLst>
               <a:ext uri="{FF2B5EF4-FFF2-40B4-BE49-F238E27FC236}">
-                <a16:creationId xmlns:a16="http://schemas.microsoft.com/office/drawing/2014/main" id="{6950ADB8-A755-4C4B-8102-F58976B5B6D4}"/>
+                <a16:creationId xmlns:a16="http://schemas.microsoft.com/office/drawing/2014/main" id="{4A1F3FC8-25B0-DEF6-CFEC-1DDA78BE8A95}"/>
               </a:ext>
             </a:extLst>
           </p:cNvPr>
@@ -12712,8 +12772,8 @@
         </p:nvSpPr>
         <p:spPr>
           <a:xfrm>
-            <a:off x="5281613" y="3503834"/>
-            <a:ext cx="3119437" cy="584775"/>
+            <a:off x="5193921" y="3448274"/>
+            <a:ext cx="3443091" cy="707886"/>
           </a:xfrm>
           <a:prstGeom prst="rect">
             <a:avLst/>
@@ -12727,92 +12787,92 @@
           <a:lstStyle/>
           <a:p>
             <a:r>
-              <a:rPr lang="en-US" altLang="ko-KR" sz="1600" dirty="0">
-                <a:latin typeface="KoPub돋움체 Light" panose="02020603020101020101" pitchFamily="18" charset="-127"/>
-                <a:ea typeface="KoPub돋움체 Light" panose="02020603020101020101" pitchFamily="18" charset="-127"/>
+              <a:rPr lang="en-US" altLang="ko-KR" sz="2000" b="1" dirty="0">
+                <a:latin typeface="KoPub돋움체 Medium" panose="02020603020101020101" pitchFamily="18" charset="-127"/>
+                <a:ea typeface="KoPub돋움체 Medium" panose="02020603020101020101" pitchFamily="18" charset="-127"/>
               </a:rPr>
               <a:t>PA </a:t>
             </a:r>
             <a:r>
-              <a:rPr lang="ko-KR" altLang="en-US" sz="1600" dirty="0">
-                <a:latin typeface="KoPub돋움체 Light" panose="02020603020101020101" pitchFamily="18" charset="-127"/>
-                <a:ea typeface="KoPub돋움체 Light" panose="02020603020101020101" pitchFamily="18" charset="-127"/>
+              <a:rPr lang="ko-KR" altLang="en-US" sz="2000" b="1" dirty="0">
+                <a:latin typeface="KoPub돋움체 Medium" panose="02020603020101020101" pitchFamily="18" charset="-127"/>
+                <a:ea typeface="KoPub돋움체 Medium" panose="02020603020101020101" pitchFamily="18" charset="-127"/>
               </a:rPr>
               <a:t>지연 사유</a:t>
             </a:r>
             <a:r>
-              <a:rPr lang="en-US" altLang="ko-KR" sz="1600" dirty="0">
-                <a:latin typeface="KoPub돋움체 Light" panose="02020603020101020101" pitchFamily="18" charset="-127"/>
-                <a:ea typeface="KoPub돋움체 Light" panose="02020603020101020101" pitchFamily="18" charset="-127"/>
+              <a:rPr lang="en-US" altLang="ko-KR" sz="2000" b="1" dirty="0">
+                <a:latin typeface="KoPub돋움체 Medium" panose="02020603020101020101" pitchFamily="18" charset="-127"/>
+                <a:ea typeface="KoPub돋움체 Medium" panose="02020603020101020101" pitchFamily="18" charset="-127"/>
               </a:rPr>
               <a:t>(</a:t>
             </a:r>
             <a:r>
-              <a:rPr lang="ko-KR" altLang="en-US" sz="1600" dirty="0">
-                <a:latin typeface="KoPub돋움체 Light" panose="02020603020101020101" pitchFamily="18" charset="-127"/>
-                <a:ea typeface="KoPub돋움체 Light" panose="02020603020101020101" pitchFamily="18" charset="-127"/>
+              <a:rPr lang="ko-KR" altLang="en-US" sz="2000" b="1" dirty="0">
+                <a:latin typeface="KoPub돋움체 Medium" panose="02020603020101020101" pitchFamily="18" charset="-127"/>
+                <a:ea typeface="KoPub돋움체 Medium" panose="02020603020101020101" pitchFamily="18" charset="-127"/>
               </a:rPr>
               <a:t>응급</a:t>
             </a:r>
             <a:r>
-              <a:rPr lang="en-US" altLang="ko-KR" sz="1600" dirty="0">
-                <a:latin typeface="KoPub돋움체 Light" panose="02020603020101020101" pitchFamily="18" charset="-127"/>
-                <a:ea typeface="KoPub돋움체 Light" panose="02020603020101020101" pitchFamily="18" charset="-127"/>
+              <a:rPr lang="en-US" altLang="ko-KR" sz="2000" b="1" dirty="0">
+                <a:latin typeface="KoPub돋움체 Medium" panose="02020603020101020101" pitchFamily="18" charset="-127"/>
+                <a:ea typeface="KoPub돋움체 Medium" panose="02020603020101020101" pitchFamily="18" charset="-127"/>
               </a:rPr>
               <a:t>·</a:t>
             </a:r>
             <a:r>
-              <a:rPr lang="ko-KR" altLang="en-US" sz="1600" dirty="0">
-                <a:latin typeface="KoPub돋움체 Light" panose="02020603020101020101" pitchFamily="18" charset="-127"/>
-                <a:ea typeface="KoPub돋움체 Light" panose="02020603020101020101" pitchFamily="18" charset="-127"/>
+              <a:rPr lang="ko-KR" altLang="en-US" sz="2000" b="1" dirty="0">
+                <a:latin typeface="KoPub돋움체 Medium" panose="02020603020101020101" pitchFamily="18" charset="-127"/>
+                <a:ea typeface="KoPub돋움체 Medium" panose="02020603020101020101" pitchFamily="18" charset="-127"/>
               </a:rPr>
               <a:t>수술</a:t>
             </a:r>
             <a:r>
-              <a:rPr lang="en-US" altLang="ko-KR" sz="1600" dirty="0">
-                <a:latin typeface="KoPub돋움체 Light" panose="02020603020101020101" pitchFamily="18" charset="-127"/>
-                <a:ea typeface="KoPub돋움체 Light" panose="02020603020101020101" pitchFamily="18" charset="-127"/>
+              <a:rPr lang="en-US" altLang="ko-KR" sz="2000" b="1" dirty="0">
+                <a:latin typeface="KoPub돋움체 Medium" panose="02020603020101020101" pitchFamily="18" charset="-127"/>
+                <a:ea typeface="KoPub돋움체 Medium" panose="02020603020101020101" pitchFamily="18" charset="-127"/>
               </a:rPr>
               <a:t>·</a:t>
             </a:r>
             <a:r>
-              <a:rPr lang="ko-KR" altLang="en-US" sz="1600" dirty="0">
-                <a:latin typeface="KoPub돋움체 Light" panose="02020603020101020101" pitchFamily="18" charset="-127"/>
-                <a:ea typeface="KoPub돋움체 Light" panose="02020603020101020101" pitchFamily="18" charset="-127"/>
+              <a:rPr lang="ko-KR" altLang="en-US" sz="2000" b="1" dirty="0">
+                <a:latin typeface="KoPub돋움체 Medium" panose="02020603020101020101" pitchFamily="18" charset="-127"/>
+                <a:ea typeface="KoPub돋움체 Medium" panose="02020603020101020101" pitchFamily="18" charset="-127"/>
               </a:rPr>
               <a:t>대기</a:t>
             </a:r>
             <a:r>
-              <a:rPr lang="en-US" altLang="ko-KR" sz="1600" dirty="0">
-                <a:latin typeface="KoPub돋움체 Light" panose="02020603020101020101" pitchFamily="18" charset="-127"/>
-                <a:ea typeface="KoPub돋움체 Light" panose="02020603020101020101" pitchFamily="18" charset="-127"/>
+              <a:rPr lang="en-US" altLang="ko-KR" sz="2000" b="1" dirty="0">
+                <a:latin typeface="KoPub돋움체 Medium" panose="02020603020101020101" pitchFamily="18" charset="-127"/>
+                <a:ea typeface="KoPub돋움체 Medium" panose="02020603020101020101" pitchFamily="18" charset="-127"/>
               </a:rPr>
               <a:t>·</a:t>
             </a:r>
             <a:r>
-              <a:rPr lang="ko-KR" altLang="en-US" sz="1600" dirty="0" err="1">
-                <a:latin typeface="KoPub돋움체 Light" panose="02020603020101020101" pitchFamily="18" charset="-127"/>
-                <a:ea typeface="KoPub돋움체 Light" panose="02020603020101020101" pitchFamily="18" charset="-127"/>
+              <a:rPr lang="ko-KR" altLang="en-US" sz="2000" b="1" dirty="0" err="1">
+                <a:latin typeface="KoPub돋움체 Medium" panose="02020603020101020101" pitchFamily="18" charset="-127"/>
+                <a:ea typeface="KoPub돋움체 Medium" panose="02020603020101020101" pitchFamily="18" charset="-127"/>
               </a:rPr>
               <a:t>컨펌</a:t>
             </a:r>
             <a:r>
-              <a:rPr lang="en-US" altLang="ko-KR" sz="1600" dirty="0">
-                <a:latin typeface="KoPub돋움체 Light" panose="02020603020101020101" pitchFamily="18" charset="-127"/>
-                <a:ea typeface="KoPub돋움체 Light" panose="02020603020101020101" pitchFamily="18" charset="-127"/>
+              <a:rPr lang="en-US" altLang="ko-KR" sz="2000" b="1" dirty="0">
+                <a:latin typeface="KoPub돋움체 Medium" panose="02020603020101020101" pitchFamily="18" charset="-127"/>
+                <a:ea typeface="KoPub돋움체 Medium" panose="02020603020101020101" pitchFamily="18" charset="-127"/>
               </a:rPr>
               <a:t>) </a:t>
             </a:r>
             <a:r>
-              <a:rPr lang="ko-KR" altLang="en-US" sz="1600" dirty="0">
-                <a:latin typeface="KoPub돋움체 Light" panose="02020603020101020101" pitchFamily="18" charset="-127"/>
-                <a:ea typeface="KoPub돋움체 Light" panose="02020603020101020101" pitchFamily="18" charset="-127"/>
+              <a:rPr lang="ko-KR" altLang="en-US" sz="2000" b="1" dirty="0">
+                <a:latin typeface="KoPub돋움체 Medium" panose="02020603020101020101" pitchFamily="18" charset="-127"/>
+                <a:ea typeface="KoPub돋움체 Medium" panose="02020603020101020101" pitchFamily="18" charset="-127"/>
               </a:rPr>
               <a:t>명시</a:t>
             </a:r>
-            <a:endParaRPr lang="en-US" altLang="ko-KR" sz="1600" dirty="0">
-              <a:latin typeface="KoPub돋움체 Light" panose="02020603020101020101" pitchFamily="18" charset="-127"/>
-              <a:ea typeface="KoPub돋움체 Light" panose="02020603020101020101" pitchFamily="18" charset="-127"/>
+            <a:endParaRPr lang="en-US" altLang="ko-KR" sz="2000" b="1" dirty="0">
+              <a:latin typeface="KoPub돋움체 Medium" panose="02020603020101020101" pitchFamily="18" charset="-127"/>
+              <a:ea typeface="KoPub돋움체 Medium" panose="02020603020101020101" pitchFamily="18" charset="-127"/>
             </a:endParaRPr>
           </a:p>
         </p:txBody>
@@ -12822,7 +12882,7 @@
           <p:cNvPr id="28" name="사각형: 둥근 모서리 27">
             <a:extLst>
               <a:ext uri="{FF2B5EF4-FFF2-40B4-BE49-F238E27FC236}">
-                <a16:creationId xmlns:a16="http://schemas.microsoft.com/office/drawing/2014/main" id="{2A688FE5-A3E9-4A7D-9640-97D9C0317280}"/>
+                <a16:creationId xmlns:a16="http://schemas.microsoft.com/office/drawing/2014/main" id="{EE23D2E0-5107-3F3F-6B08-95D877E5A602}"/>
               </a:ext>
             </a:extLst>
           </p:cNvPr>
@@ -12831,8 +12891,8 @@
         </p:nvSpPr>
         <p:spPr>
           <a:xfrm>
-            <a:off x="5067299" y="3376222"/>
-            <a:ext cx="3484563" cy="829420"/>
+            <a:off x="5087533" y="3379434"/>
+            <a:ext cx="3498477" cy="832732"/>
           </a:xfrm>
           <a:prstGeom prst="roundRect">
             <a:avLst>
@@ -12869,9 +12929,9 @@
           <a:lstStyle/>
           <a:p>
             <a:pPr algn="ctr"/>
-            <a:endParaRPr lang="ko-KR" altLang="en-US" sz="5080">
+            <a:endParaRPr lang="ko-KR" altLang="en-US" sz="5100">
               <a:latin typeface="KoPub돋움체 Medium" panose="02020603020101020101" pitchFamily="18" charset="-127"/>
-              <a:ea typeface="KoPub돋움체 Light" panose="02020603020101020101"/>
+              <a:ea typeface="KoPub돋움체 Medium" panose="02020603020101020101" pitchFamily="18" charset="-127"/>
             </a:endParaRPr>
           </a:p>
         </p:txBody>
@@ -12881,7 +12941,7 @@
           <p:cNvPr id="29" name="사각형: 둥근 모서리 28">
             <a:extLst>
               <a:ext uri="{FF2B5EF4-FFF2-40B4-BE49-F238E27FC236}">
-                <a16:creationId xmlns:a16="http://schemas.microsoft.com/office/drawing/2014/main" id="{64D39DA0-5EC6-4030-BC9A-5BA4D6820777}"/>
+                <a16:creationId xmlns:a16="http://schemas.microsoft.com/office/drawing/2014/main" id="{9CFFCE44-9CE7-96DE-EBCD-84906D12D0CF}"/>
               </a:ext>
             </a:extLst>
           </p:cNvPr>
@@ -12890,8 +12950,8 @@
         </p:nvSpPr>
         <p:spPr>
           <a:xfrm>
-            <a:off x="3204625" y="3381511"/>
-            <a:ext cx="1811875" cy="829420"/>
+            <a:off x="3217421" y="3384744"/>
+            <a:ext cx="1819110" cy="832732"/>
           </a:xfrm>
           <a:prstGeom prst="roundRect">
             <a:avLst>
@@ -12929,9 +12989,9 @@
           <a:lstStyle/>
           <a:p>
             <a:pPr algn="ctr"/>
-            <a:endParaRPr lang="ko-KR" altLang="en-US" sz="5080">
+            <a:endParaRPr lang="ko-KR" altLang="en-US" sz="5100">
               <a:latin typeface="KoPub돋움체 Medium" panose="02020603020101020101" pitchFamily="18" charset="-127"/>
-              <a:ea typeface="KoPub돋움체 Light" panose="02020603020101020101"/>
+              <a:ea typeface="KoPub돋움체 Medium" panose="02020603020101020101" pitchFamily="18" charset="-127"/>
             </a:endParaRPr>
           </a:p>
         </p:txBody>
@@ -12941,7 +13001,7 @@
           <p:cNvPr id="30" name="TextBox 29">
             <a:extLst>
               <a:ext uri="{FF2B5EF4-FFF2-40B4-BE49-F238E27FC236}">
-                <a16:creationId xmlns:a16="http://schemas.microsoft.com/office/drawing/2014/main" id="{3C4779CB-7AE4-4301-8B2E-ADD0772F1C8C}"/>
+                <a16:creationId xmlns:a16="http://schemas.microsoft.com/office/drawing/2014/main" id="{3F4A1500-FE53-2048-8D2B-3968671C60BE}"/>
               </a:ext>
             </a:extLst>
           </p:cNvPr>
@@ -12950,8 +13010,8 @@
         </p:nvSpPr>
         <p:spPr>
           <a:xfrm>
-            <a:off x="3660760" y="3626944"/>
-            <a:ext cx="899605" cy="338554"/>
+            <a:off x="3588368" y="3609035"/>
+            <a:ext cx="1077219" cy="400110"/>
           </a:xfrm>
           <a:prstGeom prst="rect">
             <a:avLst/>
@@ -12966,9 +13026,9 @@
           <a:p>
             <a:pPr algn="ctr"/>
             <a:r>
-              <a:rPr lang="en-US" altLang="ko-KR" sz="1600" b="1" dirty="0">
-                <a:latin typeface="KoPub돋움체 Light" panose="02020603020101020101" pitchFamily="18" charset="-127"/>
-                <a:ea typeface="KoPub돋움체 Light" panose="02020603020101020101" pitchFamily="18" charset="-127"/>
+              <a:rPr lang="en-US" altLang="ko-KR" sz="2000" b="1" dirty="0">
+                <a:latin typeface="KoPub돋움체 Medium" panose="02020603020101020101" pitchFamily="18" charset="-127"/>
+                <a:ea typeface="KoPub돋움체 Medium" panose="02020603020101020101" pitchFamily="18" charset="-127"/>
               </a:rPr>
               <a:t>C-Code</a:t>
             </a:r>
@@ -12980,7 +13040,7 @@
           <p:cNvPr id="33" name="TextBox 32">
             <a:extLst>
               <a:ext uri="{FF2B5EF4-FFF2-40B4-BE49-F238E27FC236}">
-                <a16:creationId xmlns:a16="http://schemas.microsoft.com/office/drawing/2014/main" id="{CE2D936A-A45B-43D0-819F-2B99B59D02C1}"/>
+                <a16:creationId xmlns:a16="http://schemas.microsoft.com/office/drawing/2014/main" id="{D38085D7-7B84-BF96-1630-B43E5B6A9982}"/>
               </a:ext>
             </a:extLst>
           </p:cNvPr>
@@ -12989,8 +13049,8 @@
         </p:nvSpPr>
         <p:spPr>
           <a:xfrm>
-            <a:off x="1847923" y="4282983"/>
-            <a:ext cx="5424883" cy="461665"/>
+            <a:off x="2192472" y="4289816"/>
+            <a:ext cx="4772204" cy="465054"/>
           </a:xfrm>
           <a:prstGeom prst="rect">
             <a:avLst/>
@@ -13005,72 +13065,72 @@
           <a:p>
             <a:pPr algn="ctr"/>
             <a:r>
-              <a:rPr lang="en-US" altLang="ko-KR" sz="2400" b="1" dirty="0">
+              <a:rPr lang="en-US" altLang="ko-KR" sz="2410" b="1" dirty="0">
                 <a:solidFill>
                   <a:srgbClr val="7030A0"/>
                 </a:solidFill>
-                <a:latin typeface="KoPub돋움체 Light" panose="02020603020101020101" pitchFamily="18" charset="-127"/>
-                <a:ea typeface="KoPub돋움체 Light" panose="02020603020101020101" pitchFamily="18" charset="-127"/>
+                <a:latin typeface="KoPub돋움체 Medium" panose="02020603020101020101" pitchFamily="18" charset="-127"/>
+                <a:ea typeface="KoPub돋움체 Medium" panose="02020603020101020101" pitchFamily="18" charset="-127"/>
               </a:rPr>
               <a:t>“</a:t>
             </a:r>
             <a:r>
-              <a:rPr lang="ko-KR" altLang="en-US" sz="2400" b="1" dirty="0">
+              <a:rPr lang="ko-KR" altLang="en-US" sz="2410" b="1" dirty="0">
                 <a:solidFill>
                   <a:srgbClr val="7030A0"/>
                 </a:solidFill>
-                <a:latin typeface="KoPub돋움체 Light" panose="02020603020101020101" pitchFamily="18" charset="-127"/>
-                <a:ea typeface="KoPub돋움체 Light" panose="02020603020101020101" pitchFamily="18" charset="-127"/>
+                <a:latin typeface="KoPub돋움체 Medium" panose="02020603020101020101" pitchFamily="18" charset="-127"/>
+                <a:ea typeface="KoPub돋움체 Medium" panose="02020603020101020101" pitchFamily="18" charset="-127"/>
               </a:rPr>
               <a:t>기록은 메신저에서</a:t>
             </a:r>
             <a:r>
-              <a:rPr lang="en-US" altLang="ko-KR" sz="2400" b="1" dirty="0">
+              <a:rPr lang="en-US" altLang="ko-KR" sz="2410" b="1" dirty="0">
                 <a:solidFill>
                   <a:srgbClr val="7030A0"/>
                 </a:solidFill>
-                <a:latin typeface="KoPub돋움체 Light" panose="02020603020101020101" pitchFamily="18" charset="-127"/>
-                <a:ea typeface="KoPub돋움체 Light" panose="02020603020101020101" pitchFamily="18" charset="-127"/>
+                <a:latin typeface="KoPub돋움체 Medium" panose="02020603020101020101" pitchFamily="18" charset="-127"/>
+                <a:ea typeface="KoPub돋움체 Medium" panose="02020603020101020101" pitchFamily="18" charset="-127"/>
               </a:rPr>
               <a:t>, </a:t>
             </a:r>
             <a:r>
-              <a:rPr lang="ko-KR" altLang="en-US" sz="2400" b="1" dirty="0">
+              <a:rPr lang="ko-KR" altLang="en-US" sz="2410" b="1" dirty="0">
                 <a:solidFill>
                   <a:srgbClr val="7030A0"/>
                 </a:solidFill>
-                <a:latin typeface="KoPub돋움체 Light" panose="02020603020101020101" pitchFamily="18" charset="-127"/>
-                <a:ea typeface="KoPub돋움체 Light" panose="02020603020101020101" pitchFamily="18" charset="-127"/>
+                <a:latin typeface="KoPub돋움체 Medium" panose="02020603020101020101" pitchFamily="18" charset="-127"/>
+                <a:ea typeface="KoPub돋움체 Medium" panose="02020603020101020101" pitchFamily="18" charset="-127"/>
               </a:rPr>
               <a:t>정보는 </a:t>
             </a:r>
             <a:r>
-              <a:rPr lang="en-US" altLang="ko-KR" sz="2400" b="1" dirty="0">
+              <a:rPr lang="en-US" altLang="ko-KR" sz="2410" b="1" dirty="0">
                 <a:solidFill>
                   <a:srgbClr val="7030A0"/>
                 </a:solidFill>
-                <a:latin typeface="KoPub돋움체 Light" panose="02020603020101020101" pitchFamily="18" charset="-127"/>
-                <a:ea typeface="KoPub돋움체 Light" panose="02020603020101020101" pitchFamily="18" charset="-127"/>
+                <a:latin typeface="KoPub돋움체 Medium" panose="02020603020101020101" pitchFamily="18" charset="-127"/>
+                <a:ea typeface="KoPub돋움체 Medium" panose="02020603020101020101" pitchFamily="18" charset="-127"/>
               </a:rPr>
               <a:t>QR</a:t>
             </a:r>
             <a:r>
-              <a:rPr lang="ko-KR" altLang="en-US" sz="2400" b="1" dirty="0">
+              <a:rPr lang="ko-KR" altLang="en-US" sz="2410" b="1" dirty="0">
                 <a:solidFill>
                   <a:srgbClr val="7030A0"/>
                 </a:solidFill>
-                <a:latin typeface="KoPub돋움체 Light" panose="02020603020101020101" pitchFamily="18" charset="-127"/>
-                <a:ea typeface="KoPub돋움체 Light" panose="02020603020101020101" pitchFamily="18" charset="-127"/>
+                <a:latin typeface="KoPub돋움체 Medium" panose="02020603020101020101" pitchFamily="18" charset="-127"/>
+                <a:ea typeface="KoPub돋움체 Medium" panose="02020603020101020101" pitchFamily="18" charset="-127"/>
               </a:rPr>
               <a:t>에서</a:t>
             </a:r>
             <a:r>
-              <a:rPr lang="en-US" altLang="ko-KR" sz="2400" b="1" dirty="0">
+              <a:rPr lang="en-US" altLang="ko-KR" sz="2410" b="1" dirty="0">
                 <a:solidFill>
                   <a:srgbClr val="7030A0"/>
                 </a:solidFill>
-                <a:latin typeface="KoPub돋움체 Light" panose="02020603020101020101" pitchFamily="18" charset="-127"/>
-                <a:ea typeface="KoPub돋움체 Light" panose="02020603020101020101" pitchFamily="18" charset="-127"/>
+                <a:latin typeface="KoPub돋움체 Medium" panose="02020603020101020101" pitchFamily="18" charset="-127"/>
+                <a:ea typeface="KoPub돋움체 Medium" panose="02020603020101020101" pitchFamily="18" charset="-127"/>
               </a:rPr>
               <a:t>!”</a:t>
             </a:r>
@@ -13080,7 +13140,7 @@
     </p:spTree>
     <p:extLst>
       <p:ext uri="{BB962C8B-B14F-4D97-AF65-F5344CB8AC3E}">
-        <p14:creationId xmlns:p14="http://schemas.microsoft.com/office/powerpoint/2010/main" val="1312225134"/>
+        <p14:creationId xmlns:p14="http://schemas.microsoft.com/office/powerpoint/2010/main" val="896073618"/>
       </p:ext>
     </p:extLst>
   </p:cSld>
@@ -13345,7 +13405,7 @@
   <a:extraClrSchemeLst/>
   <a:extLst>
     <a:ext uri="{05A4C25C-085E-4340-85A3-A5531E510DB2}">
-      <thm15:themeFamily xmlns:thm15="http://schemas.microsoft.com/office/thememl/2012/main" name="Office Theme" id="{62F939B6-93AF-4DB8-9C6B-D6C7DFDC589F}" vid="{4A3C46E8-61CC-4603-A589-7422A47A8E4A}"/>
+      <thm15:themeFamily xmlns:thm15="http://schemas.microsoft.com/office/thememl/2012/main" name="Office 2013 - 2022 Theme" id="{62F939B6-93AF-4DB8-9C6B-D6C7DFDC589F}" vid="{4A3C46E8-61CC-4603-A589-7422A47A8E4A}"/>
     </a:ext>
   </a:extLst>
 </a:theme>
